--- a/download/Презентация_для_ГД_final.pptx
+++ b/download/Презентация_для_ГД_final.pptx
@@ -15759,8 +15759,8 @@
         </p:nvSpPr>
         <p:spPr>
           <a:xfrm>
-            <a:off x="140000" y="180000"/>
-            <a:ext cx="8800000" cy="340000"/>
+            <a:off x="180000" y="180000"/>
+            <a:ext cx="7200000" cy="342000"/>
           </a:xfrm>
           <a:prstGeom prst="rect">
             <a:avLst/>
@@ -15781,7 +15781,7 @@
                 </a:solidFill>
                 <a:latin typeface="Inter"/>
               </a:rPr>
-              <a:t>Запуск новинок · Стандарт вывода</a:t>
+              <a:t>Запуск новинок · Стандарт вывода 2026</a:t>
             </a:r>
           </a:p>
         </p:txBody>
@@ -15794,8 +15794,8 @@
         </p:nvSpPr>
         <p:spPr>
           <a:xfrm>
-            <a:off x="140000" y="560000"/>
-            <a:ext cx="8800000" cy="360000"/>
+            <a:off x="180000" y="558000"/>
+            <a:ext cx="7200000" cy="180000"/>
           </a:xfrm>
           <a:prstGeom prst="rect">
             <a:avLst/>
@@ -15816,7 +15816,7 @@
                 </a:solidFill>
                 <a:latin typeface="Inter"/>
               </a:rPr>
-              <a:t>Стандартизированный процесс для каждой новинки: 4 фазы, каждая со своим KPI</a:t>
+              <a:t>Левая часть — результаты запуска новинок 2026 · Правая — стандарт вывода</a:t>
             </a:r>
           </a:p>
         </p:txBody>
@@ -15829,8 +15829,8 @@
         </p:nvSpPr>
         <p:spPr>
           <a:xfrm>
-            <a:off x="7200000" y="160000"/>
-            <a:ext cx="1800000" cy="280000"/>
+            <a:off x="7200000" y="162000"/>
+            <a:ext cx="1800000" cy="280800"/>
           </a:xfrm>
           <a:prstGeom prst="roundRect">
             <a:avLst>
@@ -15877,8 +15877,8 @@
         </p:nvSpPr>
         <p:spPr>
           <a:xfrm>
-            <a:off x="7200000" y="205000"/>
-            <a:ext cx="1800000" cy="235000"/>
+            <a:off x="7200000" y="208800"/>
+            <a:ext cx="1800000" cy="234000"/>
           </a:xfrm>
           <a:prstGeom prst="rect">
             <a:avLst/>
@@ -15912,8 +15912,8 @@
         </p:nvSpPr>
         <p:spPr>
           <a:xfrm>
-            <a:off x="140000" y="800000"/>
-            <a:ext cx="8855724" cy="28575"/>
+            <a:off x="180000" y="799200"/>
+            <a:ext cx="8820000" cy="28800"/>
           </a:xfrm>
           <a:prstGeom prst="rect">
             <a:avLst/>
@@ -15956,12 +15956,12 @@
         </p:nvSpPr>
         <p:spPr>
           <a:xfrm>
-            <a:off x="180000" y="1026000"/>
-            <a:ext cx="4320000" cy="1800000"/>
+            <a:off x="180000" y="961200"/>
+            <a:ext cx="4212000" cy="3859200"/>
           </a:xfrm>
           <a:prstGeom prst="roundRect">
             <a:avLst>
-              <a:gd name="adj" fmla="val 3000"/>
+              <a:gd name="adj" fmla="val 2000"/>
             </a:avLst>
           </a:prstGeom>
           <a:solidFill>
@@ -15998,139 +15998,14 @@
       </p:sp>
       <p:sp>
         <p:nvSpPr>
-          <p:cNvPr id="8" name="Rounded Rectangle 7"/>
-          <p:cNvSpPr/>
-          <p:nvPr/>
-        </p:nvSpPr>
-        <p:spPr>
-          <a:xfrm>
-            <a:off x="180000" y="1026000"/>
-            <a:ext cx="1100000" cy="1800000"/>
-          </a:xfrm>
-          <a:prstGeom prst="roundRect">
-            <a:avLst>
-              <a:gd name="adj" fmla="val 3000"/>
-            </a:avLst>
-          </a:prstGeom>
-          <a:solidFill>
-            <a:srgbClr val="F5F2EC"/>
-          </a:solidFill>
-          <a:ln>
-            <a:noFill/>
-          </a:ln>
-          <a:effectLst/>
-        </p:spPr>
-        <p:style>
-          <a:lnRef idx="1">
-            <a:schemeClr val="accent1"/>
-          </a:lnRef>
-          <a:fillRef idx="3">
-            <a:schemeClr val="accent1"/>
-          </a:fillRef>
-          <a:effectRef idx="2">
-            <a:schemeClr val="accent1"/>
-          </a:effectRef>
-          <a:fontRef idx="minor">
-            <a:schemeClr val="lt1"/>
-          </a:fontRef>
-        </p:style>
-        <p:txBody>
-          <a:bodyPr rtlCol="0" anchor="ctr"/>
-          <a:lstStyle/>
-          <a:p>
-            <a:pPr algn="ctr"/>
-          </a:p>
-        </p:txBody>
-      </p:sp>
-      <p:sp>
-        <p:nvSpPr>
-          <p:cNvPr id="9" name="Rectangle 8"/>
-          <p:cNvSpPr/>
-          <p:nvPr/>
-        </p:nvSpPr>
-        <p:spPr>
-          <a:xfrm>
-            <a:off x="180000" y="1026000"/>
-            <a:ext cx="40000" cy="1800000"/>
-          </a:xfrm>
-          <a:prstGeom prst="rect">
-            <a:avLst/>
-          </a:prstGeom>
-          <a:solidFill>
-            <a:srgbClr val="C00000"/>
-          </a:solidFill>
-          <a:ln>
-            <a:noFill/>
-          </a:ln>
-          <a:effectLst/>
-        </p:spPr>
-        <p:style>
-          <a:lnRef idx="1">
-            <a:schemeClr val="accent1"/>
-          </a:lnRef>
-          <a:fillRef idx="3">
-            <a:schemeClr val="accent1"/>
-          </a:fillRef>
-          <a:effectRef idx="2">
-            <a:schemeClr val="accent1"/>
-          </a:effectRef>
-          <a:fontRef idx="minor">
-            <a:schemeClr val="lt1"/>
-          </a:fontRef>
-        </p:style>
-        <p:txBody>
-          <a:bodyPr rtlCol="0" anchor="ctr"/>
-          <a:lstStyle/>
-          <a:p>
-            <a:pPr algn="ctr"/>
-          </a:p>
-        </p:txBody>
-      </p:sp>
-      <p:sp>
-        <p:nvSpPr>
-          <p:cNvPr id="10" name="TextBox 9"/>
+          <p:cNvPr id="8" name="TextBox 7"/>
           <p:cNvSpPr txBox="1"/>
           <p:nvPr/>
         </p:nvSpPr>
         <p:spPr>
           <a:xfrm>
-            <a:off x="180000" y="1306000"/>
-            <a:ext cx="1100000" cy="700000"/>
-          </a:xfrm>
-          <a:prstGeom prst="rect">
-            <a:avLst/>
-          </a:prstGeom>
-          <a:noFill/>
-        </p:spPr>
-        <p:txBody>
-          <a:bodyPr wrap="square" lIns="0" rIns="0" tIns="0" bIns="0" anchor="ctr">
-            <a:spAutoFit/>
-          </a:bodyPr>
-          <a:lstStyle/>
-          <a:p>
-            <a:pPr algn="ctr"/>
-            <a:r>
-              <a:rPr sz="3600" b="1">
-                <a:solidFill>
-                  <a:srgbClr val="C00000"/>
-                </a:solidFill>
-                <a:latin typeface="Roboto Mono"/>
-              </a:rPr>
-              <a:t>01</a:t>
-            </a:r>
-          </a:p>
-        </p:txBody>
-      </p:sp>
-      <p:sp>
-        <p:nvSpPr>
-          <p:cNvPr id="11" name="TextBox 10"/>
-          <p:cNvSpPr txBox="1"/>
-          <p:nvPr/>
-        </p:nvSpPr>
-        <p:spPr>
-          <a:xfrm>
-            <a:off x="180000" y="2026000"/>
-            <a:ext cx="1100000" cy="280000"/>
+            <a:off x="360000" y="1105200"/>
+            <a:ext cx="3851999" cy="180000"/>
           </a:xfrm>
           <a:prstGeom prst="rect">
             <a:avLst/>
@@ -16143,29 +16018,29 @@
           </a:bodyPr>
           <a:lstStyle/>
           <a:p>
-            <a:pPr algn="ctr"/>
-            <a:r>
-              <a:rPr sz="900" b="1">
-                <a:solidFill>
-                  <a:srgbClr val="8A95A3"/>
-                </a:solidFill>
-                <a:latin typeface="Roboto Mono"/>
-              </a:rPr>
-              <a:t>−60 до 0 дней</a:t>
-            </a:r>
-          </a:p>
-        </p:txBody>
-      </p:sp>
-      <p:sp>
-        <p:nvSpPr>
-          <p:cNvPr id="12" name="TextBox 11"/>
+            <a:pPr algn="l"/>
+            <a:r>
+              <a:rPr sz="1100" b="1" spc="200">
+                <a:solidFill>
+                  <a:srgbClr val="C00000"/>
+                </a:solidFill>
+                <a:latin typeface="Inter"/>
+              </a:rPr>
+              <a:t>РЕЗУЛЬТАТЫ ЗАПУСКА НОВИНОК 2026</a:t>
+            </a:r>
+          </a:p>
+        </p:txBody>
+      </p:sp>
+      <p:sp>
+        <p:nvSpPr>
+          <p:cNvPr id="9" name="TextBox 8"/>
           <p:cNvSpPr txBox="1"/>
           <p:nvPr/>
         </p:nvSpPr>
         <p:spPr>
           <a:xfrm>
-            <a:off x="180000" y="2326000"/>
-            <a:ext cx="1100000" cy="280000"/>
+            <a:off x="360000" y="1303200"/>
+            <a:ext cx="3851999" cy="144000"/>
           </a:xfrm>
           <a:prstGeom prst="rect">
             <a:avLst/>
@@ -16178,274 +16053,29 @@
           </a:bodyPr>
           <a:lstStyle/>
           <a:p>
-            <a:pPr algn="ctr"/>
-            <a:r>
-              <a:rPr sz="800" b="1" spc="200">
-                <a:solidFill>
-                  <a:srgbClr val="C00000"/>
+            <a:pPr algn="l"/>
+            <a:r>
+              <a:rPr sz="1000" b="0">
+                <a:solidFill>
+                  <a:srgbClr val="8A95A3"/>
                 </a:solidFill>
                 <a:latin typeface="Inter"/>
               </a:rPr>
-              <a:t>ФАЗА 01</a:t>
-            </a:r>
-          </a:p>
-        </p:txBody>
-      </p:sp>
-      <p:sp>
-        <p:nvSpPr>
-          <p:cNvPr id="13" name="TextBox 12"/>
-          <p:cNvSpPr txBox="1"/>
-          <p:nvPr/>
-        </p:nvSpPr>
-        <p:spPr>
-          <a:xfrm>
-            <a:off x="1460000" y="1206000"/>
-            <a:ext cx="2860000" cy="280000"/>
-          </a:xfrm>
-          <a:prstGeom prst="rect">
-            <a:avLst/>
-          </a:prstGeom>
-          <a:noFill/>
-        </p:spPr>
-        <p:txBody>
-          <a:bodyPr wrap="square" lIns="0" rIns="0" tIns="0" bIns="0" anchor="t">
-            <a:spAutoFit/>
-          </a:bodyPr>
-          <a:lstStyle/>
-          <a:p>
-            <a:pPr algn="l"/>
-            <a:r>
-              <a:rPr sz="1200" b="1" spc="100">
-                <a:solidFill>
-                  <a:srgbClr val="2F3A48"/>
-                </a:solidFill>
-                <a:latin typeface="Inter"/>
-              </a:rPr>
-              <a:t>ПОДГОТОВКА</a:t>
-            </a:r>
-          </a:p>
-        </p:txBody>
-      </p:sp>
-      <p:sp>
-        <p:nvSpPr>
-          <p:cNvPr id="14" name="TextBox 13"/>
-          <p:cNvSpPr txBox="1"/>
-          <p:nvPr/>
-        </p:nvSpPr>
-        <p:spPr>
-          <a:xfrm>
-            <a:off x="1460000" y="1566000"/>
-            <a:ext cx="80000" cy="220000"/>
-          </a:xfrm>
-          <a:prstGeom prst="rect">
-            <a:avLst/>
-          </a:prstGeom>
-          <a:noFill/>
-        </p:spPr>
-        <p:txBody>
-          <a:bodyPr wrap="square" lIns="0" rIns="0" tIns="0" bIns="0" anchor="t">
-            <a:spAutoFit/>
-          </a:bodyPr>
-          <a:lstStyle/>
-          <a:p>
-            <a:pPr algn="l"/>
-            <a:r>
-              <a:rPr sz="1400" b="1">
-                <a:solidFill>
-                  <a:srgbClr val="C00000"/>
-                </a:solidFill>
-                <a:latin typeface="Inter"/>
-              </a:rPr>
-              <a:t>·</a:t>
-            </a:r>
-          </a:p>
-        </p:txBody>
-      </p:sp>
-      <p:sp>
-        <p:nvSpPr>
-          <p:cNvPr id="15" name="TextBox 14"/>
-          <p:cNvSpPr txBox="1"/>
-          <p:nvPr/>
-        </p:nvSpPr>
-        <p:spPr>
-          <a:xfrm>
-            <a:off x="1560000" y="1586000"/>
-            <a:ext cx="2760000" cy="220000"/>
-          </a:xfrm>
-          <a:prstGeom prst="rect">
-            <a:avLst/>
-          </a:prstGeom>
-          <a:noFill/>
-        </p:spPr>
-        <p:txBody>
-          <a:bodyPr wrap="square" lIns="0" rIns="0" tIns="0" bIns="0" anchor="t">
-            <a:spAutoFit/>
-          </a:bodyPr>
-          <a:lstStyle/>
-          <a:p>
-            <a:pPr algn="l"/>
-            <a:r>
-              <a:rPr sz="950" b="0">
-                <a:solidFill>
-                  <a:srgbClr val="2F3A48"/>
-                </a:solidFill>
-                <a:latin typeface="Inter"/>
-              </a:rPr>
-              <a:t>Анализ рынка и конкурентов</a:t>
-            </a:r>
-          </a:p>
-        </p:txBody>
-      </p:sp>
-      <p:sp>
-        <p:nvSpPr>
-          <p:cNvPr id="16" name="TextBox 15"/>
-          <p:cNvSpPr txBox="1"/>
-          <p:nvPr/>
-        </p:nvSpPr>
-        <p:spPr>
-          <a:xfrm>
-            <a:off x="1460000" y="1826000"/>
-            <a:ext cx="80000" cy="220000"/>
-          </a:xfrm>
-          <a:prstGeom prst="rect">
-            <a:avLst/>
-          </a:prstGeom>
-          <a:noFill/>
-        </p:spPr>
-        <p:txBody>
-          <a:bodyPr wrap="square" lIns="0" rIns="0" tIns="0" bIns="0" anchor="t">
-            <a:spAutoFit/>
-          </a:bodyPr>
-          <a:lstStyle/>
-          <a:p>
-            <a:pPr algn="l"/>
-            <a:r>
-              <a:rPr sz="1400" b="1">
-                <a:solidFill>
-                  <a:srgbClr val="C00000"/>
-                </a:solidFill>
-                <a:latin typeface="Inter"/>
-              </a:rPr>
-              <a:t>·</a:t>
-            </a:r>
-          </a:p>
-        </p:txBody>
-      </p:sp>
-      <p:sp>
-        <p:nvSpPr>
-          <p:cNvPr id="17" name="TextBox 16"/>
-          <p:cNvSpPr txBox="1"/>
-          <p:nvPr/>
-        </p:nvSpPr>
-        <p:spPr>
-          <a:xfrm>
-            <a:off x="1560000" y="1846000"/>
-            <a:ext cx="2760000" cy="220000"/>
-          </a:xfrm>
-          <a:prstGeom prst="rect">
-            <a:avLst/>
-          </a:prstGeom>
-          <a:noFill/>
-        </p:spPr>
-        <p:txBody>
-          <a:bodyPr wrap="square" lIns="0" rIns="0" tIns="0" bIns="0" anchor="t">
-            <a:spAutoFit/>
-          </a:bodyPr>
-          <a:lstStyle/>
-          <a:p>
-            <a:pPr algn="l"/>
-            <a:r>
-              <a:rPr sz="950" b="0">
-                <a:solidFill>
-                  <a:srgbClr val="2F3A48"/>
-                </a:solidFill>
-                <a:latin typeface="Inter"/>
-              </a:rPr>
-              <a:t>Ценообразование и MML позиция</a:t>
-            </a:r>
-          </a:p>
-        </p:txBody>
-      </p:sp>
-      <p:sp>
-        <p:nvSpPr>
-          <p:cNvPr id="18" name="TextBox 17"/>
-          <p:cNvSpPr txBox="1"/>
-          <p:nvPr/>
-        </p:nvSpPr>
-        <p:spPr>
-          <a:xfrm>
-            <a:off x="1460000" y="2086000"/>
-            <a:ext cx="80000" cy="220000"/>
-          </a:xfrm>
-          <a:prstGeom prst="rect">
-            <a:avLst/>
-          </a:prstGeom>
-          <a:noFill/>
-        </p:spPr>
-        <p:txBody>
-          <a:bodyPr wrap="square" lIns="0" rIns="0" tIns="0" bIns="0" anchor="t">
-            <a:spAutoFit/>
-          </a:bodyPr>
-          <a:lstStyle/>
-          <a:p>
-            <a:pPr algn="l"/>
-            <a:r>
-              <a:rPr sz="1400" b="1">
-                <a:solidFill>
-                  <a:srgbClr val="C00000"/>
-                </a:solidFill>
-                <a:latin typeface="Inter"/>
-              </a:rPr>
-              <a:t>·</a:t>
-            </a:r>
-          </a:p>
-        </p:txBody>
-      </p:sp>
-      <p:sp>
-        <p:nvSpPr>
-          <p:cNvPr id="19" name="TextBox 18"/>
-          <p:cNvSpPr txBox="1"/>
-          <p:nvPr/>
-        </p:nvSpPr>
-        <p:spPr>
-          <a:xfrm>
-            <a:off x="1560000" y="2106000"/>
-            <a:ext cx="2760000" cy="220000"/>
-          </a:xfrm>
-          <a:prstGeom prst="rect">
-            <a:avLst/>
-          </a:prstGeom>
-          <a:noFill/>
-        </p:spPr>
-        <p:txBody>
-          <a:bodyPr wrap="square" lIns="0" rIns="0" tIns="0" bIns="0" anchor="t">
-            <a:spAutoFit/>
-          </a:bodyPr>
-          <a:lstStyle/>
-          <a:p>
-            <a:pPr algn="l"/>
-            <a:r>
-              <a:rPr sz="950" b="0">
-                <a:solidFill>
-                  <a:srgbClr val="2F3A48"/>
-                </a:solidFill>
-                <a:latin typeface="Inter"/>
-              </a:rPr>
-              <a:t>Подготовка POSM и контента</a:t>
-            </a:r>
-          </a:p>
-        </p:txBody>
-      </p:sp>
-      <p:sp>
-        <p:nvSpPr>
-          <p:cNvPr id="20" name="Rectangle 19"/>
+              <a:t>Заполняется по итогам года</a:t>
+            </a:r>
+          </a:p>
+        </p:txBody>
+      </p:sp>
+      <p:sp>
+        <p:nvSpPr>
+          <p:cNvPr id="10" name="Rectangle 9"/>
           <p:cNvSpPr/>
           <p:nvPr/>
         </p:nvSpPr>
         <p:spPr>
           <a:xfrm>
-            <a:off x="1460000" y="2266000"/>
-            <a:ext cx="2860000" cy="20000"/>
+            <a:off x="360000" y="1501200"/>
+            <a:ext cx="3851999" cy="21600"/>
           </a:xfrm>
           <a:prstGeom prst="rect">
             <a:avLst/>
@@ -16482,84 +16112,14 @@
       </p:sp>
       <p:sp>
         <p:nvSpPr>
-          <p:cNvPr id="21" name="TextBox 20"/>
+          <p:cNvPr id="11" name="TextBox 10"/>
           <p:cNvSpPr txBox="1"/>
           <p:nvPr/>
         </p:nvSpPr>
         <p:spPr>
           <a:xfrm>
-            <a:off x="1460000" y="2306000"/>
-            <a:ext cx="1500000" cy="180000"/>
-          </a:xfrm>
-          <a:prstGeom prst="rect">
-            <a:avLst/>
-          </a:prstGeom>
-          <a:noFill/>
-        </p:spPr>
-        <p:txBody>
-          <a:bodyPr wrap="square" lIns="0" rIns="0" tIns="0" bIns="0" anchor="t">
-            <a:spAutoFit/>
-          </a:bodyPr>
-          <a:lstStyle/>
-          <a:p>
-            <a:pPr algn="l"/>
-            <a:r>
-              <a:rPr sz="800" b="1" spc="100">
-                <a:solidFill>
-                  <a:srgbClr val="8A95A3"/>
-                </a:solidFill>
-                <a:latin typeface="Inter"/>
-              </a:rPr>
-              <a:t>KPI фазы</a:t>
-            </a:r>
-          </a:p>
-        </p:txBody>
-      </p:sp>
-      <p:sp>
-        <p:nvSpPr>
-          <p:cNvPr id="22" name="TextBox 21"/>
-          <p:cNvSpPr txBox="1"/>
-          <p:nvPr/>
-        </p:nvSpPr>
-        <p:spPr>
-          <a:xfrm>
-            <a:off x="1460000" y="2486000"/>
-            <a:ext cx="1500000" cy="280000"/>
-          </a:xfrm>
-          <a:prstGeom prst="rect">
-            <a:avLst/>
-          </a:prstGeom>
-          <a:noFill/>
-        </p:spPr>
-        <p:txBody>
-          <a:bodyPr wrap="square" lIns="0" rIns="0" tIns="0" bIns="0" anchor="t">
-            <a:spAutoFit/>
-          </a:bodyPr>
-          <a:lstStyle/>
-          <a:p>
-            <a:pPr algn="l"/>
-            <a:r>
-              <a:rPr sz="1400" b="1">
-                <a:solidFill>
-                  <a:srgbClr val="C00000"/>
-                </a:solidFill>
-                <a:latin typeface="Roboto Mono"/>
-              </a:rPr>
-              <a:t>60 дней</a:t>
-            </a:r>
-          </a:p>
-        </p:txBody>
-      </p:sp>
-      <p:sp>
-        <p:nvSpPr>
-          <p:cNvPr id="23" name="TextBox 22"/>
-          <p:cNvSpPr txBox="1"/>
-          <p:nvPr/>
-        </p:nvSpPr>
-        <p:spPr>
-          <a:xfrm>
-            <a:off x="3060000" y="2486000"/>
-            <a:ext cx="1260000" cy="280000"/>
+            <a:off x="360000" y="2581200"/>
+            <a:ext cx="3851999" cy="720000"/>
           </a:xfrm>
           <a:prstGeom prst="rect">
             <a:avLst/>
@@ -16572,33 +16132,37 @@
           </a:bodyPr>
           <a:lstStyle/>
           <a:p>
-            <a:pPr algn="l"/>
-            <a:r>
-              <a:rPr sz="900" b="0">
+            <a:pPr algn="ctr"/>
+            <a:r>
+              <a:rPr sz="1100" b="0">
                 <a:solidFill>
                   <a:srgbClr val="8A95A3"/>
                 </a:solidFill>
                 <a:latin typeface="Inter"/>
               </a:rPr>
-              <a:t>до запуска</a:t>
-            </a:r>
-          </a:p>
-        </p:txBody>
-      </p:sp>
-      <p:sp>
-        <p:nvSpPr>
-          <p:cNvPr id="24" name="Rounded Rectangle 23"/>
+              <a:t>Место для заполнения
+Фактические показатели запуска:
+· TITAN грунт-эмаль 3в1
+· NEWTONE LOTUS
+· AVANTGARDE интерьерная</a:t>
+            </a:r>
+          </a:p>
+        </p:txBody>
+      </p:sp>
+      <p:sp>
+        <p:nvSpPr>
+          <p:cNvPr id="12" name="Rounded Rectangle 11"/>
           <p:cNvSpPr/>
           <p:nvPr/>
         </p:nvSpPr>
         <p:spPr>
           <a:xfrm>
-            <a:off x="4650000" y="1026000"/>
-            <a:ext cx="4320000" cy="1800000"/>
+            <a:off x="4680000" y="961200"/>
+            <a:ext cx="4212000" cy="3859200"/>
           </a:xfrm>
           <a:prstGeom prst="roundRect">
             <a:avLst>
-              <a:gd name="adj" fmla="val 3000"/>
+              <a:gd name="adj" fmla="val 2000"/>
             </a:avLst>
           </a:prstGeom>
           <a:solidFill>
@@ -16635,22 +16199,90 @@
       </p:sp>
       <p:sp>
         <p:nvSpPr>
-          <p:cNvPr id="25" name="Rounded Rectangle 24"/>
+          <p:cNvPr id="13" name="TextBox 12"/>
+          <p:cNvSpPr txBox="1"/>
+          <p:nvPr/>
+        </p:nvSpPr>
+        <p:spPr>
+          <a:xfrm>
+            <a:off x="4824000" y="1105200"/>
+            <a:ext cx="3600000" cy="180000"/>
+          </a:xfrm>
+          <a:prstGeom prst="rect">
+            <a:avLst/>
+          </a:prstGeom>
+          <a:noFill/>
+        </p:spPr>
+        <p:txBody>
+          <a:bodyPr wrap="square" lIns="0" rIns="0" tIns="0" bIns="0" anchor="t">
+            <a:spAutoFit/>
+          </a:bodyPr>
+          <a:lstStyle/>
+          <a:p>
+            <a:pPr algn="l"/>
+            <a:r>
+              <a:rPr sz="1100" b="1" spc="200">
+                <a:solidFill>
+                  <a:srgbClr val="C00000"/>
+                </a:solidFill>
+                <a:latin typeface="Inter"/>
+              </a:rPr>
+              <a:t>СТАНДАРТ ВЫВОДА · 3 ФАЗЫ</a:t>
+            </a:r>
+          </a:p>
+        </p:txBody>
+      </p:sp>
+      <p:sp>
+        <p:nvSpPr>
+          <p:cNvPr id="14" name="TextBox 13"/>
+          <p:cNvSpPr txBox="1"/>
+          <p:nvPr/>
+        </p:nvSpPr>
+        <p:spPr>
+          <a:xfrm>
+            <a:off x="4824000" y="1303200"/>
+            <a:ext cx="3600000" cy="144000"/>
+          </a:xfrm>
+          <a:prstGeom prst="rect">
+            <a:avLst/>
+          </a:prstGeom>
+          <a:noFill/>
+        </p:spPr>
+        <p:txBody>
+          <a:bodyPr wrap="square" lIns="0" rIns="0" tIns="0" bIns="0" anchor="t">
+            <a:spAutoFit/>
+          </a:bodyPr>
+          <a:lstStyle/>
+          <a:p>
+            <a:pPr algn="l"/>
+            <a:r>
+              <a:rPr sz="1000" b="0">
+                <a:solidFill>
+                  <a:srgbClr val="8A95A3"/>
+                </a:solidFill>
+                <a:latin typeface="Inter"/>
+              </a:rPr>
+              <a:t>Подготовка → Запуск → Сопровождение</a:t>
+            </a:r>
+          </a:p>
+        </p:txBody>
+      </p:sp>
+      <p:sp>
+        <p:nvSpPr>
+          <p:cNvPr id="15" name="Rectangle 14"/>
           <p:cNvSpPr/>
           <p:nvPr/>
         </p:nvSpPr>
         <p:spPr>
           <a:xfrm>
-            <a:off x="4650000" y="1026000"/>
-            <a:ext cx="1100000" cy="1800000"/>
-          </a:xfrm>
-          <a:prstGeom prst="roundRect">
-            <a:avLst>
-              <a:gd name="adj" fmla="val 3000"/>
-            </a:avLst>
+            <a:off x="4824000" y="1501200"/>
+            <a:ext cx="3924000" cy="21600"/>
+          </a:xfrm>
+          <a:prstGeom prst="rect">
+            <a:avLst/>
           </a:prstGeom>
           <a:solidFill>
-            <a:srgbClr val="F5F2EC"/>
+            <a:srgbClr val="EFE9DD"/>
           </a:solidFill>
           <a:ln>
             <a:noFill/>
@@ -16681,14 +16313,666 @@
       </p:sp>
       <p:sp>
         <p:nvSpPr>
-          <p:cNvPr id="26" name="Rectangle 25"/>
+          <p:cNvPr id="16" name="Rounded Rectangle 15"/>
           <p:cNvSpPr/>
           <p:nvPr/>
         </p:nvSpPr>
         <p:spPr>
           <a:xfrm>
-            <a:off x="4650000" y="1026000"/>
-            <a:ext cx="40000" cy="1800000"/>
+            <a:off x="4824000" y="1627200"/>
+            <a:ext cx="3924000" cy="972000"/>
+          </a:xfrm>
+          <a:prstGeom prst="roundRect">
+            <a:avLst>
+              <a:gd name="adj" fmla="val 4000"/>
+            </a:avLst>
+          </a:prstGeom>
+          <a:solidFill>
+            <a:srgbClr val="F5F2EC"/>
+          </a:solidFill>
+          <a:ln w="6350">
+            <a:solidFill>
+              <a:srgbClr val="D9D2C2"/>
+            </a:solidFill>
+          </a:ln>
+          <a:effectLst/>
+        </p:spPr>
+        <p:style>
+          <a:lnRef idx="1">
+            <a:schemeClr val="accent1"/>
+          </a:lnRef>
+          <a:fillRef idx="3">
+            <a:schemeClr val="accent1"/>
+          </a:fillRef>
+          <a:effectRef idx="2">
+            <a:schemeClr val="accent1"/>
+          </a:effectRef>
+          <a:fontRef idx="minor">
+            <a:schemeClr val="lt1"/>
+          </a:fontRef>
+        </p:style>
+        <p:txBody>
+          <a:bodyPr rtlCol="0" anchor="ctr"/>
+          <a:lstStyle/>
+          <a:p>
+            <a:pPr algn="ctr"/>
+          </a:p>
+        </p:txBody>
+      </p:sp>
+      <p:sp>
+        <p:nvSpPr>
+          <p:cNvPr id="17" name="Rounded Rectangle 16"/>
+          <p:cNvSpPr/>
+          <p:nvPr/>
+        </p:nvSpPr>
+        <p:spPr>
+          <a:xfrm>
+            <a:off x="4824000" y="1627200"/>
+            <a:ext cx="864000" cy="972000"/>
+          </a:xfrm>
+          <a:prstGeom prst="roundRect">
+            <a:avLst>
+              <a:gd name="adj" fmla="val 4000"/>
+            </a:avLst>
+          </a:prstGeom>
+          <a:solidFill>
+            <a:srgbClr val="FFFFFF"/>
+          </a:solidFill>
+          <a:ln>
+            <a:noFill/>
+          </a:ln>
+          <a:effectLst/>
+        </p:spPr>
+        <p:style>
+          <a:lnRef idx="1">
+            <a:schemeClr val="accent1"/>
+          </a:lnRef>
+          <a:fillRef idx="3">
+            <a:schemeClr val="accent1"/>
+          </a:fillRef>
+          <a:effectRef idx="2">
+            <a:schemeClr val="accent1"/>
+          </a:effectRef>
+          <a:fontRef idx="minor">
+            <a:schemeClr val="lt1"/>
+          </a:fontRef>
+        </p:style>
+        <p:txBody>
+          <a:bodyPr rtlCol="0" anchor="ctr"/>
+          <a:lstStyle/>
+          <a:p>
+            <a:pPr algn="ctr"/>
+          </a:p>
+        </p:txBody>
+      </p:sp>
+      <p:sp>
+        <p:nvSpPr>
+          <p:cNvPr id="18" name="Rectangle 17"/>
+          <p:cNvSpPr/>
+          <p:nvPr/>
+        </p:nvSpPr>
+        <p:spPr>
+          <a:xfrm>
+            <a:off x="4824000" y="1627200"/>
+            <a:ext cx="39600" cy="972000"/>
+          </a:xfrm>
+          <a:prstGeom prst="rect">
+            <a:avLst/>
+          </a:prstGeom>
+          <a:solidFill>
+            <a:srgbClr val="C00000"/>
+          </a:solidFill>
+          <a:ln>
+            <a:noFill/>
+          </a:ln>
+          <a:effectLst/>
+        </p:spPr>
+        <p:style>
+          <a:lnRef idx="1">
+            <a:schemeClr val="accent1"/>
+          </a:lnRef>
+          <a:fillRef idx="3">
+            <a:schemeClr val="accent1"/>
+          </a:fillRef>
+          <a:effectRef idx="2">
+            <a:schemeClr val="accent1"/>
+          </a:effectRef>
+          <a:fontRef idx="minor">
+            <a:schemeClr val="lt1"/>
+          </a:fontRef>
+        </p:style>
+        <p:txBody>
+          <a:bodyPr rtlCol="0" anchor="ctr"/>
+          <a:lstStyle/>
+          <a:p>
+            <a:pPr algn="ctr"/>
+          </a:p>
+        </p:txBody>
+      </p:sp>
+      <p:sp>
+        <p:nvSpPr>
+          <p:cNvPr id="19" name="TextBox 18"/>
+          <p:cNvSpPr txBox="1"/>
+          <p:nvPr/>
+        </p:nvSpPr>
+        <p:spPr>
+          <a:xfrm>
+            <a:off x="4824000" y="1807200"/>
+            <a:ext cx="864000" cy="396000"/>
+          </a:xfrm>
+          <a:prstGeom prst="rect">
+            <a:avLst/>
+          </a:prstGeom>
+          <a:noFill/>
+        </p:spPr>
+        <p:txBody>
+          <a:bodyPr wrap="square" lIns="0" rIns="0" tIns="0" bIns="0" anchor="ctr">
+            <a:spAutoFit/>
+          </a:bodyPr>
+          <a:lstStyle/>
+          <a:p>
+            <a:pPr algn="ctr"/>
+            <a:r>
+              <a:rPr sz="2800" b="1">
+                <a:solidFill>
+                  <a:srgbClr val="C00000"/>
+                </a:solidFill>
+                <a:latin typeface="Roboto Mono"/>
+              </a:rPr>
+              <a:t>01</a:t>
+            </a:r>
+          </a:p>
+        </p:txBody>
+      </p:sp>
+      <p:sp>
+        <p:nvSpPr>
+          <p:cNvPr id="20" name="TextBox 19"/>
+          <p:cNvSpPr txBox="1"/>
+          <p:nvPr/>
+        </p:nvSpPr>
+        <p:spPr>
+          <a:xfrm>
+            <a:off x="4824000" y="2239200"/>
+            <a:ext cx="864000" cy="144000"/>
+          </a:xfrm>
+          <a:prstGeom prst="rect">
+            <a:avLst/>
+          </a:prstGeom>
+          <a:noFill/>
+        </p:spPr>
+        <p:txBody>
+          <a:bodyPr wrap="square" lIns="0" rIns="0" tIns="0" bIns="0" anchor="t">
+            <a:spAutoFit/>
+          </a:bodyPr>
+          <a:lstStyle/>
+          <a:p>
+            <a:pPr algn="ctr"/>
+            <a:r>
+              <a:rPr sz="900" b="1">
+                <a:solidFill>
+                  <a:srgbClr val="8A95A3"/>
+                </a:solidFill>
+                <a:latin typeface="Roboto Mono"/>
+              </a:rPr>
+              <a:t>−60 до 0 дней</a:t>
+            </a:r>
+          </a:p>
+        </p:txBody>
+      </p:sp>
+      <p:sp>
+        <p:nvSpPr>
+          <p:cNvPr id="21" name="TextBox 20"/>
+          <p:cNvSpPr txBox="1"/>
+          <p:nvPr/>
+        </p:nvSpPr>
+        <p:spPr>
+          <a:xfrm>
+            <a:off x="4824000" y="2401200"/>
+            <a:ext cx="864000" cy="125999"/>
+          </a:xfrm>
+          <a:prstGeom prst="rect">
+            <a:avLst/>
+          </a:prstGeom>
+          <a:noFill/>
+        </p:spPr>
+        <p:txBody>
+          <a:bodyPr wrap="square" lIns="0" rIns="0" tIns="0" bIns="0" anchor="t">
+            <a:spAutoFit/>
+          </a:bodyPr>
+          <a:lstStyle/>
+          <a:p>
+            <a:pPr algn="ctr"/>
+            <a:r>
+              <a:rPr sz="750" b="1" spc="200">
+                <a:solidFill>
+                  <a:srgbClr val="C00000"/>
+                </a:solidFill>
+                <a:latin typeface="Inter"/>
+              </a:rPr>
+              <a:t>ФАЗА 01</a:t>
+            </a:r>
+          </a:p>
+        </p:txBody>
+      </p:sp>
+      <p:sp>
+        <p:nvSpPr>
+          <p:cNvPr id="22" name="TextBox 21"/>
+          <p:cNvSpPr txBox="1"/>
+          <p:nvPr/>
+        </p:nvSpPr>
+        <p:spPr>
+          <a:xfrm>
+            <a:off x="5796000" y="1735200"/>
+            <a:ext cx="2844000" cy="162000"/>
+          </a:xfrm>
+          <a:prstGeom prst="rect">
+            <a:avLst/>
+          </a:prstGeom>
+          <a:noFill/>
+        </p:spPr>
+        <p:txBody>
+          <a:bodyPr wrap="square" lIns="0" rIns="0" tIns="0" bIns="0" anchor="t">
+            <a:spAutoFit/>
+          </a:bodyPr>
+          <a:lstStyle/>
+          <a:p>
+            <a:pPr algn="l"/>
+            <a:r>
+              <a:rPr sz="1200" b="1" spc="100">
+                <a:solidFill>
+                  <a:srgbClr val="2F3A48"/>
+                </a:solidFill>
+                <a:latin typeface="Inter"/>
+              </a:rPr>
+              <a:t>ПОДГОТОВКА</a:t>
+            </a:r>
+          </a:p>
+        </p:txBody>
+      </p:sp>
+      <p:sp>
+        <p:nvSpPr>
+          <p:cNvPr id="23" name="TextBox 22"/>
+          <p:cNvSpPr txBox="1"/>
+          <p:nvPr/>
+        </p:nvSpPr>
+        <p:spPr>
+          <a:xfrm>
+            <a:off x="5796000" y="1969200"/>
+            <a:ext cx="72000" cy="115200"/>
+          </a:xfrm>
+          <a:prstGeom prst="rect">
+            <a:avLst/>
+          </a:prstGeom>
+          <a:noFill/>
+        </p:spPr>
+        <p:txBody>
+          <a:bodyPr wrap="square" lIns="0" rIns="0" tIns="0" bIns="0" anchor="t">
+            <a:spAutoFit/>
+          </a:bodyPr>
+          <a:lstStyle/>
+          <a:p>
+            <a:pPr algn="l"/>
+            <a:r>
+              <a:rPr sz="1200" b="1">
+                <a:solidFill>
+                  <a:srgbClr val="C00000"/>
+                </a:solidFill>
+                <a:latin typeface="Inter"/>
+              </a:rPr>
+              <a:t>·</a:t>
+            </a:r>
+          </a:p>
+        </p:txBody>
+      </p:sp>
+      <p:sp>
+        <p:nvSpPr>
+          <p:cNvPr id="24" name="TextBox 23"/>
+          <p:cNvSpPr txBox="1"/>
+          <p:nvPr/>
+        </p:nvSpPr>
+        <p:spPr>
+          <a:xfrm>
+            <a:off x="5886000" y="1980000"/>
+            <a:ext cx="2754000" cy="115200"/>
+          </a:xfrm>
+          <a:prstGeom prst="rect">
+            <a:avLst/>
+          </a:prstGeom>
+          <a:noFill/>
+        </p:spPr>
+        <p:txBody>
+          <a:bodyPr wrap="square" lIns="0" rIns="0" tIns="0" bIns="0" anchor="t">
+            <a:spAutoFit/>
+          </a:bodyPr>
+          <a:lstStyle/>
+          <a:p>
+            <a:pPr algn="l"/>
+            <a:r>
+              <a:rPr sz="900" b="0">
+                <a:solidFill>
+                  <a:srgbClr val="2F3A48"/>
+                </a:solidFill>
+                <a:latin typeface="Inter"/>
+              </a:rPr>
+              <a:t>Анализ рынка и конкурентов</a:t>
+            </a:r>
+          </a:p>
+        </p:txBody>
+      </p:sp>
+      <p:sp>
+        <p:nvSpPr>
+          <p:cNvPr id="25" name="TextBox 24"/>
+          <p:cNvSpPr txBox="1"/>
+          <p:nvPr/>
+        </p:nvSpPr>
+        <p:spPr>
+          <a:xfrm>
+            <a:off x="5796000" y="2098800"/>
+            <a:ext cx="72000" cy="115200"/>
+          </a:xfrm>
+          <a:prstGeom prst="rect">
+            <a:avLst/>
+          </a:prstGeom>
+          <a:noFill/>
+        </p:spPr>
+        <p:txBody>
+          <a:bodyPr wrap="square" lIns="0" rIns="0" tIns="0" bIns="0" anchor="t">
+            <a:spAutoFit/>
+          </a:bodyPr>
+          <a:lstStyle/>
+          <a:p>
+            <a:pPr algn="l"/>
+            <a:r>
+              <a:rPr sz="1200" b="1">
+                <a:solidFill>
+                  <a:srgbClr val="C00000"/>
+                </a:solidFill>
+                <a:latin typeface="Inter"/>
+              </a:rPr>
+              <a:t>·</a:t>
+            </a:r>
+          </a:p>
+        </p:txBody>
+      </p:sp>
+      <p:sp>
+        <p:nvSpPr>
+          <p:cNvPr id="26" name="TextBox 25"/>
+          <p:cNvSpPr txBox="1"/>
+          <p:nvPr/>
+        </p:nvSpPr>
+        <p:spPr>
+          <a:xfrm>
+            <a:off x="5886000" y="2109600"/>
+            <a:ext cx="2754000" cy="115200"/>
+          </a:xfrm>
+          <a:prstGeom prst="rect">
+            <a:avLst/>
+          </a:prstGeom>
+          <a:noFill/>
+        </p:spPr>
+        <p:txBody>
+          <a:bodyPr wrap="square" lIns="0" rIns="0" tIns="0" bIns="0" anchor="t">
+            <a:spAutoFit/>
+          </a:bodyPr>
+          <a:lstStyle/>
+          <a:p>
+            <a:pPr algn="l"/>
+            <a:r>
+              <a:rPr sz="900" b="0">
+                <a:solidFill>
+                  <a:srgbClr val="2F3A48"/>
+                </a:solidFill>
+                <a:latin typeface="Inter"/>
+              </a:rPr>
+              <a:t>Ценообразование и MML</a:t>
+            </a:r>
+          </a:p>
+        </p:txBody>
+      </p:sp>
+      <p:sp>
+        <p:nvSpPr>
+          <p:cNvPr id="27" name="TextBox 26"/>
+          <p:cNvSpPr txBox="1"/>
+          <p:nvPr/>
+        </p:nvSpPr>
+        <p:spPr>
+          <a:xfrm>
+            <a:off x="5796000" y="2228400"/>
+            <a:ext cx="72000" cy="115200"/>
+          </a:xfrm>
+          <a:prstGeom prst="rect">
+            <a:avLst/>
+          </a:prstGeom>
+          <a:noFill/>
+        </p:spPr>
+        <p:txBody>
+          <a:bodyPr wrap="square" lIns="0" rIns="0" tIns="0" bIns="0" anchor="t">
+            <a:spAutoFit/>
+          </a:bodyPr>
+          <a:lstStyle/>
+          <a:p>
+            <a:pPr algn="l"/>
+            <a:r>
+              <a:rPr sz="1200" b="1">
+                <a:solidFill>
+                  <a:srgbClr val="C00000"/>
+                </a:solidFill>
+                <a:latin typeface="Inter"/>
+              </a:rPr>
+              <a:t>·</a:t>
+            </a:r>
+          </a:p>
+        </p:txBody>
+      </p:sp>
+      <p:sp>
+        <p:nvSpPr>
+          <p:cNvPr id="28" name="TextBox 27"/>
+          <p:cNvSpPr txBox="1"/>
+          <p:nvPr/>
+        </p:nvSpPr>
+        <p:spPr>
+          <a:xfrm>
+            <a:off x="5886000" y="2239200"/>
+            <a:ext cx="2754000" cy="115200"/>
+          </a:xfrm>
+          <a:prstGeom prst="rect">
+            <a:avLst/>
+          </a:prstGeom>
+          <a:noFill/>
+        </p:spPr>
+        <p:txBody>
+          <a:bodyPr wrap="square" lIns="0" rIns="0" tIns="0" bIns="0" anchor="t">
+            <a:spAutoFit/>
+          </a:bodyPr>
+          <a:lstStyle/>
+          <a:p>
+            <a:pPr algn="l"/>
+            <a:r>
+              <a:rPr sz="900" b="0">
+                <a:solidFill>
+                  <a:srgbClr val="2F3A48"/>
+                </a:solidFill>
+                <a:latin typeface="Inter"/>
+              </a:rPr>
+              <a:t>Подготовка POSM и контента</a:t>
+            </a:r>
+          </a:p>
+        </p:txBody>
+      </p:sp>
+      <p:sp>
+        <p:nvSpPr>
+          <p:cNvPr id="29" name="TextBox 28"/>
+          <p:cNvSpPr txBox="1"/>
+          <p:nvPr/>
+        </p:nvSpPr>
+        <p:spPr>
+          <a:xfrm>
+            <a:off x="7560000" y="2293200"/>
+            <a:ext cx="1080000" cy="144000"/>
+          </a:xfrm>
+          <a:prstGeom prst="rect">
+            <a:avLst/>
+          </a:prstGeom>
+          <a:noFill/>
+        </p:spPr>
+        <p:txBody>
+          <a:bodyPr wrap="square" lIns="0" rIns="0" tIns="0" bIns="0" anchor="t">
+            <a:spAutoFit/>
+          </a:bodyPr>
+          <a:lstStyle/>
+          <a:p>
+            <a:pPr algn="r"/>
+            <a:r>
+              <a:rPr sz="1400" b="1">
+                <a:solidFill>
+                  <a:srgbClr val="C00000"/>
+                </a:solidFill>
+                <a:latin typeface="Roboto Mono"/>
+              </a:rPr>
+              <a:t>60 дней</a:t>
+            </a:r>
+          </a:p>
+        </p:txBody>
+      </p:sp>
+      <p:sp>
+        <p:nvSpPr>
+          <p:cNvPr id="30" name="TextBox 29"/>
+          <p:cNvSpPr txBox="1"/>
+          <p:nvPr/>
+        </p:nvSpPr>
+        <p:spPr>
+          <a:xfrm>
+            <a:off x="7560000" y="2437200"/>
+            <a:ext cx="1080000" cy="108000"/>
+          </a:xfrm>
+          <a:prstGeom prst="rect">
+            <a:avLst/>
+          </a:prstGeom>
+          <a:noFill/>
+        </p:spPr>
+        <p:txBody>
+          <a:bodyPr wrap="square" lIns="0" rIns="0" tIns="0" bIns="0" anchor="t">
+            <a:spAutoFit/>
+          </a:bodyPr>
+          <a:lstStyle/>
+          <a:p>
+            <a:pPr algn="r"/>
+            <a:r>
+              <a:rPr sz="800" b="0">
+                <a:solidFill>
+                  <a:srgbClr val="8A95A3"/>
+                </a:solidFill>
+                <a:latin typeface="Inter"/>
+              </a:rPr>
+              <a:t>до запуска</a:t>
+            </a:r>
+          </a:p>
+        </p:txBody>
+      </p:sp>
+      <p:sp>
+        <p:nvSpPr>
+          <p:cNvPr id="31" name="Rounded Rectangle 30"/>
+          <p:cNvSpPr/>
+          <p:nvPr/>
+        </p:nvSpPr>
+        <p:spPr>
+          <a:xfrm>
+            <a:off x="4824000" y="2671200"/>
+            <a:ext cx="3924000" cy="972000"/>
+          </a:xfrm>
+          <a:prstGeom prst="roundRect">
+            <a:avLst>
+              <a:gd name="adj" fmla="val 4000"/>
+            </a:avLst>
+          </a:prstGeom>
+          <a:solidFill>
+            <a:srgbClr val="F5F2EC"/>
+          </a:solidFill>
+          <a:ln w="6350">
+            <a:solidFill>
+              <a:srgbClr val="D9D2C2"/>
+            </a:solidFill>
+          </a:ln>
+          <a:effectLst/>
+        </p:spPr>
+        <p:style>
+          <a:lnRef idx="1">
+            <a:schemeClr val="accent1"/>
+          </a:lnRef>
+          <a:fillRef idx="3">
+            <a:schemeClr val="accent1"/>
+          </a:fillRef>
+          <a:effectRef idx="2">
+            <a:schemeClr val="accent1"/>
+          </a:effectRef>
+          <a:fontRef idx="minor">
+            <a:schemeClr val="lt1"/>
+          </a:fontRef>
+        </p:style>
+        <p:txBody>
+          <a:bodyPr rtlCol="0" anchor="ctr"/>
+          <a:lstStyle/>
+          <a:p>
+            <a:pPr algn="ctr"/>
+          </a:p>
+        </p:txBody>
+      </p:sp>
+      <p:sp>
+        <p:nvSpPr>
+          <p:cNvPr id="32" name="Rounded Rectangle 31"/>
+          <p:cNvSpPr/>
+          <p:nvPr/>
+        </p:nvSpPr>
+        <p:spPr>
+          <a:xfrm>
+            <a:off x="4824000" y="2671200"/>
+            <a:ext cx="864000" cy="972000"/>
+          </a:xfrm>
+          <a:prstGeom prst="roundRect">
+            <a:avLst>
+              <a:gd name="adj" fmla="val 4000"/>
+            </a:avLst>
+          </a:prstGeom>
+          <a:solidFill>
+            <a:srgbClr val="FFFFFF"/>
+          </a:solidFill>
+          <a:ln>
+            <a:noFill/>
+          </a:ln>
+          <a:effectLst/>
+        </p:spPr>
+        <p:style>
+          <a:lnRef idx="1">
+            <a:schemeClr val="accent1"/>
+          </a:lnRef>
+          <a:fillRef idx="3">
+            <a:schemeClr val="accent1"/>
+          </a:fillRef>
+          <a:effectRef idx="2">
+            <a:schemeClr val="accent1"/>
+          </a:effectRef>
+          <a:fontRef idx="minor">
+            <a:schemeClr val="lt1"/>
+          </a:fontRef>
+        </p:style>
+        <p:txBody>
+          <a:bodyPr rtlCol="0" anchor="ctr"/>
+          <a:lstStyle/>
+          <a:p>
+            <a:pPr algn="ctr"/>
+          </a:p>
+        </p:txBody>
+      </p:sp>
+      <p:sp>
+        <p:nvSpPr>
+          <p:cNvPr id="33" name="Rectangle 32"/>
+          <p:cNvSpPr/>
+          <p:nvPr/>
+        </p:nvSpPr>
+        <p:spPr>
+          <a:xfrm>
+            <a:off x="4824000" y="2671200"/>
+            <a:ext cx="39600" cy="972000"/>
           </a:xfrm>
           <a:prstGeom prst="rect">
             <a:avLst/>
@@ -16725,14 +17009,14 @@
       </p:sp>
       <p:sp>
         <p:nvSpPr>
-          <p:cNvPr id="27" name="TextBox 26"/>
+          <p:cNvPr id="34" name="TextBox 33"/>
           <p:cNvSpPr txBox="1"/>
           <p:nvPr/>
         </p:nvSpPr>
         <p:spPr>
           <a:xfrm>
-            <a:off x="4650000" y="1306000"/>
-            <a:ext cx="1100000" cy="700000"/>
+            <a:off x="4824000" y="2851200"/>
+            <a:ext cx="864000" cy="396000"/>
           </a:xfrm>
           <a:prstGeom prst="rect">
             <a:avLst/>
@@ -16747,7 +17031,7 @@
           <a:p>
             <a:pPr algn="ctr"/>
             <a:r>
-              <a:rPr sz="3600" b="1">
+              <a:rPr sz="2800" b="1">
                 <a:solidFill>
                   <a:srgbClr val="C9A77C"/>
                 </a:solidFill>
@@ -16760,14 +17044,14 @@
       </p:sp>
       <p:sp>
         <p:nvSpPr>
-          <p:cNvPr id="28" name="TextBox 27"/>
+          <p:cNvPr id="35" name="TextBox 34"/>
           <p:cNvSpPr txBox="1"/>
           <p:nvPr/>
         </p:nvSpPr>
         <p:spPr>
           <a:xfrm>
-            <a:off x="4650000" y="2026000"/>
-            <a:ext cx="1100000" cy="280000"/>
+            <a:off x="4824000" y="3283200"/>
+            <a:ext cx="864000" cy="144000"/>
           </a:xfrm>
           <a:prstGeom prst="rect">
             <a:avLst/>
@@ -16795,14 +17079,14 @@
       </p:sp>
       <p:sp>
         <p:nvSpPr>
-          <p:cNvPr id="29" name="TextBox 28"/>
+          <p:cNvPr id="36" name="TextBox 35"/>
           <p:cNvSpPr txBox="1"/>
           <p:nvPr/>
         </p:nvSpPr>
         <p:spPr>
           <a:xfrm>
-            <a:off x="4650000" y="2326000"/>
-            <a:ext cx="1100000" cy="280000"/>
+            <a:off x="4824000" y="3445200"/>
+            <a:ext cx="864000" cy="125999"/>
           </a:xfrm>
           <a:prstGeom prst="rect">
             <a:avLst/>
@@ -16817,7 +17101,7 @@
           <a:p>
             <a:pPr algn="ctr"/>
             <a:r>
-              <a:rPr sz="800" b="1" spc="200">
+              <a:rPr sz="750" b="1" spc="200">
                 <a:solidFill>
                   <a:srgbClr val="C9A77C"/>
                 </a:solidFill>
@@ -16830,14 +17114,14 @@
       </p:sp>
       <p:sp>
         <p:nvSpPr>
-          <p:cNvPr id="30" name="TextBox 29"/>
+          <p:cNvPr id="37" name="TextBox 36"/>
           <p:cNvSpPr txBox="1"/>
           <p:nvPr/>
         </p:nvSpPr>
         <p:spPr>
           <a:xfrm>
-            <a:off x="5930000" y="1206000"/>
-            <a:ext cx="2860000" cy="280000"/>
+            <a:off x="5796000" y="2779200"/>
+            <a:ext cx="2844000" cy="162000"/>
           </a:xfrm>
           <a:prstGeom prst="rect">
             <a:avLst/>
@@ -16865,14 +17149,14 @@
       </p:sp>
       <p:sp>
         <p:nvSpPr>
-          <p:cNvPr id="31" name="TextBox 30"/>
+          <p:cNvPr id="38" name="TextBox 37"/>
           <p:cNvSpPr txBox="1"/>
           <p:nvPr/>
         </p:nvSpPr>
         <p:spPr>
           <a:xfrm>
-            <a:off x="5930000" y="1566000"/>
-            <a:ext cx="80000" cy="220000"/>
+            <a:off x="5796000" y="3013200"/>
+            <a:ext cx="72000" cy="115200"/>
           </a:xfrm>
           <a:prstGeom prst="rect">
             <a:avLst/>
@@ -16887,7 +17171,7 @@
           <a:p>
             <a:pPr algn="l"/>
             <a:r>
-              <a:rPr sz="1400" b="1">
+              <a:rPr sz="1200" b="1">
                 <a:solidFill>
                   <a:srgbClr val="C9A77C"/>
                 </a:solidFill>
@@ -16900,14 +17184,14 @@
       </p:sp>
       <p:sp>
         <p:nvSpPr>
-          <p:cNvPr id="32" name="TextBox 31"/>
+          <p:cNvPr id="39" name="TextBox 38"/>
           <p:cNvSpPr txBox="1"/>
           <p:nvPr/>
         </p:nvSpPr>
         <p:spPr>
           <a:xfrm>
-            <a:off x="6030000" y="1586000"/>
-            <a:ext cx="2760000" cy="220000"/>
+            <a:off x="5886000" y="3024000"/>
+            <a:ext cx="2754000" cy="115200"/>
           </a:xfrm>
           <a:prstGeom prst="rect">
             <a:avLst/>
@@ -16922,7 +17206,7 @@
           <a:p>
             <a:pPr algn="l"/>
             <a:r>
-              <a:rPr sz="950" b="0">
+              <a:rPr sz="900" b="0">
                 <a:solidFill>
                   <a:srgbClr val="2F3A48"/>
                 </a:solidFill>
@@ -16935,14 +17219,14 @@
       </p:sp>
       <p:sp>
         <p:nvSpPr>
-          <p:cNvPr id="33" name="TextBox 32"/>
+          <p:cNvPr id="40" name="TextBox 39"/>
           <p:cNvSpPr txBox="1"/>
           <p:nvPr/>
         </p:nvSpPr>
         <p:spPr>
           <a:xfrm>
-            <a:off x="5930000" y="1826000"/>
-            <a:ext cx="80000" cy="220000"/>
+            <a:off x="5796000" y="3142800"/>
+            <a:ext cx="72000" cy="115200"/>
           </a:xfrm>
           <a:prstGeom prst="rect">
             <a:avLst/>
@@ -16957,7 +17241,7 @@
           <a:p>
             <a:pPr algn="l"/>
             <a:r>
-              <a:rPr sz="1400" b="1">
+              <a:rPr sz="1200" b="1">
                 <a:solidFill>
                   <a:srgbClr val="C9A77C"/>
                 </a:solidFill>
@@ -16970,14 +17254,14 @@
       </p:sp>
       <p:sp>
         <p:nvSpPr>
-          <p:cNvPr id="34" name="TextBox 33"/>
+          <p:cNvPr id="41" name="TextBox 40"/>
           <p:cNvSpPr txBox="1"/>
           <p:nvPr/>
         </p:nvSpPr>
         <p:spPr>
           <a:xfrm>
-            <a:off x="6030000" y="1846000"/>
-            <a:ext cx="2760000" cy="220000"/>
+            <a:off x="5886000" y="3153600"/>
+            <a:ext cx="2754000" cy="115200"/>
           </a:xfrm>
           <a:prstGeom prst="rect">
             <a:avLst/>
@@ -16992,7 +17276,7 @@
           <a:p>
             <a:pPr algn="l"/>
             <a:r>
-              <a:rPr sz="950" b="0">
+              <a:rPr sz="900" b="0">
                 <a:solidFill>
                   <a:srgbClr val="2F3A48"/>
                 </a:solidFill>
@@ -17005,14 +17289,14 @@
       </p:sp>
       <p:sp>
         <p:nvSpPr>
-          <p:cNvPr id="35" name="TextBox 34"/>
+          <p:cNvPr id="42" name="TextBox 41"/>
           <p:cNvSpPr txBox="1"/>
           <p:nvPr/>
         </p:nvSpPr>
         <p:spPr>
           <a:xfrm>
-            <a:off x="5930000" y="2086000"/>
-            <a:ext cx="80000" cy="220000"/>
+            <a:off x="5796000" y="3272400"/>
+            <a:ext cx="72000" cy="115200"/>
           </a:xfrm>
           <a:prstGeom prst="rect">
             <a:avLst/>
@@ -17027,7 +17311,7 @@
           <a:p>
             <a:pPr algn="l"/>
             <a:r>
-              <a:rPr sz="1400" b="1">
+              <a:rPr sz="1200" b="1">
                 <a:solidFill>
                   <a:srgbClr val="C9A77C"/>
                 </a:solidFill>
@@ -17040,14 +17324,14 @@
       </p:sp>
       <p:sp>
         <p:nvSpPr>
-          <p:cNvPr id="36" name="TextBox 35"/>
+          <p:cNvPr id="43" name="TextBox 42"/>
           <p:cNvSpPr txBox="1"/>
           <p:nvPr/>
         </p:nvSpPr>
         <p:spPr>
           <a:xfrm>
-            <a:off x="6030000" y="2106000"/>
-            <a:ext cx="2760000" cy="220000"/>
+            <a:off x="5886000" y="3283200"/>
+            <a:ext cx="2754000" cy="115200"/>
           </a:xfrm>
           <a:prstGeom prst="rect">
             <a:avLst/>
@@ -17062,7 +17346,7 @@
           <a:p>
             <a:pPr algn="l"/>
             <a:r>
-              <a:rPr sz="950" b="0">
+              <a:rPr sz="900" b="0">
                 <a:solidFill>
                   <a:srgbClr val="2F3A48"/>
                 </a:solidFill>
@@ -17075,14 +17359,642 @@
       </p:sp>
       <p:sp>
         <p:nvSpPr>
-          <p:cNvPr id="37" name="Rectangle 36"/>
+          <p:cNvPr id="44" name="TextBox 43"/>
+          <p:cNvSpPr txBox="1"/>
+          <p:nvPr/>
+        </p:nvSpPr>
+        <p:spPr>
+          <a:xfrm>
+            <a:off x="7560000" y="3337200"/>
+            <a:ext cx="1080000" cy="144000"/>
+          </a:xfrm>
+          <a:prstGeom prst="rect">
+            <a:avLst/>
+          </a:prstGeom>
+          <a:noFill/>
+        </p:spPr>
+        <p:txBody>
+          <a:bodyPr wrap="square" lIns="0" rIns="0" tIns="0" bIns="0" anchor="t">
+            <a:spAutoFit/>
+          </a:bodyPr>
+          <a:lstStyle/>
+          <a:p>
+            <a:pPr algn="r"/>
+            <a:r>
+              <a:rPr sz="1400" b="1">
+                <a:solidFill>
+                  <a:srgbClr val="C9A77C"/>
+                </a:solidFill>
+                <a:latin typeface="Roboto Mono"/>
+              </a:rPr>
+              <a:t>100%</a:t>
+            </a:r>
+          </a:p>
+        </p:txBody>
+      </p:sp>
+      <p:sp>
+        <p:nvSpPr>
+          <p:cNvPr id="45" name="TextBox 44"/>
+          <p:cNvSpPr txBox="1"/>
+          <p:nvPr/>
+        </p:nvSpPr>
+        <p:spPr>
+          <a:xfrm>
+            <a:off x="7560000" y="3481200"/>
+            <a:ext cx="1080000" cy="108000"/>
+          </a:xfrm>
+          <a:prstGeom prst="rect">
+            <a:avLst/>
+          </a:prstGeom>
+          <a:noFill/>
+        </p:spPr>
+        <p:txBody>
+          <a:bodyPr wrap="square" lIns="0" rIns="0" tIns="0" bIns="0" anchor="t">
+            <a:spAutoFit/>
+          </a:bodyPr>
+          <a:lstStyle/>
+          <a:p>
+            <a:pPr algn="r"/>
+            <a:r>
+              <a:rPr sz="800" b="0">
+                <a:solidFill>
+                  <a:srgbClr val="8A95A3"/>
+                </a:solidFill>
+                <a:latin typeface="Inter"/>
+              </a:rPr>
+              <a:t>наличие POSM</a:t>
+            </a:r>
+          </a:p>
+        </p:txBody>
+      </p:sp>
+      <p:sp>
+        <p:nvSpPr>
+          <p:cNvPr id="46" name="Rounded Rectangle 45"/>
           <p:cNvSpPr/>
           <p:nvPr/>
         </p:nvSpPr>
         <p:spPr>
           <a:xfrm>
-            <a:off x="5930000" y="2266000"/>
-            <a:ext cx="2860000" cy="20000"/>
+            <a:off x="4824000" y="3715200"/>
+            <a:ext cx="3924000" cy="972000"/>
+          </a:xfrm>
+          <a:prstGeom prst="roundRect">
+            <a:avLst>
+              <a:gd name="adj" fmla="val 4000"/>
+            </a:avLst>
+          </a:prstGeom>
+          <a:solidFill>
+            <a:srgbClr val="F5F2EC"/>
+          </a:solidFill>
+          <a:ln w="6350">
+            <a:solidFill>
+              <a:srgbClr val="D9D2C2"/>
+            </a:solidFill>
+          </a:ln>
+          <a:effectLst/>
+        </p:spPr>
+        <p:style>
+          <a:lnRef idx="1">
+            <a:schemeClr val="accent1"/>
+          </a:lnRef>
+          <a:fillRef idx="3">
+            <a:schemeClr val="accent1"/>
+          </a:fillRef>
+          <a:effectRef idx="2">
+            <a:schemeClr val="accent1"/>
+          </a:effectRef>
+          <a:fontRef idx="minor">
+            <a:schemeClr val="lt1"/>
+          </a:fontRef>
+        </p:style>
+        <p:txBody>
+          <a:bodyPr rtlCol="0" anchor="ctr"/>
+          <a:lstStyle/>
+          <a:p>
+            <a:pPr algn="ctr"/>
+          </a:p>
+        </p:txBody>
+      </p:sp>
+      <p:sp>
+        <p:nvSpPr>
+          <p:cNvPr id="47" name="Rounded Rectangle 46"/>
+          <p:cNvSpPr/>
+          <p:nvPr/>
+        </p:nvSpPr>
+        <p:spPr>
+          <a:xfrm>
+            <a:off x="4824000" y="3715200"/>
+            <a:ext cx="864000" cy="972000"/>
+          </a:xfrm>
+          <a:prstGeom prst="roundRect">
+            <a:avLst>
+              <a:gd name="adj" fmla="val 4000"/>
+            </a:avLst>
+          </a:prstGeom>
+          <a:solidFill>
+            <a:srgbClr val="FFFFFF"/>
+          </a:solidFill>
+          <a:ln>
+            <a:noFill/>
+          </a:ln>
+          <a:effectLst/>
+        </p:spPr>
+        <p:style>
+          <a:lnRef idx="1">
+            <a:schemeClr val="accent1"/>
+          </a:lnRef>
+          <a:fillRef idx="3">
+            <a:schemeClr val="accent1"/>
+          </a:fillRef>
+          <a:effectRef idx="2">
+            <a:schemeClr val="accent1"/>
+          </a:effectRef>
+          <a:fontRef idx="minor">
+            <a:schemeClr val="lt1"/>
+          </a:fontRef>
+        </p:style>
+        <p:txBody>
+          <a:bodyPr rtlCol="0" anchor="ctr"/>
+          <a:lstStyle/>
+          <a:p>
+            <a:pPr algn="ctr"/>
+          </a:p>
+        </p:txBody>
+      </p:sp>
+      <p:sp>
+        <p:nvSpPr>
+          <p:cNvPr id="48" name="Rectangle 47"/>
+          <p:cNvSpPr/>
+          <p:nvPr/>
+        </p:nvSpPr>
+        <p:spPr>
+          <a:xfrm>
+            <a:off x="4824000" y="3715200"/>
+            <a:ext cx="39600" cy="972000"/>
+          </a:xfrm>
+          <a:prstGeom prst="rect">
+            <a:avLst/>
+          </a:prstGeom>
+          <a:solidFill>
+            <a:srgbClr val="6B8FA8"/>
+          </a:solidFill>
+          <a:ln>
+            <a:noFill/>
+          </a:ln>
+          <a:effectLst/>
+        </p:spPr>
+        <p:style>
+          <a:lnRef idx="1">
+            <a:schemeClr val="accent1"/>
+          </a:lnRef>
+          <a:fillRef idx="3">
+            <a:schemeClr val="accent1"/>
+          </a:fillRef>
+          <a:effectRef idx="2">
+            <a:schemeClr val="accent1"/>
+          </a:effectRef>
+          <a:fontRef idx="minor">
+            <a:schemeClr val="lt1"/>
+          </a:fontRef>
+        </p:style>
+        <p:txBody>
+          <a:bodyPr rtlCol="0" anchor="ctr"/>
+          <a:lstStyle/>
+          <a:p>
+            <a:pPr algn="ctr"/>
+          </a:p>
+        </p:txBody>
+      </p:sp>
+      <p:sp>
+        <p:nvSpPr>
+          <p:cNvPr id="49" name="TextBox 48"/>
+          <p:cNvSpPr txBox="1"/>
+          <p:nvPr/>
+        </p:nvSpPr>
+        <p:spPr>
+          <a:xfrm>
+            <a:off x="4824000" y="3895200"/>
+            <a:ext cx="864000" cy="396000"/>
+          </a:xfrm>
+          <a:prstGeom prst="rect">
+            <a:avLst/>
+          </a:prstGeom>
+          <a:noFill/>
+        </p:spPr>
+        <p:txBody>
+          <a:bodyPr wrap="square" lIns="0" rIns="0" tIns="0" bIns="0" anchor="ctr">
+            <a:spAutoFit/>
+          </a:bodyPr>
+          <a:lstStyle/>
+          <a:p>
+            <a:pPr algn="ctr"/>
+            <a:r>
+              <a:rPr sz="2800" b="1">
+                <a:solidFill>
+                  <a:srgbClr val="6B8FA8"/>
+                </a:solidFill>
+                <a:latin typeface="Roboto Mono"/>
+              </a:rPr>
+              <a:t>03</a:t>
+            </a:r>
+          </a:p>
+        </p:txBody>
+      </p:sp>
+      <p:sp>
+        <p:nvSpPr>
+          <p:cNvPr id="50" name="TextBox 49"/>
+          <p:cNvSpPr txBox="1"/>
+          <p:nvPr/>
+        </p:nvSpPr>
+        <p:spPr>
+          <a:xfrm>
+            <a:off x="4824000" y="4327200"/>
+            <a:ext cx="864000" cy="144000"/>
+          </a:xfrm>
+          <a:prstGeom prst="rect">
+            <a:avLst/>
+          </a:prstGeom>
+          <a:noFill/>
+        </p:spPr>
+        <p:txBody>
+          <a:bodyPr wrap="square" lIns="0" rIns="0" tIns="0" bIns="0" anchor="t">
+            <a:spAutoFit/>
+          </a:bodyPr>
+          <a:lstStyle/>
+          <a:p>
+            <a:pPr algn="ctr"/>
+            <a:r>
+              <a:rPr sz="900" b="1">
+                <a:solidFill>
+                  <a:srgbClr val="8A95A3"/>
+                </a:solidFill>
+                <a:latin typeface="Roboto Mono"/>
+              </a:rPr>
+              <a:t>30 — 90 дней</a:t>
+            </a:r>
+          </a:p>
+        </p:txBody>
+      </p:sp>
+      <p:sp>
+        <p:nvSpPr>
+          <p:cNvPr id="51" name="TextBox 50"/>
+          <p:cNvSpPr txBox="1"/>
+          <p:nvPr/>
+        </p:nvSpPr>
+        <p:spPr>
+          <a:xfrm>
+            <a:off x="4824000" y="4489200"/>
+            <a:ext cx="864000" cy="125999"/>
+          </a:xfrm>
+          <a:prstGeom prst="rect">
+            <a:avLst/>
+          </a:prstGeom>
+          <a:noFill/>
+        </p:spPr>
+        <p:txBody>
+          <a:bodyPr wrap="square" lIns="0" rIns="0" tIns="0" bIns="0" anchor="t">
+            <a:spAutoFit/>
+          </a:bodyPr>
+          <a:lstStyle/>
+          <a:p>
+            <a:pPr algn="ctr"/>
+            <a:r>
+              <a:rPr sz="750" b="1" spc="200">
+                <a:solidFill>
+                  <a:srgbClr val="6B8FA8"/>
+                </a:solidFill>
+                <a:latin typeface="Inter"/>
+              </a:rPr>
+              <a:t>ФАЗА 03</a:t>
+            </a:r>
+          </a:p>
+        </p:txBody>
+      </p:sp>
+      <p:sp>
+        <p:nvSpPr>
+          <p:cNvPr id="52" name="TextBox 51"/>
+          <p:cNvSpPr txBox="1"/>
+          <p:nvPr/>
+        </p:nvSpPr>
+        <p:spPr>
+          <a:xfrm>
+            <a:off x="5796000" y="3823200"/>
+            <a:ext cx="2844000" cy="162000"/>
+          </a:xfrm>
+          <a:prstGeom prst="rect">
+            <a:avLst/>
+          </a:prstGeom>
+          <a:noFill/>
+        </p:spPr>
+        <p:txBody>
+          <a:bodyPr wrap="square" lIns="0" rIns="0" tIns="0" bIns="0" anchor="t">
+            <a:spAutoFit/>
+          </a:bodyPr>
+          <a:lstStyle/>
+          <a:p>
+            <a:pPr algn="l"/>
+            <a:r>
+              <a:rPr sz="1200" b="1" spc="100">
+                <a:solidFill>
+                  <a:srgbClr val="2F3A48"/>
+                </a:solidFill>
+                <a:latin typeface="Inter"/>
+              </a:rPr>
+              <a:t>СОПРОВОЖДЕНИЕ</a:t>
+            </a:r>
+          </a:p>
+        </p:txBody>
+      </p:sp>
+      <p:sp>
+        <p:nvSpPr>
+          <p:cNvPr id="53" name="TextBox 52"/>
+          <p:cNvSpPr txBox="1"/>
+          <p:nvPr/>
+        </p:nvSpPr>
+        <p:spPr>
+          <a:xfrm>
+            <a:off x="5796000" y="4057200"/>
+            <a:ext cx="72000" cy="115200"/>
+          </a:xfrm>
+          <a:prstGeom prst="rect">
+            <a:avLst/>
+          </a:prstGeom>
+          <a:noFill/>
+        </p:spPr>
+        <p:txBody>
+          <a:bodyPr wrap="square" lIns="0" rIns="0" tIns="0" bIns="0" anchor="t">
+            <a:spAutoFit/>
+          </a:bodyPr>
+          <a:lstStyle/>
+          <a:p>
+            <a:pPr algn="l"/>
+            <a:r>
+              <a:rPr sz="1200" b="1">
+                <a:solidFill>
+                  <a:srgbClr val="6B8FA8"/>
+                </a:solidFill>
+                <a:latin typeface="Inter"/>
+              </a:rPr>
+              <a:t>·</a:t>
+            </a:r>
+          </a:p>
+        </p:txBody>
+      </p:sp>
+      <p:sp>
+        <p:nvSpPr>
+          <p:cNvPr id="54" name="TextBox 53"/>
+          <p:cNvSpPr txBox="1"/>
+          <p:nvPr/>
+        </p:nvSpPr>
+        <p:spPr>
+          <a:xfrm>
+            <a:off x="5886000" y="4068000"/>
+            <a:ext cx="2754000" cy="115200"/>
+          </a:xfrm>
+          <a:prstGeom prst="rect">
+            <a:avLst/>
+          </a:prstGeom>
+          <a:noFill/>
+        </p:spPr>
+        <p:txBody>
+          <a:bodyPr wrap="square" lIns="0" rIns="0" tIns="0" bIns="0" anchor="t">
+            <a:spAutoFit/>
+          </a:bodyPr>
+          <a:lstStyle/>
+          <a:p>
+            <a:pPr algn="l"/>
+            <a:r>
+              <a:rPr sz="900" b="0">
+                <a:solidFill>
+                  <a:srgbClr val="2F3A48"/>
+                </a:solidFill>
+                <a:latin typeface="Inter"/>
+              </a:rPr>
+              <a:t>Промоакции и мастер-классы</a:t>
+            </a:r>
+          </a:p>
+        </p:txBody>
+      </p:sp>
+      <p:sp>
+        <p:nvSpPr>
+          <p:cNvPr id="55" name="TextBox 54"/>
+          <p:cNvSpPr txBox="1"/>
+          <p:nvPr/>
+        </p:nvSpPr>
+        <p:spPr>
+          <a:xfrm>
+            <a:off x="5796000" y="4186800"/>
+            <a:ext cx="72000" cy="115200"/>
+          </a:xfrm>
+          <a:prstGeom prst="rect">
+            <a:avLst/>
+          </a:prstGeom>
+          <a:noFill/>
+        </p:spPr>
+        <p:txBody>
+          <a:bodyPr wrap="square" lIns="0" rIns="0" tIns="0" bIns="0" anchor="t">
+            <a:spAutoFit/>
+          </a:bodyPr>
+          <a:lstStyle/>
+          <a:p>
+            <a:pPr algn="l"/>
+            <a:r>
+              <a:rPr sz="1200" b="1">
+                <a:solidFill>
+                  <a:srgbClr val="6B8FA8"/>
+                </a:solidFill>
+                <a:latin typeface="Inter"/>
+              </a:rPr>
+              <a:t>·</a:t>
+            </a:r>
+          </a:p>
+        </p:txBody>
+      </p:sp>
+      <p:sp>
+        <p:nvSpPr>
+          <p:cNvPr id="56" name="TextBox 55"/>
+          <p:cNvSpPr txBox="1"/>
+          <p:nvPr/>
+        </p:nvSpPr>
+        <p:spPr>
+          <a:xfrm>
+            <a:off x="5886000" y="4197600"/>
+            <a:ext cx="2754000" cy="115200"/>
+          </a:xfrm>
+          <a:prstGeom prst="rect">
+            <a:avLst/>
+          </a:prstGeom>
+          <a:noFill/>
+        </p:spPr>
+        <p:txBody>
+          <a:bodyPr wrap="square" lIns="0" rIns="0" tIns="0" bIns="0" anchor="t">
+            <a:spAutoFit/>
+          </a:bodyPr>
+          <a:lstStyle/>
+          <a:p>
+            <a:pPr algn="l"/>
+            <a:r>
+              <a:rPr sz="900" b="0">
+                <a:solidFill>
+                  <a:srgbClr val="2F3A48"/>
+                </a:solidFill>
+                <a:latin typeface="Inter"/>
+              </a:rPr>
+              <a:t>Куратор на каждую точку</a:t>
+            </a:r>
+          </a:p>
+        </p:txBody>
+      </p:sp>
+      <p:sp>
+        <p:nvSpPr>
+          <p:cNvPr id="57" name="TextBox 56"/>
+          <p:cNvSpPr txBox="1"/>
+          <p:nvPr/>
+        </p:nvSpPr>
+        <p:spPr>
+          <a:xfrm>
+            <a:off x="5796000" y="4316400"/>
+            <a:ext cx="72000" cy="115200"/>
+          </a:xfrm>
+          <a:prstGeom prst="rect">
+            <a:avLst/>
+          </a:prstGeom>
+          <a:noFill/>
+        </p:spPr>
+        <p:txBody>
+          <a:bodyPr wrap="square" lIns="0" rIns="0" tIns="0" bIns="0" anchor="t">
+            <a:spAutoFit/>
+          </a:bodyPr>
+          <a:lstStyle/>
+          <a:p>
+            <a:pPr algn="l"/>
+            <a:r>
+              <a:rPr sz="1200" b="1">
+                <a:solidFill>
+                  <a:srgbClr val="6B8FA8"/>
+                </a:solidFill>
+                <a:latin typeface="Inter"/>
+              </a:rPr>
+              <a:t>·</a:t>
+            </a:r>
+          </a:p>
+        </p:txBody>
+      </p:sp>
+      <p:sp>
+        <p:nvSpPr>
+          <p:cNvPr id="58" name="TextBox 57"/>
+          <p:cNvSpPr txBox="1"/>
+          <p:nvPr/>
+        </p:nvSpPr>
+        <p:spPr>
+          <a:xfrm>
+            <a:off x="5886000" y="4327200"/>
+            <a:ext cx="2754000" cy="115200"/>
+          </a:xfrm>
+          <a:prstGeom prst="rect">
+            <a:avLst/>
+          </a:prstGeom>
+          <a:noFill/>
+        </p:spPr>
+        <p:txBody>
+          <a:bodyPr wrap="square" lIns="0" rIns="0" tIns="0" bIns="0" anchor="t">
+            <a:spAutoFit/>
+          </a:bodyPr>
+          <a:lstStyle/>
+          <a:p>
+            <a:pPr algn="l"/>
+            <a:r>
+              <a:rPr sz="900" b="0">
+                <a:solidFill>
+                  <a:srgbClr val="2F3A48"/>
+                </a:solidFill>
+                <a:latin typeface="Inter"/>
+              </a:rPr>
+              <a:t>Аналитика продаж по неделе</a:t>
+            </a:r>
+          </a:p>
+        </p:txBody>
+      </p:sp>
+      <p:sp>
+        <p:nvSpPr>
+          <p:cNvPr id="59" name="TextBox 58"/>
+          <p:cNvSpPr txBox="1"/>
+          <p:nvPr/>
+        </p:nvSpPr>
+        <p:spPr>
+          <a:xfrm>
+            <a:off x="7560000" y="4381200"/>
+            <a:ext cx="1080000" cy="144000"/>
+          </a:xfrm>
+          <a:prstGeom prst="rect">
+            <a:avLst/>
+          </a:prstGeom>
+          <a:noFill/>
+        </p:spPr>
+        <p:txBody>
+          <a:bodyPr wrap="square" lIns="0" rIns="0" tIns="0" bIns="0" anchor="t">
+            <a:spAutoFit/>
+          </a:bodyPr>
+          <a:lstStyle/>
+          <a:p>
+            <a:pPr algn="r"/>
+            <a:r>
+              <a:rPr sz="1400" b="1">
+                <a:solidFill>
+                  <a:srgbClr val="6B8FA8"/>
+                </a:solidFill>
+                <a:latin typeface="Roboto Mono"/>
+              </a:rPr>
+              <a:t>350 ТП</a:t>
+            </a:r>
+          </a:p>
+        </p:txBody>
+      </p:sp>
+      <p:sp>
+        <p:nvSpPr>
+          <p:cNvPr id="60" name="TextBox 59"/>
+          <p:cNvSpPr txBox="1"/>
+          <p:nvPr/>
+        </p:nvSpPr>
+        <p:spPr>
+          <a:xfrm>
+            <a:off x="7560000" y="4525200"/>
+            <a:ext cx="1080000" cy="108000"/>
+          </a:xfrm>
+          <a:prstGeom prst="rect">
+            <a:avLst/>
+          </a:prstGeom>
+          <a:noFill/>
+        </p:spPr>
+        <p:txBody>
+          <a:bodyPr wrap="square" lIns="0" rIns="0" tIns="0" bIns="0" anchor="t">
+            <a:spAutoFit/>
+          </a:bodyPr>
+          <a:lstStyle/>
+          <a:p>
+            <a:pPr algn="r"/>
+            <a:r>
+              <a:rPr sz="800" b="0">
+                <a:solidFill>
+                  <a:srgbClr val="8A95A3"/>
+                </a:solidFill>
+                <a:latin typeface="Inter"/>
+              </a:rPr>
+              <a:t>обучено в 1-й мес.</a:t>
+            </a:r>
+          </a:p>
+        </p:txBody>
+      </p:sp>
+      <p:sp>
+        <p:nvSpPr>
+          <p:cNvPr id="61" name="Rectangle 60"/>
+          <p:cNvSpPr/>
+          <p:nvPr/>
+        </p:nvSpPr>
+        <p:spPr>
+          <a:xfrm>
+            <a:off x="180000" y="4860000"/>
+            <a:ext cx="8820000" cy="14400"/>
           </a:xfrm>
           <a:prstGeom prst="rect">
             <a:avLst/>
@@ -17119,14 +18031,14 @@
       </p:sp>
       <p:sp>
         <p:nvSpPr>
-          <p:cNvPr id="38" name="TextBox 37"/>
+          <p:cNvPr id="62" name="TextBox 61"/>
           <p:cNvSpPr txBox="1"/>
           <p:nvPr/>
         </p:nvSpPr>
         <p:spPr>
           <a:xfrm>
-            <a:off x="5930000" y="2306000"/>
-            <a:ext cx="1500000" cy="180000"/>
+            <a:off x="180000" y="4896000"/>
+            <a:ext cx="8820000" cy="144000"/>
           </a:xfrm>
           <a:prstGeom prst="rect">
             <a:avLst/>
@@ -17139,1438 +18051,15 @@
           </a:bodyPr>
           <a:lstStyle/>
           <a:p>
-            <a:pPr algn="l"/>
-            <a:r>
-              <a:rPr sz="800" b="1" spc="100">
+            <a:pPr algn="ctr"/>
+            <a:r>
+              <a:rPr sz="900" b="0">
                 <a:solidFill>
                   <a:srgbClr val="8A95A3"/>
                 </a:solidFill>
                 <a:latin typeface="Inter"/>
               </a:rPr>
-              <a:t>KPI фазы</a:t>
-            </a:r>
-          </a:p>
-        </p:txBody>
-      </p:sp>
-      <p:sp>
-        <p:nvSpPr>
-          <p:cNvPr id="39" name="TextBox 38"/>
-          <p:cNvSpPr txBox="1"/>
-          <p:nvPr/>
-        </p:nvSpPr>
-        <p:spPr>
-          <a:xfrm>
-            <a:off x="5930000" y="2486000"/>
-            <a:ext cx="1500000" cy="280000"/>
-          </a:xfrm>
-          <a:prstGeom prst="rect">
-            <a:avLst/>
-          </a:prstGeom>
-          <a:noFill/>
-        </p:spPr>
-        <p:txBody>
-          <a:bodyPr wrap="square" lIns="0" rIns="0" tIns="0" bIns="0" anchor="t">
-            <a:spAutoFit/>
-          </a:bodyPr>
-          <a:lstStyle/>
-          <a:p>
-            <a:pPr algn="l"/>
-            <a:r>
-              <a:rPr sz="1400" b="1">
-                <a:solidFill>
-                  <a:srgbClr val="C9A77C"/>
-                </a:solidFill>
-                <a:latin typeface="Roboto Mono"/>
-              </a:rPr>
-              <a:t>100%</a:t>
-            </a:r>
-          </a:p>
-        </p:txBody>
-      </p:sp>
-      <p:sp>
-        <p:nvSpPr>
-          <p:cNvPr id="40" name="TextBox 39"/>
-          <p:cNvSpPr txBox="1"/>
-          <p:nvPr/>
-        </p:nvSpPr>
-        <p:spPr>
-          <a:xfrm>
-            <a:off x="7530000" y="2486000"/>
-            <a:ext cx="1260000" cy="280000"/>
-          </a:xfrm>
-          <a:prstGeom prst="rect">
-            <a:avLst/>
-          </a:prstGeom>
-          <a:noFill/>
-        </p:spPr>
-        <p:txBody>
-          <a:bodyPr wrap="square" lIns="0" rIns="0" tIns="0" bIns="0" anchor="ctr">
-            <a:spAutoFit/>
-          </a:bodyPr>
-          <a:lstStyle/>
-          <a:p>
-            <a:pPr algn="l"/>
-            <a:r>
-              <a:rPr sz="900" b="0">
-                <a:solidFill>
-                  <a:srgbClr val="8A95A3"/>
-                </a:solidFill>
-                <a:latin typeface="Inter"/>
-              </a:rPr>
-              <a:t>наличие POSM</a:t>
-            </a:r>
-          </a:p>
-        </p:txBody>
-      </p:sp>
-      <p:sp>
-        <p:nvSpPr>
-          <p:cNvPr id="41" name="Rounded Rectangle 40"/>
-          <p:cNvSpPr/>
-          <p:nvPr/>
-        </p:nvSpPr>
-        <p:spPr>
-          <a:xfrm>
-            <a:off x="180000" y="2976000"/>
-            <a:ext cx="4320000" cy="1800000"/>
-          </a:xfrm>
-          <a:prstGeom prst="roundRect">
-            <a:avLst>
-              <a:gd name="adj" fmla="val 3000"/>
-            </a:avLst>
-          </a:prstGeom>
-          <a:solidFill>
-            <a:srgbClr val="FFFFFF"/>
-          </a:solidFill>
-          <a:ln w="6350">
-            <a:solidFill>
-              <a:srgbClr val="D9D2C2"/>
-            </a:solidFill>
-          </a:ln>
-          <a:effectLst/>
-        </p:spPr>
-        <p:style>
-          <a:lnRef idx="1">
-            <a:schemeClr val="accent1"/>
-          </a:lnRef>
-          <a:fillRef idx="3">
-            <a:schemeClr val="accent1"/>
-          </a:fillRef>
-          <a:effectRef idx="2">
-            <a:schemeClr val="accent1"/>
-          </a:effectRef>
-          <a:fontRef idx="minor">
-            <a:schemeClr val="lt1"/>
-          </a:fontRef>
-        </p:style>
-        <p:txBody>
-          <a:bodyPr rtlCol="0" anchor="ctr"/>
-          <a:lstStyle/>
-          <a:p>
-            <a:pPr algn="ctr"/>
-          </a:p>
-        </p:txBody>
-      </p:sp>
-      <p:sp>
-        <p:nvSpPr>
-          <p:cNvPr id="42" name="Rounded Rectangle 41"/>
-          <p:cNvSpPr/>
-          <p:nvPr/>
-        </p:nvSpPr>
-        <p:spPr>
-          <a:xfrm>
-            <a:off x="180000" y="2976000"/>
-            <a:ext cx="1100000" cy="1800000"/>
-          </a:xfrm>
-          <a:prstGeom prst="roundRect">
-            <a:avLst>
-              <a:gd name="adj" fmla="val 3000"/>
-            </a:avLst>
-          </a:prstGeom>
-          <a:solidFill>
-            <a:srgbClr val="F5F2EC"/>
-          </a:solidFill>
-          <a:ln>
-            <a:noFill/>
-          </a:ln>
-          <a:effectLst/>
-        </p:spPr>
-        <p:style>
-          <a:lnRef idx="1">
-            <a:schemeClr val="accent1"/>
-          </a:lnRef>
-          <a:fillRef idx="3">
-            <a:schemeClr val="accent1"/>
-          </a:fillRef>
-          <a:effectRef idx="2">
-            <a:schemeClr val="accent1"/>
-          </a:effectRef>
-          <a:fontRef idx="minor">
-            <a:schemeClr val="lt1"/>
-          </a:fontRef>
-        </p:style>
-        <p:txBody>
-          <a:bodyPr rtlCol="0" anchor="ctr"/>
-          <a:lstStyle/>
-          <a:p>
-            <a:pPr algn="ctr"/>
-          </a:p>
-        </p:txBody>
-      </p:sp>
-      <p:sp>
-        <p:nvSpPr>
-          <p:cNvPr id="43" name="Rectangle 42"/>
-          <p:cNvSpPr/>
-          <p:nvPr/>
-        </p:nvSpPr>
-        <p:spPr>
-          <a:xfrm>
-            <a:off x="180000" y="2976000"/>
-            <a:ext cx="40000" cy="1800000"/>
-          </a:xfrm>
-          <a:prstGeom prst="rect">
-            <a:avLst/>
-          </a:prstGeom>
-          <a:solidFill>
-            <a:srgbClr val="6B8FA8"/>
-          </a:solidFill>
-          <a:ln>
-            <a:noFill/>
-          </a:ln>
-          <a:effectLst/>
-        </p:spPr>
-        <p:style>
-          <a:lnRef idx="1">
-            <a:schemeClr val="accent1"/>
-          </a:lnRef>
-          <a:fillRef idx="3">
-            <a:schemeClr val="accent1"/>
-          </a:fillRef>
-          <a:effectRef idx="2">
-            <a:schemeClr val="accent1"/>
-          </a:effectRef>
-          <a:fontRef idx="minor">
-            <a:schemeClr val="lt1"/>
-          </a:fontRef>
-        </p:style>
-        <p:txBody>
-          <a:bodyPr rtlCol="0" anchor="ctr"/>
-          <a:lstStyle/>
-          <a:p>
-            <a:pPr algn="ctr"/>
-          </a:p>
-        </p:txBody>
-      </p:sp>
-      <p:sp>
-        <p:nvSpPr>
-          <p:cNvPr id="44" name="TextBox 43"/>
-          <p:cNvSpPr txBox="1"/>
-          <p:nvPr/>
-        </p:nvSpPr>
-        <p:spPr>
-          <a:xfrm>
-            <a:off x="180000" y="3256000"/>
-            <a:ext cx="1100000" cy="700000"/>
-          </a:xfrm>
-          <a:prstGeom prst="rect">
-            <a:avLst/>
-          </a:prstGeom>
-          <a:noFill/>
-        </p:spPr>
-        <p:txBody>
-          <a:bodyPr wrap="square" lIns="0" rIns="0" tIns="0" bIns="0" anchor="ctr">
-            <a:spAutoFit/>
-          </a:bodyPr>
-          <a:lstStyle/>
-          <a:p>
-            <a:pPr algn="ctr"/>
-            <a:r>
-              <a:rPr sz="3600" b="1">
-                <a:solidFill>
-                  <a:srgbClr val="6B8FA8"/>
-                </a:solidFill>
-                <a:latin typeface="Roboto Mono"/>
-              </a:rPr>
-              <a:t>03</a:t>
-            </a:r>
-          </a:p>
-        </p:txBody>
-      </p:sp>
-      <p:sp>
-        <p:nvSpPr>
-          <p:cNvPr id="45" name="TextBox 44"/>
-          <p:cNvSpPr txBox="1"/>
-          <p:nvPr/>
-        </p:nvSpPr>
-        <p:spPr>
-          <a:xfrm>
-            <a:off x="180000" y="3976000"/>
-            <a:ext cx="1100000" cy="280000"/>
-          </a:xfrm>
-          <a:prstGeom prst="rect">
-            <a:avLst/>
-          </a:prstGeom>
-          <a:noFill/>
-        </p:spPr>
-        <p:txBody>
-          <a:bodyPr wrap="square" lIns="0" rIns="0" tIns="0" bIns="0" anchor="t">
-            <a:spAutoFit/>
-          </a:bodyPr>
-          <a:lstStyle/>
-          <a:p>
-            <a:pPr algn="ctr"/>
-            <a:r>
-              <a:rPr sz="900" b="1">
-                <a:solidFill>
-                  <a:srgbClr val="8A95A3"/>
-                </a:solidFill>
-                <a:latin typeface="Roboto Mono"/>
-              </a:rPr>
-              <a:t>30 — 90 дней</a:t>
-            </a:r>
-          </a:p>
-        </p:txBody>
-      </p:sp>
-      <p:sp>
-        <p:nvSpPr>
-          <p:cNvPr id="46" name="TextBox 45"/>
-          <p:cNvSpPr txBox="1"/>
-          <p:nvPr/>
-        </p:nvSpPr>
-        <p:spPr>
-          <a:xfrm>
-            <a:off x="180000" y="4276000"/>
-            <a:ext cx="1100000" cy="280000"/>
-          </a:xfrm>
-          <a:prstGeom prst="rect">
-            <a:avLst/>
-          </a:prstGeom>
-          <a:noFill/>
-        </p:spPr>
-        <p:txBody>
-          <a:bodyPr wrap="square" lIns="0" rIns="0" tIns="0" bIns="0" anchor="t">
-            <a:spAutoFit/>
-          </a:bodyPr>
-          <a:lstStyle/>
-          <a:p>
-            <a:pPr algn="ctr"/>
-            <a:r>
-              <a:rPr sz="800" b="1" spc="200">
-                <a:solidFill>
-                  <a:srgbClr val="6B8FA8"/>
-                </a:solidFill>
-                <a:latin typeface="Inter"/>
-              </a:rPr>
-              <a:t>ФАЗА 03</a:t>
-            </a:r>
-          </a:p>
-        </p:txBody>
-      </p:sp>
-      <p:sp>
-        <p:nvSpPr>
-          <p:cNvPr id="47" name="TextBox 46"/>
-          <p:cNvSpPr txBox="1"/>
-          <p:nvPr/>
-        </p:nvSpPr>
-        <p:spPr>
-          <a:xfrm>
-            <a:off x="1460000" y="3156000"/>
-            <a:ext cx="2860000" cy="280000"/>
-          </a:xfrm>
-          <a:prstGeom prst="rect">
-            <a:avLst/>
-          </a:prstGeom>
-          <a:noFill/>
-        </p:spPr>
-        <p:txBody>
-          <a:bodyPr wrap="square" lIns="0" rIns="0" tIns="0" bIns="0" anchor="t">
-            <a:spAutoFit/>
-          </a:bodyPr>
-          <a:lstStyle/>
-          <a:p>
-            <a:pPr algn="l"/>
-            <a:r>
-              <a:rPr sz="1200" b="1" spc="100">
-                <a:solidFill>
-                  <a:srgbClr val="2F3A48"/>
-                </a:solidFill>
-                <a:latin typeface="Inter"/>
-              </a:rPr>
-              <a:t>СОПРОВОЖДЕНИЕ</a:t>
-            </a:r>
-          </a:p>
-        </p:txBody>
-      </p:sp>
-      <p:sp>
-        <p:nvSpPr>
-          <p:cNvPr id="48" name="TextBox 47"/>
-          <p:cNvSpPr txBox="1"/>
-          <p:nvPr/>
-        </p:nvSpPr>
-        <p:spPr>
-          <a:xfrm>
-            <a:off x="1460000" y="3516000"/>
-            <a:ext cx="80000" cy="220000"/>
-          </a:xfrm>
-          <a:prstGeom prst="rect">
-            <a:avLst/>
-          </a:prstGeom>
-          <a:noFill/>
-        </p:spPr>
-        <p:txBody>
-          <a:bodyPr wrap="square" lIns="0" rIns="0" tIns="0" bIns="0" anchor="t">
-            <a:spAutoFit/>
-          </a:bodyPr>
-          <a:lstStyle/>
-          <a:p>
-            <a:pPr algn="l"/>
-            <a:r>
-              <a:rPr sz="1400" b="1">
-                <a:solidFill>
-                  <a:srgbClr val="6B8FA8"/>
-                </a:solidFill>
-                <a:latin typeface="Inter"/>
-              </a:rPr>
-              <a:t>·</a:t>
-            </a:r>
-          </a:p>
-        </p:txBody>
-      </p:sp>
-      <p:sp>
-        <p:nvSpPr>
-          <p:cNvPr id="49" name="TextBox 48"/>
-          <p:cNvSpPr txBox="1"/>
-          <p:nvPr/>
-        </p:nvSpPr>
-        <p:spPr>
-          <a:xfrm>
-            <a:off x="1560000" y="3536000"/>
-            <a:ext cx="2760000" cy="220000"/>
-          </a:xfrm>
-          <a:prstGeom prst="rect">
-            <a:avLst/>
-          </a:prstGeom>
-          <a:noFill/>
-        </p:spPr>
-        <p:txBody>
-          <a:bodyPr wrap="square" lIns="0" rIns="0" tIns="0" bIns="0" anchor="t">
-            <a:spAutoFit/>
-          </a:bodyPr>
-          <a:lstStyle/>
-          <a:p>
-            <a:pPr algn="l"/>
-            <a:r>
-              <a:rPr sz="950" b="0">
-                <a:solidFill>
-                  <a:srgbClr val="2F3A48"/>
-                </a:solidFill>
-                <a:latin typeface="Inter"/>
-              </a:rPr>
-              <a:t>Промоакции и мастер-классы</a:t>
-            </a:r>
-          </a:p>
-        </p:txBody>
-      </p:sp>
-      <p:sp>
-        <p:nvSpPr>
-          <p:cNvPr id="50" name="TextBox 49"/>
-          <p:cNvSpPr txBox="1"/>
-          <p:nvPr/>
-        </p:nvSpPr>
-        <p:spPr>
-          <a:xfrm>
-            <a:off x="1460000" y="3776000"/>
-            <a:ext cx="80000" cy="220000"/>
-          </a:xfrm>
-          <a:prstGeom prst="rect">
-            <a:avLst/>
-          </a:prstGeom>
-          <a:noFill/>
-        </p:spPr>
-        <p:txBody>
-          <a:bodyPr wrap="square" lIns="0" rIns="0" tIns="0" bIns="0" anchor="t">
-            <a:spAutoFit/>
-          </a:bodyPr>
-          <a:lstStyle/>
-          <a:p>
-            <a:pPr algn="l"/>
-            <a:r>
-              <a:rPr sz="1400" b="1">
-                <a:solidFill>
-                  <a:srgbClr val="6B8FA8"/>
-                </a:solidFill>
-                <a:latin typeface="Inter"/>
-              </a:rPr>
-              <a:t>·</a:t>
-            </a:r>
-          </a:p>
-        </p:txBody>
-      </p:sp>
-      <p:sp>
-        <p:nvSpPr>
-          <p:cNvPr id="51" name="TextBox 50"/>
-          <p:cNvSpPr txBox="1"/>
-          <p:nvPr/>
-        </p:nvSpPr>
-        <p:spPr>
-          <a:xfrm>
-            <a:off x="1560000" y="3796000"/>
-            <a:ext cx="2760000" cy="220000"/>
-          </a:xfrm>
-          <a:prstGeom prst="rect">
-            <a:avLst/>
-          </a:prstGeom>
-          <a:noFill/>
-        </p:spPr>
-        <p:txBody>
-          <a:bodyPr wrap="square" lIns="0" rIns="0" tIns="0" bIns="0" anchor="t">
-            <a:spAutoFit/>
-          </a:bodyPr>
-          <a:lstStyle/>
-          <a:p>
-            <a:pPr algn="l"/>
-            <a:r>
-              <a:rPr sz="950" b="0">
-                <a:solidFill>
-                  <a:srgbClr val="2F3A48"/>
-                </a:solidFill>
-                <a:latin typeface="Inter"/>
-              </a:rPr>
-              <a:t>Куратор на каждую точку</a:t>
-            </a:r>
-          </a:p>
-        </p:txBody>
-      </p:sp>
-      <p:sp>
-        <p:nvSpPr>
-          <p:cNvPr id="52" name="TextBox 51"/>
-          <p:cNvSpPr txBox="1"/>
-          <p:nvPr/>
-        </p:nvSpPr>
-        <p:spPr>
-          <a:xfrm>
-            <a:off x="1460000" y="4036000"/>
-            <a:ext cx="80000" cy="220000"/>
-          </a:xfrm>
-          <a:prstGeom prst="rect">
-            <a:avLst/>
-          </a:prstGeom>
-          <a:noFill/>
-        </p:spPr>
-        <p:txBody>
-          <a:bodyPr wrap="square" lIns="0" rIns="0" tIns="0" bIns="0" anchor="t">
-            <a:spAutoFit/>
-          </a:bodyPr>
-          <a:lstStyle/>
-          <a:p>
-            <a:pPr algn="l"/>
-            <a:r>
-              <a:rPr sz="1400" b="1">
-                <a:solidFill>
-                  <a:srgbClr val="6B8FA8"/>
-                </a:solidFill>
-                <a:latin typeface="Inter"/>
-              </a:rPr>
-              <a:t>·</a:t>
-            </a:r>
-          </a:p>
-        </p:txBody>
-      </p:sp>
-      <p:sp>
-        <p:nvSpPr>
-          <p:cNvPr id="53" name="TextBox 52"/>
-          <p:cNvSpPr txBox="1"/>
-          <p:nvPr/>
-        </p:nvSpPr>
-        <p:spPr>
-          <a:xfrm>
-            <a:off x="1560000" y="4056000"/>
-            <a:ext cx="2760000" cy="220000"/>
-          </a:xfrm>
-          <a:prstGeom prst="rect">
-            <a:avLst/>
-          </a:prstGeom>
-          <a:noFill/>
-        </p:spPr>
-        <p:txBody>
-          <a:bodyPr wrap="square" lIns="0" rIns="0" tIns="0" bIns="0" anchor="t">
-            <a:spAutoFit/>
-          </a:bodyPr>
-          <a:lstStyle/>
-          <a:p>
-            <a:pPr algn="l"/>
-            <a:r>
-              <a:rPr sz="950" b="0">
-                <a:solidFill>
-                  <a:srgbClr val="2F3A48"/>
-                </a:solidFill>
-                <a:latin typeface="Inter"/>
-              </a:rPr>
-              <a:t>Аналитика продаж по неделе</a:t>
-            </a:r>
-          </a:p>
-        </p:txBody>
-      </p:sp>
-      <p:sp>
-        <p:nvSpPr>
-          <p:cNvPr id="54" name="Rectangle 53"/>
-          <p:cNvSpPr/>
-          <p:nvPr/>
-        </p:nvSpPr>
-        <p:spPr>
-          <a:xfrm>
-            <a:off x="1460000" y="4216000"/>
-            <a:ext cx="2860000" cy="20000"/>
-          </a:xfrm>
-          <a:prstGeom prst="rect">
-            <a:avLst/>
-          </a:prstGeom>
-          <a:solidFill>
-            <a:srgbClr val="EFE9DD"/>
-          </a:solidFill>
-          <a:ln>
-            <a:noFill/>
-          </a:ln>
-          <a:effectLst/>
-        </p:spPr>
-        <p:style>
-          <a:lnRef idx="1">
-            <a:schemeClr val="accent1"/>
-          </a:lnRef>
-          <a:fillRef idx="3">
-            <a:schemeClr val="accent1"/>
-          </a:fillRef>
-          <a:effectRef idx="2">
-            <a:schemeClr val="accent1"/>
-          </a:effectRef>
-          <a:fontRef idx="minor">
-            <a:schemeClr val="lt1"/>
-          </a:fontRef>
-        </p:style>
-        <p:txBody>
-          <a:bodyPr rtlCol="0" anchor="ctr"/>
-          <a:lstStyle/>
-          <a:p>
-            <a:pPr algn="ctr"/>
-          </a:p>
-        </p:txBody>
-      </p:sp>
-      <p:sp>
-        <p:nvSpPr>
-          <p:cNvPr id="55" name="TextBox 54"/>
-          <p:cNvSpPr txBox="1"/>
-          <p:nvPr/>
-        </p:nvSpPr>
-        <p:spPr>
-          <a:xfrm>
-            <a:off x="1460000" y="4256000"/>
-            <a:ext cx="1500000" cy="180000"/>
-          </a:xfrm>
-          <a:prstGeom prst="rect">
-            <a:avLst/>
-          </a:prstGeom>
-          <a:noFill/>
-        </p:spPr>
-        <p:txBody>
-          <a:bodyPr wrap="square" lIns="0" rIns="0" tIns="0" bIns="0" anchor="t">
-            <a:spAutoFit/>
-          </a:bodyPr>
-          <a:lstStyle/>
-          <a:p>
-            <a:pPr algn="l"/>
-            <a:r>
-              <a:rPr sz="800" b="1" spc="100">
-                <a:solidFill>
-                  <a:srgbClr val="8A95A3"/>
-                </a:solidFill>
-                <a:latin typeface="Inter"/>
-              </a:rPr>
-              <a:t>KPI фазы</a:t>
-            </a:r>
-          </a:p>
-        </p:txBody>
-      </p:sp>
-      <p:sp>
-        <p:nvSpPr>
-          <p:cNvPr id="56" name="TextBox 55"/>
-          <p:cNvSpPr txBox="1"/>
-          <p:nvPr/>
-        </p:nvSpPr>
-        <p:spPr>
-          <a:xfrm>
-            <a:off x="1460000" y="4436000"/>
-            <a:ext cx="1500000" cy="280000"/>
-          </a:xfrm>
-          <a:prstGeom prst="rect">
-            <a:avLst/>
-          </a:prstGeom>
-          <a:noFill/>
-        </p:spPr>
-        <p:txBody>
-          <a:bodyPr wrap="square" lIns="0" rIns="0" tIns="0" bIns="0" anchor="t">
-            <a:spAutoFit/>
-          </a:bodyPr>
-          <a:lstStyle/>
-          <a:p>
-            <a:pPr algn="l"/>
-            <a:r>
-              <a:rPr sz="1400" b="1">
-                <a:solidFill>
-                  <a:srgbClr val="6B8FA8"/>
-                </a:solidFill>
-                <a:latin typeface="Roboto Mono"/>
-              </a:rPr>
-              <a:t>350 ТП</a:t>
-            </a:r>
-          </a:p>
-        </p:txBody>
-      </p:sp>
-      <p:sp>
-        <p:nvSpPr>
-          <p:cNvPr id="57" name="TextBox 56"/>
-          <p:cNvSpPr txBox="1"/>
-          <p:nvPr/>
-        </p:nvSpPr>
-        <p:spPr>
-          <a:xfrm>
-            <a:off x="3060000" y="4436000"/>
-            <a:ext cx="1260000" cy="280000"/>
-          </a:xfrm>
-          <a:prstGeom prst="rect">
-            <a:avLst/>
-          </a:prstGeom>
-          <a:noFill/>
-        </p:spPr>
-        <p:txBody>
-          <a:bodyPr wrap="square" lIns="0" rIns="0" tIns="0" bIns="0" anchor="ctr">
-            <a:spAutoFit/>
-          </a:bodyPr>
-          <a:lstStyle/>
-          <a:p>
-            <a:pPr algn="l"/>
-            <a:r>
-              <a:rPr sz="900" b="0">
-                <a:solidFill>
-                  <a:srgbClr val="8A95A3"/>
-                </a:solidFill>
-                <a:latin typeface="Inter"/>
-              </a:rPr>
-              <a:t>обучено в 1-й мес.</a:t>
-            </a:r>
-          </a:p>
-        </p:txBody>
-      </p:sp>
-      <p:sp>
-        <p:nvSpPr>
-          <p:cNvPr id="58" name="Rounded Rectangle 57"/>
-          <p:cNvSpPr/>
-          <p:nvPr/>
-        </p:nvSpPr>
-        <p:spPr>
-          <a:xfrm>
-            <a:off x="4650000" y="2976000"/>
-            <a:ext cx="4320000" cy="1800000"/>
-          </a:xfrm>
-          <a:prstGeom prst="roundRect">
-            <a:avLst>
-              <a:gd name="adj" fmla="val 3000"/>
-            </a:avLst>
-          </a:prstGeom>
-          <a:solidFill>
-            <a:srgbClr val="FFFFFF"/>
-          </a:solidFill>
-          <a:ln w="6350">
-            <a:solidFill>
-              <a:srgbClr val="D9D2C2"/>
-            </a:solidFill>
-          </a:ln>
-          <a:effectLst/>
-        </p:spPr>
-        <p:style>
-          <a:lnRef idx="1">
-            <a:schemeClr val="accent1"/>
-          </a:lnRef>
-          <a:fillRef idx="3">
-            <a:schemeClr val="accent1"/>
-          </a:fillRef>
-          <a:effectRef idx="2">
-            <a:schemeClr val="accent1"/>
-          </a:effectRef>
-          <a:fontRef idx="minor">
-            <a:schemeClr val="lt1"/>
-          </a:fontRef>
-        </p:style>
-        <p:txBody>
-          <a:bodyPr rtlCol="0" anchor="ctr"/>
-          <a:lstStyle/>
-          <a:p>
-            <a:pPr algn="ctr"/>
-          </a:p>
-        </p:txBody>
-      </p:sp>
-      <p:sp>
-        <p:nvSpPr>
-          <p:cNvPr id="59" name="Rounded Rectangle 58"/>
-          <p:cNvSpPr/>
-          <p:nvPr/>
-        </p:nvSpPr>
-        <p:spPr>
-          <a:xfrm>
-            <a:off x="4650000" y="2976000"/>
-            <a:ext cx="1100000" cy="1800000"/>
-          </a:xfrm>
-          <a:prstGeom prst="roundRect">
-            <a:avLst>
-              <a:gd name="adj" fmla="val 3000"/>
-            </a:avLst>
-          </a:prstGeom>
-          <a:solidFill>
-            <a:srgbClr val="F5F2EC"/>
-          </a:solidFill>
-          <a:ln>
-            <a:noFill/>
-          </a:ln>
-          <a:effectLst/>
-        </p:spPr>
-        <p:style>
-          <a:lnRef idx="1">
-            <a:schemeClr val="accent1"/>
-          </a:lnRef>
-          <a:fillRef idx="3">
-            <a:schemeClr val="accent1"/>
-          </a:fillRef>
-          <a:effectRef idx="2">
-            <a:schemeClr val="accent1"/>
-          </a:effectRef>
-          <a:fontRef idx="minor">
-            <a:schemeClr val="lt1"/>
-          </a:fontRef>
-        </p:style>
-        <p:txBody>
-          <a:bodyPr rtlCol="0" anchor="ctr"/>
-          <a:lstStyle/>
-          <a:p>
-            <a:pPr algn="ctr"/>
-          </a:p>
-        </p:txBody>
-      </p:sp>
-      <p:sp>
-        <p:nvSpPr>
-          <p:cNvPr id="60" name="Rectangle 59"/>
-          <p:cNvSpPr/>
-          <p:nvPr/>
-        </p:nvSpPr>
-        <p:spPr>
-          <a:xfrm>
-            <a:off x="4650000" y="2976000"/>
-            <a:ext cx="40000" cy="1800000"/>
-          </a:xfrm>
-          <a:prstGeom prst="rect">
-            <a:avLst/>
-          </a:prstGeom>
-          <a:solidFill>
-            <a:srgbClr val="8BAA8A"/>
-          </a:solidFill>
-          <a:ln>
-            <a:noFill/>
-          </a:ln>
-          <a:effectLst/>
-        </p:spPr>
-        <p:style>
-          <a:lnRef idx="1">
-            <a:schemeClr val="accent1"/>
-          </a:lnRef>
-          <a:fillRef idx="3">
-            <a:schemeClr val="accent1"/>
-          </a:fillRef>
-          <a:effectRef idx="2">
-            <a:schemeClr val="accent1"/>
-          </a:effectRef>
-          <a:fontRef idx="minor">
-            <a:schemeClr val="lt1"/>
-          </a:fontRef>
-        </p:style>
-        <p:txBody>
-          <a:bodyPr rtlCol="0" anchor="ctr"/>
-          <a:lstStyle/>
-          <a:p>
-            <a:pPr algn="ctr"/>
-          </a:p>
-        </p:txBody>
-      </p:sp>
-      <p:sp>
-        <p:nvSpPr>
-          <p:cNvPr id="61" name="TextBox 60"/>
-          <p:cNvSpPr txBox="1"/>
-          <p:nvPr/>
-        </p:nvSpPr>
-        <p:spPr>
-          <a:xfrm>
-            <a:off x="4650000" y="3256000"/>
-            <a:ext cx="1100000" cy="700000"/>
-          </a:xfrm>
-          <a:prstGeom prst="rect">
-            <a:avLst/>
-          </a:prstGeom>
-          <a:noFill/>
-        </p:spPr>
-        <p:txBody>
-          <a:bodyPr wrap="square" lIns="0" rIns="0" tIns="0" bIns="0" anchor="ctr">
-            <a:spAutoFit/>
-          </a:bodyPr>
-          <a:lstStyle/>
-          <a:p>
-            <a:pPr algn="ctr"/>
-            <a:r>
-              <a:rPr sz="3600" b="1">
-                <a:solidFill>
-                  <a:srgbClr val="8BAA8A"/>
-                </a:solidFill>
-                <a:latin typeface="Roboto Mono"/>
-              </a:rPr>
-              <a:t>04</a:t>
-            </a:r>
-          </a:p>
-        </p:txBody>
-      </p:sp>
-      <p:sp>
-        <p:nvSpPr>
-          <p:cNvPr id="62" name="TextBox 61"/>
-          <p:cNvSpPr txBox="1"/>
-          <p:nvPr/>
-        </p:nvSpPr>
-        <p:spPr>
-          <a:xfrm>
-            <a:off x="4650000" y="3976000"/>
-            <a:ext cx="1100000" cy="280000"/>
-          </a:xfrm>
-          <a:prstGeom prst="rect">
-            <a:avLst/>
-          </a:prstGeom>
-          <a:noFill/>
-        </p:spPr>
-        <p:txBody>
-          <a:bodyPr wrap="square" lIns="0" rIns="0" tIns="0" bIns="0" anchor="t">
-            <a:spAutoFit/>
-          </a:bodyPr>
-          <a:lstStyle/>
-          <a:p>
-            <a:pPr algn="ctr"/>
-            <a:r>
-              <a:rPr sz="900" b="1">
-                <a:solidFill>
-                  <a:srgbClr val="8A95A3"/>
-                </a:solidFill>
-                <a:latin typeface="Roboto Mono"/>
-              </a:rPr>
-              <a:t>90 — 180 дней</a:t>
-            </a:r>
-          </a:p>
-        </p:txBody>
-      </p:sp>
-      <p:sp>
-        <p:nvSpPr>
-          <p:cNvPr id="63" name="TextBox 62"/>
-          <p:cNvSpPr txBox="1"/>
-          <p:nvPr/>
-        </p:nvSpPr>
-        <p:spPr>
-          <a:xfrm>
-            <a:off x="4650000" y="4276000"/>
-            <a:ext cx="1100000" cy="280000"/>
-          </a:xfrm>
-          <a:prstGeom prst="rect">
-            <a:avLst/>
-          </a:prstGeom>
-          <a:noFill/>
-        </p:spPr>
-        <p:txBody>
-          <a:bodyPr wrap="square" lIns="0" rIns="0" tIns="0" bIns="0" anchor="t">
-            <a:spAutoFit/>
-          </a:bodyPr>
-          <a:lstStyle/>
-          <a:p>
-            <a:pPr algn="ctr"/>
-            <a:r>
-              <a:rPr sz="800" b="1" spc="200">
-                <a:solidFill>
-                  <a:srgbClr val="8BAA8A"/>
-                </a:solidFill>
-                <a:latin typeface="Inter"/>
-              </a:rPr>
-              <a:t>ФАЗА 04</a:t>
-            </a:r>
-          </a:p>
-        </p:txBody>
-      </p:sp>
-      <p:sp>
-        <p:nvSpPr>
-          <p:cNvPr id="64" name="TextBox 63"/>
-          <p:cNvSpPr txBox="1"/>
-          <p:nvPr/>
-        </p:nvSpPr>
-        <p:spPr>
-          <a:xfrm>
-            <a:off x="5930000" y="3156000"/>
-            <a:ext cx="2860000" cy="280000"/>
-          </a:xfrm>
-          <a:prstGeom prst="rect">
-            <a:avLst/>
-          </a:prstGeom>
-          <a:noFill/>
-        </p:spPr>
-        <p:txBody>
-          <a:bodyPr wrap="square" lIns="0" rIns="0" tIns="0" bIns="0" anchor="t">
-            <a:spAutoFit/>
-          </a:bodyPr>
-          <a:lstStyle/>
-          <a:p>
-            <a:pPr algn="l"/>
-            <a:r>
-              <a:rPr sz="1200" b="1" spc="100">
-                <a:solidFill>
-                  <a:srgbClr val="2F3A48"/>
-                </a:solidFill>
-                <a:latin typeface="Inter"/>
-              </a:rPr>
-              <a:t>ОЦЕНКА</a:t>
-            </a:r>
-          </a:p>
-        </p:txBody>
-      </p:sp>
-      <p:sp>
-        <p:nvSpPr>
-          <p:cNvPr id="65" name="TextBox 64"/>
-          <p:cNvSpPr txBox="1"/>
-          <p:nvPr/>
-        </p:nvSpPr>
-        <p:spPr>
-          <a:xfrm>
-            <a:off x="5930000" y="3516000"/>
-            <a:ext cx="80000" cy="220000"/>
-          </a:xfrm>
-          <a:prstGeom prst="rect">
-            <a:avLst/>
-          </a:prstGeom>
-          <a:noFill/>
-        </p:spPr>
-        <p:txBody>
-          <a:bodyPr wrap="square" lIns="0" rIns="0" tIns="0" bIns="0" anchor="t">
-            <a:spAutoFit/>
-          </a:bodyPr>
-          <a:lstStyle/>
-          <a:p>
-            <a:pPr algn="l"/>
-            <a:r>
-              <a:rPr sz="1400" b="1">
-                <a:solidFill>
-                  <a:srgbClr val="8BAA8A"/>
-                </a:solidFill>
-                <a:latin typeface="Inter"/>
-              </a:rPr>
-              <a:t>·</a:t>
-            </a:r>
-          </a:p>
-        </p:txBody>
-      </p:sp>
-      <p:sp>
-        <p:nvSpPr>
-          <p:cNvPr id="66" name="TextBox 65"/>
-          <p:cNvSpPr txBox="1"/>
-          <p:nvPr/>
-        </p:nvSpPr>
-        <p:spPr>
-          <a:xfrm>
-            <a:off x="6030000" y="3536000"/>
-            <a:ext cx="2760000" cy="220000"/>
-          </a:xfrm>
-          <a:prstGeom prst="rect">
-            <a:avLst/>
-          </a:prstGeom>
-          <a:noFill/>
-        </p:spPr>
-        <p:txBody>
-          <a:bodyPr wrap="square" lIns="0" rIns="0" tIns="0" bIns="0" anchor="t">
-            <a:spAutoFit/>
-          </a:bodyPr>
-          <a:lstStyle/>
-          <a:p>
-            <a:pPr algn="l"/>
-            <a:r>
-              <a:rPr sz="950" b="0">
-                <a:solidFill>
-                  <a:srgbClr val="2F3A48"/>
-                </a:solidFill>
-                <a:latin typeface="Inter"/>
-              </a:rPr>
-              <a:t>Анализ KPI по фазам 1-3</a:t>
-            </a:r>
-          </a:p>
-        </p:txBody>
-      </p:sp>
-      <p:sp>
-        <p:nvSpPr>
-          <p:cNvPr id="67" name="TextBox 66"/>
-          <p:cNvSpPr txBox="1"/>
-          <p:nvPr/>
-        </p:nvSpPr>
-        <p:spPr>
-          <a:xfrm>
-            <a:off x="5930000" y="3776000"/>
-            <a:ext cx="80000" cy="220000"/>
-          </a:xfrm>
-          <a:prstGeom prst="rect">
-            <a:avLst/>
-          </a:prstGeom>
-          <a:noFill/>
-        </p:spPr>
-        <p:txBody>
-          <a:bodyPr wrap="square" lIns="0" rIns="0" tIns="0" bIns="0" anchor="t">
-            <a:spAutoFit/>
-          </a:bodyPr>
-          <a:lstStyle/>
-          <a:p>
-            <a:pPr algn="l"/>
-            <a:r>
-              <a:rPr sz="1400" b="1">
-                <a:solidFill>
-                  <a:srgbClr val="8BAA8A"/>
-                </a:solidFill>
-                <a:latin typeface="Inter"/>
-              </a:rPr>
-              <a:t>·</a:t>
-            </a:r>
-          </a:p>
-        </p:txBody>
-      </p:sp>
-      <p:sp>
-        <p:nvSpPr>
-          <p:cNvPr id="68" name="TextBox 67"/>
-          <p:cNvSpPr txBox="1"/>
-          <p:nvPr/>
-        </p:nvSpPr>
-        <p:spPr>
-          <a:xfrm>
-            <a:off x="6030000" y="3796000"/>
-            <a:ext cx="2760000" cy="220000"/>
-          </a:xfrm>
-          <a:prstGeom prst="rect">
-            <a:avLst/>
-          </a:prstGeom>
-          <a:noFill/>
-        </p:spPr>
-        <p:txBody>
-          <a:bodyPr wrap="square" lIns="0" rIns="0" tIns="0" bIns="0" anchor="t">
-            <a:spAutoFit/>
-          </a:bodyPr>
-          <a:lstStyle/>
-          <a:p>
-            <a:pPr algn="l"/>
-            <a:r>
-              <a:rPr sz="950" b="0">
-                <a:solidFill>
-                  <a:srgbClr val="2F3A48"/>
-                </a:solidFill>
-                <a:latin typeface="Inter"/>
-              </a:rPr>
-              <a:t>Решение: масштабировать / корректировать</a:t>
-            </a:r>
-          </a:p>
-        </p:txBody>
-      </p:sp>
-      <p:sp>
-        <p:nvSpPr>
-          <p:cNvPr id="69" name="TextBox 68"/>
-          <p:cNvSpPr txBox="1"/>
-          <p:nvPr/>
-        </p:nvSpPr>
-        <p:spPr>
-          <a:xfrm>
-            <a:off x="5930000" y="4036000"/>
-            <a:ext cx="80000" cy="220000"/>
-          </a:xfrm>
-          <a:prstGeom prst="rect">
-            <a:avLst/>
-          </a:prstGeom>
-          <a:noFill/>
-        </p:spPr>
-        <p:txBody>
-          <a:bodyPr wrap="square" lIns="0" rIns="0" tIns="0" bIns="0" anchor="t">
-            <a:spAutoFit/>
-          </a:bodyPr>
-          <a:lstStyle/>
-          <a:p>
-            <a:pPr algn="l"/>
-            <a:r>
-              <a:rPr sz="1400" b="1">
-                <a:solidFill>
-                  <a:srgbClr val="8BAA8A"/>
-                </a:solidFill>
-                <a:latin typeface="Inter"/>
-              </a:rPr>
-              <a:t>·</a:t>
-            </a:r>
-          </a:p>
-        </p:txBody>
-      </p:sp>
-      <p:sp>
-        <p:nvSpPr>
-          <p:cNvPr id="70" name="TextBox 69"/>
-          <p:cNvSpPr txBox="1"/>
-          <p:nvPr/>
-        </p:nvSpPr>
-        <p:spPr>
-          <a:xfrm>
-            <a:off x="6030000" y="4056000"/>
-            <a:ext cx="2760000" cy="220000"/>
-          </a:xfrm>
-          <a:prstGeom prst="rect">
-            <a:avLst/>
-          </a:prstGeom>
-          <a:noFill/>
-        </p:spPr>
-        <p:txBody>
-          <a:bodyPr wrap="square" lIns="0" rIns="0" tIns="0" bIns="0" anchor="t">
-            <a:spAutoFit/>
-          </a:bodyPr>
-          <a:lstStyle/>
-          <a:p>
-            <a:pPr algn="l"/>
-            <a:r>
-              <a:rPr sz="950" b="0">
-                <a:solidFill>
-                  <a:srgbClr val="2F3A48"/>
-                </a:solidFill>
-                <a:latin typeface="Inter"/>
-              </a:rPr>
-              <a:t>Ввод в MML или вывод из ассортимента</a:t>
-            </a:r>
-          </a:p>
-        </p:txBody>
-      </p:sp>
-      <p:sp>
-        <p:nvSpPr>
-          <p:cNvPr id="71" name="Rectangle 70"/>
-          <p:cNvSpPr/>
-          <p:nvPr/>
-        </p:nvSpPr>
-        <p:spPr>
-          <a:xfrm>
-            <a:off x="5930000" y="4216000"/>
-            <a:ext cx="2860000" cy="20000"/>
-          </a:xfrm>
-          <a:prstGeom prst="rect">
-            <a:avLst/>
-          </a:prstGeom>
-          <a:solidFill>
-            <a:srgbClr val="EFE9DD"/>
-          </a:solidFill>
-          <a:ln>
-            <a:noFill/>
-          </a:ln>
-          <a:effectLst/>
-        </p:spPr>
-        <p:style>
-          <a:lnRef idx="1">
-            <a:schemeClr val="accent1"/>
-          </a:lnRef>
-          <a:fillRef idx="3">
-            <a:schemeClr val="accent1"/>
-          </a:fillRef>
-          <a:effectRef idx="2">
-            <a:schemeClr val="accent1"/>
-          </a:effectRef>
-          <a:fontRef idx="minor">
-            <a:schemeClr val="lt1"/>
-          </a:fontRef>
-        </p:style>
-        <p:txBody>
-          <a:bodyPr rtlCol="0" anchor="ctr"/>
-          <a:lstStyle/>
-          <a:p>
-            <a:pPr algn="ctr"/>
-          </a:p>
-        </p:txBody>
-      </p:sp>
-      <p:sp>
-        <p:nvSpPr>
-          <p:cNvPr id="72" name="TextBox 71"/>
-          <p:cNvSpPr txBox="1"/>
-          <p:nvPr/>
-        </p:nvSpPr>
-        <p:spPr>
-          <a:xfrm>
-            <a:off x="5930000" y="4256000"/>
-            <a:ext cx="1500000" cy="180000"/>
-          </a:xfrm>
-          <a:prstGeom prst="rect">
-            <a:avLst/>
-          </a:prstGeom>
-          <a:noFill/>
-        </p:spPr>
-        <p:txBody>
-          <a:bodyPr wrap="square" lIns="0" rIns="0" tIns="0" bIns="0" anchor="t">
-            <a:spAutoFit/>
-          </a:bodyPr>
-          <a:lstStyle/>
-          <a:p>
-            <a:pPr algn="l"/>
-            <a:r>
-              <a:rPr sz="800" b="1" spc="100">
-                <a:solidFill>
-                  <a:srgbClr val="8A95A3"/>
-                </a:solidFill>
-                <a:latin typeface="Inter"/>
-              </a:rPr>
-              <a:t>KPI фазы</a:t>
-            </a:r>
-          </a:p>
-        </p:txBody>
-      </p:sp>
-      <p:sp>
-        <p:nvSpPr>
-          <p:cNvPr id="73" name="TextBox 72"/>
-          <p:cNvSpPr txBox="1"/>
-          <p:nvPr/>
-        </p:nvSpPr>
-        <p:spPr>
-          <a:xfrm>
-            <a:off x="5930000" y="4436000"/>
-            <a:ext cx="1500000" cy="280000"/>
-          </a:xfrm>
-          <a:prstGeom prst="rect">
-            <a:avLst/>
-          </a:prstGeom>
-          <a:noFill/>
-        </p:spPr>
-        <p:txBody>
-          <a:bodyPr wrap="square" lIns="0" rIns="0" tIns="0" bIns="0" anchor="t">
-            <a:spAutoFit/>
-          </a:bodyPr>
-          <a:lstStyle/>
-          <a:p>
-            <a:pPr algn="l"/>
-            <a:r>
-              <a:rPr sz="1400" b="1">
-                <a:solidFill>
-                  <a:srgbClr val="8BAA8A"/>
-                </a:solidFill>
-                <a:latin typeface="Roboto Mono"/>
-              </a:rPr>
-              <a:t>90 дней</a:t>
-            </a:r>
-          </a:p>
-        </p:txBody>
-      </p:sp>
-      <p:sp>
-        <p:nvSpPr>
-          <p:cNvPr id="74" name="TextBox 73"/>
-          <p:cNvSpPr txBox="1"/>
-          <p:nvPr/>
-        </p:nvSpPr>
-        <p:spPr>
-          <a:xfrm>
-            <a:off x="7530000" y="4436000"/>
-            <a:ext cx="1260000" cy="280000"/>
-          </a:xfrm>
-          <a:prstGeom prst="rect">
-            <a:avLst/>
-          </a:prstGeom>
-          <a:noFill/>
-        </p:spPr>
-        <p:txBody>
-          <a:bodyPr wrap="square" lIns="0" rIns="0" tIns="0" bIns="0" anchor="ctr">
-            <a:spAutoFit/>
-          </a:bodyPr>
-          <a:lstStyle/>
-          <a:p>
-            <a:pPr algn="l"/>
-            <a:r>
-              <a:rPr sz="900" b="0">
-                <a:solidFill>
-                  <a:srgbClr val="8A95A3"/>
-                </a:solidFill>
-                <a:latin typeface="Inter"/>
-              </a:rPr>
-              <a:t>период поддержки</a:t>
-            </a:r>
-          </a:p>
-        </p:txBody>
-      </p:sp>
-      <p:sp>
-        <p:nvSpPr>
-          <p:cNvPr id="75" name="Rectangle 74"/>
-          <p:cNvSpPr/>
-          <p:nvPr/>
-        </p:nvSpPr>
-        <p:spPr>
-          <a:xfrm>
-            <a:off x="180000" y="4400000"/>
-            <a:ext cx="8855724" cy="15000"/>
-          </a:xfrm>
-          <a:prstGeom prst="rect">
-            <a:avLst/>
-          </a:prstGeom>
-          <a:solidFill>
-            <a:srgbClr val="EFE9DD"/>
-          </a:solidFill>
-          <a:ln>
-            <a:noFill/>
-          </a:ln>
-          <a:effectLst/>
-        </p:spPr>
-        <p:style>
-          <a:lnRef idx="1">
-            <a:schemeClr val="accent1"/>
-          </a:lnRef>
-          <a:fillRef idx="3">
-            <a:schemeClr val="accent1"/>
-          </a:fillRef>
-          <a:effectRef idx="2">
-            <a:schemeClr val="accent1"/>
-          </a:effectRef>
-          <a:fontRef idx="minor">
-            <a:schemeClr val="lt1"/>
-          </a:fontRef>
-        </p:style>
-        <p:txBody>
-          <a:bodyPr rtlCol="0" anchor="ctr"/>
-          <a:lstStyle/>
-          <a:p>
-            <a:pPr algn="ctr"/>
-          </a:p>
-        </p:txBody>
-      </p:sp>
-      <p:sp>
-        <p:nvSpPr>
-          <p:cNvPr id="76" name="TextBox 75"/>
-          <p:cNvSpPr txBox="1"/>
-          <p:nvPr/>
-        </p:nvSpPr>
-        <p:spPr>
-          <a:xfrm>
-            <a:off x="180000" y="4450000"/>
-            <a:ext cx="8855724" cy="280000"/>
-          </a:xfrm>
-          <a:prstGeom prst="rect">
-            <a:avLst/>
-          </a:prstGeom>
-          <a:noFill/>
-        </p:spPr>
-        <p:txBody>
-          <a:bodyPr wrap="square" lIns="0" rIns="0" tIns="0" bIns="0" anchor="t">
-            <a:spAutoFit/>
-          </a:bodyPr>
-          <a:lstStyle/>
-          <a:p>
-            <a:pPr algn="ctr"/>
-            <a:r>
-              <a:rPr sz="900" b="0">
-                <a:solidFill>
-                  <a:srgbClr val="8A95A3"/>
-                </a:solidFill>
-                <a:latin typeface="Inter"/>
-              </a:rPr>
-              <a:t>Стандарт обязателен для всех новинок Эмпилс. Без прохождения 4 фаз новинка не вводится в MML дистрибьюторов.</a:t>
+              <a:t>Стандарт обязателен для всех новинок. Без прохождения 3 фаз новинка не вводится в MML дистрибьюторов.</a:t>
             </a:r>
           </a:p>
         </p:txBody>

--- a/download/Презентация_для_ГД_final.pptx
+++ b/download/Презентация_для_ГД_final.pptx
@@ -19232,14 +19232,6 @@
 <file path=ppt/slides/slide6.xml><?xml version="1.0" encoding="utf-8"?>
 <p:sld xmlns:a="http://schemas.openxmlformats.org/drawingml/2006/main" xmlns:r="http://schemas.openxmlformats.org/officeDocument/2006/relationships" xmlns:p="http://schemas.openxmlformats.org/presentationml/2006/main">
   <p:cSld>
-    <p:bg>
-      <p:bgPr>
-        <a:solidFill>
-          <a:srgbClr val="F5F2EC"/>
-        </a:solidFill>
-        <a:effectLst/>
-      </p:bgPr>
-    </p:bg>
     <p:spTree>
       <p:nvGrpSpPr>
         <p:cNvPr id="1" name=""/>
@@ -19254,3257 +19246,134 @@
           <a:chExt cx="0" cy="0"/>
         </a:xfrm>
       </p:grpSpPr>
-      <p:sp>
-        <p:nvSpPr>
-          <p:cNvPr id="2" name="TextBox 1"/>
-          <p:cNvSpPr txBox="1"/>
-          <p:nvPr/>
-        </p:nvSpPr>
-        <p:spPr>
-          <a:xfrm>
-            <a:off x="180000" y="180000"/>
-            <a:ext cx="7200000" cy="342000"/>
-          </a:xfrm>
-          <a:prstGeom prst="rect">
-            <a:avLst/>
-          </a:prstGeom>
-          <a:noFill/>
-        </p:spPr>
-        <p:txBody>
-          <a:bodyPr wrap="square" lIns="0" rIns="0" tIns="0" bIns="0" anchor="t">
-            <a:spAutoFit/>
-          </a:bodyPr>
-          <a:lstStyle/>
-          <a:p>
-            <a:pPr algn="l"/>
-            <a:r>
-              <a:rPr sz="2000" b="1">
-                <a:solidFill>
-                  <a:srgbClr val="2F3A48"/>
-                </a:solidFill>
-                <a:latin typeface="Inter"/>
-              </a:rPr>
-              <a:t>Email-рассылка · Касание брендом</a:t>
-            </a:r>
-          </a:p>
-        </p:txBody>
-      </p:sp>
-      <p:sp>
-        <p:nvSpPr>
-          <p:cNvPr id="3" name="TextBox 2"/>
-          <p:cNvSpPr txBox="1"/>
-          <p:nvPr/>
-        </p:nvSpPr>
-        <p:spPr>
-          <a:xfrm>
-            <a:off x="180000" y="558000"/>
-            <a:ext cx="7200000" cy="180000"/>
-          </a:xfrm>
-          <a:prstGeom prst="rect">
-            <a:avLst/>
-          </a:prstGeom>
-          <a:noFill/>
-        </p:spPr>
-        <p:txBody>
-          <a:bodyPr wrap="square" lIns="0" rIns="0" tIns="0" bIns="0" anchor="t">
-            <a:spAutoFit/>
-          </a:bodyPr>
-          <a:lstStyle/>
-          <a:p>
-            <a:pPr algn="l"/>
-            <a:r>
-              <a:rPr sz="1100" b="0">
-                <a:solidFill>
-                  <a:srgbClr val="8A95A3"/>
-                </a:solidFill>
-                <a:latin typeface="Inter"/>
-              </a:rPr>
-              <a:t>Стратегия формирования узнаваемости бренда Эмпилс у потенциальных партнёров</a:t>
-            </a:r>
-          </a:p>
-        </p:txBody>
-      </p:sp>
-      <p:sp>
-        <p:nvSpPr>
-          <p:cNvPr id="4" name="Rounded Rectangle 3"/>
-          <p:cNvSpPr/>
-          <p:nvPr/>
-        </p:nvSpPr>
-        <p:spPr>
-          <a:xfrm>
-            <a:off x="7200000" y="162000"/>
-            <a:ext cx="1800000" cy="280800"/>
-          </a:xfrm>
-          <a:prstGeom prst="roundRect">
-            <a:avLst>
-              <a:gd name="adj" fmla="val 50000"/>
-            </a:avLst>
-          </a:prstGeom>
-          <a:solidFill>
-            <a:srgbClr val="FFFFFF"/>
-          </a:solidFill>
-          <a:ln w="9525">
-            <a:solidFill>
-              <a:srgbClr val="C9A77C"/>
-            </a:solidFill>
-          </a:ln>
-          <a:effectLst/>
-        </p:spPr>
-        <p:style>
-          <a:lnRef idx="1">
-            <a:schemeClr val="accent1"/>
-          </a:lnRef>
-          <a:fillRef idx="3">
-            <a:schemeClr val="accent1"/>
-          </a:fillRef>
-          <a:effectRef idx="2">
-            <a:schemeClr val="accent1"/>
-          </a:effectRef>
-          <a:fontRef idx="minor">
-            <a:schemeClr val="lt1"/>
-          </a:fontRef>
-        </p:style>
-        <p:txBody>
-          <a:bodyPr rtlCol="0" anchor="ctr"/>
-          <a:lstStyle/>
-          <a:p>
-            <a:pPr algn="ctr"/>
-          </a:p>
-        </p:txBody>
-      </p:sp>
-      <p:sp>
-        <p:nvSpPr>
-          <p:cNvPr id="5" name="TextBox 4"/>
-          <p:cNvSpPr txBox="1"/>
-          <p:nvPr/>
-        </p:nvSpPr>
-        <p:spPr>
-          <a:xfrm>
-            <a:off x="7200000" y="208800"/>
-            <a:ext cx="1800000" cy="234000"/>
-          </a:xfrm>
-          <a:prstGeom prst="rect">
-            <a:avLst/>
-          </a:prstGeom>
-          <a:noFill/>
-        </p:spPr>
-        <p:txBody>
-          <a:bodyPr wrap="square" lIns="0" rIns="0" tIns="0" bIns="0" anchor="t">
-            <a:spAutoFit/>
-          </a:bodyPr>
-          <a:lstStyle/>
-          <a:p>
-            <a:pPr algn="ctr"/>
-            <a:r>
-              <a:rPr sz="1000" b="1" spc="150">
-                <a:solidFill>
-                  <a:srgbClr val="C9A77C"/>
-                </a:solidFill>
-                <a:latin typeface="Inter"/>
-              </a:rPr>
-              <a:t>СТРАТЕГИЯ · 2026</a:t>
-            </a:r>
-          </a:p>
-        </p:txBody>
-      </p:sp>
-      <p:sp>
-        <p:nvSpPr>
-          <p:cNvPr id="6" name="Rectangle 5"/>
-          <p:cNvSpPr/>
-          <p:nvPr/>
-        </p:nvSpPr>
-        <p:spPr>
-          <a:xfrm>
-            <a:off x="180000" y="799200"/>
-            <a:ext cx="8820000" cy="28800"/>
-          </a:xfrm>
-          <a:prstGeom prst="rect">
-            <a:avLst/>
-          </a:prstGeom>
-          <a:solidFill>
-            <a:srgbClr val="D9D2C2"/>
-          </a:solidFill>
+      <p:pic>
+        <p:nvPicPr>
+          <p:cNvPr id="1027" name="Picture 3"/>
+          <p:cNvPicPr>
+            <a:picLocks noChangeAspect="1" noChangeArrowheads="1"/>
+          </p:cNvPicPr>
+          <p:nvPr/>
+        </p:nvPicPr>
+        <p:blipFill>
+          <a:blip r:embed="rId2">
+            <a:extLst>
+              <a:ext uri="{28A0092B-C50C-407E-A947-70E740481C1C}">
+                <a14:useLocalDpi xmlns:a14="http://schemas.microsoft.com/office/drawing/2010/main" val="0"/>
+              </a:ext>
+            </a:extLst>
+          </a:blip>
+          <a:srcRect/>
+          <a:stretch>
+            <a:fillRect/>
+          </a:stretch>
+        </p:blipFill>
+        <p:spPr bwMode="auto">
+          <a:xfrm>
+            <a:off x="6014703" y="159902"/>
+            <a:ext cx="2504174" cy="4856301"/>
+          </a:xfrm>
+          <a:prstGeom prst="rect">
+            <a:avLst/>
+          </a:prstGeom>
+          <a:noFill/>
           <a:ln>
             <a:noFill/>
           </a:ln>
           <a:effectLst/>
-        </p:spPr>
-        <p:style>
-          <a:lnRef idx="1">
-            <a:schemeClr val="accent1"/>
-          </a:lnRef>
-          <a:fillRef idx="3">
-            <a:schemeClr val="accent1"/>
-          </a:fillRef>
-          <a:effectRef idx="2">
-            <a:schemeClr val="accent1"/>
-          </a:effectRef>
-          <a:fontRef idx="minor">
-            <a:schemeClr val="lt1"/>
-          </a:fontRef>
-        </p:style>
-        <p:txBody>
-          <a:bodyPr rtlCol="0" anchor="ctr"/>
-          <a:lstStyle/>
-          <a:p>
-            <a:pPr algn="ctr"/>
-          </a:p>
-        </p:txBody>
-      </p:sp>
-      <p:sp>
-        <p:nvSpPr>
-          <p:cNvPr id="7" name="Rounded Rectangle 6"/>
-          <p:cNvSpPr/>
-          <p:nvPr/>
-        </p:nvSpPr>
-        <p:spPr>
-          <a:xfrm>
-            <a:off x="180000" y="961200"/>
-            <a:ext cx="4212000" cy="3859200"/>
-          </a:xfrm>
-          <a:prstGeom prst="roundRect">
-            <a:avLst>
-              <a:gd name="adj" fmla="val 2000"/>
-            </a:avLst>
-          </a:prstGeom>
-          <a:solidFill>
-            <a:srgbClr val="FFFFFF"/>
-          </a:solidFill>
-          <a:ln w="6350">
-            <a:solidFill>
-              <a:srgbClr val="D9D2C2"/>
-            </a:solidFill>
-          </a:ln>
-          <a:effectLst/>
-        </p:spPr>
-        <p:style>
-          <a:lnRef idx="1">
-            <a:schemeClr val="accent1"/>
-          </a:lnRef>
-          <a:fillRef idx="3">
-            <a:schemeClr val="accent1"/>
-          </a:fillRef>
-          <a:effectRef idx="2">
-            <a:schemeClr val="accent1"/>
-          </a:effectRef>
-          <a:fontRef idx="minor">
-            <a:schemeClr val="lt1"/>
-          </a:fontRef>
-        </p:style>
-        <p:txBody>
-          <a:bodyPr rtlCol="0" anchor="ctr"/>
-          <a:lstStyle/>
-          <a:p>
-            <a:pPr algn="ctr"/>
-          </a:p>
-        </p:txBody>
-      </p:sp>
-      <p:sp>
-        <p:nvSpPr>
-          <p:cNvPr id="8" name="TextBox 7"/>
-          <p:cNvSpPr txBox="1"/>
-          <p:nvPr/>
-        </p:nvSpPr>
-        <p:spPr>
-          <a:xfrm>
-            <a:off x="324000" y="1087199"/>
-            <a:ext cx="3924000" cy="162000"/>
-          </a:xfrm>
-          <a:prstGeom prst="rect">
-            <a:avLst/>
-          </a:prstGeom>
-          <a:noFill/>
-        </p:spPr>
-        <p:txBody>
-          <a:bodyPr wrap="square" lIns="0" rIns="0" tIns="0" bIns="0" anchor="t">
-            <a:spAutoFit/>
-          </a:bodyPr>
-          <a:lstStyle/>
-          <a:p>
-            <a:pPr algn="l"/>
-            <a:r>
-              <a:rPr sz="1100" b="1" spc="200">
-                <a:solidFill>
-                  <a:srgbClr val="C00000"/>
-                </a:solidFill>
-                <a:latin typeface="Inter"/>
-              </a:rPr>
-              <a:t>КОНЦЕПЦИЯ «КАСАНИЕ БРЕНДОМ»</a:t>
-            </a:r>
-          </a:p>
-        </p:txBody>
-      </p:sp>
-      <p:sp>
-        <p:nvSpPr>
-          <p:cNvPr id="9" name="TextBox 8"/>
-          <p:cNvSpPr txBox="1"/>
-          <p:nvPr/>
-        </p:nvSpPr>
-        <p:spPr>
-          <a:xfrm>
-            <a:off x="324000" y="1267200"/>
-            <a:ext cx="3924000" cy="125999"/>
-          </a:xfrm>
-          <a:prstGeom prst="rect">
-            <a:avLst/>
-          </a:prstGeom>
-          <a:noFill/>
-        </p:spPr>
-        <p:txBody>
-          <a:bodyPr wrap="square" lIns="0" rIns="0" tIns="0" bIns="0" anchor="t">
-            <a:spAutoFit/>
-          </a:bodyPr>
-          <a:lstStyle/>
-          <a:p>
-            <a:pPr algn="l"/>
-            <a:r>
-              <a:rPr sz="1000" b="0">
-                <a:solidFill>
-                  <a:srgbClr val="8A95A3"/>
-                </a:solidFill>
-                <a:latin typeface="Inter"/>
-              </a:rPr>
-              <a:t>Формирование подсознательной узнаваемости</a:t>
-            </a:r>
-          </a:p>
-        </p:txBody>
-      </p:sp>
-      <p:sp>
-        <p:nvSpPr>
-          <p:cNvPr id="10" name="Rectangle 9"/>
-          <p:cNvSpPr/>
-          <p:nvPr/>
-        </p:nvSpPr>
-        <p:spPr>
-          <a:xfrm>
-            <a:off x="324000" y="1429200"/>
-            <a:ext cx="3924000" cy="21600"/>
-          </a:xfrm>
-          <a:prstGeom prst="rect">
-            <a:avLst/>
-          </a:prstGeom>
-          <a:solidFill>
-            <a:srgbClr val="EFE9DD"/>
-          </a:solidFill>
+          <a:extLst>
+            <a:ext uri="{909E8E84-426E-40DD-AFC4-6F175D3DCCD1}">
+              <a14:hiddenFill xmlns:a14="http://schemas.microsoft.com/office/drawing/2010/main">
+                <a:solidFill>
+                  <a:schemeClr val="accent1"/>
+                </a:solidFill>
+              </a14:hiddenFill>
+            </a:ext>
+            <a:ext uri="{91240B29-F687-4F45-9708-019B960494DF}">
+              <a14:hiddenLine xmlns:a14="http://schemas.microsoft.com/office/drawing/2010/main" w="9525">
+                <a:solidFill>
+                  <a:schemeClr val="tx1"/>
+                </a:solidFill>
+                <a:miter lim="800000"/>
+                <a:headEnd/>
+                <a:tailEnd/>
+              </a14:hiddenLine>
+            </a:ext>
+            <a:ext uri="{AF507438-7753-43E0-B8FC-AC1667EBCBE1}">
+              <a14:hiddenEffects xmlns:a14="http://schemas.microsoft.com/office/drawing/2010/main">
+                <a:effectLst>
+                  <a:outerShdw dist="35921" dir="2700000" algn="ctr" rotWithShape="0">
+                    <a:schemeClr val="bg2"/>
+                  </a:outerShdw>
+                </a:effectLst>
+              </a14:hiddenEffects>
+            </a:ext>
+          </a:extLst>
+        </p:spPr>
+      </p:pic>
+      <p:pic>
+        <p:nvPicPr>
+          <p:cNvPr id="1028" name="Picture 4"/>
+          <p:cNvPicPr>
+            <a:picLocks noChangeAspect="1" noChangeArrowheads="1"/>
+          </p:cNvPicPr>
+          <p:nvPr/>
+        </p:nvPicPr>
+        <p:blipFill>
+          <a:blip r:embed="rId3">
+            <a:extLst>
+              <a:ext uri="{28A0092B-C50C-407E-A947-70E740481C1C}">
+                <a14:useLocalDpi xmlns:a14="http://schemas.microsoft.com/office/drawing/2010/main" val="0"/>
+              </a:ext>
+            </a:extLst>
+          </a:blip>
+          <a:srcRect/>
+          <a:stretch>
+            <a:fillRect/>
+          </a:stretch>
+        </p:blipFill>
+        <p:spPr bwMode="auto">
+          <a:xfrm>
+            <a:off x="255775" y="3284511"/>
+            <a:ext cx="5499189" cy="1731694"/>
+          </a:xfrm>
+          <a:prstGeom prst="rect">
+            <a:avLst/>
+          </a:prstGeom>
+          <a:noFill/>
           <a:ln>
             <a:noFill/>
           </a:ln>
           <a:effectLst/>
-        </p:spPr>
-        <p:style>
-          <a:lnRef idx="1">
-            <a:schemeClr val="accent1"/>
-          </a:lnRef>
-          <a:fillRef idx="3">
-            <a:schemeClr val="accent1"/>
-          </a:fillRef>
-          <a:effectRef idx="2">
-            <a:schemeClr val="accent1"/>
-          </a:effectRef>
-          <a:fontRef idx="minor">
-            <a:schemeClr val="lt1"/>
-          </a:fontRef>
-        </p:style>
-        <p:txBody>
-          <a:bodyPr rtlCol="0" anchor="ctr"/>
-          <a:lstStyle/>
-          <a:p>
-            <a:pPr algn="ctr"/>
-          </a:p>
-        </p:txBody>
-      </p:sp>
-      <p:sp>
-        <p:nvSpPr>
-          <p:cNvPr id="11" name="TextBox 10"/>
-          <p:cNvSpPr txBox="1"/>
-          <p:nvPr/>
-        </p:nvSpPr>
-        <p:spPr>
-          <a:xfrm>
-            <a:off x="324000" y="1519200"/>
-            <a:ext cx="3924000" cy="144000"/>
-          </a:xfrm>
-          <a:prstGeom prst="rect">
-            <a:avLst/>
-          </a:prstGeom>
-          <a:noFill/>
-        </p:spPr>
-        <p:txBody>
-          <a:bodyPr wrap="square" lIns="0" rIns="0" tIns="0" bIns="0" anchor="t">
-            <a:spAutoFit/>
-          </a:bodyPr>
-          <a:lstStyle/>
-          <a:p>
-            <a:pPr algn="l"/>
-            <a:r>
-              <a:rPr sz="1000" b="1" spc="100">
-                <a:solidFill>
-                  <a:srgbClr val="2F3A48"/>
-                </a:solidFill>
-                <a:latin typeface="Inter"/>
-              </a:rPr>
-              <a:t>Суть подхода</a:t>
-            </a:r>
-          </a:p>
-        </p:txBody>
-      </p:sp>
-      <p:sp>
-        <p:nvSpPr>
-          <p:cNvPr id="12" name="TextBox 11"/>
-          <p:cNvSpPr txBox="1"/>
-          <p:nvPr/>
-        </p:nvSpPr>
-        <p:spPr>
-          <a:xfrm>
-            <a:off x="324000" y="1681200"/>
-            <a:ext cx="3924000" cy="576000"/>
-          </a:xfrm>
-          <a:prstGeom prst="rect">
-            <a:avLst/>
-          </a:prstGeom>
-          <a:noFill/>
-        </p:spPr>
-        <p:txBody>
-          <a:bodyPr wrap="square" lIns="0" rIns="0" tIns="0" bIns="0" anchor="t">
-            <a:spAutoFit/>
-          </a:bodyPr>
-          <a:lstStyle/>
-          <a:p>
-            <a:pPr algn="l"/>
-            <a:r>
-              <a:rPr sz="950" b="0">
-                <a:solidFill>
-                  <a:srgbClr val="2F3A48"/>
-                </a:solidFill>
-                <a:latin typeface="Inter"/>
-              </a:rPr>
-              <a:t>Email-рассылка по потенциальным партнёрам, работающим с конкурентами — это не спам и не прямой продажи. Это регулярное касание потенциального дистрибьютора с брендом Эмпилс. Каждое письмо — точка контакта, которая формирует информационное присутствие бренда в сознании партнёра.</a:t>
-            </a:r>
-          </a:p>
-        </p:txBody>
-      </p:sp>
-      <p:sp>
-        <p:nvSpPr>
-          <p:cNvPr id="13" name="Rectangle 12"/>
-          <p:cNvSpPr/>
-          <p:nvPr/>
-        </p:nvSpPr>
-        <p:spPr>
-          <a:xfrm>
-            <a:off x="324000" y="2293200"/>
-            <a:ext cx="3924000" cy="14400"/>
-          </a:xfrm>
-          <a:prstGeom prst="rect">
-            <a:avLst/>
-          </a:prstGeom>
-          <a:solidFill>
-            <a:srgbClr val="EFE9DD"/>
-          </a:solidFill>
-          <a:ln>
-            <a:noFill/>
-          </a:ln>
-          <a:effectLst/>
-        </p:spPr>
-        <p:style>
-          <a:lnRef idx="1">
-            <a:schemeClr val="accent1"/>
-          </a:lnRef>
-          <a:fillRef idx="3">
-            <a:schemeClr val="accent1"/>
-          </a:fillRef>
-          <a:effectRef idx="2">
-            <a:schemeClr val="accent1"/>
-          </a:effectRef>
-          <a:fontRef idx="minor">
-            <a:schemeClr val="lt1"/>
-          </a:fontRef>
-        </p:style>
-        <p:txBody>
-          <a:bodyPr rtlCol="0" anchor="ctr"/>
-          <a:lstStyle/>
-          <a:p>
-            <a:pPr algn="ctr"/>
-          </a:p>
-        </p:txBody>
-      </p:sp>
-      <p:sp>
-        <p:nvSpPr>
-          <p:cNvPr id="14" name="TextBox 13"/>
-          <p:cNvSpPr txBox="1"/>
-          <p:nvPr/>
-        </p:nvSpPr>
-        <p:spPr>
-          <a:xfrm>
-            <a:off x="324000" y="2347200"/>
-            <a:ext cx="3924000" cy="144000"/>
-          </a:xfrm>
-          <a:prstGeom prst="rect">
-            <a:avLst/>
-          </a:prstGeom>
-          <a:noFill/>
-        </p:spPr>
-        <p:txBody>
-          <a:bodyPr wrap="square" lIns="0" rIns="0" tIns="0" bIns="0" anchor="t">
-            <a:spAutoFit/>
-          </a:bodyPr>
-          <a:lstStyle/>
-          <a:p>
-            <a:pPr algn="l"/>
-            <a:r>
-              <a:rPr sz="1000" b="1" spc="100">
-                <a:solidFill>
-                  <a:srgbClr val="2F3A48"/>
-                </a:solidFill>
-                <a:latin typeface="Inter"/>
-              </a:rPr>
-              <a:t>Как это работает</a:t>
-            </a:r>
-          </a:p>
-        </p:txBody>
-      </p:sp>
-      <p:sp>
-        <p:nvSpPr>
-          <p:cNvPr id="15" name="TextBox 14"/>
-          <p:cNvSpPr txBox="1"/>
-          <p:nvPr/>
-        </p:nvSpPr>
-        <p:spPr>
-          <a:xfrm>
-            <a:off x="324000" y="2527199"/>
-            <a:ext cx="180000" cy="125999"/>
-          </a:xfrm>
-          <a:prstGeom prst="rect">
-            <a:avLst/>
-          </a:prstGeom>
-          <a:noFill/>
-        </p:spPr>
-        <p:txBody>
-          <a:bodyPr wrap="square" lIns="0" rIns="0" tIns="0" bIns="0" anchor="t">
-            <a:spAutoFit/>
-          </a:bodyPr>
-          <a:lstStyle/>
-          <a:p>
-            <a:pPr algn="l"/>
-            <a:r>
-              <a:rPr sz="1100" b="1">
-                <a:solidFill>
-                  <a:srgbClr val="7B6FA8"/>
-                </a:solidFill>
-                <a:latin typeface="Roboto Mono"/>
-              </a:rPr>
-              <a:t>1.</a:t>
-            </a:r>
-          </a:p>
-        </p:txBody>
-      </p:sp>
-      <p:sp>
-        <p:nvSpPr>
-          <p:cNvPr id="16" name="TextBox 15"/>
-          <p:cNvSpPr txBox="1"/>
-          <p:nvPr/>
-        </p:nvSpPr>
-        <p:spPr>
-          <a:xfrm>
-            <a:off x="540000" y="2527199"/>
-            <a:ext cx="900000" cy="125999"/>
-          </a:xfrm>
-          <a:prstGeom prst="rect">
-            <a:avLst/>
-          </a:prstGeom>
-          <a:noFill/>
-        </p:spPr>
-        <p:txBody>
-          <a:bodyPr wrap="square" lIns="0" rIns="0" tIns="0" bIns="0" anchor="t">
-            <a:spAutoFit/>
-          </a:bodyPr>
-          <a:lstStyle/>
-          <a:p>
-            <a:pPr algn="l"/>
-            <a:r>
-              <a:rPr sz="1000" b="1">
-                <a:solidFill>
-                  <a:srgbClr val="2F3A48"/>
-                </a:solidFill>
-                <a:latin typeface="Inter"/>
-              </a:rPr>
-              <a:t>Касание</a:t>
-            </a:r>
-          </a:p>
-        </p:txBody>
-      </p:sp>
-      <p:sp>
-        <p:nvSpPr>
-          <p:cNvPr id="17" name="TextBox 16"/>
-          <p:cNvSpPr txBox="1"/>
-          <p:nvPr/>
-        </p:nvSpPr>
-        <p:spPr>
-          <a:xfrm>
-            <a:off x="1440000" y="2527199"/>
-            <a:ext cx="2808000" cy="125999"/>
-          </a:xfrm>
-          <a:prstGeom prst="rect">
-            <a:avLst/>
-          </a:prstGeom>
-          <a:noFill/>
-        </p:spPr>
-        <p:txBody>
-          <a:bodyPr wrap="square" lIns="0" rIns="0" tIns="0" bIns="0" anchor="t">
-            <a:spAutoFit/>
-          </a:bodyPr>
-          <a:lstStyle/>
-          <a:p>
-            <a:pPr algn="l"/>
-            <a:r>
-              <a:rPr sz="900" b="0">
-                <a:solidFill>
-                  <a:srgbClr val="8A95A3"/>
-                </a:solidFill>
-                <a:latin typeface="Inter"/>
-              </a:rPr>
-              <a:t>Партнёр получает email от Эмпилс — первое знакомство с брендом</a:t>
-            </a:r>
-          </a:p>
-        </p:txBody>
-      </p:sp>
-      <p:sp>
-        <p:nvSpPr>
-          <p:cNvPr id="18" name="TextBox 17"/>
-          <p:cNvSpPr txBox="1"/>
-          <p:nvPr/>
-        </p:nvSpPr>
-        <p:spPr>
-          <a:xfrm>
-            <a:off x="324000" y="2707199"/>
-            <a:ext cx="180000" cy="125999"/>
-          </a:xfrm>
-          <a:prstGeom prst="rect">
-            <a:avLst/>
-          </a:prstGeom>
-          <a:noFill/>
-        </p:spPr>
-        <p:txBody>
-          <a:bodyPr wrap="square" lIns="0" rIns="0" tIns="0" bIns="0" anchor="t">
-            <a:spAutoFit/>
-          </a:bodyPr>
-          <a:lstStyle/>
-          <a:p>
-            <a:pPr algn="l"/>
-            <a:r>
-              <a:rPr sz="1100" b="1">
-                <a:solidFill>
-                  <a:srgbClr val="7B6FA8"/>
-                </a:solidFill>
-                <a:latin typeface="Roboto Mono"/>
-              </a:rPr>
-              <a:t>2.</a:t>
-            </a:r>
-          </a:p>
-        </p:txBody>
-      </p:sp>
-      <p:sp>
-        <p:nvSpPr>
-          <p:cNvPr id="19" name="TextBox 18"/>
-          <p:cNvSpPr txBox="1"/>
-          <p:nvPr/>
-        </p:nvSpPr>
-        <p:spPr>
-          <a:xfrm>
-            <a:off x="540000" y="2707199"/>
-            <a:ext cx="900000" cy="125999"/>
-          </a:xfrm>
-          <a:prstGeom prst="rect">
-            <a:avLst/>
-          </a:prstGeom>
-          <a:noFill/>
-        </p:spPr>
-        <p:txBody>
-          <a:bodyPr wrap="square" lIns="0" rIns="0" tIns="0" bIns="0" anchor="t">
-            <a:spAutoFit/>
-          </a:bodyPr>
-          <a:lstStyle/>
-          <a:p>
-            <a:pPr algn="l"/>
-            <a:r>
-              <a:rPr sz="1000" b="1">
-                <a:solidFill>
-                  <a:srgbClr val="2F3A48"/>
-                </a:solidFill>
-                <a:latin typeface="Inter"/>
-              </a:rPr>
-              <a:t>Регулярность</a:t>
-            </a:r>
-          </a:p>
-        </p:txBody>
-      </p:sp>
-      <p:sp>
-        <p:nvSpPr>
-          <p:cNvPr id="20" name="TextBox 19"/>
-          <p:cNvSpPr txBox="1"/>
-          <p:nvPr/>
-        </p:nvSpPr>
-        <p:spPr>
-          <a:xfrm>
-            <a:off x="1440000" y="2707199"/>
-            <a:ext cx="2808000" cy="125999"/>
-          </a:xfrm>
-          <a:prstGeom prst="rect">
-            <a:avLst/>
-          </a:prstGeom>
-          <a:noFill/>
-        </p:spPr>
-        <p:txBody>
-          <a:bodyPr wrap="square" lIns="0" rIns="0" tIns="0" bIns="0" anchor="t">
-            <a:spAutoFit/>
-          </a:bodyPr>
-          <a:lstStyle/>
-          <a:p>
-            <a:pPr algn="l"/>
-            <a:r>
-              <a:rPr sz="900" b="0">
-                <a:solidFill>
-                  <a:srgbClr val="8A95A3"/>
-                </a:solidFill>
-                <a:latin typeface="Inter"/>
-              </a:rPr>
-              <a:t>Периодичность рассылки создаёт узнаваемый ритм присутствия</a:t>
-            </a:r>
-          </a:p>
-        </p:txBody>
-      </p:sp>
-      <p:sp>
-        <p:nvSpPr>
-          <p:cNvPr id="21" name="TextBox 20"/>
-          <p:cNvSpPr txBox="1"/>
-          <p:nvPr/>
-        </p:nvSpPr>
-        <p:spPr>
-          <a:xfrm>
-            <a:off x="324000" y="2887199"/>
-            <a:ext cx="180000" cy="125999"/>
-          </a:xfrm>
-          <a:prstGeom prst="rect">
-            <a:avLst/>
-          </a:prstGeom>
-          <a:noFill/>
-        </p:spPr>
-        <p:txBody>
-          <a:bodyPr wrap="square" lIns="0" rIns="0" tIns="0" bIns="0" anchor="t">
-            <a:spAutoFit/>
-          </a:bodyPr>
-          <a:lstStyle/>
-          <a:p>
-            <a:pPr algn="l"/>
-            <a:r>
-              <a:rPr sz="1100" b="1">
-                <a:solidFill>
-                  <a:srgbClr val="7B6FA8"/>
-                </a:solidFill>
-                <a:latin typeface="Roboto Mono"/>
-              </a:rPr>
-              <a:t>3.</a:t>
-            </a:r>
-          </a:p>
-        </p:txBody>
-      </p:sp>
-      <p:sp>
-        <p:nvSpPr>
-          <p:cNvPr id="22" name="TextBox 21"/>
-          <p:cNvSpPr txBox="1"/>
-          <p:nvPr/>
-        </p:nvSpPr>
-        <p:spPr>
-          <a:xfrm>
-            <a:off x="540000" y="2887199"/>
-            <a:ext cx="900000" cy="125999"/>
-          </a:xfrm>
-          <a:prstGeom prst="rect">
-            <a:avLst/>
-          </a:prstGeom>
-          <a:noFill/>
-        </p:spPr>
-        <p:txBody>
-          <a:bodyPr wrap="square" lIns="0" rIns="0" tIns="0" bIns="0" anchor="t">
-            <a:spAutoFit/>
-          </a:bodyPr>
-          <a:lstStyle/>
-          <a:p>
-            <a:pPr algn="l"/>
-            <a:r>
-              <a:rPr sz="1000" b="1">
-                <a:solidFill>
-                  <a:srgbClr val="2F3A48"/>
-                </a:solidFill>
-                <a:latin typeface="Inter"/>
-              </a:rPr>
-              <a:t>Накопление</a:t>
-            </a:r>
-          </a:p>
-        </p:txBody>
-      </p:sp>
-      <p:sp>
-        <p:nvSpPr>
-          <p:cNvPr id="23" name="TextBox 22"/>
-          <p:cNvSpPr txBox="1"/>
-          <p:nvPr/>
-        </p:nvSpPr>
-        <p:spPr>
-          <a:xfrm>
-            <a:off x="1440000" y="2887199"/>
-            <a:ext cx="2808000" cy="125999"/>
-          </a:xfrm>
-          <a:prstGeom prst="rect">
-            <a:avLst/>
-          </a:prstGeom>
-          <a:noFill/>
-        </p:spPr>
-        <p:txBody>
-          <a:bodyPr wrap="square" lIns="0" rIns="0" tIns="0" bIns="0" anchor="t">
-            <a:spAutoFit/>
-          </a:bodyPr>
-          <a:lstStyle/>
-          <a:p>
-            <a:pPr algn="l"/>
-            <a:r>
-              <a:rPr sz="900" b="0">
-                <a:solidFill>
-                  <a:srgbClr val="8A95A3"/>
-                </a:solidFill>
-                <a:latin typeface="Inter"/>
-              </a:rPr>
-              <a:t>Каждое касание усиливает информационный след бренда</a:t>
-            </a:r>
-          </a:p>
-        </p:txBody>
-      </p:sp>
-      <p:sp>
-        <p:nvSpPr>
-          <p:cNvPr id="24" name="TextBox 23"/>
-          <p:cNvSpPr txBox="1"/>
-          <p:nvPr/>
-        </p:nvSpPr>
-        <p:spPr>
-          <a:xfrm>
-            <a:off x="324000" y="3067199"/>
-            <a:ext cx="180000" cy="125999"/>
-          </a:xfrm>
-          <a:prstGeom prst="rect">
-            <a:avLst/>
-          </a:prstGeom>
-          <a:noFill/>
-        </p:spPr>
-        <p:txBody>
-          <a:bodyPr wrap="square" lIns="0" rIns="0" tIns="0" bIns="0" anchor="t">
-            <a:spAutoFit/>
-          </a:bodyPr>
-          <a:lstStyle/>
-          <a:p>
-            <a:pPr algn="l"/>
-            <a:r>
-              <a:rPr sz="1100" b="1">
-                <a:solidFill>
-                  <a:srgbClr val="7B6FA8"/>
-                </a:solidFill>
-                <a:latin typeface="Roboto Mono"/>
-              </a:rPr>
-              <a:t>4.</a:t>
-            </a:r>
-          </a:p>
-        </p:txBody>
-      </p:sp>
-      <p:sp>
-        <p:nvSpPr>
-          <p:cNvPr id="25" name="TextBox 24"/>
-          <p:cNvSpPr txBox="1"/>
-          <p:nvPr/>
-        </p:nvSpPr>
-        <p:spPr>
-          <a:xfrm>
-            <a:off x="540000" y="3067199"/>
-            <a:ext cx="900000" cy="125999"/>
-          </a:xfrm>
-          <a:prstGeom prst="rect">
-            <a:avLst/>
-          </a:prstGeom>
-          <a:noFill/>
-        </p:spPr>
-        <p:txBody>
-          <a:bodyPr wrap="square" lIns="0" rIns="0" tIns="0" bIns="0" anchor="t">
-            <a:spAutoFit/>
-          </a:bodyPr>
-          <a:lstStyle/>
-          <a:p>
-            <a:pPr algn="l"/>
-            <a:r>
-              <a:rPr sz="1000" b="1">
-                <a:solidFill>
-                  <a:srgbClr val="2F3A48"/>
-                </a:solidFill>
-                <a:latin typeface="Inter"/>
-              </a:rPr>
-              <a:t>Узнаваемость</a:t>
-            </a:r>
-          </a:p>
-        </p:txBody>
-      </p:sp>
-      <p:sp>
-        <p:nvSpPr>
-          <p:cNvPr id="26" name="TextBox 25"/>
-          <p:cNvSpPr txBox="1"/>
-          <p:nvPr/>
-        </p:nvSpPr>
-        <p:spPr>
-          <a:xfrm>
-            <a:off x="1440000" y="3067199"/>
-            <a:ext cx="2808000" cy="125999"/>
-          </a:xfrm>
-          <a:prstGeom prst="rect">
-            <a:avLst/>
-          </a:prstGeom>
-          <a:noFill/>
-        </p:spPr>
-        <p:txBody>
-          <a:bodyPr wrap="square" lIns="0" rIns="0" tIns="0" bIns="0" anchor="t">
-            <a:spAutoFit/>
-          </a:bodyPr>
-          <a:lstStyle/>
-          <a:p>
-            <a:pPr algn="l"/>
-            <a:r>
-              <a:rPr sz="900" b="0">
-                <a:solidFill>
-                  <a:srgbClr val="8A95A3"/>
-                </a:solidFill>
-                <a:latin typeface="Inter"/>
-              </a:rPr>
-              <a:t>На подсознательном уровне формируется знание об Эмпилс</a:t>
-            </a:r>
-          </a:p>
-        </p:txBody>
-      </p:sp>
-      <p:sp>
-        <p:nvSpPr>
-          <p:cNvPr id="27" name="TextBox 26"/>
-          <p:cNvSpPr txBox="1"/>
-          <p:nvPr/>
-        </p:nvSpPr>
-        <p:spPr>
-          <a:xfrm>
-            <a:off x="324000" y="3247199"/>
-            <a:ext cx="180000" cy="125999"/>
-          </a:xfrm>
-          <a:prstGeom prst="rect">
-            <a:avLst/>
-          </a:prstGeom>
-          <a:noFill/>
-        </p:spPr>
-        <p:txBody>
-          <a:bodyPr wrap="square" lIns="0" rIns="0" tIns="0" bIns="0" anchor="t">
-            <a:spAutoFit/>
-          </a:bodyPr>
-          <a:lstStyle/>
-          <a:p>
-            <a:pPr algn="l"/>
-            <a:r>
-              <a:rPr sz="1100" b="1">
-                <a:solidFill>
-                  <a:srgbClr val="7B6FA8"/>
-                </a:solidFill>
-                <a:latin typeface="Roboto Mono"/>
-              </a:rPr>
-              <a:t>5.</a:t>
-            </a:r>
-          </a:p>
-        </p:txBody>
-      </p:sp>
-      <p:sp>
-        <p:nvSpPr>
-          <p:cNvPr id="28" name="TextBox 27"/>
-          <p:cNvSpPr txBox="1"/>
-          <p:nvPr/>
-        </p:nvSpPr>
-        <p:spPr>
-          <a:xfrm>
-            <a:off x="540000" y="3247199"/>
-            <a:ext cx="900000" cy="125999"/>
-          </a:xfrm>
-          <a:prstGeom prst="rect">
-            <a:avLst/>
-          </a:prstGeom>
-          <a:noFill/>
-        </p:spPr>
-        <p:txBody>
-          <a:bodyPr wrap="square" lIns="0" rIns="0" tIns="0" bIns="0" anchor="t">
-            <a:spAutoFit/>
-          </a:bodyPr>
-          <a:lstStyle/>
-          <a:p>
-            <a:pPr algn="l"/>
-            <a:r>
-              <a:rPr sz="1000" b="1">
-                <a:solidFill>
-                  <a:srgbClr val="2F3A48"/>
-                </a:solidFill>
-                <a:latin typeface="Inter"/>
-              </a:rPr>
-              <a:t>Решение</a:t>
-            </a:r>
-          </a:p>
-        </p:txBody>
-      </p:sp>
-      <p:sp>
-        <p:nvSpPr>
-          <p:cNvPr id="29" name="TextBox 28"/>
-          <p:cNvSpPr txBox="1"/>
-          <p:nvPr/>
-        </p:nvSpPr>
-        <p:spPr>
-          <a:xfrm>
-            <a:off x="1440000" y="3247199"/>
-            <a:ext cx="2808000" cy="125999"/>
-          </a:xfrm>
-          <a:prstGeom prst="rect">
-            <a:avLst/>
-          </a:prstGeom>
-          <a:noFill/>
-        </p:spPr>
-        <p:txBody>
-          <a:bodyPr wrap="square" lIns="0" rIns="0" tIns="0" bIns="0" anchor="t">
-            <a:spAutoFit/>
-          </a:bodyPr>
-          <a:lstStyle/>
-          <a:p>
-            <a:pPr algn="l"/>
-            <a:r>
-              <a:rPr sz="900" b="0">
-                <a:solidFill>
-                  <a:srgbClr val="8A95A3"/>
-                </a:solidFill>
-                <a:latin typeface="Inter"/>
-              </a:rPr>
-              <a:t>Когда возникает потребность — партнёр вспоминает об Эмпилс</a:t>
-            </a:r>
-          </a:p>
-        </p:txBody>
-      </p:sp>
-      <p:sp>
-        <p:nvSpPr>
-          <p:cNvPr id="30" name="Rectangle 29"/>
-          <p:cNvSpPr/>
-          <p:nvPr/>
-        </p:nvSpPr>
-        <p:spPr>
-          <a:xfrm>
-            <a:off x="324000" y="3481200"/>
-            <a:ext cx="3924000" cy="14400"/>
-          </a:xfrm>
-          <a:prstGeom prst="rect">
-            <a:avLst/>
-          </a:prstGeom>
-          <a:solidFill>
-            <a:srgbClr val="EFE9DD"/>
-          </a:solidFill>
-          <a:ln>
-            <a:noFill/>
-          </a:ln>
-          <a:effectLst/>
-        </p:spPr>
-        <p:style>
-          <a:lnRef idx="1">
-            <a:schemeClr val="accent1"/>
-          </a:lnRef>
-          <a:fillRef idx="3">
-            <a:schemeClr val="accent1"/>
-          </a:fillRef>
-          <a:effectRef idx="2">
-            <a:schemeClr val="accent1"/>
-          </a:effectRef>
-          <a:fontRef idx="minor">
-            <a:schemeClr val="lt1"/>
-          </a:fontRef>
-        </p:style>
-        <p:txBody>
-          <a:bodyPr rtlCol="0" anchor="ctr"/>
-          <a:lstStyle/>
-          <a:p>
-            <a:pPr algn="ctr"/>
-          </a:p>
-        </p:txBody>
-      </p:sp>
-      <p:sp>
-        <p:nvSpPr>
-          <p:cNvPr id="31" name="TextBox 30"/>
-          <p:cNvSpPr txBox="1"/>
-          <p:nvPr/>
-        </p:nvSpPr>
-        <p:spPr>
-          <a:xfrm>
-            <a:off x="324000" y="3553200"/>
-            <a:ext cx="3924000" cy="144000"/>
-          </a:xfrm>
-          <a:prstGeom prst="rect">
-            <a:avLst/>
-          </a:prstGeom>
-          <a:noFill/>
-        </p:spPr>
-        <p:txBody>
-          <a:bodyPr wrap="square" lIns="0" rIns="0" tIns="0" bIns="0" anchor="t">
-            <a:spAutoFit/>
-          </a:bodyPr>
-          <a:lstStyle/>
-          <a:p>
-            <a:pPr algn="l"/>
-            <a:r>
-              <a:rPr sz="1000" b="1" spc="100">
-                <a:solidFill>
-                  <a:srgbClr val="C00000"/>
-                </a:solidFill>
-                <a:latin typeface="Inter"/>
-              </a:rPr>
-              <a:t>Ключевой принцип</a:t>
-            </a:r>
-          </a:p>
-        </p:txBody>
-      </p:sp>
-      <p:sp>
-        <p:nvSpPr>
-          <p:cNvPr id="32" name="Rectangle 31"/>
-          <p:cNvSpPr/>
-          <p:nvPr/>
-        </p:nvSpPr>
-        <p:spPr>
-          <a:xfrm>
-            <a:off x="324000" y="3715200"/>
-            <a:ext cx="28800" cy="900000"/>
-          </a:xfrm>
-          <a:prstGeom prst="rect">
-            <a:avLst/>
-          </a:prstGeom>
-          <a:solidFill>
-            <a:srgbClr val="7B6FA8"/>
-          </a:solidFill>
-          <a:ln>
-            <a:noFill/>
-          </a:ln>
-          <a:effectLst/>
-        </p:spPr>
-        <p:style>
-          <a:lnRef idx="1">
-            <a:schemeClr val="accent1"/>
-          </a:lnRef>
-          <a:fillRef idx="3">
-            <a:schemeClr val="accent1"/>
-          </a:fillRef>
-          <a:effectRef idx="2">
-            <a:schemeClr val="accent1"/>
-          </a:effectRef>
-          <a:fontRef idx="minor">
-            <a:schemeClr val="lt1"/>
-          </a:fontRef>
-        </p:style>
-        <p:txBody>
-          <a:bodyPr rtlCol="0" anchor="ctr"/>
-          <a:lstStyle/>
-          <a:p>
-            <a:pPr algn="ctr"/>
-          </a:p>
-        </p:txBody>
-      </p:sp>
-      <p:sp>
-        <p:nvSpPr>
-          <p:cNvPr id="33" name="TextBox 32"/>
-          <p:cNvSpPr txBox="1"/>
-          <p:nvPr/>
-        </p:nvSpPr>
-        <p:spPr>
-          <a:xfrm>
-            <a:off x="431999" y="3733200"/>
-            <a:ext cx="3780000" cy="864000"/>
-          </a:xfrm>
-          <a:prstGeom prst="rect">
-            <a:avLst/>
-          </a:prstGeom>
-          <a:noFill/>
-        </p:spPr>
-        <p:txBody>
-          <a:bodyPr wrap="square" lIns="0" rIns="0" tIns="0" bIns="0" anchor="t">
-            <a:spAutoFit/>
-          </a:bodyPr>
-          <a:lstStyle/>
-          <a:p>
-            <a:pPr algn="l"/>
-            <a:r>
-              <a:rPr sz="1000" b="0">
-                <a:solidFill>
-                  <a:srgbClr val="2F3A48"/>
-                </a:solidFill>
-                <a:latin typeface="Inter"/>
-              </a:rPr>
-              <a:t>«Рано или поздно периодичность касания формирует подсознательное знание о бренде. Когда партнёр, работающий с конкурентом, столкнётся с потребностью в альтернативе — он вспомнит об Эмпилс. Не потому что мы ему навязали, а потому что мы были рядом.»</a:t>
-            </a:r>
-          </a:p>
-        </p:txBody>
-      </p:sp>
-      <p:sp>
-        <p:nvSpPr>
-          <p:cNvPr id="34" name="Rectangle 33"/>
-          <p:cNvSpPr/>
-          <p:nvPr/>
-        </p:nvSpPr>
-        <p:spPr>
-          <a:xfrm>
-            <a:off x="324000" y="4651200"/>
-            <a:ext cx="3924000" cy="14400"/>
-          </a:xfrm>
-          <a:prstGeom prst="rect">
-            <a:avLst/>
-          </a:prstGeom>
-          <a:solidFill>
-            <a:srgbClr val="EFE9DD"/>
-          </a:solidFill>
-          <a:ln>
-            <a:noFill/>
-          </a:ln>
-          <a:effectLst/>
-        </p:spPr>
-        <p:style>
-          <a:lnRef idx="1">
-            <a:schemeClr val="accent1"/>
-          </a:lnRef>
-          <a:fillRef idx="3">
-            <a:schemeClr val="accent1"/>
-          </a:fillRef>
-          <a:effectRef idx="2">
-            <a:schemeClr val="accent1"/>
-          </a:effectRef>
-          <a:fontRef idx="minor">
-            <a:schemeClr val="lt1"/>
-          </a:fontRef>
-        </p:style>
-        <p:txBody>
-          <a:bodyPr rtlCol="0" anchor="ctr"/>
-          <a:lstStyle/>
-          <a:p>
-            <a:pPr algn="ctr"/>
-          </a:p>
-        </p:txBody>
-      </p:sp>
-      <p:sp>
-        <p:nvSpPr>
-          <p:cNvPr id="35" name="TextBox 34"/>
-          <p:cNvSpPr txBox="1"/>
-          <p:nvPr/>
-        </p:nvSpPr>
-        <p:spPr>
-          <a:xfrm>
-            <a:off x="324000" y="4705200"/>
-            <a:ext cx="3924000" cy="108000"/>
-          </a:xfrm>
-          <a:prstGeom prst="rect">
-            <a:avLst/>
-          </a:prstGeom>
-          <a:noFill/>
-        </p:spPr>
-        <p:txBody>
-          <a:bodyPr wrap="square" lIns="0" rIns="0" tIns="0" bIns="0" anchor="t">
-            <a:spAutoFit/>
-          </a:bodyPr>
-          <a:lstStyle/>
-          <a:p>
-            <a:pPr algn="ctr"/>
-            <a:r>
-              <a:rPr sz="850" b="0">
-                <a:solidFill>
-                  <a:srgbClr val="8A95A3"/>
-                </a:solidFill>
-                <a:latin typeface="Inter"/>
-              </a:rPr>
-              <a:t>Цель: системное формирование информационного присутствия бренда</a:t>
-            </a:r>
-          </a:p>
-        </p:txBody>
-      </p:sp>
-      <p:sp>
-        <p:nvSpPr>
-          <p:cNvPr id="36" name="Rounded Rectangle 35"/>
-          <p:cNvSpPr/>
-          <p:nvPr/>
-        </p:nvSpPr>
-        <p:spPr>
-          <a:xfrm>
-            <a:off x="4680000" y="961200"/>
-            <a:ext cx="4212000" cy="3859200"/>
-          </a:xfrm>
-          <a:prstGeom prst="roundRect">
-            <a:avLst>
-              <a:gd name="adj" fmla="val 2000"/>
-            </a:avLst>
-          </a:prstGeom>
-          <a:solidFill>
-            <a:srgbClr val="FFFFFF"/>
-          </a:solidFill>
-          <a:ln w="6350">
-            <a:solidFill>
-              <a:srgbClr val="D9D2C2"/>
-            </a:solidFill>
-          </a:ln>
-          <a:effectLst/>
-        </p:spPr>
-        <p:style>
-          <a:lnRef idx="1">
-            <a:schemeClr val="accent1"/>
-          </a:lnRef>
-          <a:fillRef idx="3">
-            <a:schemeClr val="accent1"/>
-          </a:fillRef>
-          <a:effectRef idx="2">
-            <a:schemeClr val="accent1"/>
-          </a:effectRef>
-          <a:fontRef idx="minor">
-            <a:schemeClr val="lt1"/>
-          </a:fontRef>
-        </p:style>
-        <p:txBody>
-          <a:bodyPr rtlCol="0" anchor="ctr"/>
-          <a:lstStyle/>
-          <a:p>
-            <a:pPr algn="ctr"/>
-          </a:p>
-        </p:txBody>
-      </p:sp>
-      <p:sp>
-        <p:nvSpPr>
-          <p:cNvPr id="37" name="TextBox 36"/>
-          <p:cNvSpPr txBox="1"/>
-          <p:nvPr/>
-        </p:nvSpPr>
-        <p:spPr>
-          <a:xfrm>
-            <a:off x="4824000" y="1087199"/>
-            <a:ext cx="3924000" cy="162000"/>
-          </a:xfrm>
-          <a:prstGeom prst="rect">
-            <a:avLst/>
-          </a:prstGeom>
-          <a:noFill/>
-        </p:spPr>
-        <p:txBody>
-          <a:bodyPr wrap="square" lIns="0" rIns="0" tIns="0" bIns="0" anchor="t">
-            <a:spAutoFit/>
-          </a:bodyPr>
-          <a:lstStyle/>
-          <a:p>
-            <a:pPr algn="l"/>
-            <a:r>
-              <a:rPr sz="1100" b="1" spc="200">
-                <a:solidFill>
-                  <a:srgbClr val="C00000"/>
-                </a:solidFill>
-                <a:latin typeface="Inter"/>
-              </a:rPr>
-              <a:t>КАСКАД КАСАНИЙ</a:t>
-            </a:r>
-          </a:p>
-        </p:txBody>
-      </p:sp>
-      <p:sp>
-        <p:nvSpPr>
-          <p:cNvPr id="38" name="TextBox 37"/>
-          <p:cNvSpPr txBox="1"/>
-          <p:nvPr/>
-        </p:nvSpPr>
-        <p:spPr>
-          <a:xfrm>
-            <a:off x="4824000" y="1267200"/>
-            <a:ext cx="3924000" cy="125999"/>
-          </a:xfrm>
-          <a:prstGeom prst="rect">
-            <a:avLst/>
-          </a:prstGeom>
-          <a:noFill/>
-        </p:spPr>
-        <p:txBody>
-          <a:bodyPr wrap="square" lIns="0" rIns="0" tIns="0" bIns="0" anchor="t">
-            <a:spAutoFit/>
-          </a:bodyPr>
-          <a:lstStyle/>
-          <a:p>
-            <a:pPr algn="l"/>
-            <a:r>
-              <a:rPr sz="1000" b="0">
-                <a:solidFill>
-                  <a:srgbClr val="8A95A3"/>
-                </a:solidFill>
-                <a:latin typeface="Inter"/>
-              </a:rPr>
-              <a:t>От первого касания до партнёрства</a:t>
-            </a:r>
-          </a:p>
-        </p:txBody>
-      </p:sp>
-      <p:sp>
-        <p:nvSpPr>
-          <p:cNvPr id="39" name="Rectangle 38"/>
-          <p:cNvSpPr/>
-          <p:nvPr/>
-        </p:nvSpPr>
-        <p:spPr>
-          <a:xfrm>
-            <a:off x="4824000" y="1429200"/>
-            <a:ext cx="3924000" cy="21600"/>
-          </a:xfrm>
-          <a:prstGeom prst="rect">
-            <a:avLst/>
-          </a:prstGeom>
-          <a:solidFill>
-            <a:srgbClr val="EFE9DD"/>
-          </a:solidFill>
-          <a:ln>
-            <a:noFill/>
-          </a:ln>
-          <a:effectLst/>
-        </p:spPr>
-        <p:style>
-          <a:lnRef idx="1">
-            <a:schemeClr val="accent1"/>
-          </a:lnRef>
-          <a:fillRef idx="3">
-            <a:schemeClr val="accent1"/>
-          </a:fillRef>
-          <a:effectRef idx="2">
-            <a:schemeClr val="accent1"/>
-          </a:effectRef>
-          <a:fontRef idx="minor">
-            <a:schemeClr val="lt1"/>
-          </a:fontRef>
-        </p:style>
-        <p:txBody>
-          <a:bodyPr rtlCol="0" anchor="ctr"/>
-          <a:lstStyle/>
-          <a:p>
-            <a:pPr algn="ctr"/>
-          </a:p>
-        </p:txBody>
-      </p:sp>
-      <p:sp>
-        <p:nvSpPr>
-          <p:cNvPr id="40" name="Rounded Rectangle 39"/>
-          <p:cNvSpPr/>
-          <p:nvPr/>
-        </p:nvSpPr>
-        <p:spPr>
-          <a:xfrm>
-            <a:off x="4824000" y="1537200"/>
-            <a:ext cx="3924000" cy="558000"/>
-          </a:xfrm>
-          <a:prstGeom prst="roundRect">
-            <a:avLst>
-              <a:gd name="adj" fmla="val 4000"/>
-            </a:avLst>
-          </a:prstGeom>
-          <a:solidFill>
-            <a:srgbClr val="F5F2EC"/>
-          </a:solidFill>
-          <a:ln>
-            <a:noFill/>
-          </a:ln>
-          <a:effectLst/>
-        </p:spPr>
-        <p:style>
-          <a:lnRef idx="1">
-            <a:schemeClr val="accent1"/>
-          </a:lnRef>
-          <a:fillRef idx="3">
-            <a:schemeClr val="accent1"/>
-          </a:fillRef>
-          <a:effectRef idx="2">
-            <a:schemeClr val="accent1"/>
-          </a:effectRef>
-          <a:fontRef idx="minor">
-            <a:schemeClr val="lt1"/>
-          </a:fontRef>
-        </p:style>
-        <p:txBody>
-          <a:bodyPr rtlCol="0" anchor="ctr"/>
-          <a:lstStyle/>
-          <a:p>
-            <a:pPr algn="ctr"/>
-          </a:p>
-        </p:txBody>
-      </p:sp>
-      <p:sp>
-        <p:nvSpPr>
-          <p:cNvPr id="41" name="Rectangle 40"/>
-          <p:cNvSpPr/>
-          <p:nvPr/>
-        </p:nvSpPr>
-        <p:spPr>
-          <a:xfrm>
-            <a:off x="4824000" y="1537200"/>
-            <a:ext cx="28800" cy="558000"/>
-          </a:xfrm>
-          <a:prstGeom prst="rect">
-            <a:avLst/>
-          </a:prstGeom>
-          <a:solidFill>
-            <a:srgbClr val="7B6FA8"/>
-          </a:solidFill>
-          <a:ln>
-            <a:noFill/>
-          </a:ln>
-          <a:effectLst/>
-        </p:spPr>
-        <p:style>
-          <a:lnRef idx="1">
-            <a:schemeClr val="accent1"/>
-          </a:lnRef>
-          <a:fillRef idx="3">
-            <a:schemeClr val="accent1"/>
-          </a:fillRef>
-          <a:effectRef idx="2">
-            <a:schemeClr val="accent1"/>
-          </a:effectRef>
-          <a:fontRef idx="minor">
-            <a:schemeClr val="lt1"/>
-          </a:fontRef>
-        </p:style>
-        <p:txBody>
-          <a:bodyPr rtlCol="0" anchor="ctr"/>
-          <a:lstStyle/>
-          <a:p>
-            <a:pPr algn="ctr"/>
-          </a:p>
-        </p:txBody>
-      </p:sp>
-      <p:sp>
-        <p:nvSpPr>
-          <p:cNvPr id="42" name="Rounded Rectangle 41"/>
-          <p:cNvSpPr/>
-          <p:nvPr/>
-        </p:nvSpPr>
-        <p:spPr>
-          <a:xfrm>
-            <a:off x="4914000" y="1645200"/>
-            <a:ext cx="324000" cy="324000"/>
-          </a:xfrm>
-          <a:prstGeom prst="roundRect">
-            <a:avLst>
-              <a:gd name="adj" fmla="val 50000"/>
-            </a:avLst>
-          </a:prstGeom>
-          <a:solidFill>
-            <a:srgbClr val="FFFFFF"/>
-          </a:solidFill>
-          <a:ln w="9525">
-            <a:solidFill>
-              <a:srgbClr val="7B6FA8"/>
-            </a:solidFill>
-          </a:ln>
-          <a:effectLst/>
-        </p:spPr>
-        <p:style>
-          <a:lnRef idx="1">
-            <a:schemeClr val="accent1"/>
-          </a:lnRef>
-          <a:fillRef idx="3">
-            <a:schemeClr val="accent1"/>
-          </a:fillRef>
-          <a:effectRef idx="2">
-            <a:schemeClr val="accent1"/>
-          </a:effectRef>
-          <a:fontRef idx="minor">
-            <a:schemeClr val="lt1"/>
-          </a:fontRef>
-        </p:style>
-        <p:txBody>
-          <a:bodyPr rtlCol="0" anchor="ctr"/>
-          <a:lstStyle/>
-          <a:p>
-            <a:pPr algn="ctr"/>
-          </a:p>
-        </p:txBody>
-      </p:sp>
-      <p:sp>
-        <p:nvSpPr>
-          <p:cNvPr id="43" name="TextBox 42"/>
-          <p:cNvSpPr txBox="1"/>
-          <p:nvPr/>
-        </p:nvSpPr>
-        <p:spPr>
-          <a:xfrm>
-            <a:off x="4914000" y="1699200"/>
-            <a:ext cx="324000" cy="216000"/>
-          </a:xfrm>
-          <a:prstGeom prst="rect">
-            <a:avLst/>
-          </a:prstGeom>
-          <a:noFill/>
-        </p:spPr>
-        <p:txBody>
-          <a:bodyPr wrap="square" lIns="0" rIns="0" tIns="0" bIns="0" anchor="ctr">
-            <a:spAutoFit/>
-          </a:bodyPr>
-          <a:lstStyle/>
-          <a:p>
-            <a:pPr algn="ctr"/>
-            <a:r>
-              <a:rPr sz="1400" b="1">
-                <a:solidFill>
-                  <a:srgbClr val="7B6FA8"/>
-                </a:solidFill>
-                <a:latin typeface="Roboto Mono"/>
-              </a:rPr>
-              <a:t>1</a:t>
-            </a:r>
-          </a:p>
-        </p:txBody>
-      </p:sp>
-      <p:sp>
-        <p:nvSpPr>
-          <p:cNvPr id="44" name="TextBox 43"/>
-          <p:cNvSpPr txBox="1"/>
-          <p:nvPr/>
-        </p:nvSpPr>
-        <p:spPr>
-          <a:xfrm>
-            <a:off x="5310000" y="1627200"/>
-            <a:ext cx="2700000" cy="144000"/>
-          </a:xfrm>
-          <a:prstGeom prst="rect">
-            <a:avLst/>
-          </a:prstGeom>
-          <a:noFill/>
-        </p:spPr>
-        <p:txBody>
-          <a:bodyPr wrap="square" lIns="0" rIns="0" tIns="0" bIns="0" anchor="t">
-            <a:spAutoFit/>
-          </a:bodyPr>
-          <a:lstStyle/>
-          <a:p>
-            <a:pPr algn="l"/>
-            <a:r>
-              <a:rPr sz="1000" b="1" spc="50">
-                <a:solidFill>
-                  <a:srgbClr val="2F3A48"/>
-                </a:solidFill>
-                <a:latin typeface="Inter"/>
-              </a:rPr>
-              <a:t>ПЕРВОЕ КАСАНИЕ</a:t>
-            </a:r>
-          </a:p>
-        </p:txBody>
-      </p:sp>
-      <p:sp>
-        <p:nvSpPr>
-          <p:cNvPr id="45" name="TextBox 44"/>
-          <p:cNvSpPr txBox="1"/>
-          <p:nvPr/>
-        </p:nvSpPr>
-        <p:spPr>
-          <a:xfrm>
-            <a:off x="5310000" y="1789199"/>
-            <a:ext cx="2700000" cy="125999"/>
-          </a:xfrm>
-          <a:prstGeom prst="rect">
-            <a:avLst/>
-          </a:prstGeom>
-          <a:noFill/>
-        </p:spPr>
-        <p:txBody>
-          <a:bodyPr wrap="square" lIns="0" rIns="0" tIns="0" bIns="0" anchor="t">
-            <a:spAutoFit/>
-          </a:bodyPr>
-          <a:lstStyle/>
-          <a:p>
-            <a:pPr algn="l"/>
-            <a:r>
-              <a:rPr sz="850" b="0">
-                <a:solidFill>
-                  <a:srgbClr val="8A95A3"/>
-                </a:solidFill>
-                <a:latin typeface="Inter"/>
-              </a:rPr>
-              <a:t>Email #1: знакомство с брендом Эмпилс</a:t>
-            </a:r>
-          </a:p>
-        </p:txBody>
-      </p:sp>
-      <p:sp>
-        <p:nvSpPr>
-          <p:cNvPr id="46" name="TextBox 45"/>
-          <p:cNvSpPr txBox="1"/>
-          <p:nvPr/>
-        </p:nvSpPr>
-        <p:spPr>
-          <a:xfrm>
-            <a:off x="5310000" y="1915200"/>
-            <a:ext cx="2700000" cy="108000"/>
-          </a:xfrm>
-          <a:prstGeom prst="rect">
-            <a:avLst/>
-          </a:prstGeom>
-          <a:noFill/>
-        </p:spPr>
-        <p:txBody>
-          <a:bodyPr wrap="square" lIns="0" rIns="0" tIns="0" bIns="0" anchor="t">
-            <a:spAutoFit/>
-          </a:bodyPr>
-          <a:lstStyle/>
-          <a:p>
-            <a:pPr algn="l"/>
-            <a:r>
-              <a:rPr sz="800" b="1">
-                <a:solidFill>
-                  <a:srgbClr val="7B6FA8"/>
-                </a:solidFill>
-                <a:latin typeface="Roboto Mono"/>
-              </a:rPr>
-              <a:t>День 0</a:t>
-            </a:r>
-          </a:p>
-        </p:txBody>
-      </p:sp>
-      <p:sp>
-        <p:nvSpPr>
-          <p:cNvPr id="47" name="TextBox 46"/>
-          <p:cNvSpPr txBox="1"/>
-          <p:nvPr/>
-        </p:nvSpPr>
-        <p:spPr>
-          <a:xfrm>
-            <a:off x="8100000" y="1681200"/>
-            <a:ext cx="612000" cy="144000"/>
-          </a:xfrm>
-          <a:prstGeom prst="rect">
-            <a:avLst/>
-          </a:prstGeom>
-          <a:noFill/>
-        </p:spPr>
-        <p:txBody>
-          <a:bodyPr wrap="square" lIns="0" rIns="0" tIns="0" bIns="0" anchor="t">
-            <a:spAutoFit/>
-          </a:bodyPr>
-          <a:lstStyle/>
-          <a:p>
-            <a:pPr algn="r"/>
-            <a:r>
-              <a:rPr sz="1200" b="1">
-                <a:solidFill>
-                  <a:srgbClr val="7B6FA8"/>
-                </a:solidFill>
-                <a:latin typeface="Roboto Mono"/>
-              </a:rPr>
-              <a:t>0%</a:t>
-            </a:r>
-          </a:p>
-        </p:txBody>
-      </p:sp>
-      <p:sp>
-        <p:nvSpPr>
-          <p:cNvPr id="48" name="TextBox 47"/>
-          <p:cNvSpPr txBox="1"/>
-          <p:nvPr/>
-        </p:nvSpPr>
-        <p:spPr>
-          <a:xfrm>
-            <a:off x="8100000" y="1843200"/>
-            <a:ext cx="612000" cy="108000"/>
-          </a:xfrm>
-          <a:prstGeom prst="rect">
-            <a:avLst/>
-          </a:prstGeom>
-          <a:noFill/>
-        </p:spPr>
-        <p:txBody>
-          <a:bodyPr wrap="square" lIns="0" rIns="0" tIns="0" bIns="0" anchor="t">
-            <a:spAutoFit/>
-          </a:bodyPr>
-          <a:lstStyle/>
-          <a:p>
-            <a:pPr algn="r"/>
-            <a:r>
-              <a:rPr sz="750" b="0">
-                <a:solidFill>
-                  <a:srgbClr val="8A95A3"/>
-                </a:solidFill>
-                <a:latin typeface="Inter"/>
-              </a:rPr>
-              <a:t>узнаваемость</a:t>
-            </a:r>
-          </a:p>
-        </p:txBody>
-      </p:sp>
-      <p:sp>
-        <p:nvSpPr>
-          <p:cNvPr id="49" name="Rounded Rectangle 48"/>
-          <p:cNvSpPr/>
-          <p:nvPr/>
-        </p:nvSpPr>
-        <p:spPr>
-          <a:xfrm>
-            <a:off x="4824000" y="2131200"/>
-            <a:ext cx="3924000" cy="558000"/>
-          </a:xfrm>
-          <a:prstGeom prst="roundRect">
-            <a:avLst>
-              <a:gd name="adj" fmla="val 4000"/>
-            </a:avLst>
-          </a:prstGeom>
-          <a:solidFill>
-            <a:srgbClr val="F5F2EC"/>
-          </a:solidFill>
-          <a:ln>
-            <a:noFill/>
-          </a:ln>
-          <a:effectLst/>
-        </p:spPr>
-        <p:style>
-          <a:lnRef idx="1">
-            <a:schemeClr val="accent1"/>
-          </a:lnRef>
-          <a:fillRef idx="3">
-            <a:schemeClr val="accent1"/>
-          </a:fillRef>
-          <a:effectRef idx="2">
-            <a:schemeClr val="accent1"/>
-          </a:effectRef>
-          <a:fontRef idx="minor">
-            <a:schemeClr val="lt1"/>
-          </a:fontRef>
-        </p:style>
-        <p:txBody>
-          <a:bodyPr rtlCol="0" anchor="ctr"/>
-          <a:lstStyle/>
-          <a:p>
-            <a:pPr algn="ctr"/>
-          </a:p>
-        </p:txBody>
-      </p:sp>
-      <p:sp>
-        <p:nvSpPr>
-          <p:cNvPr id="50" name="Rectangle 49"/>
-          <p:cNvSpPr/>
-          <p:nvPr/>
-        </p:nvSpPr>
-        <p:spPr>
-          <a:xfrm>
-            <a:off x="4824000" y="2131200"/>
-            <a:ext cx="28800" cy="558000"/>
-          </a:xfrm>
-          <a:prstGeom prst="rect">
-            <a:avLst/>
-          </a:prstGeom>
-          <a:solidFill>
-            <a:srgbClr val="6B8FA8"/>
-          </a:solidFill>
-          <a:ln>
-            <a:noFill/>
-          </a:ln>
-          <a:effectLst/>
-        </p:spPr>
-        <p:style>
-          <a:lnRef idx="1">
-            <a:schemeClr val="accent1"/>
-          </a:lnRef>
-          <a:fillRef idx="3">
-            <a:schemeClr val="accent1"/>
-          </a:fillRef>
-          <a:effectRef idx="2">
-            <a:schemeClr val="accent1"/>
-          </a:effectRef>
-          <a:fontRef idx="minor">
-            <a:schemeClr val="lt1"/>
-          </a:fontRef>
-        </p:style>
-        <p:txBody>
-          <a:bodyPr rtlCol="0" anchor="ctr"/>
-          <a:lstStyle/>
-          <a:p>
-            <a:pPr algn="ctr"/>
-          </a:p>
-        </p:txBody>
-      </p:sp>
-      <p:sp>
-        <p:nvSpPr>
-          <p:cNvPr id="51" name="Rounded Rectangle 50"/>
-          <p:cNvSpPr/>
-          <p:nvPr/>
-        </p:nvSpPr>
-        <p:spPr>
-          <a:xfrm>
-            <a:off x="4914000" y="2239200"/>
-            <a:ext cx="324000" cy="324000"/>
-          </a:xfrm>
-          <a:prstGeom prst="roundRect">
-            <a:avLst>
-              <a:gd name="adj" fmla="val 50000"/>
-            </a:avLst>
-          </a:prstGeom>
-          <a:solidFill>
-            <a:srgbClr val="FFFFFF"/>
-          </a:solidFill>
-          <a:ln w="9525">
-            <a:solidFill>
-              <a:srgbClr val="6B8FA8"/>
-            </a:solidFill>
-          </a:ln>
-          <a:effectLst/>
-        </p:spPr>
-        <p:style>
-          <a:lnRef idx="1">
-            <a:schemeClr val="accent1"/>
-          </a:lnRef>
-          <a:fillRef idx="3">
-            <a:schemeClr val="accent1"/>
-          </a:fillRef>
-          <a:effectRef idx="2">
-            <a:schemeClr val="accent1"/>
-          </a:effectRef>
-          <a:fontRef idx="minor">
-            <a:schemeClr val="lt1"/>
-          </a:fontRef>
-        </p:style>
-        <p:txBody>
-          <a:bodyPr rtlCol="0" anchor="ctr"/>
-          <a:lstStyle/>
-          <a:p>
-            <a:pPr algn="ctr"/>
-          </a:p>
-        </p:txBody>
-      </p:sp>
-      <p:sp>
-        <p:nvSpPr>
-          <p:cNvPr id="52" name="TextBox 51"/>
-          <p:cNvSpPr txBox="1"/>
-          <p:nvPr/>
-        </p:nvSpPr>
-        <p:spPr>
-          <a:xfrm>
-            <a:off x="4914000" y="2293200"/>
-            <a:ext cx="324000" cy="216000"/>
-          </a:xfrm>
-          <a:prstGeom prst="rect">
-            <a:avLst/>
-          </a:prstGeom>
-          <a:noFill/>
-        </p:spPr>
-        <p:txBody>
-          <a:bodyPr wrap="square" lIns="0" rIns="0" tIns="0" bIns="0" anchor="ctr">
-            <a:spAutoFit/>
-          </a:bodyPr>
-          <a:lstStyle/>
-          <a:p>
-            <a:pPr algn="ctr"/>
-            <a:r>
-              <a:rPr sz="1400" b="1">
-                <a:solidFill>
-                  <a:srgbClr val="6B8FA8"/>
-                </a:solidFill>
-                <a:latin typeface="Roboto Mono"/>
-              </a:rPr>
-              <a:t>2</a:t>
-            </a:r>
-          </a:p>
-        </p:txBody>
-      </p:sp>
-      <p:sp>
-        <p:nvSpPr>
-          <p:cNvPr id="53" name="TextBox 52"/>
-          <p:cNvSpPr txBox="1"/>
-          <p:nvPr/>
-        </p:nvSpPr>
-        <p:spPr>
-          <a:xfrm>
-            <a:off x="5310000" y="2221200"/>
-            <a:ext cx="2700000" cy="144000"/>
-          </a:xfrm>
-          <a:prstGeom prst="rect">
-            <a:avLst/>
-          </a:prstGeom>
-          <a:noFill/>
-        </p:spPr>
-        <p:txBody>
-          <a:bodyPr wrap="square" lIns="0" rIns="0" tIns="0" bIns="0" anchor="t">
-            <a:spAutoFit/>
-          </a:bodyPr>
-          <a:lstStyle/>
-          <a:p>
-            <a:pPr algn="l"/>
-            <a:r>
-              <a:rPr sz="1000" b="1" spc="50">
-                <a:solidFill>
-                  <a:srgbClr val="2F3A48"/>
-                </a:solidFill>
-                <a:latin typeface="Inter"/>
-              </a:rPr>
-              <a:t>ИНФОРМАЦИОННОЕ ПРИСУТСТВИЕ</a:t>
-            </a:r>
-          </a:p>
-        </p:txBody>
-      </p:sp>
-      <p:sp>
-        <p:nvSpPr>
-          <p:cNvPr id="54" name="TextBox 53"/>
-          <p:cNvSpPr txBox="1"/>
-          <p:nvPr/>
-        </p:nvSpPr>
-        <p:spPr>
-          <a:xfrm>
-            <a:off x="5310000" y="2383199"/>
-            <a:ext cx="2700000" cy="125999"/>
-          </a:xfrm>
-          <a:prstGeom prst="rect">
-            <a:avLst/>
-          </a:prstGeom>
-          <a:noFill/>
-        </p:spPr>
-        <p:txBody>
-          <a:bodyPr wrap="square" lIns="0" rIns="0" tIns="0" bIns="0" anchor="t">
-            <a:spAutoFit/>
-          </a:bodyPr>
-          <a:lstStyle/>
-          <a:p>
-            <a:pPr algn="l"/>
-            <a:r>
-              <a:rPr sz="850" b="0">
-                <a:solidFill>
-                  <a:srgbClr val="8A95A3"/>
-                </a:solidFill>
-                <a:latin typeface="Inter"/>
-              </a:rPr>
-              <a:t>Email #2-3: каталог, кейсы, преимущества</a:t>
-            </a:r>
-          </a:p>
-        </p:txBody>
-      </p:sp>
-      <p:sp>
-        <p:nvSpPr>
-          <p:cNvPr id="55" name="TextBox 54"/>
-          <p:cNvSpPr txBox="1"/>
-          <p:nvPr/>
-        </p:nvSpPr>
-        <p:spPr>
-          <a:xfrm>
-            <a:off x="5310000" y="2509200"/>
-            <a:ext cx="2700000" cy="108000"/>
-          </a:xfrm>
-          <a:prstGeom prst="rect">
-            <a:avLst/>
-          </a:prstGeom>
-          <a:noFill/>
-        </p:spPr>
-        <p:txBody>
-          <a:bodyPr wrap="square" lIns="0" rIns="0" tIns="0" bIns="0" anchor="t">
-            <a:spAutoFit/>
-          </a:bodyPr>
-          <a:lstStyle/>
-          <a:p>
-            <a:pPr algn="l"/>
-            <a:r>
-              <a:rPr sz="800" b="1">
-                <a:solidFill>
-                  <a:srgbClr val="6B8FA8"/>
-                </a:solidFill>
-                <a:latin typeface="Roboto Mono"/>
-              </a:rPr>
-              <a:t>Месяц 1</a:t>
-            </a:r>
-          </a:p>
-        </p:txBody>
-      </p:sp>
-      <p:sp>
-        <p:nvSpPr>
-          <p:cNvPr id="56" name="TextBox 55"/>
-          <p:cNvSpPr txBox="1"/>
-          <p:nvPr/>
-        </p:nvSpPr>
-        <p:spPr>
-          <a:xfrm>
-            <a:off x="8100000" y="2275200"/>
-            <a:ext cx="612000" cy="144000"/>
-          </a:xfrm>
-          <a:prstGeom prst="rect">
-            <a:avLst/>
-          </a:prstGeom>
-          <a:noFill/>
-        </p:spPr>
-        <p:txBody>
-          <a:bodyPr wrap="square" lIns="0" rIns="0" tIns="0" bIns="0" anchor="t">
-            <a:spAutoFit/>
-          </a:bodyPr>
-          <a:lstStyle/>
-          <a:p>
-            <a:pPr algn="r"/>
-            <a:r>
-              <a:rPr sz="1200" b="1">
-                <a:solidFill>
-                  <a:srgbClr val="6B8FA8"/>
-                </a:solidFill>
-                <a:latin typeface="Roboto Mono"/>
-              </a:rPr>
-              <a:t>15%</a:t>
-            </a:r>
-          </a:p>
-        </p:txBody>
-      </p:sp>
-      <p:sp>
-        <p:nvSpPr>
-          <p:cNvPr id="57" name="TextBox 56"/>
-          <p:cNvSpPr txBox="1"/>
-          <p:nvPr/>
-        </p:nvSpPr>
-        <p:spPr>
-          <a:xfrm>
-            <a:off x="8100000" y="2437200"/>
-            <a:ext cx="612000" cy="108000"/>
-          </a:xfrm>
-          <a:prstGeom prst="rect">
-            <a:avLst/>
-          </a:prstGeom>
-          <a:noFill/>
-        </p:spPr>
-        <p:txBody>
-          <a:bodyPr wrap="square" lIns="0" rIns="0" tIns="0" bIns="0" anchor="t">
-            <a:spAutoFit/>
-          </a:bodyPr>
-          <a:lstStyle/>
-          <a:p>
-            <a:pPr algn="r"/>
-            <a:r>
-              <a:rPr sz="750" b="0">
-                <a:solidFill>
-                  <a:srgbClr val="8A95A3"/>
-                </a:solidFill>
-                <a:latin typeface="Inter"/>
-              </a:rPr>
-              <a:t>узнаваемость</a:t>
-            </a:r>
-          </a:p>
-        </p:txBody>
-      </p:sp>
-      <p:sp>
-        <p:nvSpPr>
-          <p:cNvPr id="58" name="Rounded Rectangle 57"/>
-          <p:cNvSpPr/>
-          <p:nvPr/>
-        </p:nvSpPr>
-        <p:spPr>
-          <a:xfrm>
-            <a:off x="4824000" y="2725200"/>
-            <a:ext cx="3924000" cy="558000"/>
-          </a:xfrm>
-          <a:prstGeom prst="roundRect">
-            <a:avLst>
-              <a:gd name="adj" fmla="val 4000"/>
-            </a:avLst>
-          </a:prstGeom>
-          <a:solidFill>
-            <a:srgbClr val="F5F2EC"/>
-          </a:solidFill>
-          <a:ln>
-            <a:noFill/>
-          </a:ln>
-          <a:effectLst/>
-        </p:spPr>
-        <p:style>
-          <a:lnRef idx="1">
-            <a:schemeClr val="accent1"/>
-          </a:lnRef>
-          <a:fillRef idx="3">
-            <a:schemeClr val="accent1"/>
-          </a:fillRef>
-          <a:effectRef idx="2">
-            <a:schemeClr val="accent1"/>
-          </a:effectRef>
-          <a:fontRef idx="minor">
-            <a:schemeClr val="lt1"/>
-          </a:fontRef>
-        </p:style>
-        <p:txBody>
-          <a:bodyPr rtlCol="0" anchor="ctr"/>
-          <a:lstStyle/>
-          <a:p>
-            <a:pPr algn="ctr"/>
-          </a:p>
-        </p:txBody>
-      </p:sp>
-      <p:sp>
-        <p:nvSpPr>
-          <p:cNvPr id="59" name="Rectangle 58"/>
-          <p:cNvSpPr/>
-          <p:nvPr/>
-        </p:nvSpPr>
-        <p:spPr>
-          <a:xfrm>
-            <a:off x="4824000" y="2725200"/>
-            <a:ext cx="28800" cy="558000"/>
-          </a:xfrm>
-          <a:prstGeom prst="rect">
-            <a:avLst/>
-          </a:prstGeom>
-          <a:solidFill>
-            <a:srgbClr val="C9A77C"/>
-          </a:solidFill>
-          <a:ln>
-            <a:noFill/>
-          </a:ln>
-          <a:effectLst/>
-        </p:spPr>
-        <p:style>
-          <a:lnRef idx="1">
-            <a:schemeClr val="accent1"/>
-          </a:lnRef>
-          <a:fillRef idx="3">
-            <a:schemeClr val="accent1"/>
-          </a:fillRef>
-          <a:effectRef idx="2">
-            <a:schemeClr val="accent1"/>
-          </a:effectRef>
-          <a:fontRef idx="minor">
-            <a:schemeClr val="lt1"/>
-          </a:fontRef>
-        </p:style>
-        <p:txBody>
-          <a:bodyPr rtlCol="0" anchor="ctr"/>
-          <a:lstStyle/>
-          <a:p>
-            <a:pPr algn="ctr"/>
-          </a:p>
-        </p:txBody>
-      </p:sp>
-      <p:sp>
-        <p:nvSpPr>
-          <p:cNvPr id="60" name="Rounded Rectangle 59"/>
-          <p:cNvSpPr/>
-          <p:nvPr/>
-        </p:nvSpPr>
-        <p:spPr>
-          <a:xfrm>
-            <a:off x="4914000" y="2833200"/>
-            <a:ext cx="324000" cy="324000"/>
-          </a:xfrm>
-          <a:prstGeom prst="roundRect">
-            <a:avLst>
-              <a:gd name="adj" fmla="val 50000"/>
-            </a:avLst>
-          </a:prstGeom>
-          <a:solidFill>
-            <a:srgbClr val="FFFFFF"/>
-          </a:solidFill>
-          <a:ln w="9525">
-            <a:solidFill>
-              <a:srgbClr val="C9A77C"/>
-            </a:solidFill>
-          </a:ln>
-          <a:effectLst/>
-        </p:spPr>
-        <p:style>
-          <a:lnRef idx="1">
-            <a:schemeClr val="accent1"/>
-          </a:lnRef>
-          <a:fillRef idx="3">
-            <a:schemeClr val="accent1"/>
-          </a:fillRef>
-          <a:effectRef idx="2">
-            <a:schemeClr val="accent1"/>
-          </a:effectRef>
-          <a:fontRef idx="minor">
-            <a:schemeClr val="lt1"/>
-          </a:fontRef>
-        </p:style>
-        <p:txBody>
-          <a:bodyPr rtlCol="0" anchor="ctr"/>
-          <a:lstStyle/>
-          <a:p>
-            <a:pPr algn="ctr"/>
-          </a:p>
-        </p:txBody>
-      </p:sp>
-      <p:sp>
-        <p:nvSpPr>
-          <p:cNvPr id="61" name="TextBox 60"/>
-          <p:cNvSpPr txBox="1"/>
-          <p:nvPr/>
-        </p:nvSpPr>
-        <p:spPr>
-          <a:xfrm>
-            <a:off x="4914000" y="2887200"/>
-            <a:ext cx="324000" cy="216000"/>
-          </a:xfrm>
-          <a:prstGeom prst="rect">
-            <a:avLst/>
-          </a:prstGeom>
-          <a:noFill/>
-        </p:spPr>
-        <p:txBody>
-          <a:bodyPr wrap="square" lIns="0" rIns="0" tIns="0" bIns="0" anchor="ctr">
-            <a:spAutoFit/>
-          </a:bodyPr>
-          <a:lstStyle/>
-          <a:p>
-            <a:pPr algn="ctr"/>
-            <a:r>
-              <a:rPr sz="1400" b="1">
-                <a:solidFill>
-                  <a:srgbClr val="C9A77C"/>
-                </a:solidFill>
-                <a:latin typeface="Roboto Mono"/>
-              </a:rPr>
-              <a:t>3</a:t>
-            </a:r>
-          </a:p>
-        </p:txBody>
-      </p:sp>
-      <p:sp>
-        <p:nvSpPr>
-          <p:cNvPr id="62" name="TextBox 61"/>
-          <p:cNvSpPr txBox="1"/>
-          <p:nvPr/>
-        </p:nvSpPr>
-        <p:spPr>
-          <a:xfrm>
-            <a:off x="5310000" y="2815200"/>
-            <a:ext cx="2700000" cy="144000"/>
-          </a:xfrm>
-          <a:prstGeom prst="rect">
-            <a:avLst/>
-          </a:prstGeom>
-          <a:noFill/>
-        </p:spPr>
-        <p:txBody>
-          <a:bodyPr wrap="square" lIns="0" rIns="0" tIns="0" bIns="0" anchor="t">
-            <a:spAutoFit/>
-          </a:bodyPr>
-          <a:lstStyle/>
-          <a:p>
-            <a:pPr algn="l"/>
-            <a:r>
-              <a:rPr sz="1000" b="1" spc="50">
-                <a:solidFill>
-                  <a:srgbClr val="2F3A48"/>
-                </a:solidFill>
-                <a:latin typeface="Inter"/>
-              </a:rPr>
-              <a:t>УЗНАВАЕМОСТЬ</a:t>
-            </a:r>
-          </a:p>
-        </p:txBody>
-      </p:sp>
-      <p:sp>
-        <p:nvSpPr>
-          <p:cNvPr id="63" name="TextBox 62"/>
-          <p:cNvSpPr txBox="1"/>
-          <p:nvPr/>
-        </p:nvSpPr>
-        <p:spPr>
-          <a:xfrm>
-            <a:off x="5310000" y="2977199"/>
-            <a:ext cx="2700000" cy="125999"/>
-          </a:xfrm>
-          <a:prstGeom prst="rect">
-            <a:avLst/>
-          </a:prstGeom>
-          <a:noFill/>
-        </p:spPr>
-        <p:txBody>
-          <a:bodyPr wrap="square" lIns="0" rIns="0" tIns="0" bIns="0" anchor="t">
-            <a:spAutoFit/>
-          </a:bodyPr>
-          <a:lstStyle/>
-          <a:p>
-            <a:pPr algn="l"/>
-            <a:r>
-              <a:rPr sz="850" b="0">
-                <a:solidFill>
-                  <a:srgbClr val="8A95A3"/>
-                </a:solidFill>
-                <a:latin typeface="Inter"/>
-              </a:rPr>
-              <a:t>Email #4-6: отраслевые новости, продукт года</a:t>
-            </a:r>
-          </a:p>
-        </p:txBody>
-      </p:sp>
-      <p:sp>
-        <p:nvSpPr>
-          <p:cNvPr id="64" name="TextBox 63"/>
-          <p:cNvSpPr txBox="1"/>
-          <p:nvPr/>
-        </p:nvSpPr>
-        <p:spPr>
-          <a:xfrm>
-            <a:off x="5310000" y="3103200"/>
-            <a:ext cx="2700000" cy="108000"/>
-          </a:xfrm>
-          <a:prstGeom prst="rect">
-            <a:avLst/>
-          </a:prstGeom>
-          <a:noFill/>
-        </p:spPr>
-        <p:txBody>
-          <a:bodyPr wrap="square" lIns="0" rIns="0" tIns="0" bIns="0" anchor="t">
-            <a:spAutoFit/>
-          </a:bodyPr>
-          <a:lstStyle/>
-          <a:p>
-            <a:pPr algn="l"/>
-            <a:r>
-              <a:rPr sz="800" b="1">
-                <a:solidFill>
-                  <a:srgbClr val="C9A77C"/>
-                </a:solidFill>
-                <a:latin typeface="Roboto Mono"/>
-              </a:rPr>
-              <a:t>Месяц 2-3</a:t>
-            </a:r>
-          </a:p>
-        </p:txBody>
-      </p:sp>
-      <p:sp>
-        <p:nvSpPr>
-          <p:cNvPr id="65" name="TextBox 64"/>
-          <p:cNvSpPr txBox="1"/>
-          <p:nvPr/>
-        </p:nvSpPr>
-        <p:spPr>
-          <a:xfrm>
-            <a:off x="8100000" y="2869200"/>
-            <a:ext cx="612000" cy="144000"/>
-          </a:xfrm>
-          <a:prstGeom prst="rect">
-            <a:avLst/>
-          </a:prstGeom>
-          <a:noFill/>
-        </p:spPr>
-        <p:txBody>
-          <a:bodyPr wrap="square" lIns="0" rIns="0" tIns="0" bIns="0" anchor="t">
-            <a:spAutoFit/>
-          </a:bodyPr>
-          <a:lstStyle/>
-          <a:p>
-            <a:pPr algn="r"/>
-            <a:r>
-              <a:rPr sz="1200" b="1">
-                <a:solidFill>
-                  <a:srgbClr val="C9A77C"/>
-                </a:solidFill>
-                <a:latin typeface="Roboto Mono"/>
-              </a:rPr>
-              <a:t>35%</a:t>
-            </a:r>
-          </a:p>
-        </p:txBody>
-      </p:sp>
-      <p:sp>
-        <p:nvSpPr>
-          <p:cNvPr id="66" name="TextBox 65"/>
-          <p:cNvSpPr txBox="1"/>
-          <p:nvPr/>
-        </p:nvSpPr>
-        <p:spPr>
-          <a:xfrm>
-            <a:off x="8100000" y="3031200"/>
-            <a:ext cx="612000" cy="108000"/>
-          </a:xfrm>
-          <a:prstGeom prst="rect">
-            <a:avLst/>
-          </a:prstGeom>
-          <a:noFill/>
-        </p:spPr>
-        <p:txBody>
-          <a:bodyPr wrap="square" lIns="0" rIns="0" tIns="0" bIns="0" anchor="t">
-            <a:spAutoFit/>
-          </a:bodyPr>
-          <a:lstStyle/>
-          <a:p>
-            <a:pPr algn="r"/>
-            <a:r>
-              <a:rPr sz="750" b="0">
-                <a:solidFill>
-                  <a:srgbClr val="8A95A3"/>
-                </a:solidFill>
-                <a:latin typeface="Inter"/>
-              </a:rPr>
-              <a:t>узнаваемость</a:t>
-            </a:r>
-          </a:p>
-        </p:txBody>
-      </p:sp>
-      <p:sp>
-        <p:nvSpPr>
-          <p:cNvPr id="67" name="Rounded Rectangle 66"/>
-          <p:cNvSpPr/>
-          <p:nvPr/>
-        </p:nvSpPr>
-        <p:spPr>
-          <a:xfrm>
-            <a:off x="4824000" y="3319200"/>
-            <a:ext cx="3924000" cy="558000"/>
-          </a:xfrm>
-          <a:prstGeom prst="roundRect">
-            <a:avLst>
-              <a:gd name="adj" fmla="val 4000"/>
-            </a:avLst>
-          </a:prstGeom>
-          <a:solidFill>
-            <a:srgbClr val="F5F2EC"/>
-          </a:solidFill>
-          <a:ln>
-            <a:noFill/>
-          </a:ln>
-          <a:effectLst/>
-        </p:spPr>
-        <p:style>
-          <a:lnRef idx="1">
-            <a:schemeClr val="accent1"/>
-          </a:lnRef>
-          <a:fillRef idx="3">
-            <a:schemeClr val="accent1"/>
-          </a:fillRef>
-          <a:effectRef idx="2">
-            <a:schemeClr val="accent1"/>
-          </a:effectRef>
-          <a:fontRef idx="minor">
-            <a:schemeClr val="lt1"/>
-          </a:fontRef>
-        </p:style>
-        <p:txBody>
-          <a:bodyPr rtlCol="0" anchor="ctr"/>
-          <a:lstStyle/>
-          <a:p>
-            <a:pPr algn="ctr"/>
-          </a:p>
-        </p:txBody>
-      </p:sp>
-      <p:sp>
-        <p:nvSpPr>
-          <p:cNvPr id="68" name="Rectangle 67"/>
-          <p:cNvSpPr/>
-          <p:nvPr/>
-        </p:nvSpPr>
-        <p:spPr>
-          <a:xfrm>
-            <a:off x="4824000" y="3319200"/>
-            <a:ext cx="28800" cy="558000"/>
-          </a:xfrm>
-          <a:prstGeom prst="rect">
-            <a:avLst/>
-          </a:prstGeom>
-          <a:solidFill>
-            <a:srgbClr val="D4A574"/>
-          </a:solidFill>
-          <a:ln>
-            <a:noFill/>
-          </a:ln>
-          <a:effectLst/>
-        </p:spPr>
-        <p:style>
-          <a:lnRef idx="1">
-            <a:schemeClr val="accent1"/>
-          </a:lnRef>
-          <a:fillRef idx="3">
-            <a:schemeClr val="accent1"/>
-          </a:fillRef>
-          <a:effectRef idx="2">
-            <a:schemeClr val="accent1"/>
-          </a:effectRef>
-          <a:fontRef idx="minor">
-            <a:schemeClr val="lt1"/>
-          </a:fontRef>
-        </p:style>
-        <p:txBody>
-          <a:bodyPr rtlCol="0" anchor="ctr"/>
-          <a:lstStyle/>
-          <a:p>
-            <a:pPr algn="ctr"/>
-          </a:p>
-        </p:txBody>
-      </p:sp>
-      <p:sp>
-        <p:nvSpPr>
-          <p:cNvPr id="69" name="Rounded Rectangle 68"/>
-          <p:cNvSpPr/>
-          <p:nvPr/>
-        </p:nvSpPr>
-        <p:spPr>
-          <a:xfrm>
-            <a:off x="4914000" y="3427200"/>
-            <a:ext cx="324000" cy="324000"/>
-          </a:xfrm>
-          <a:prstGeom prst="roundRect">
-            <a:avLst>
-              <a:gd name="adj" fmla="val 50000"/>
-            </a:avLst>
-          </a:prstGeom>
-          <a:solidFill>
-            <a:srgbClr val="FFFFFF"/>
-          </a:solidFill>
-          <a:ln w="9525">
-            <a:solidFill>
-              <a:srgbClr val="D4A574"/>
-            </a:solidFill>
-          </a:ln>
-          <a:effectLst/>
-        </p:spPr>
-        <p:style>
-          <a:lnRef idx="1">
-            <a:schemeClr val="accent1"/>
-          </a:lnRef>
-          <a:fillRef idx="3">
-            <a:schemeClr val="accent1"/>
-          </a:fillRef>
-          <a:effectRef idx="2">
-            <a:schemeClr val="accent1"/>
-          </a:effectRef>
-          <a:fontRef idx="minor">
-            <a:schemeClr val="lt1"/>
-          </a:fontRef>
-        </p:style>
-        <p:txBody>
-          <a:bodyPr rtlCol="0" anchor="ctr"/>
-          <a:lstStyle/>
-          <a:p>
-            <a:pPr algn="ctr"/>
-          </a:p>
-        </p:txBody>
-      </p:sp>
-      <p:sp>
-        <p:nvSpPr>
-          <p:cNvPr id="70" name="TextBox 69"/>
-          <p:cNvSpPr txBox="1"/>
-          <p:nvPr/>
-        </p:nvSpPr>
-        <p:spPr>
-          <a:xfrm>
-            <a:off x="4914000" y="3481200"/>
-            <a:ext cx="324000" cy="216000"/>
-          </a:xfrm>
-          <a:prstGeom prst="rect">
-            <a:avLst/>
-          </a:prstGeom>
-          <a:noFill/>
-        </p:spPr>
-        <p:txBody>
-          <a:bodyPr wrap="square" lIns="0" rIns="0" tIns="0" bIns="0" anchor="ctr">
-            <a:spAutoFit/>
-          </a:bodyPr>
-          <a:lstStyle/>
-          <a:p>
-            <a:pPr algn="ctr"/>
-            <a:r>
-              <a:rPr sz="1400" b="1">
-                <a:solidFill>
-                  <a:srgbClr val="D4A574"/>
-                </a:solidFill>
-                <a:latin typeface="Roboto Mono"/>
-              </a:rPr>
-              <a:t>4</a:t>
-            </a:r>
-          </a:p>
-        </p:txBody>
-      </p:sp>
-      <p:sp>
-        <p:nvSpPr>
-          <p:cNvPr id="71" name="TextBox 70"/>
-          <p:cNvSpPr txBox="1"/>
-          <p:nvPr/>
-        </p:nvSpPr>
-        <p:spPr>
-          <a:xfrm>
-            <a:off x="5310000" y="3409200"/>
-            <a:ext cx="2700000" cy="144000"/>
-          </a:xfrm>
-          <a:prstGeom prst="rect">
-            <a:avLst/>
-          </a:prstGeom>
-          <a:noFill/>
-        </p:spPr>
-        <p:txBody>
-          <a:bodyPr wrap="square" lIns="0" rIns="0" tIns="0" bIns="0" anchor="t">
-            <a:spAutoFit/>
-          </a:bodyPr>
-          <a:lstStyle/>
-          <a:p>
-            <a:pPr algn="l"/>
-            <a:r>
-              <a:rPr sz="1000" b="1" spc="50">
-                <a:solidFill>
-                  <a:srgbClr val="2F3A48"/>
-                </a:solidFill>
-                <a:latin typeface="Inter"/>
-              </a:rPr>
-              <a:t>ДОВЕРИЕ</a:t>
-            </a:r>
-          </a:p>
-        </p:txBody>
-      </p:sp>
-      <p:sp>
-        <p:nvSpPr>
-          <p:cNvPr id="72" name="TextBox 71"/>
-          <p:cNvSpPr txBox="1"/>
-          <p:nvPr/>
-        </p:nvSpPr>
-        <p:spPr>
-          <a:xfrm>
-            <a:off x="5310000" y="3571199"/>
-            <a:ext cx="2700000" cy="125999"/>
-          </a:xfrm>
-          <a:prstGeom prst="rect">
-            <a:avLst/>
-          </a:prstGeom>
-          <a:noFill/>
-        </p:spPr>
-        <p:txBody>
-          <a:bodyPr wrap="square" lIns="0" rIns="0" tIns="0" bIns="0" anchor="t">
-            <a:spAutoFit/>
-          </a:bodyPr>
-          <a:lstStyle/>
-          <a:p>
-            <a:pPr algn="l"/>
-            <a:r>
-              <a:rPr sz="850" b="0">
-                <a:solidFill>
-                  <a:srgbClr val="8A95A3"/>
-                </a:solidFill>
-                <a:latin typeface="Inter"/>
-              </a:rPr>
-              <a:t>Email #7-9: отзывы, рейтинги, сертификаты</a:t>
-            </a:r>
-          </a:p>
-        </p:txBody>
-      </p:sp>
-      <p:sp>
-        <p:nvSpPr>
-          <p:cNvPr id="73" name="TextBox 72"/>
-          <p:cNvSpPr txBox="1"/>
-          <p:nvPr/>
-        </p:nvSpPr>
-        <p:spPr>
-          <a:xfrm>
-            <a:off x="5310000" y="3697200"/>
-            <a:ext cx="2700000" cy="108000"/>
-          </a:xfrm>
-          <a:prstGeom prst="rect">
-            <a:avLst/>
-          </a:prstGeom>
-          <a:noFill/>
-        </p:spPr>
-        <p:txBody>
-          <a:bodyPr wrap="square" lIns="0" rIns="0" tIns="0" bIns="0" anchor="t">
-            <a:spAutoFit/>
-          </a:bodyPr>
-          <a:lstStyle/>
-          <a:p>
-            <a:pPr algn="l"/>
-            <a:r>
-              <a:rPr sz="800" b="1">
-                <a:solidFill>
-                  <a:srgbClr val="D4A574"/>
-                </a:solidFill>
-                <a:latin typeface="Roboto Mono"/>
-              </a:rPr>
-              <a:t>Месяц 4-5</a:t>
-            </a:r>
-          </a:p>
-        </p:txBody>
-      </p:sp>
-      <p:sp>
-        <p:nvSpPr>
-          <p:cNvPr id="74" name="TextBox 73"/>
-          <p:cNvSpPr txBox="1"/>
-          <p:nvPr/>
-        </p:nvSpPr>
-        <p:spPr>
-          <a:xfrm>
-            <a:off x="8100000" y="3463200"/>
-            <a:ext cx="612000" cy="144000"/>
-          </a:xfrm>
-          <a:prstGeom prst="rect">
-            <a:avLst/>
-          </a:prstGeom>
-          <a:noFill/>
-        </p:spPr>
-        <p:txBody>
-          <a:bodyPr wrap="square" lIns="0" rIns="0" tIns="0" bIns="0" anchor="t">
-            <a:spAutoFit/>
-          </a:bodyPr>
-          <a:lstStyle/>
-          <a:p>
-            <a:pPr algn="r"/>
-            <a:r>
-              <a:rPr sz="1200" b="1">
-                <a:solidFill>
-                  <a:srgbClr val="D4A574"/>
-                </a:solidFill>
-                <a:latin typeface="Roboto Mono"/>
-              </a:rPr>
-              <a:t>60%</a:t>
-            </a:r>
-          </a:p>
-        </p:txBody>
-      </p:sp>
-      <p:sp>
-        <p:nvSpPr>
-          <p:cNvPr id="75" name="TextBox 74"/>
-          <p:cNvSpPr txBox="1"/>
-          <p:nvPr/>
-        </p:nvSpPr>
-        <p:spPr>
-          <a:xfrm>
-            <a:off x="8100000" y="3625200"/>
-            <a:ext cx="612000" cy="108000"/>
-          </a:xfrm>
-          <a:prstGeom prst="rect">
-            <a:avLst/>
-          </a:prstGeom>
-          <a:noFill/>
-        </p:spPr>
-        <p:txBody>
-          <a:bodyPr wrap="square" lIns="0" rIns="0" tIns="0" bIns="0" anchor="t">
-            <a:spAutoFit/>
-          </a:bodyPr>
-          <a:lstStyle/>
-          <a:p>
-            <a:pPr algn="r"/>
-            <a:r>
-              <a:rPr sz="750" b="0">
-                <a:solidFill>
-                  <a:srgbClr val="8A95A3"/>
-                </a:solidFill>
-                <a:latin typeface="Inter"/>
-              </a:rPr>
-              <a:t>узнаваемость</a:t>
-            </a:r>
-          </a:p>
-        </p:txBody>
-      </p:sp>
-      <p:sp>
-        <p:nvSpPr>
-          <p:cNvPr id="76" name="Rounded Rectangle 75"/>
-          <p:cNvSpPr/>
-          <p:nvPr/>
-        </p:nvSpPr>
-        <p:spPr>
-          <a:xfrm>
-            <a:off x="4824000" y="3913200"/>
-            <a:ext cx="3924000" cy="558000"/>
-          </a:xfrm>
-          <a:prstGeom prst="roundRect">
-            <a:avLst>
-              <a:gd name="adj" fmla="val 4000"/>
-            </a:avLst>
-          </a:prstGeom>
-          <a:solidFill>
-            <a:srgbClr val="F5F2EC"/>
-          </a:solidFill>
-          <a:ln>
-            <a:noFill/>
-          </a:ln>
-          <a:effectLst/>
-        </p:spPr>
-        <p:style>
-          <a:lnRef idx="1">
-            <a:schemeClr val="accent1"/>
-          </a:lnRef>
-          <a:fillRef idx="3">
-            <a:schemeClr val="accent1"/>
-          </a:fillRef>
-          <a:effectRef idx="2">
-            <a:schemeClr val="accent1"/>
-          </a:effectRef>
-          <a:fontRef idx="minor">
-            <a:schemeClr val="lt1"/>
-          </a:fontRef>
-        </p:style>
-        <p:txBody>
-          <a:bodyPr rtlCol="0" anchor="ctr"/>
-          <a:lstStyle/>
-          <a:p>
-            <a:pPr algn="ctr"/>
-          </a:p>
-        </p:txBody>
-      </p:sp>
-      <p:sp>
-        <p:nvSpPr>
-          <p:cNvPr id="77" name="Rectangle 76"/>
-          <p:cNvSpPr/>
-          <p:nvPr/>
-        </p:nvSpPr>
-        <p:spPr>
-          <a:xfrm>
-            <a:off x="4824000" y="3913200"/>
-            <a:ext cx="28800" cy="558000"/>
-          </a:xfrm>
-          <a:prstGeom prst="rect">
-            <a:avLst/>
-          </a:prstGeom>
-          <a:solidFill>
-            <a:srgbClr val="C00000"/>
-          </a:solidFill>
-          <a:ln>
-            <a:noFill/>
-          </a:ln>
-          <a:effectLst/>
-        </p:spPr>
-        <p:style>
-          <a:lnRef idx="1">
-            <a:schemeClr val="accent1"/>
-          </a:lnRef>
-          <a:fillRef idx="3">
-            <a:schemeClr val="accent1"/>
-          </a:fillRef>
-          <a:effectRef idx="2">
-            <a:schemeClr val="accent1"/>
-          </a:effectRef>
-          <a:fontRef idx="minor">
-            <a:schemeClr val="lt1"/>
-          </a:fontRef>
-        </p:style>
-        <p:txBody>
-          <a:bodyPr rtlCol="0" anchor="ctr"/>
-          <a:lstStyle/>
-          <a:p>
-            <a:pPr algn="ctr"/>
-          </a:p>
-        </p:txBody>
-      </p:sp>
-      <p:sp>
-        <p:nvSpPr>
-          <p:cNvPr id="78" name="Rounded Rectangle 77"/>
-          <p:cNvSpPr/>
-          <p:nvPr/>
-        </p:nvSpPr>
-        <p:spPr>
-          <a:xfrm>
-            <a:off x="4914000" y="4021200"/>
-            <a:ext cx="324000" cy="324000"/>
-          </a:xfrm>
-          <a:prstGeom prst="roundRect">
-            <a:avLst>
-              <a:gd name="adj" fmla="val 50000"/>
-            </a:avLst>
-          </a:prstGeom>
-          <a:solidFill>
-            <a:srgbClr val="FFFFFF"/>
-          </a:solidFill>
-          <a:ln w="9525">
-            <a:solidFill>
-              <a:srgbClr val="C00000"/>
-            </a:solidFill>
-          </a:ln>
-          <a:effectLst/>
-        </p:spPr>
-        <p:style>
-          <a:lnRef idx="1">
-            <a:schemeClr val="accent1"/>
-          </a:lnRef>
-          <a:fillRef idx="3">
-            <a:schemeClr val="accent1"/>
-          </a:fillRef>
-          <a:effectRef idx="2">
-            <a:schemeClr val="accent1"/>
-          </a:effectRef>
-          <a:fontRef idx="minor">
-            <a:schemeClr val="lt1"/>
-          </a:fontRef>
-        </p:style>
-        <p:txBody>
-          <a:bodyPr rtlCol="0" anchor="ctr"/>
-          <a:lstStyle/>
-          <a:p>
-            <a:pPr algn="ctr"/>
-          </a:p>
-        </p:txBody>
-      </p:sp>
-      <p:sp>
-        <p:nvSpPr>
-          <p:cNvPr id="79" name="TextBox 78"/>
-          <p:cNvSpPr txBox="1"/>
-          <p:nvPr/>
-        </p:nvSpPr>
-        <p:spPr>
-          <a:xfrm>
-            <a:off x="4914000" y="4075200"/>
-            <a:ext cx="324000" cy="216000"/>
-          </a:xfrm>
-          <a:prstGeom prst="rect">
-            <a:avLst/>
-          </a:prstGeom>
-          <a:noFill/>
-        </p:spPr>
-        <p:txBody>
-          <a:bodyPr wrap="square" lIns="0" rIns="0" tIns="0" bIns="0" anchor="ctr">
-            <a:spAutoFit/>
-          </a:bodyPr>
-          <a:lstStyle/>
-          <a:p>
-            <a:pPr algn="ctr"/>
-            <a:r>
-              <a:rPr sz="1400" b="1">
-                <a:solidFill>
-                  <a:srgbClr val="C00000"/>
-                </a:solidFill>
-                <a:latin typeface="Roboto Mono"/>
-              </a:rPr>
-              <a:t>5</a:t>
-            </a:r>
-          </a:p>
-        </p:txBody>
-      </p:sp>
-      <p:sp>
-        <p:nvSpPr>
-          <p:cNvPr id="80" name="TextBox 79"/>
-          <p:cNvSpPr txBox="1"/>
-          <p:nvPr/>
-        </p:nvSpPr>
-        <p:spPr>
-          <a:xfrm>
-            <a:off x="5310000" y="4003200"/>
-            <a:ext cx="2700000" cy="144000"/>
-          </a:xfrm>
-          <a:prstGeom prst="rect">
-            <a:avLst/>
-          </a:prstGeom>
-          <a:noFill/>
-        </p:spPr>
-        <p:txBody>
-          <a:bodyPr wrap="square" lIns="0" rIns="0" tIns="0" bIns="0" anchor="t">
-            <a:spAutoFit/>
-          </a:bodyPr>
-          <a:lstStyle/>
-          <a:p>
-            <a:pPr algn="l"/>
-            <a:r>
-              <a:rPr sz="1000" b="1" spc="50">
-                <a:solidFill>
-                  <a:srgbClr val="2F3A48"/>
-                </a:solidFill>
-                <a:latin typeface="Inter"/>
-              </a:rPr>
-              <a:t>РЕШЕНИЕ О ПАРТНЁРСТВЕ</a:t>
-            </a:r>
-          </a:p>
-        </p:txBody>
-      </p:sp>
-      <p:sp>
-        <p:nvSpPr>
-          <p:cNvPr id="81" name="TextBox 80"/>
-          <p:cNvSpPr txBox="1"/>
-          <p:nvPr/>
-        </p:nvSpPr>
-        <p:spPr>
-          <a:xfrm>
-            <a:off x="5310000" y="4165199"/>
-            <a:ext cx="2700000" cy="125999"/>
-          </a:xfrm>
-          <a:prstGeom prst="rect">
-            <a:avLst/>
-          </a:prstGeom>
-          <a:noFill/>
-        </p:spPr>
-        <p:txBody>
-          <a:bodyPr wrap="square" lIns="0" rIns="0" tIns="0" bIns="0" anchor="t">
-            <a:spAutoFit/>
-          </a:bodyPr>
-          <a:lstStyle/>
-          <a:p>
-            <a:pPr algn="l"/>
-            <a:r>
-              <a:rPr sz="850" b="0">
-                <a:solidFill>
-                  <a:srgbClr val="8A95A3"/>
-                </a:solidFill>
-                <a:latin typeface="Inter"/>
-              </a:rPr>
-              <a:t>Email #10+: спецпредложение для перехода</a:t>
-            </a:r>
-          </a:p>
-        </p:txBody>
-      </p:sp>
-      <p:sp>
-        <p:nvSpPr>
-          <p:cNvPr id="82" name="TextBox 81"/>
-          <p:cNvSpPr txBox="1"/>
-          <p:nvPr/>
-        </p:nvSpPr>
-        <p:spPr>
-          <a:xfrm>
-            <a:off x="5310000" y="4291200"/>
-            <a:ext cx="2700000" cy="108000"/>
-          </a:xfrm>
-          <a:prstGeom prst="rect">
-            <a:avLst/>
-          </a:prstGeom>
-          <a:noFill/>
-        </p:spPr>
-        <p:txBody>
-          <a:bodyPr wrap="square" lIns="0" rIns="0" tIns="0" bIns="0" anchor="t">
-            <a:spAutoFit/>
-          </a:bodyPr>
-          <a:lstStyle/>
-          <a:p>
-            <a:pPr algn="l"/>
-            <a:r>
-              <a:rPr sz="800" b="1">
-                <a:solidFill>
-                  <a:srgbClr val="C00000"/>
-                </a:solidFill>
-                <a:latin typeface="Roboto Mono"/>
-              </a:rPr>
-              <a:t>Месяц 6+</a:t>
-            </a:r>
-          </a:p>
-        </p:txBody>
-      </p:sp>
-      <p:sp>
-        <p:nvSpPr>
-          <p:cNvPr id="83" name="TextBox 82"/>
-          <p:cNvSpPr txBox="1"/>
-          <p:nvPr/>
-        </p:nvSpPr>
-        <p:spPr>
-          <a:xfrm>
-            <a:off x="8100000" y="4057200"/>
-            <a:ext cx="612000" cy="144000"/>
-          </a:xfrm>
-          <a:prstGeom prst="rect">
-            <a:avLst/>
-          </a:prstGeom>
-          <a:noFill/>
-        </p:spPr>
-        <p:txBody>
-          <a:bodyPr wrap="square" lIns="0" rIns="0" tIns="0" bIns="0" anchor="t">
-            <a:spAutoFit/>
-          </a:bodyPr>
-          <a:lstStyle/>
-          <a:p>
-            <a:pPr algn="r"/>
-            <a:r>
-              <a:rPr sz="1200" b="1">
-                <a:solidFill>
-                  <a:srgbClr val="C00000"/>
-                </a:solidFill>
-                <a:latin typeface="Roboto Mono"/>
-              </a:rPr>
-              <a:t>Готов</a:t>
-            </a:r>
-          </a:p>
-        </p:txBody>
-      </p:sp>
-      <p:sp>
-        <p:nvSpPr>
-          <p:cNvPr id="84" name="TextBox 83"/>
-          <p:cNvSpPr txBox="1"/>
-          <p:nvPr/>
-        </p:nvSpPr>
-        <p:spPr>
-          <a:xfrm>
-            <a:off x="8100000" y="4219200"/>
-            <a:ext cx="612000" cy="108000"/>
-          </a:xfrm>
-          <a:prstGeom prst="rect">
-            <a:avLst/>
-          </a:prstGeom>
-          <a:noFill/>
-        </p:spPr>
-        <p:txBody>
-          <a:bodyPr wrap="square" lIns="0" rIns="0" tIns="0" bIns="0" anchor="t">
-            <a:spAutoFit/>
-          </a:bodyPr>
-          <a:lstStyle/>
-          <a:p>
-            <a:pPr algn="r"/>
-            <a:r>
-              <a:rPr sz="750" b="0">
-                <a:solidFill>
-                  <a:srgbClr val="8A95A3"/>
-                </a:solidFill>
-                <a:latin typeface="Inter"/>
-              </a:rPr>
-              <a:t>узнаваемость</a:t>
-            </a:r>
-          </a:p>
-        </p:txBody>
-      </p:sp>
-      <p:sp>
-        <p:nvSpPr>
-          <p:cNvPr id="85" name="Rectangle 84"/>
-          <p:cNvSpPr/>
-          <p:nvPr/>
-        </p:nvSpPr>
-        <p:spPr>
-          <a:xfrm>
-            <a:off x="4824000" y="4651200"/>
-            <a:ext cx="3924000" cy="14400"/>
-          </a:xfrm>
-          <a:prstGeom prst="rect">
-            <a:avLst/>
-          </a:prstGeom>
-          <a:solidFill>
-            <a:srgbClr val="EFE9DD"/>
-          </a:solidFill>
-          <a:ln>
-            <a:noFill/>
-          </a:ln>
-          <a:effectLst/>
-        </p:spPr>
-        <p:style>
-          <a:lnRef idx="1">
-            <a:schemeClr val="accent1"/>
-          </a:lnRef>
-          <a:fillRef idx="3">
-            <a:schemeClr val="accent1"/>
-          </a:fillRef>
-          <a:effectRef idx="2">
-            <a:schemeClr val="accent1"/>
-          </a:effectRef>
-          <a:fontRef idx="minor">
-            <a:schemeClr val="lt1"/>
-          </a:fontRef>
-        </p:style>
-        <p:txBody>
-          <a:bodyPr rtlCol="0" anchor="ctr"/>
-          <a:lstStyle/>
-          <a:p>
-            <a:pPr algn="ctr"/>
-          </a:p>
-        </p:txBody>
-      </p:sp>
-      <p:sp>
-        <p:nvSpPr>
-          <p:cNvPr id="86" name="TextBox 85"/>
-          <p:cNvSpPr txBox="1"/>
-          <p:nvPr/>
-        </p:nvSpPr>
-        <p:spPr>
-          <a:xfrm>
-            <a:off x="4824000" y="4705200"/>
-            <a:ext cx="3924000" cy="108000"/>
-          </a:xfrm>
-          <a:prstGeom prst="rect">
-            <a:avLst/>
-          </a:prstGeom>
-          <a:noFill/>
-        </p:spPr>
-        <p:txBody>
-          <a:bodyPr wrap="square" lIns="0" rIns="0" tIns="0" bIns="0" anchor="t">
-            <a:spAutoFit/>
-          </a:bodyPr>
-          <a:lstStyle/>
-          <a:p>
-            <a:pPr algn="ctr"/>
-            <a:r>
-              <a:rPr sz="850" b="0">
-                <a:solidFill>
-                  <a:srgbClr val="8A95A3"/>
-                </a:solidFill>
-                <a:latin typeface="Inter"/>
-              </a:rPr>
-              <a:t>10+ касаний за 6 месяцев → готовность к партнёрству</a:t>
-            </a:r>
-          </a:p>
-        </p:txBody>
-      </p:sp>
+          <a:extLst>
+            <a:ext uri="{909E8E84-426E-40DD-AFC4-6F175D3DCCD1}">
+              <a14:hiddenFill xmlns:a14="http://schemas.microsoft.com/office/drawing/2010/main">
+                <a:solidFill>
+                  <a:schemeClr val="accent1"/>
+                </a:solidFill>
+              </a14:hiddenFill>
+            </a:ext>
+            <a:ext uri="{91240B29-F687-4F45-9708-019B960494DF}">
+              <a14:hiddenLine xmlns:a14="http://schemas.microsoft.com/office/drawing/2010/main" w="9525">
+                <a:solidFill>
+                  <a:schemeClr val="tx1"/>
+                </a:solidFill>
+                <a:miter lim="800000"/>
+                <a:headEnd/>
+                <a:tailEnd/>
+              </a14:hiddenLine>
+            </a:ext>
+            <a:ext uri="{AF507438-7753-43E0-B8FC-AC1667EBCBE1}">
+              <a14:hiddenEffects xmlns:a14="http://schemas.microsoft.com/office/drawing/2010/main">
+                <a:effectLst>
+                  <a:outerShdw dist="35921" dir="2700000" algn="ctr" rotWithShape="0">
+                    <a:schemeClr val="bg2"/>
+                  </a:outerShdw>
+                </a:effectLst>
+              </a14:hiddenEffects>
+            </a:ext>
+          </a:extLst>
+        </p:spPr>
+      </p:pic>
     </p:spTree>
     <p:extLst>
       <p:ext uri="{BB962C8B-B14F-4D97-AF65-F5344CB8AC3E}">
@@ -24645,6 +21514,14 @@
 <file path=ppt/slides/slide8.xml><?xml version="1.0" encoding="utf-8"?>
 <p:sld xmlns:a="http://schemas.openxmlformats.org/drawingml/2006/main" xmlns:r="http://schemas.openxmlformats.org/officeDocument/2006/relationships" xmlns:p="http://schemas.openxmlformats.org/presentationml/2006/main">
   <p:cSld>
+    <p:bg>
+      <p:bgPr>
+        <a:solidFill>
+          <a:srgbClr val="F5F2EC"/>
+        </a:solidFill>
+        <a:effectLst/>
+      </p:bgPr>
+    </p:bg>
     <p:spTree>
       <p:nvGrpSpPr>
         <p:cNvPr id="1" name=""/>
@@ -24676,7 +21553,7 @@
           <a:noFill/>
         </p:spPr>
         <p:txBody>
-          <a:bodyPr wrap="square" lIns="0" tIns="0" rIns="0" bIns="0" anchor="t">
+          <a:bodyPr wrap="square" lIns="0" rIns="0" tIns="0" bIns="0" anchor="t">
             <a:spAutoFit/>
           </a:bodyPr>
           <a:lstStyle/>
@@ -24711,7 +21588,7 @@
           <a:noFill/>
         </p:spPr>
         <p:txBody>
-          <a:bodyPr wrap="square" lIns="0" tIns="0" rIns="0" bIns="0" anchor="t">
+          <a:bodyPr wrap="square" lIns="0" rIns="0" tIns="0" bIns="0" anchor="t">
             <a:spAutoFit/>
           </a:bodyPr>
           <a:lstStyle/>
@@ -24724,7 +21601,7 @@
                 </a:solidFill>
                 <a:latin typeface="Inter"/>
               </a:rPr>
-              <a:t>Левая часть — результаты запуска новинок 2026 · Правая — стандарт вывода</a:t>
+              <a:t>Итоги 5 новинок 2026 · Первичка: 3.65 млн ₽ · 25 SKU · АКБ 302</a:t>
             </a:r>
           </a:p>
         </p:txBody>
@@ -24774,7 +21651,6 @@
           <a:lstStyle/>
           <a:p>
             <a:pPr algn="ctr"/>
-            <a:endParaRPr/>
           </a:p>
         </p:txBody>
       </p:sp>
@@ -24795,7 +21671,7 @@
           <a:noFill/>
         </p:spPr>
         <p:txBody>
-          <a:bodyPr wrap="square" lIns="0" tIns="0" rIns="0" bIns="0" anchor="t">
+          <a:bodyPr wrap="square" lIns="0" rIns="0" tIns="0" bIns="0" anchor="t">
             <a:spAutoFit/>
           </a:bodyPr>
           <a:lstStyle/>
@@ -24854,24 +21730,1272 @@
           <a:lstStyle/>
           <a:p>
             <a:pPr algn="ctr"/>
-            <a:endParaRPr/>
-          </a:p>
-        </p:txBody>
-      </p:sp>
-      <p:sp>
-        <p:nvSpPr>
-          <p:cNvPr id="12" name="Rounded Rectangle 11"/>
+          </a:p>
+        </p:txBody>
+      </p:sp>
+      <p:graphicFrame>
+        <p:nvGraphicFramePr>
+          <p:cNvPr id="7" name="Table 6"/>
+          <p:cNvGraphicFramePr>
+            <a:graphicFrameLocks noGrp="1"/>
+          </p:cNvGraphicFramePr>
+          <p:nvPr/>
+        </p:nvGraphicFramePr>
+        <p:xfrm>
+          <a:off x="180000" y="961200"/>
+          <a:ext cx="8820000" cy="2033998"/>
+        </p:xfrm>
+        <a:graphic>
+          <a:graphicData uri="http://schemas.openxmlformats.org/drawingml/2006/table">
+            <a:tbl>
+              <a:tblPr firstRow="0" bandRow="0"/>
+              <a:tblGrid>
+                <a:gridCol w="360000"/>
+                <a:gridCol w="1980000"/>
+                <a:gridCol w="432000"/>
+                <a:gridCol w="1440000"/>
+                <a:gridCol w="2088000"/>
+                <a:gridCol w="1260000"/>
+                <a:gridCol w="1260000"/>
+              </a:tblGrid>
+              <a:tr h="251999">
+                <a:tc>
+                  <a:txBody>
+                    <a:bodyPr wrap="square"/>
+                    <a:lstStyle/>
+                    <a:p>
+                      <a:pPr algn="ctr"/>
+                      <a:r>
+                        <a:rPr sz="950" b="1">
+                          <a:solidFill>
+                            <a:srgbClr val="FFFFFF"/>
+                          </a:solidFill>
+                          <a:latin typeface="Inter"/>
+                        </a:rPr>
+                        <a:t>#</a:t>
+                      </a:r>
+                    </a:p>
+                  </a:txBody>
+                  <a:tcPr anchor="ctr" marL="50000" marR="50000" marT="20000" marB="20000">
+                    <a:solidFill>
+                      <a:srgbClr val="2F3A48"/>
+                    </a:solidFill>
+                  </a:tcPr>
+                </a:tc>
+                <a:tc>
+                  <a:txBody>
+                    <a:bodyPr wrap="square"/>
+                    <a:lstStyle/>
+                    <a:p>
+                      <a:pPr algn="l"/>
+                      <a:r>
+                        <a:rPr sz="950" b="1">
+                          <a:solidFill>
+                            <a:srgbClr val="FFFFFF"/>
+                          </a:solidFill>
+                          <a:latin typeface="Inter"/>
+                        </a:rPr>
+                        <a:t>Новинка</a:t>
+                      </a:r>
+                    </a:p>
+                  </a:txBody>
+                  <a:tcPr anchor="ctr" marL="50000" marR="50000" marT="20000" marB="20000">
+                    <a:solidFill>
+                      <a:srgbClr val="2F3A48"/>
+                    </a:solidFill>
+                  </a:tcPr>
+                </a:tc>
+                <a:tc>
+                  <a:txBody>
+                    <a:bodyPr wrap="square"/>
+                    <a:lstStyle/>
+                    <a:p>
+                      <a:pPr algn="ctr"/>
+                      <a:r>
+                        <a:rPr sz="950" b="1">
+                          <a:solidFill>
+                            <a:srgbClr val="FFFFFF"/>
+                          </a:solidFill>
+                          <a:latin typeface="Inter"/>
+                        </a:rPr>
+                        <a:t>SKU</a:t>
+                      </a:r>
+                    </a:p>
+                  </a:txBody>
+                  <a:tcPr anchor="ctr" marL="50000" marR="50000" marT="20000" marB="20000">
+                    <a:solidFill>
+                      <a:srgbClr val="2F3A48"/>
+                    </a:solidFill>
+                  </a:tcPr>
+                </a:tc>
+                <a:tc>
+                  <a:txBody>
+                    <a:bodyPr wrap="square"/>
+                    <a:lstStyle/>
+                    <a:p>
+                      <a:pPr algn="l"/>
+                      <a:r>
+                        <a:rPr sz="950" b="1">
+                          <a:solidFill>
+                            <a:srgbClr val="FFFFFF"/>
+                          </a:solidFill>
+                          <a:latin typeface="Inter"/>
+                        </a:rPr>
+                        <a:t>Фасовки</a:t>
+                      </a:r>
+                    </a:p>
+                  </a:txBody>
+                  <a:tcPr anchor="ctr" marL="50000" marR="50000" marT="20000" marB="20000">
+                    <a:solidFill>
+                      <a:srgbClr val="2F3A48"/>
+                    </a:solidFill>
+                  </a:tcPr>
+                </a:tc>
+                <a:tc>
+                  <a:txBody>
+                    <a:bodyPr wrap="square"/>
+                    <a:lstStyle/>
+                    <a:p>
+                      <a:pPr algn="l"/>
+                      <a:r>
+                        <a:rPr sz="950" b="1">
+                          <a:solidFill>
+                            <a:srgbClr val="FFFFFF"/>
+                          </a:solidFill>
+                          <a:latin typeface="Inter"/>
+                        </a:rPr>
+                        <a:t>Цвета</a:t>
+                      </a:r>
+                    </a:p>
+                  </a:txBody>
+                  <a:tcPr anchor="ctr" marL="50000" marR="50000" marT="20000" marB="20000">
+                    <a:solidFill>
+                      <a:srgbClr val="2F3A48"/>
+                    </a:solidFill>
+                  </a:tcPr>
+                </a:tc>
+                <a:tc>
+                  <a:txBody>
+                    <a:bodyPr wrap="square"/>
+                    <a:lstStyle/>
+                    <a:p>
+                      <a:pPr algn="l"/>
+                      <a:r>
+                        <a:rPr sz="950" b="1">
+                          <a:solidFill>
+                            <a:srgbClr val="FFFFFF"/>
+                          </a:solidFill>
+                          <a:latin typeface="Inter"/>
+                        </a:rPr>
+                        <a:t>Первичка (₽)</a:t>
+                      </a:r>
+                    </a:p>
+                  </a:txBody>
+                  <a:tcPr anchor="ctr" marL="50000" marR="50000" marT="20000" marB="20000">
+                    <a:solidFill>
+                      <a:srgbClr val="2F3A48"/>
+                    </a:solidFill>
+                  </a:tcPr>
+                </a:tc>
+                <a:tc>
+                  <a:txBody>
+                    <a:bodyPr wrap="square"/>
+                    <a:lstStyle/>
+                    <a:p>
+                      <a:pPr algn="ctr"/>
+                      <a:r>
+                        <a:rPr sz="950" b="1">
+                          <a:solidFill>
+                            <a:srgbClr val="FFFFFF"/>
+                          </a:solidFill>
+                          <a:latin typeface="Inter"/>
+                        </a:rPr>
+                        <a:t>АКБ</a:t>
+                      </a:r>
+                    </a:p>
+                  </a:txBody>
+                  <a:tcPr anchor="ctr" marL="50000" marR="50000" marT="20000" marB="20000">
+                    <a:solidFill>
+                      <a:srgbClr val="2F3A48"/>
+                    </a:solidFill>
+                  </a:tcPr>
+                </a:tc>
+              </a:tr>
+              <a:tr h="306000">
+                <a:tc>
+                  <a:txBody>
+                    <a:bodyPr wrap="square"/>
+                    <a:lstStyle/>
+                    <a:p>
+                      <a:pPr algn="ctr"/>
+                      <a:r>
+                        <a:rPr sz="1000" b="1">
+                          <a:solidFill>
+                            <a:srgbClr val="C00000"/>
+                          </a:solidFill>
+                          <a:latin typeface="Roboto Mono"/>
+                        </a:rPr>
+                        <a:t>01</a:t>
+                      </a:r>
+                    </a:p>
+                  </a:txBody>
+                  <a:tcPr anchor="ctr" marL="50000" marR="50000" marT="20000" marB="20000">
+                    <a:solidFill>
+                      <a:srgbClr val="F5F2EC"/>
+                    </a:solidFill>
+                  </a:tcPr>
+                </a:tc>
+                <a:tc>
+                  <a:txBody>
+                    <a:bodyPr wrap="square"/>
+                    <a:lstStyle/>
+                    <a:p>
+                      <a:pPr algn="l"/>
+                      <a:r>
+                        <a:rPr sz="950" b="1">
+                          <a:solidFill>
+                            <a:srgbClr val="2F3A48"/>
+                          </a:solidFill>
+                          <a:latin typeface="Inter"/>
+                        </a:rPr>
+                        <a:t>PROFIWOOD антисептик кроющий ВД</a:t>
+                      </a:r>
+                    </a:p>
+                  </a:txBody>
+                  <a:tcPr anchor="ctr" marL="50000" marR="50000" marT="20000" marB="20000">
+                    <a:solidFill>
+                      <a:srgbClr val="F5F2EC"/>
+                    </a:solidFill>
+                  </a:tcPr>
+                </a:tc>
+                <a:tc>
+                  <a:txBody>
+                    <a:bodyPr wrap="square"/>
+                    <a:lstStyle/>
+                    <a:p>
+                      <a:pPr algn="ctr"/>
+                      <a:r>
+                        <a:rPr sz="1000" b="1">
+                          <a:solidFill>
+                            <a:srgbClr val="2F3A48"/>
+                          </a:solidFill>
+                          <a:latin typeface="Roboto Mono"/>
+                        </a:rPr>
+                        <a:t>14</a:t>
+                      </a:r>
+                    </a:p>
+                  </a:txBody>
+                  <a:tcPr anchor="ctr" marL="50000" marR="50000" marT="20000" marB="20000">
+                    <a:solidFill>
+                      <a:srgbClr val="F5F2EC"/>
+                    </a:solidFill>
+                  </a:tcPr>
+                </a:tc>
+                <a:tc>
+                  <a:txBody>
+                    <a:bodyPr wrap="square"/>
+                    <a:lstStyle/>
+                    <a:p>
+                      <a:pPr algn="l"/>
+                      <a:r>
+                        <a:rPr sz="850" b="0">
+                          <a:solidFill>
+                            <a:srgbClr val="8A95A3"/>
+                          </a:solidFill>
+                          <a:latin typeface="Inter"/>
+                        </a:rPr>
+                        <a:t>0.8 л, 2.1 л, 2.4 л</a:t>
+                      </a:r>
+                    </a:p>
+                  </a:txBody>
+                  <a:tcPr anchor="ctr" marL="50000" marR="50000" marT="20000" marB="20000">
+                    <a:solidFill>
+                      <a:srgbClr val="F5F2EC"/>
+                    </a:solidFill>
+                  </a:tcPr>
+                </a:tc>
+                <a:tc>
+                  <a:txBody>
+                    <a:bodyPr wrap="square"/>
+                    <a:lstStyle/>
+                    <a:p>
+                      <a:pPr algn="l"/>
+                      <a:r>
+                        <a:rPr sz="850" b="0">
+                          <a:solidFill>
+                            <a:srgbClr val="8A95A3"/>
+                          </a:solidFill>
+                          <a:latin typeface="Inter"/>
+                        </a:rPr>
+                        <a:t>база С, бежевый, белый, горький шоколад, серый туман, сканд. серый, шоколад. мусс</a:t>
+                      </a:r>
+                    </a:p>
+                  </a:txBody>
+                  <a:tcPr anchor="ctr" marL="50000" marR="50000" marT="20000" marB="20000">
+                    <a:solidFill>
+                      <a:srgbClr val="F5F2EC"/>
+                    </a:solidFill>
+                  </a:tcPr>
+                </a:tc>
+                <a:tc>
+                  <a:txBody>
+                    <a:bodyPr wrap="square"/>
+                    <a:lstStyle/>
+                    <a:p>
+                      <a:pPr algn="r"/>
+                      <a:r>
+                        <a:rPr sz="1000" b="1">
+                          <a:solidFill>
+                            <a:srgbClr val="C00000"/>
+                          </a:solidFill>
+                          <a:latin typeface="Roboto Mono"/>
+                        </a:rPr>
+                        <a:t>804 тыс</a:t>
+                      </a:r>
+                    </a:p>
+                  </a:txBody>
+                  <a:tcPr anchor="ctr" marL="50000" marR="50000" marT="20000" marB="20000">
+                    <a:solidFill>
+                      <a:srgbClr val="F5F2EC"/>
+                    </a:solidFill>
+                  </a:tcPr>
+                </a:tc>
+                <a:tc>
+                  <a:txBody>
+                    <a:bodyPr wrap="square"/>
+                    <a:lstStyle/>
+                    <a:p>
+                      <a:pPr algn="ctr"/>
+                      <a:r>
+                        <a:rPr sz="1000" b="1">
+                          <a:solidFill>
+                            <a:srgbClr val="2F3A48"/>
+                          </a:solidFill>
+                          <a:latin typeface="Roboto Mono"/>
+                        </a:rPr>
+                        <a:t>100</a:t>
+                      </a:r>
+                    </a:p>
+                  </a:txBody>
+                  <a:tcPr anchor="ctr" marL="50000" marR="50000" marT="20000" marB="20000">
+                    <a:solidFill>
+                      <a:srgbClr val="F5F2EC"/>
+                    </a:solidFill>
+                  </a:tcPr>
+                </a:tc>
+              </a:tr>
+              <a:tr h="306000">
+                <a:tc>
+                  <a:txBody>
+                    <a:bodyPr wrap="square"/>
+                    <a:lstStyle/>
+                    <a:p>
+                      <a:pPr algn="ctr"/>
+                      <a:r>
+                        <a:rPr sz="1000" b="1">
+                          <a:solidFill>
+                            <a:srgbClr val="C9A77C"/>
+                          </a:solidFill>
+                          <a:latin typeface="Roboto Mono"/>
+                        </a:rPr>
+                        <a:t>02</a:t>
+                      </a:r>
+                    </a:p>
+                  </a:txBody>
+                  <a:tcPr anchor="ctr" marL="50000" marR="50000" marT="20000" marB="20000">
+                    <a:solidFill>
+                      <a:srgbClr val="FFFFFF"/>
+                    </a:solidFill>
+                  </a:tcPr>
+                </a:tc>
+                <a:tc>
+                  <a:txBody>
+                    <a:bodyPr wrap="square"/>
+                    <a:lstStyle/>
+                    <a:p>
+                      <a:pPr algn="l"/>
+                      <a:r>
+                        <a:rPr sz="950" b="1">
+                          <a:solidFill>
+                            <a:srgbClr val="2F3A48"/>
+                          </a:solidFill>
+                          <a:latin typeface="Inter"/>
+                        </a:rPr>
+                        <a:t>Ореол краска для плит OSB</a:t>
+                      </a:r>
+                    </a:p>
+                  </a:txBody>
+                  <a:tcPr anchor="ctr" marL="50000" marR="50000" marT="20000" marB="20000">
+                    <a:solidFill>
+                      <a:srgbClr val="FFFFFF"/>
+                    </a:solidFill>
+                  </a:tcPr>
+                </a:tc>
+                <a:tc>
+                  <a:txBody>
+                    <a:bodyPr wrap="square"/>
+                    <a:lstStyle/>
+                    <a:p>
+                      <a:pPr algn="ctr"/>
+                      <a:r>
+                        <a:rPr sz="1000" b="1">
+                          <a:solidFill>
+                            <a:srgbClr val="2F3A48"/>
+                          </a:solidFill>
+                          <a:latin typeface="Roboto Mono"/>
+                        </a:rPr>
+                        <a:t>3</a:t>
+                      </a:r>
+                    </a:p>
+                  </a:txBody>
+                  <a:tcPr anchor="ctr" marL="50000" marR="50000" marT="20000" marB="20000">
+                    <a:solidFill>
+                      <a:srgbClr val="FFFFFF"/>
+                    </a:solidFill>
+                  </a:tcPr>
+                </a:tc>
+                <a:tc>
+                  <a:txBody>
+                    <a:bodyPr wrap="square"/>
+                    <a:lstStyle/>
+                    <a:p>
+                      <a:pPr algn="l"/>
+                      <a:r>
+                        <a:rPr sz="850" b="0">
+                          <a:solidFill>
+                            <a:srgbClr val="8A95A3"/>
+                          </a:solidFill>
+                          <a:latin typeface="Inter"/>
+                        </a:rPr>
+                        <a:t>1 кг, 12 кг, 6 кг</a:t>
+                      </a:r>
+                    </a:p>
+                  </a:txBody>
+                  <a:tcPr anchor="ctr" marL="50000" marR="50000" marT="20000" marB="20000">
+                    <a:solidFill>
+                      <a:srgbClr val="FFFFFF"/>
+                    </a:solidFill>
+                  </a:tcPr>
+                </a:tc>
+                <a:tc>
+                  <a:txBody>
+                    <a:bodyPr wrap="square"/>
+                    <a:lstStyle/>
+                    <a:p>
+                      <a:pPr algn="l"/>
+                      <a:r>
+                        <a:rPr sz="850" b="0">
+                          <a:solidFill>
+                            <a:srgbClr val="8A95A3"/>
+                          </a:solidFill>
+                          <a:latin typeface="Inter"/>
+                        </a:rPr>
+                        <a:t>база А</a:t>
+                      </a:r>
+                    </a:p>
+                  </a:txBody>
+                  <a:tcPr anchor="ctr" marL="50000" marR="50000" marT="20000" marB="20000">
+                    <a:solidFill>
+                      <a:srgbClr val="FFFFFF"/>
+                    </a:solidFill>
+                  </a:tcPr>
+                </a:tc>
+                <a:tc>
+                  <a:txBody>
+                    <a:bodyPr wrap="square"/>
+                    <a:lstStyle/>
+                    <a:p>
+                      <a:pPr algn="r"/>
+                      <a:r>
+                        <a:rPr sz="1000" b="1">
+                          <a:solidFill>
+                            <a:srgbClr val="C9A77C"/>
+                          </a:solidFill>
+                          <a:latin typeface="Roboto Mono"/>
+                        </a:rPr>
+                        <a:t>1,616 тыс</a:t>
+                      </a:r>
+                    </a:p>
+                  </a:txBody>
+                  <a:tcPr anchor="ctr" marL="50000" marR="50000" marT="20000" marB="20000">
+                    <a:solidFill>
+                      <a:srgbClr val="FFFFFF"/>
+                    </a:solidFill>
+                  </a:tcPr>
+                </a:tc>
+                <a:tc>
+                  <a:txBody>
+                    <a:bodyPr wrap="square"/>
+                    <a:lstStyle/>
+                    <a:p>
+                      <a:pPr algn="ctr"/>
+                      <a:r>
+                        <a:rPr sz="1000" b="1">
+                          <a:solidFill>
+                            <a:srgbClr val="2F3A48"/>
+                          </a:solidFill>
+                          <a:latin typeface="Roboto Mono"/>
+                        </a:rPr>
+                        <a:t>197</a:t>
+                      </a:r>
+                    </a:p>
+                  </a:txBody>
+                  <a:tcPr anchor="ctr" marL="50000" marR="50000" marT="20000" marB="20000">
+                    <a:solidFill>
+                      <a:srgbClr val="FFFFFF"/>
+                    </a:solidFill>
+                  </a:tcPr>
+                </a:tc>
+              </a:tr>
+              <a:tr h="306000">
+                <a:tc>
+                  <a:txBody>
+                    <a:bodyPr wrap="square"/>
+                    <a:lstStyle/>
+                    <a:p>
+                      <a:pPr algn="ctr"/>
+                      <a:r>
+                        <a:rPr sz="1000" b="1">
+                          <a:solidFill>
+                            <a:srgbClr val="6B8FA8"/>
+                          </a:solidFill>
+                          <a:latin typeface="Roboto Mono"/>
+                        </a:rPr>
+                        <a:t>03</a:t>
+                      </a:r>
+                    </a:p>
+                  </a:txBody>
+                  <a:tcPr anchor="ctr" marL="50000" marR="50000" marT="20000" marB="20000">
+                    <a:solidFill>
+                      <a:srgbClr val="F5F2EC"/>
+                    </a:solidFill>
+                  </a:tcPr>
+                </a:tc>
+                <a:tc>
+                  <a:txBody>
+                    <a:bodyPr wrap="square"/>
+                    <a:lstStyle/>
+                    <a:p>
+                      <a:pPr algn="l"/>
+                      <a:r>
+                        <a:rPr sz="950" b="1">
+                          <a:solidFill>
+                            <a:srgbClr val="2F3A48"/>
+                          </a:solidFill>
+                          <a:latin typeface="Inter"/>
+                        </a:rPr>
+                        <a:t>NEWTONE ABSOLUTE BLACK</a:t>
+                      </a:r>
+                    </a:p>
+                  </a:txBody>
+                  <a:tcPr anchor="ctr" marL="50000" marR="50000" marT="20000" marB="20000">
+                    <a:solidFill>
+                      <a:srgbClr val="F5F2EC"/>
+                    </a:solidFill>
+                  </a:tcPr>
+                </a:tc>
+                <a:tc>
+                  <a:txBody>
+                    <a:bodyPr wrap="square"/>
+                    <a:lstStyle/>
+                    <a:p>
+                      <a:pPr algn="ctr"/>
+                      <a:r>
+                        <a:rPr sz="1000" b="1">
+                          <a:solidFill>
+                            <a:srgbClr val="2F3A48"/>
+                          </a:solidFill>
+                          <a:latin typeface="Roboto Mono"/>
+                        </a:rPr>
+                        <a:t>2</a:t>
+                      </a:r>
+                    </a:p>
+                  </a:txBody>
+                  <a:tcPr anchor="ctr" marL="50000" marR="50000" marT="20000" marB="20000">
+                    <a:solidFill>
+                      <a:srgbClr val="F5F2EC"/>
+                    </a:solidFill>
+                  </a:tcPr>
+                </a:tc>
+                <a:tc>
+                  <a:txBody>
+                    <a:bodyPr wrap="square"/>
+                    <a:lstStyle/>
+                    <a:p>
+                      <a:pPr algn="l"/>
+                      <a:r>
+                        <a:rPr sz="850" b="0">
+                          <a:solidFill>
+                            <a:srgbClr val="8A95A3"/>
+                          </a:solidFill>
+                          <a:latin typeface="Inter"/>
+                        </a:rPr>
+                        <a:t>10 л, 2.5 л</a:t>
+                      </a:r>
+                    </a:p>
+                  </a:txBody>
+                  <a:tcPr anchor="ctr" marL="50000" marR="50000" marT="20000" marB="20000">
+                    <a:solidFill>
+                      <a:srgbClr val="F5F2EC"/>
+                    </a:solidFill>
+                  </a:tcPr>
+                </a:tc>
+                <a:tc>
+                  <a:txBody>
+                    <a:bodyPr wrap="square"/>
+                    <a:lstStyle/>
+                    <a:p>
+                      <a:pPr algn="l"/>
+                      <a:r>
+                        <a:rPr sz="850" b="0">
+                          <a:solidFill>
+                            <a:srgbClr val="8A95A3"/>
+                          </a:solidFill>
+                          <a:latin typeface="Inter"/>
+                        </a:rPr>
+                        <a:t>чёрный</a:t>
+                      </a:r>
+                    </a:p>
+                  </a:txBody>
+                  <a:tcPr anchor="ctr" marL="50000" marR="50000" marT="20000" marB="20000">
+                    <a:solidFill>
+                      <a:srgbClr val="F5F2EC"/>
+                    </a:solidFill>
+                  </a:tcPr>
+                </a:tc>
+                <a:tc>
+                  <a:txBody>
+                    <a:bodyPr wrap="square"/>
+                    <a:lstStyle/>
+                    <a:p>
+                      <a:pPr algn="r"/>
+                      <a:r>
+                        <a:rPr sz="1000" b="1">
+                          <a:solidFill>
+                            <a:srgbClr val="6B8FA8"/>
+                          </a:solidFill>
+                          <a:latin typeface="Roboto Mono"/>
+                        </a:rPr>
+                        <a:t>111 тыс</a:t>
+                      </a:r>
+                    </a:p>
+                  </a:txBody>
+                  <a:tcPr anchor="ctr" marL="50000" marR="50000" marT="20000" marB="20000">
+                    <a:solidFill>
+                      <a:srgbClr val="F5F2EC"/>
+                    </a:solidFill>
+                  </a:tcPr>
+                </a:tc>
+                <a:tc>
+                  <a:txBody>
+                    <a:bodyPr wrap="square"/>
+                    <a:lstStyle/>
+                    <a:p>
+                      <a:pPr algn="ctr"/>
+                      <a:r>
+                        <a:rPr sz="1000" b="1">
+                          <a:solidFill>
+                            <a:srgbClr val="2F3A48"/>
+                          </a:solidFill>
+                          <a:latin typeface="Roboto Mono"/>
+                        </a:rPr>
+                        <a:t>0</a:t>
+                      </a:r>
+                    </a:p>
+                  </a:txBody>
+                  <a:tcPr anchor="ctr" marL="50000" marR="50000" marT="20000" marB="20000">
+                    <a:solidFill>
+                      <a:srgbClr val="F5F2EC"/>
+                    </a:solidFill>
+                  </a:tcPr>
+                </a:tc>
+              </a:tr>
+              <a:tr h="306000">
+                <a:tc>
+                  <a:txBody>
+                    <a:bodyPr wrap="square"/>
+                    <a:lstStyle/>
+                    <a:p>
+                      <a:pPr algn="ctr"/>
+                      <a:r>
+                        <a:rPr sz="1000" b="1">
+                          <a:solidFill>
+                            <a:srgbClr val="8BAA8A"/>
+                          </a:solidFill>
+                          <a:latin typeface="Roboto Mono"/>
+                        </a:rPr>
+                        <a:t>04</a:t>
+                      </a:r>
+                    </a:p>
+                  </a:txBody>
+                  <a:tcPr anchor="ctr" marL="50000" marR="50000" marT="20000" marB="20000">
+                    <a:solidFill>
+                      <a:srgbClr val="FFFFFF"/>
+                    </a:solidFill>
+                  </a:tcPr>
+                </a:tc>
+                <a:tc>
+                  <a:txBody>
+                    <a:bodyPr wrap="square"/>
+                    <a:lstStyle/>
+                    <a:p>
+                      <a:pPr algn="l"/>
+                      <a:r>
+                        <a:rPr sz="950" b="1">
+                          <a:solidFill>
+                            <a:srgbClr val="2F3A48"/>
+                          </a:solidFill>
+                          <a:latin typeface="Inter"/>
+                        </a:rPr>
+                        <a:t>NEWTONE SKY потолочная</a:t>
+                      </a:r>
+                    </a:p>
+                  </a:txBody>
+                  <a:tcPr anchor="ctr" marL="50000" marR="50000" marT="20000" marB="20000">
+                    <a:solidFill>
+                      <a:srgbClr val="FFFFFF"/>
+                    </a:solidFill>
+                  </a:tcPr>
+                </a:tc>
+                <a:tc>
+                  <a:txBody>
+                    <a:bodyPr wrap="square"/>
+                    <a:lstStyle/>
+                    <a:p>
+                      <a:pPr algn="ctr"/>
+                      <a:r>
+                        <a:rPr sz="1000" b="1">
+                          <a:solidFill>
+                            <a:srgbClr val="2F3A48"/>
+                          </a:solidFill>
+                          <a:latin typeface="Roboto Mono"/>
+                        </a:rPr>
+                        <a:t>2</a:t>
+                      </a:r>
+                    </a:p>
+                  </a:txBody>
+                  <a:tcPr anchor="ctr" marL="50000" marR="50000" marT="20000" marB="20000">
+                    <a:solidFill>
+                      <a:srgbClr val="FFFFFF"/>
+                    </a:solidFill>
+                  </a:tcPr>
+                </a:tc>
+                <a:tc>
+                  <a:txBody>
+                    <a:bodyPr wrap="square"/>
+                    <a:lstStyle/>
+                    <a:p>
+                      <a:pPr algn="l"/>
+                      <a:r>
+                        <a:rPr sz="850" b="0">
+                          <a:solidFill>
+                            <a:srgbClr val="8A95A3"/>
+                          </a:solidFill>
+                          <a:latin typeface="Inter"/>
+                        </a:rPr>
+                        <a:t>2.5 л, 9 л</a:t>
+                      </a:r>
+                    </a:p>
+                  </a:txBody>
+                  <a:tcPr anchor="ctr" marL="50000" marR="50000" marT="20000" marB="20000">
+                    <a:solidFill>
+                      <a:srgbClr val="FFFFFF"/>
+                    </a:solidFill>
+                  </a:tcPr>
+                </a:tc>
+                <a:tc>
+                  <a:txBody>
+                    <a:bodyPr wrap="square"/>
+                    <a:lstStyle/>
+                    <a:p>
+                      <a:pPr algn="l"/>
+                      <a:r>
+                        <a:rPr sz="850" b="0">
+                          <a:solidFill>
+                            <a:srgbClr val="8A95A3"/>
+                          </a:solidFill>
+                          <a:latin typeface="Inter"/>
+                        </a:rPr>
+                        <a:t>ультрабелый</a:t>
+                      </a:r>
+                    </a:p>
+                  </a:txBody>
+                  <a:tcPr anchor="ctr" marL="50000" marR="50000" marT="20000" marB="20000">
+                    <a:solidFill>
+                      <a:srgbClr val="FFFFFF"/>
+                    </a:solidFill>
+                  </a:tcPr>
+                </a:tc>
+                <a:tc>
+                  <a:txBody>
+                    <a:bodyPr wrap="square"/>
+                    <a:lstStyle/>
+                    <a:p>
+                      <a:pPr algn="r"/>
+                      <a:r>
+                        <a:rPr sz="1000" b="1">
+                          <a:solidFill>
+                            <a:srgbClr val="8BAA8A"/>
+                          </a:solidFill>
+                          <a:latin typeface="Roboto Mono"/>
+                        </a:rPr>
+                        <a:t>57 тыс</a:t>
+                      </a:r>
+                    </a:p>
+                  </a:txBody>
+                  <a:tcPr anchor="ctr" marL="50000" marR="50000" marT="20000" marB="20000">
+                    <a:solidFill>
+                      <a:srgbClr val="FFFFFF"/>
+                    </a:solidFill>
+                  </a:tcPr>
+                </a:tc>
+                <a:tc>
+                  <a:txBody>
+                    <a:bodyPr wrap="square"/>
+                    <a:lstStyle/>
+                    <a:p>
+                      <a:pPr algn="ctr"/>
+                      <a:r>
+                        <a:rPr sz="1000" b="1">
+                          <a:solidFill>
+                            <a:srgbClr val="2F3A48"/>
+                          </a:solidFill>
+                          <a:latin typeface="Roboto Mono"/>
+                        </a:rPr>
+                        <a:t>0</a:t>
+                      </a:r>
+                    </a:p>
+                  </a:txBody>
+                  <a:tcPr anchor="ctr" marL="50000" marR="50000" marT="20000" marB="20000">
+                    <a:solidFill>
+                      <a:srgbClr val="FFFFFF"/>
+                    </a:solidFill>
+                  </a:tcPr>
+                </a:tc>
+              </a:tr>
+              <a:tr h="306000">
+                <a:tc>
+                  <a:txBody>
+                    <a:bodyPr wrap="square"/>
+                    <a:lstStyle/>
+                    <a:p>
+                      <a:pPr algn="ctr"/>
+                      <a:r>
+                        <a:rPr sz="1000" b="1">
+                          <a:solidFill>
+                            <a:srgbClr val="7B6FA8"/>
+                          </a:solidFill>
+                          <a:latin typeface="Roboto Mono"/>
+                        </a:rPr>
+                        <a:t>05</a:t>
+                      </a:r>
+                    </a:p>
+                  </a:txBody>
+                  <a:tcPr anchor="ctr" marL="50000" marR="50000" marT="20000" marB="20000">
+                    <a:solidFill>
+                      <a:srgbClr val="F5F2EC"/>
+                    </a:solidFill>
+                  </a:tcPr>
+                </a:tc>
+                <a:tc>
+                  <a:txBody>
+                    <a:bodyPr wrap="square"/>
+                    <a:lstStyle/>
+                    <a:p>
+                      <a:pPr algn="l"/>
+                      <a:r>
+                        <a:rPr sz="950" b="1">
+                          <a:solidFill>
+                            <a:srgbClr val="2F3A48"/>
+                          </a:solidFill>
+                          <a:latin typeface="Inter"/>
+                        </a:rPr>
+                        <a:t>Ореол краска резиновая ВД</a:t>
+                      </a:r>
+                    </a:p>
+                  </a:txBody>
+                  <a:tcPr anchor="ctr" marL="50000" marR="50000" marT="20000" marB="20000">
+                    <a:solidFill>
+                      <a:srgbClr val="F5F2EC"/>
+                    </a:solidFill>
+                  </a:tcPr>
+                </a:tc>
+                <a:tc>
+                  <a:txBody>
+                    <a:bodyPr wrap="square"/>
+                    <a:lstStyle/>
+                    <a:p>
+                      <a:pPr algn="ctr"/>
+                      <a:r>
+                        <a:rPr sz="1000" b="1">
+                          <a:solidFill>
+                            <a:srgbClr val="2F3A48"/>
+                          </a:solidFill>
+                          <a:latin typeface="Roboto Mono"/>
+                        </a:rPr>
+                        <a:t>4</a:t>
+                      </a:r>
+                    </a:p>
+                  </a:txBody>
+                  <a:tcPr anchor="ctr" marL="50000" marR="50000" marT="20000" marB="20000">
+                    <a:solidFill>
+                      <a:srgbClr val="F5F2EC"/>
+                    </a:solidFill>
+                  </a:tcPr>
+                </a:tc>
+                <a:tc>
+                  <a:txBody>
+                    <a:bodyPr wrap="square"/>
+                    <a:lstStyle/>
+                    <a:p>
+                      <a:pPr algn="l"/>
+                      <a:r>
+                        <a:rPr sz="850" b="0">
+                          <a:solidFill>
+                            <a:srgbClr val="8A95A3"/>
+                          </a:solidFill>
+                          <a:latin typeface="Inter"/>
+                        </a:rPr>
+                        <a:t>1.3 кг, 12 кг, 3 кг, 6 кг</a:t>
+                      </a:r>
+                    </a:p>
+                  </a:txBody>
+                  <a:tcPr anchor="ctr" marL="50000" marR="50000" marT="20000" marB="20000">
+                    <a:solidFill>
+                      <a:srgbClr val="F5F2EC"/>
+                    </a:solidFill>
+                  </a:tcPr>
+                </a:tc>
+                <a:tc>
+                  <a:txBody>
+                    <a:bodyPr wrap="square"/>
+                    <a:lstStyle/>
+                    <a:p>
+                      <a:pPr algn="l"/>
+                      <a:r>
+                        <a:rPr sz="850" b="0">
+                          <a:solidFill>
+                            <a:srgbClr val="8A95A3"/>
+                          </a:solidFill>
+                          <a:latin typeface="Inter"/>
+                        </a:rPr>
+                        <a:t>база А</a:t>
+                      </a:r>
+                    </a:p>
+                  </a:txBody>
+                  <a:tcPr anchor="ctr" marL="50000" marR="50000" marT="20000" marB="20000">
+                    <a:solidFill>
+                      <a:srgbClr val="F5F2EC"/>
+                    </a:solidFill>
+                  </a:tcPr>
+                </a:tc>
+                <a:tc>
+                  <a:txBody>
+                    <a:bodyPr wrap="square"/>
+                    <a:lstStyle/>
+                    <a:p>
+                      <a:pPr algn="r"/>
+                      <a:r>
+                        <a:rPr sz="1000" b="1">
+                          <a:solidFill>
+                            <a:srgbClr val="7B6FA8"/>
+                          </a:solidFill>
+                          <a:latin typeface="Roboto Mono"/>
+                        </a:rPr>
+                        <a:t>1,058 тыс</a:t>
+                      </a:r>
+                    </a:p>
+                  </a:txBody>
+                  <a:tcPr anchor="ctr" marL="50000" marR="50000" marT="20000" marB="20000">
+                    <a:solidFill>
+                      <a:srgbClr val="F5F2EC"/>
+                    </a:solidFill>
+                  </a:tcPr>
+                </a:tc>
+                <a:tc>
+                  <a:txBody>
+                    <a:bodyPr wrap="square"/>
+                    <a:lstStyle/>
+                    <a:p>
+                      <a:pPr algn="ctr"/>
+                      <a:r>
+                        <a:rPr sz="1000" b="1">
+                          <a:solidFill>
+                            <a:srgbClr val="2F3A48"/>
+                          </a:solidFill>
+                          <a:latin typeface="Roboto Mono"/>
+                        </a:rPr>
+                        <a:t>5</a:t>
+                      </a:r>
+                    </a:p>
+                  </a:txBody>
+                  <a:tcPr anchor="ctr" marL="50000" marR="50000" marT="20000" marB="20000">
+                    <a:solidFill>
+                      <a:srgbClr val="F5F2EC"/>
+                    </a:solidFill>
+                  </a:tcPr>
+                </a:tc>
+              </a:tr>
+              <a:tr h="251999">
+                <a:tc>
+                  <a:txBody>
+                    <a:bodyPr wrap="square"/>
+                    <a:lstStyle/>
+                    <a:p>
+                      <a:pPr algn="ctr"/>
+                      <a:r>
+                        <a:rPr sz="1000" b="1">
+                          <a:solidFill>
+                            <a:srgbClr val="FFFFFF"/>
+                          </a:solidFill>
+                          <a:latin typeface="Roboto Mono"/>
+                        </a:rPr>
+                        <a:t>Σ</a:t>
+                      </a:r>
+                    </a:p>
+                  </a:txBody>
+                  <a:tcPr anchor="ctr" marL="50000" marR="50000" marT="20000" marB="20000">
+                    <a:solidFill>
+                      <a:srgbClr val="2F3A48"/>
+                    </a:solidFill>
+                  </a:tcPr>
+                </a:tc>
+                <a:tc>
+                  <a:txBody>
+                    <a:bodyPr wrap="square"/>
+                    <a:lstStyle/>
+                    <a:p>
+                      <a:pPr algn="l"/>
+                      <a:r>
+                        <a:rPr sz="1000" b="1">
+                          <a:solidFill>
+                            <a:srgbClr val="FFFFFF"/>
+                          </a:solidFill>
+                          <a:latin typeface="Inter"/>
+                        </a:rPr>
+                        <a:t>ИТОГО</a:t>
+                      </a:r>
+                    </a:p>
+                  </a:txBody>
+                  <a:tcPr anchor="ctr" marL="50000" marR="50000" marT="20000" marB="20000">
+                    <a:solidFill>
+                      <a:srgbClr val="2F3A48"/>
+                    </a:solidFill>
+                  </a:tcPr>
+                </a:tc>
+                <a:tc>
+                  <a:txBody>
+                    <a:bodyPr wrap="square"/>
+                    <a:lstStyle/>
+                    <a:p>
+                      <a:pPr algn="ctr"/>
+                      <a:r>
+                        <a:rPr sz="1000" b="1">
+                          <a:solidFill>
+                            <a:srgbClr val="FFFFFF"/>
+                          </a:solidFill>
+                          <a:latin typeface="Roboto Mono"/>
+                        </a:rPr>
+                        <a:t>25</a:t>
+                      </a:r>
+                    </a:p>
+                  </a:txBody>
+                  <a:tcPr anchor="ctr" marL="50000" marR="50000" marT="20000" marB="20000">
+                    <a:solidFill>
+                      <a:srgbClr val="2F3A48"/>
+                    </a:solidFill>
+                  </a:tcPr>
+                </a:tc>
+                <a:tc>
+                  <a:txBody>
+                    <a:bodyPr wrap="square"/>
+                    <a:lstStyle/>
+                    <a:p>
+                      <a:pPr algn="l"/>
+                      <a:r>
+                        <a:rPr sz="1000" b="0">
+                          <a:solidFill>
+                            <a:srgbClr val="2F3A48"/>
+                          </a:solidFill>
+                          <a:latin typeface="Inter"/>
+                        </a:rPr>
+                        <a:t/>
+                      </a:r>
+                    </a:p>
+                  </a:txBody>
+                  <a:tcPr anchor="ctr" marL="50000" marR="50000" marT="20000" marB="20000">
+                    <a:solidFill>
+                      <a:srgbClr val="2F3A48"/>
+                    </a:solidFill>
+                  </a:tcPr>
+                </a:tc>
+                <a:tc>
+                  <a:txBody>
+                    <a:bodyPr wrap="square"/>
+                    <a:lstStyle/>
+                    <a:p>
+                      <a:pPr algn="l"/>
+                      <a:r>
+                        <a:rPr sz="1000" b="0">
+                          <a:solidFill>
+                            <a:srgbClr val="2F3A48"/>
+                          </a:solidFill>
+                          <a:latin typeface="Inter"/>
+                        </a:rPr>
+                        <a:t/>
+                      </a:r>
+                    </a:p>
+                  </a:txBody>
+                  <a:tcPr anchor="ctr" marL="50000" marR="50000" marT="20000" marB="20000">
+                    <a:solidFill>
+                      <a:srgbClr val="2F3A48"/>
+                    </a:solidFill>
+                  </a:tcPr>
+                </a:tc>
+                <a:tc>
+                  <a:txBody>
+                    <a:bodyPr wrap="square"/>
+                    <a:lstStyle/>
+                    <a:p>
+                      <a:pPr algn="r"/>
+                      <a:r>
+                        <a:rPr sz="1000" b="1">
+                          <a:solidFill>
+                            <a:srgbClr val="FFFFFF"/>
+                          </a:solidFill>
+                          <a:latin typeface="Roboto Mono"/>
+                        </a:rPr>
+                        <a:t>3.65 млн</a:t>
+                      </a:r>
+                    </a:p>
+                  </a:txBody>
+                  <a:tcPr anchor="ctr" marL="50000" marR="50000" marT="20000" marB="20000">
+                    <a:solidFill>
+                      <a:srgbClr val="2F3A48"/>
+                    </a:solidFill>
+                  </a:tcPr>
+                </a:tc>
+                <a:tc>
+                  <a:txBody>
+                    <a:bodyPr wrap="square"/>
+                    <a:lstStyle/>
+                    <a:p>
+                      <a:pPr algn="ctr"/>
+                      <a:r>
+                        <a:rPr sz="1000" b="1">
+                          <a:solidFill>
+                            <a:srgbClr val="FFFFFF"/>
+                          </a:solidFill>
+                          <a:latin typeface="Roboto Mono"/>
+                        </a:rPr>
+                        <a:t>302</a:t>
+                      </a:r>
+                    </a:p>
+                  </a:txBody>
+                  <a:tcPr anchor="ctr" marL="50000" marR="50000" marT="20000" marB="20000">
+                    <a:solidFill>
+                      <a:srgbClr val="2F3A48"/>
+                    </a:solidFill>
+                  </a:tcPr>
+                </a:tc>
+              </a:tr>
+            </a:tbl>
+          </a:graphicData>
+        </a:graphic>
+      </p:graphicFrame>
+      <p:sp>
+        <p:nvSpPr>
+          <p:cNvPr id="8" name="TextBox 7"/>
+          <p:cNvSpPr txBox="1"/>
+          <p:nvPr/>
+        </p:nvSpPr>
+        <p:spPr>
+          <a:xfrm>
+            <a:off x="180000" y="3131999"/>
+            <a:ext cx="8820000" cy="144000"/>
+          </a:xfrm>
+          <a:prstGeom prst="rect">
+            <a:avLst/>
+          </a:prstGeom>
+          <a:noFill/>
+        </p:spPr>
+        <p:txBody>
+          <a:bodyPr wrap="square" lIns="0" rIns="0" tIns="0" bIns="0" anchor="t">
+            <a:spAutoFit/>
+          </a:bodyPr>
+          <a:lstStyle/>
+          <a:p>
+            <a:pPr algn="l"/>
+            <a:r>
+              <a:rPr sz="1100" b="1" spc="200">
+                <a:solidFill>
+                  <a:srgbClr val="C00000"/>
+                </a:solidFill>
+                <a:latin typeface="Inter"/>
+              </a:rPr>
+              <a:t>СТАНДАРТ ВЫВОДА · 3 ФАЗЫ</a:t>
+            </a:r>
+          </a:p>
+        </p:txBody>
+      </p:sp>
+      <p:sp>
+        <p:nvSpPr>
+          <p:cNvPr id="9" name="Rectangle 8"/>
           <p:cNvSpPr/>
           <p:nvPr/>
         </p:nvSpPr>
         <p:spPr>
           <a:xfrm>
-            <a:off x="4680000" y="961200"/>
-            <a:ext cx="4212000" cy="3859200"/>
+            <a:off x="180000" y="3293999"/>
+            <a:ext cx="8820000" cy="14400"/>
+          </a:xfrm>
+          <a:prstGeom prst="rect">
+            <a:avLst/>
+          </a:prstGeom>
+          <a:solidFill>
+            <a:srgbClr val="EFE9DD"/>
+          </a:solidFill>
+          <a:ln>
+            <a:noFill/>
+          </a:ln>
+          <a:effectLst/>
+        </p:spPr>
+        <p:style>
+          <a:lnRef idx="1">
+            <a:schemeClr val="accent1"/>
+          </a:lnRef>
+          <a:fillRef idx="3">
+            <a:schemeClr val="accent1"/>
+          </a:fillRef>
+          <a:effectRef idx="2">
+            <a:schemeClr val="accent1"/>
+          </a:effectRef>
+          <a:fontRef idx="minor">
+            <a:schemeClr val="lt1"/>
+          </a:fontRef>
+        </p:style>
+        <p:txBody>
+          <a:bodyPr rtlCol="0" anchor="ctr"/>
+          <a:lstStyle/>
+          <a:p>
+            <a:pPr algn="ctr"/>
+          </a:p>
+        </p:txBody>
+      </p:sp>
+      <p:sp>
+        <p:nvSpPr>
+          <p:cNvPr id="10" name="Rounded Rectangle 9"/>
+          <p:cNvSpPr/>
+          <p:nvPr/>
+        </p:nvSpPr>
+        <p:spPr>
+          <a:xfrm>
+            <a:off x="180000" y="3348000"/>
+            <a:ext cx="2808000" cy="1440000"/>
           </a:xfrm>
           <a:prstGeom prst="roundRect">
             <a:avLst>
-              <a:gd name="adj" fmla="val 2000"/>
+              <a:gd name="adj" fmla="val 3000"/>
             </a:avLst>
           </a:prstGeom>
           <a:solidFill>
@@ -24903,7 +23027,85 @@
           <a:lstStyle/>
           <a:p>
             <a:pPr algn="ctr"/>
-            <a:endParaRPr/>
+          </a:p>
+        </p:txBody>
+      </p:sp>
+      <p:sp>
+        <p:nvSpPr>
+          <p:cNvPr id="11" name="Rectangle 10"/>
+          <p:cNvSpPr/>
+          <p:nvPr/>
+        </p:nvSpPr>
+        <p:spPr>
+          <a:xfrm>
+            <a:off x="180000" y="3348000"/>
+            <a:ext cx="2808000" cy="21600"/>
+          </a:xfrm>
+          <a:prstGeom prst="rect">
+            <a:avLst/>
+          </a:prstGeom>
+          <a:solidFill>
+            <a:srgbClr val="C00000"/>
+          </a:solidFill>
+          <a:ln>
+            <a:noFill/>
+          </a:ln>
+          <a:effectLst/>
+        </p:spPr>
+        <p:style>
+          <a:lnRef idx="1">
+            <a:schemeClr val="accent1"/>
+          </a:lnRef>
+          <a:fillRef idx="3">
+            <a:schemeClr val="accent1"/>
+          </a:fillRef>
+          <a:effectRef idx="2">
+            <a:schemeClr val="accent1"/>
+          </a:effectRef>
+          <a:fontRef idx="minor">
+            <a:schemeClr val="lt1"/>
+          </a:fontRef>
+        </p:style>
+        <p:txBody>
+          <a:bodyPr rtlCol="0" anchor="ctr"/>
+          <a:lstStyle/>
+          <a:p>
+            <a:pPr algn="ctr"/>
+          </a:p>
+        </p:txBody>
+      </p:sp>
+      <p:sp>
+        <p:nvSpPr>
+          <p:cNvPr id="12" name="TextBox 11"/>
+          <p:cNvSpPr txBox="1"/>
+          <p:nvPr/>
+        </p:nvSpPr>
+        <p:spPr>
+          <a:xfrm>
+            <a:off x="324000" y="3456000"/>
+            <a:ext cx="540000" cy="251999"/>
+          </a:xfrm>
+          <a:prstGeom prst="rect">
+            <a:avLst/>
+          </a:prstGeom>
+          <a:noFill/>
+        </p:spPr>
+        <p:txBody>
+          <a:bodyPr wrap="square" lIns="0" rIns="0" tIns="0" bIns="0" anchor="ctr">
+            <a:spAutoFit/>
+          </a:bodyPr>
+          <a:lstStyle/>
+          <a:p>
+            <a:pPr algn="l"/>
+            <a:r>
+              <a:rPr sz="2400" b="1">
+                <a:solidFill>
+                  <a:srgbClr val="C00000"/>
+                </a:solidFill>
+                <a:latin typeface="Roboto Mono"/>
+              </a:rPr>
+              <a:t>01</a:t>
+            </a:r>
           </a:p>
         </p:txBody>
       </p:sp>
@@ -24915,29 +23117,29 @@
         </p:nvSpPr>
         <p:spPr>
           <a:xfrm>
-            <a:off x="4824000" y="1105200"/>
-            <a:ext cx="3600000" cy="180000"/>
-          </a:xfrm>
-          <a:prstGeom prst="rect">
-            <a:avLst/>
-          </a:prstGeom>
-          <a:noFill/>
-        </p:spPr>
-        <p:txBody>
-          <a:bodyPr wrap="square" lIns="0" tIns="0" rIns="0" bIns="0" anchor="t">
+            <a:off x="900000" y="3473999"/>
+            <a:ext cx="1980000" cy="144000"/>
+          </a:xfrm>
+          <a:prstGeom prst="rect">
+            <a:avLst/>
+          </a:prstGeom>
+          <a:noFill/>
+        </p:spPr>
+        <p:txBody>
+          <a:bodyPr wrap="square" lIns="0" rIns="0" tIns="0" bIns="0" anchor="t">
             <a:spAutoFit/>
           </a:bodyPr>
           <a:lstStyle/>
           <a:p>
             <a:pPr algn="l"/>
             <a:r>
-              <a:rPr sz="1100" b="1" spc="200">
-                <a:solidFill>
-                  <a:srgbClr val="C00000"/>
+              <a:rPr sz="1100" b="1" spc="100">
+                <a:solidFill>
+                  <a:srgbClr val="2F3A48"/>
                 </a:solidFill>
                 <a:latin typeface="Inter"/>
               </a:rPr>
-              <a:t>СТАНДАРТ ВЫВОДА · 3 ФАЗЫ</a:t>
+              <a:t>ПОДГОТОВКА</a:t>
             </a:r>
           </a:p>
         </p:txBody>
@@ -24950,29 +23152,29 @@
         </p:nvSpPr>
         <p:spPr>
           <a:xfrm>
-            <a:off x="4824000" y="1303200"/>
-            <a:ext cx="3600000" cy="144000"/>
-          </a:xfrm>
-          <a:prstGeom prst="rect">
-            <a:avLst/>
-          </a:prstGeom>
-          <a:noFill/>
-        </p:spPr>
-        <p:txBody>
-          <a:bodyPr wrap="square" lIns="0" tIns="0" rIns="0" bIns="0" anchor="t">
+            <a:off x="900000" y="3618000"/>
+            <a:ext cx="1980000" cy="108000"/>
+          </a:xfrm>
+          <a:prstGeom prst="rect">
+            <a:avLst/>
+          </a:prstGeom>
+          <a:noFill/>
+        </p:spPr>
+        <p:txBody>
+          <a:bodyPr wrap="square" lIns="0" rIns="0" tIns="0" bIns="0" anchor="t">
             <a:spAutoFit/>
           </a:bodyPr>
           <a:lstStyle/>
           <a:p>
             <a:pPr algn="l"/>
             <a:r>
-              <a:rPr sz="1000" b="0">
-                <a:solidFill>
-                  <a:srgbClr val="8A95A3"/>
-                </a:solidFill>
-                <a:latin typeface="Inter"/>
-              </a:rPr>
-              <a:t>Подготовка → Запуск → Сопровождение</a:t>
+              <a:rPr sz="900" b="1">
+                <a:solidFill>
+                  <a:srgbClr val="C00000"/>
+                </a:solidFill>
+                <a:latin typeface="Roboto Mono"/>
+              </a:rPr>
+              <a:t>−60 до 0 дней</a:t>
             </a:r>
           </a:p>
         </p:txBody>
@@ -24985,8 +23187,8 @@
         </p:nvSpPr>
         <p:spPr>
           <a:xfrm>
-            <a:off x="4824000" y="1501200"/>
-            <a:ext cx="3924000" cy="21600"/>
+            <a:off x="324000" y="3816000"/>
+            <a:ext cx="2520000" cy="14400"/>
           </a:xfrm>
           <a:prstGeom prst="rect">
             <a:avLst/>
@@ -25018,33 +23220,238 @@
           <a:lstStyle/>
           <a:p>
             <a:pPr algn="ctr"/>
-            <a:endParaRPr/>
-          </a:p>
-        </p:txBody>
-      </p:sp>
-      <p:sp>
-        <p:nvSpPr>
-          <p:cNvPr id="16" name="Rounded Rectangle 15"/>
+          </a:p>
+        </p:txBody>
+      </p:sp>
+      <p:sp>
+        <p:nvSpPr>
+          <p:cNvPr id="16" name="TextBox 15"/>
+          <p:cNvSpPr txBox="1"/>
+          <p:nvPr/>
+        </p:nvSpPr>
+        <p:spPr>
+          <a:xfrm>
+            <a:off x="324000" y="3888000"/>
+            <a:ext cx="72000" cy="108000"/>
+          </a:xfrm>
+          <a:prstGeom prst="rect">
+            <a:avLst/>
+          </a:prstGeom>
+          <a:noFill/>
+        </p:spPr>
+        <p:txBody>
+          <a:bodyPr wrap="square" lIns="0" rIns="0" tIns="0" bIns="0" anchor="t">
+            <a:spAutoFit/>
+          </a:bodyPr>
+          <a:lstStyle/>
+          <a:p>
+            <a:pPr algn="l"/>
+            <a:r>
+              <a:rPr sz="1200" b="1">
+                <a:solidFill>
+                  <a:srgbClr val="C00000"/>
+                </a:solidFill>
+                <a:latin typeface="Inter"/>
+              </a:rPr>
+              <a:t>·</a:t>
+            </a:r>
+          </a:p>
+        </p:txBody>
+      </p:sp>
+      <p:sp>
+        <p:nvSpPr>
+          <p:cNvPr id="17" name="TextBox 16"/>
+          <p:cNvSpPr txBox="1"/>
+          <p:nvPr/>
+        </p:nvSpPr>
+        <p:spPr>
+          <a:xfrm>
+            <a:off x="414000" y="3895200"/>
+            <a:ext cx="2412000" cy="108000"/>
+          </a:xfrm>
+          <a:prstGeom prst="rect">
+            <a:avLst/>
+          </a:prstGeom>
+          <a:noFill/>
+        </p:spPr>
+        <p:txBody>
+          <a:bodyPr wrap="square" lIns="0" rIns="0" tIns="0" bIns="0" anchor="t">
+            <a:spAutoFit/>
+          </a:bodyPr>
+          <a:lstStyle/>
+          <a:p>
+            <a:pPr algn="l"/>
+            <a:r>
+              <a:rPr sz="900" b="0">
+                <a:solidFill>
+                  <a:srgbClr val="2F3A48"/>
+                </a:solidFill>
+                <a:latin typeface="Inter"/>
+              </a:rPr>
+              <a:t>Анализ рынка и конкурентов</a:t>
+            </a:r>
+          </a:p>
+        </p:txBody>
+      </p:sp>
+      <p:sp>
+        <p:nvSpPr>
+          <p:cNvPr id="18" name="TextBox 17"/>
+          <p:cNvSpPr txBox="1"/>
+          <p:nvPr/>
+        </p:nvSpPr>
+        <p:spPr>
+          <a:xfrm>
+            <a:off x="324000" y="4024800"/>
+            <a:ext cx="72000" cy="108000"/>
+          </a:xfrm>
+          <a:prstGeom prst="rect">
+            <a:avLst/>
+          </a:prstGeom>
+          <a:noFill/>
+        </p:spPr>
+        <p:txBody>
+          <a:bodyPr wrap="square" lIns="0" rIns="0" tIns="0" bIns="0" anchor="t">
+            <a:spAutoFit/>
+          </a:bodyPr>
+          <a:lstStyle/>
+          <a:p>
+            <a:pPr algn="l"/>
+            <a:r>
+              <a:rPr sz="1200" b="1">
+                <a:solidFill>
+                  <a:srgbClr val="C00000"/>
+                </a:solidFill>
+                <a:latin typeface="Inter"/>
+              </a:rPr>
+              <a:t>·</a:t>
+            </a:r>
+          </a:p>
+        </p:txBody>
+      </p:sp>
+      <p:sp>
+        <p:nvSpPr>
+          <p:cNvPr id="19" name="TextBox 18"/>
+          <p:cNvSpPr txBox="1"/>
+          <p:nvPr/>
+        </p:nvSpPr>
+        <p:spPr>
+          <a:xfrm>
+            <a:off x="414000" y="4032000"/>
+            <a:ext cx="2412000" cy="108000"/>
+          </a:xfrm>
+          <a:prstGeom prst="rect">
+            <a:avLst/>
+          </a:prstGeom>
+          <a:noFill/>
+        </p:spPr>
+        <p:txBody>
+          <a:bodyPr wrap="square" lIns="0" rIns="0" tIns="0" bIns="0" anchor="t">
+            <a:spAutoFit/>
+          </a:bodyPr>
+          <a:lstStyle/>
+          <a:p>
+            <a:pPr algn="l"/>
+            <a:r>
+              <a:rPr sz="900" b="0">
+                <a:solidFill>
+                  <a:srgbClr val="2F3A48"/>
+                </a:solidFill>
+                <a:latin typeface="Inter"/>
+              </a:rPr>
+              <a:t>Ценообразование и MML</a:t>
+            </a:r>
+          </a:p>
+        </p:txBody>
+      </p:sp>
+      <p:sp>
+        <p:nvSpPr>
+          <p:cNvPr id="20" name="TextBox 19"/>
+          <p:cNvSpPr txBox="1"/>
+          <p:nvPr/>
+        </p:nvSpPr>
+        <p:spPr>
+          <a:xfrm>
+            <a:off x="324000" y="4161600"/>
+            <a:ext cx="72000" cy="108000"/>
+          </a:xfrm>
+          <a:prstGeom prst="rect">
+            <a:avLst/>
+          </a:prstGeom>
+          <a:noFill/>
+        </p:spPr>
+        <p:txBody>
+          <a:bodyPr wrap="square" lIns="0" rIns="0" tIns="0" bIns="0" anchor="t">
+            <a:spAutoFit/>
+          </a:bodyPr>
+          <a:lstStyle/>
+          <a:p>
+            <a:pPr algn="l"/>
+            <a:r>
+              <a:rPr sz="1200" b="1">
+                <a:solidFill>
+                  <a:srgbClr val="C00000"/>
+                </a:solidFill>
+                <a:latin typeface="Inter"/>
+              </a:rPr>
+              <a:t>·</a:t>
+            </a:r>
+          </a:p>
+        </p:txBody>
+      </p:sp>
+      <p:sp>
+        <p:nvSpPr>
+          <p:cNvPr id="21" name="TextBox 20"/>
+          <p:cNvSpPr txBox="1"/>
+          <p:nvPr/>
+        </p:nvSpPr>
+        <p:spPr>
+          <a:xfrm>
+            <a:off x="414000" y="4168800"/>
+            <a:ext cx="2412000" cy="108000"/>
+          </a:xfrm>
+          <a:prstGeom prst="rect">
+            <a:avLst/>
+          </a:prstGeom>
+          <a:noFill/>
+        </p:spPr>
+        <p:txBody>
+          <a:bodyPr wrap="square" lIns="0" rIns="0" tIns="0" bIns="0" anchor="t">
+            <a:spAutoFit/>
+          </a:bodyPr>
+          <a:lstStyle/>
+          <a:p>
+            <a:pPr algn="l"/>
+            <a:r>
+              <a:rPr sz="900" b="0">
+                <a:solidFill>
+                  <a:srgbClr val="2F3A48"/>
+                </a:solidFill>
+                <a:latin typeface="Inter"/>
+              </a:rPr>
+              <a:t>Подготовка POSM и контента</a:t>
+            </a:r>
+          </a:p>
+        </p:txBody>
+      </p:sp>
+      <p:sp>
+        <p:nvSpPr>
+          <p:cNvPr id="22" name="Rectangle 21"/>
           <p:cNvSpPr/>
           <p:nvPr/>
         </p:nvSpPr>
         <p:spPr>
           <a:xfrm>
-            <a:off x="4824000" y="1627200"/>
-            <a:ext cx="3924000" cy="972000"/>
-          </a:xfrm>
-          <a:prstGeom prst="roundRect">
-            <a:avLst>
-              <a:gd name="adj" fmla="val 4000"/>
-            </a:avLst>
+            <a:off x="324000" y="4446000"/>
+            <a:ext cx="2520000" cy="10800"/>
+          </a:xfrm>
+          <a:prstGeom prst="rect">
+            <a:avLst/>
           </a:prstGeom>
           <a:solidFill>
-            <a:srgbClr val="F5F2EC"/>
+            <a:srgbClr val="EFE9DD"/>
           </a:solidFill>
-          <a:ln w="6350">
-            <a:solidFill>
-              <a:srgbClr val="D9D2C2"/>
-            </a:solidFill>
+          <a:ln>
+            <a:noFill/>
           </a:ln>
           <a:effectLst/>
         </p:spPr>
@@ -25067,1658 +23474,128 @@
           <a:lstStyle/>
           <a:p>
             <a:pPr algn="ctr"/>
-            <a:endParaRPr/>
-          </a:p>
-        </p:txBody>
-      </p:sp>
-      <p:sp>
-        <p:nvSpPr>
-          <p:cNvPr id="17" name="Rounded Rectangle 16"/>
+          </a:p>
+        </p:txBody>
+      </p:sp>
+      <p:sp>
+        <p:nvSpPr>
+          <p:cNvPr id="23" name="TextBox 22"/>
+          <p:cNvSpPr txBox="1"/>
+          <p:nvPr/>
+        </p:nvSpPr>
+        <p:spPr>
+          <a:xfrm>
+            <a:off x="324000" y="4482000"/>
+            <a:ext cx="1080000" cy="125999"/>
+          </a:xfrm>
+          <a:prstGeom prst="rect">
+            <a:avLst/>
+          </a:prstGeom>
+          <a:noFill/>
+        </p:spPr>
+        <p:txBody>
+          <a:bodyPr wrap="square" lIns="0" rIns="0" tIns="0" bIns="0" anchor="ctr">
+            <a:spAutoFit/>
+          </a:bodyPr>
+          <a:lstStyle/>
+          <a:p>
+            <a:pPr algn="l"/>
+            <a:r>
+              <a:rPr sz="800" b="1">
+                <a:solidFill>
+                  <a:srgbClr val="8A95A3"/>
+                </a:solidFill>
+                <a:latin typeface="Inter"/>
+              </a:rPr>
+              <a:t>KPI:</a:t>
+            </a:r>
+          </a:p>
+        </p:txBody>
+      </p:sp>
+      <p:sp>
+        <p:nvSpPr>
+          <p:cNvPr id="24" name="TextBox 23"/>
+          <p:cNvSpPr txBox="1"/>
+          <p:nvPr/>
+        </p:nvSpPr>
+        <p:spPr>
+          <a:xfrm>
+            <a:off x="720000" y="4482000"/>
+            <a:ext cx="1080000" cy="125999"/>
+          </a:xfrm>
+          <a:prstGeom prst="rect">
+            <a:avLst/>
+          </a:prstGeom>
+          <a:noFill/>
+        </p:spPr>
+        <p:txBody>
+          <a:bodyPr wrap="square" lIns="0" rIns="0" tIns="0" bIns="0" anchor="ctr">
+            <a:spAutoFit/>
+          </a:bodyPr>
+          <a:lstStyle/>
+          <a:p>
+            <a:pPr algn="l"/>
+            <a:r>
+              <a:rPr sz="1200" b="1">
+                <a:solidFill>
+                  <a:srgbClr val="C00000"/>
+                </a:solidFill>
+                <a:latin typeface="Roboto Mono"/>
+              </a:rPr>
+              <a:t>60 дней</a:t>
+            </a:r>
+          </a:p>
+        </p:txBody>
+      </p:sp>
+      <p:sp>
+        <p:nvSpPr>
+          <p:cNvPr id="25" name="TextBox 24"/>
+          <p:cNvSpPr txBox="1"/>
+          <p:nvPr/>
+        </p:nvSpPr>
+        <p:spPr>
+          <a:xfrm>
+            <a:off x="1800000" y="4482000"/>
+            <a:ext cx="1008000" cy="125999"/>
+          </a:xfrm>
+          <a:prstGeom prst="rect">
+            <a:avLst/>
+          </a:prstGeom>
+          <a:noFill/>
+        </p:spPr>
+        <p:txBody>
+          <a:bodyPr wrap="square" lIns="0" rIns="0" tIns="0" bIns="0" anchor="ctr">
+            <a:spAutoFit/>
+          </a:bodyPr>
+          <a:lstStyle/>
+          <a:p>
+            <a:pPr algn="r"/>
+            <a:r>
+              <a:rPr sz="850" b="0">
+                <a:solidFill>
+                  <a:srgbClr val="8A95A3"/>
+                </a:solidFill>
+                <a:latin typeface="Inter"/>
+              </a:rPr>
+              <a:t>до запуска</a:t>
+            </a:r>
+          </a:p>
+        </p:txBody>
+      </p:sp>
+      <p:sp>
+        <p:nvSpPr>
+          <p:cNvPr id="26" name="Rounded Rectangle 25"/>
           <p:cNvSpPr/>
           <p:nvPr/>
         </p:nvSpPr>
         <p:spPr>
           <a:xfrm>
-            <a:off x="4824000" y="1627200"/>
-            <a:ext cx="864000" cy="972000"/>
+            <a:off x="3096000" y="3348000"/>
+            <a:ext cx="2808000" cy="1440000"/>
           </a:xfrm>
           <a:prstGeom prst="roundRect">
             <a:avLst>
-              <a:gd name="adj" fmla="val 4000"/>
-            </a:avLst>
-          </a:prstGeom>
-          <a:solidFill>
-            <a:srgbClr val="FFFFFF"/>
-          </a:solidFill>
-          <a:ln>
-            <a:noFill/>
-          </a:ln>
-          <a:effectLst/>
-        </p:spPr>
-        <p:style>
-          <a:lnRef idx="1">
-            <a:schemeClr val="accent1"/>
-          </a:lnRef>
-          <a:fillRef idx="3">
-            <a:schemeClr val="accent1"/>
-          </a:fillRef>
-          <a:effectRef idx="2">
-            <a:schemeClr val="accent1"/>
-          </a:effectRef>
-          <a:fontRef idx="minor">
-            <a:schemeClr val="lt1"/>
-          </a:fontRef>
-        </p:style>
-        <p:txBody>
-          <a:bodyPr rtlCol="0" anchor="ctr"/>
-          <a:lstStyle/>
-          <a:p>
-            <a:pPr algn="ctr"/>
-            <a:endParaRPr/>
-          </a:p>
-        </p:txBody>
-      </p:sp>
-      <p:sp>
-        <p:nvSpPr>
-          <p:cNvPr id="18" name="Rectangle 17"/>
-          <p:cNvSpPr/>
-          <p:nvPr/>
-        </p:nvSpPr>
-        <p:spPr>
-          <a:xfrm>
-            <a:off x="4824000" y="1627200"/>
-            <a:ext cx="39600" cy="972000"/>
-          </a:xfrm>
-          <a:prstGeom prst="rect">
-            <a:avLst/>
-          </a:prstGeom>
-          <a:solidFill>
-            <a:srgbClr val="C00000"/>
-          </a:solidFill>
-          <a:ln>
-            <a:noFill/>
-          </a:ln>
-          <a:effectLst/>
-        </p:spPr>
-        <p:style>
-          <a:lnRef idx="1">
-            <a:schemeClr val="accent1"/>
-          </a:lnRef>
-          <a:fillRef idx="3">
-            <a:schemeClr val="accent1"/>
-          </a:fillRef>
-          <a:effectRef idx="2">
-            <a:schemeClr val="accent1"/>
-          </a:effectRef>
-          <a:fontRef idx="minor">
-            <a:schemeClr val="lt1"/>
-          </a:fontRef>
-        </p:style>
-        <p:txBody>
-          <a:bodyPr rtlCol="0" anchor="ctr"/>
-          <a:lstStyle/>
-          <a:p>
-            <a:pPr algn="ctr"/>
-            <a:endParaRPr/>
-          </a:p>
-        </p:txBody>
-      </p:sp>
-      <p:sp>
-        <p:nvSpPr>
-          <p:cNvPr id="19" name="TextBox 18"/>
-          <p:cNvSpPr txBox="1"/>
-          <p:nvPr/>
-        </p:nvSpPr>
-        <p:spPr>
-          <a:xfrm>
-            <a:off x="4824000" y="1807200"/>
-            <a:ext cx="864000" cy="396000"/>
-          </a:xfrm>
-          <a:prstGeom prst="rect">
-            <a:avLst/>
-          </a:prstGeom>
-          <a:noFill/>
-        </p:spPr>
-        <p:txBody>
-          <a:bodyPr wrap="square" lIns="0" tIns="0" rIns="0" bIns="0" anchor="ctr">
-            <a:spAutoFit/>
-          </a:bodyPr>
-          <a:lstStyle/>
-          <a:p>
-            <a:pPr algn="ctr"/>
-            <a:r>
-              <a:rPr sz="2800" b="1">
-                <a:solidFill>
-                  <a:srgbClr val="C00000"/>
-                </a:solidFill>
-                <a:latin typeface="Roboto Mono"/>
-              </a:rPr>
-              <a:t>01</a:t>
-            </a:r>
-          </a:p>
-        </p:txBody>
-      </p:sp>
-      <p:sp>
-        <p:nvSpPr>
-          <p:cNvPr id="20" name="TextBox 19"/>
-          <p:cNvSpPr txBox="1"/>
-          <p:nvPr/>
-        </p:nvSpPr>
-        <p:spPr>
-          <a:xfrm>
-            <a:off x="4824000" y="2239200"/>
-            <a:ext cx="864000" cy="144000"/>
-          </a:xfrm>
-          <a:prstGeom prst="rect">
-            <a:avLst/>
-          </a:prstGeom>
-          <a:noFill/>
-        </p:spPr>
-        <p:txBody>
-          <a:bodyPr wrap="square" lIns="0" tIns="0" rIns="0" bIns="0" anchor="t">
-            <a:spAutoFit/>
-          </a:bodyPr>
-          <a:lstStyle/>
-          <a:p>
-            <a:pPr algn="ctr"/>
-            <a:r>
-              <a:rPr sz="900" b="1">
-                <a:solidFill>
-                  <a:srgbClr val="8A95A3"/>
-                </a:solidFill>
-                <a:latin typeface="Roboto Mono"/>
-              </a:rPr>
-              <a:t>−60 до 0 дней</a:t>
-            </a:r>
-          </a:p>
-        </p:txBody>
-      </p:sp>
-      <p:sp>
-        <p:nvSpPr>
-          <p:cNvPr id="21" name="TextBox 20"/>
-          <p:cNvSpPr txBox="1"/>
-          <p:nvPr/>
-        </p:nvSpPr>
-        <p:spPr>
-          <a:xfrm>
-            <a:off x="4824000" y="2401200"/>
-            <a:ext cx="864000" cy="125999"/>
-          </a:xfrm>
-          <a:prstGeom prst="rect">
-            <a:avLst/>
-          </a:prstGeom>
-          <a:noFill/>
-        </p:spPr>
-        <p:txBody>
-          <a:bodyPr wrap="square" lIns="0" tIns="0" rIns="0" bIns="0" anchor="t">
-            <a:spAutoFit/>
-          </a:bodyPr>
-          <a:lstStyle/>
-          <a:p>
-            <a:pPr algn="ctr"/>
-            <a:r>
-              <a:rPr sz="750" b="1" spc="200">
-                <a:solidFill>
-                  <a:srgbClr val="C00000"/>
-                </a:solidFill>
-                <a:latin typeface="Inter"/>
-              </a:rPr>
-              <a:t>ФАЗА 01</a:t>
-            </a:r>
-          </a:p>
-        </p:txBody>
-      </p:sp>
-      <p:sp>
-        <p:nvSpPr>
-          <p:cNvPr id="22" name="TextBox 21"/>
-          <p:cNvSpPr txBox="1"/>
-          <p:nvPr/>
-        </p:nvSpPr>
-        <p:spPr>
-          <a:xfrm>
-            <a:off x="5796000" y="1735200"/>
-            <a:ext cx="2844000" cy="162000"/>
-          </a:xfrm>
-          <a:prstGeom prst="rect">
-            <a:avLst/>
-          </a:prstGeom>
-          <a:noFill/>
-        </p:spPr>
-        <p:txBody>
-          <a:bodyPr wrap="square" lIns="0" tIns="0" rIns="0" bIns="0" anchor="t">
-            <a:spAutoFit/>
-          </a:bodyPr>
-          <a:lstStyle/>
-          <a:p>
-            <a:pPr algn="l"/>
-            <a:r>
-              <a:rPr sz="1200" b="1" spc="100">
-                <a:solidFill>
-                  <a:srgbClr val="2F3A48"/>
-                </a:solidFill>
-                <a:latin typeface="Inter"/>
-              </a:rPr>
-              <a:t>ПОДГОТОВКА</a:t>
-            </a:r>
-          </a:p>
-        </p:txBody>
-      </p:sp>
-      <p:sp>
-        <p:nvSpPr>
-          <p:cNvPr id="23" name="TextBox 22"/>
-          <p:cNvSpPr txBox="1"/>
-          <p:nvPr/>
-        </p:nvSpPr>
-        <p:spPr>
-          <a:xfrm>
-            <a:off x="5796000" y="1969200"/>
-            <a:ext cx="72000" cy="115200"/>
-          </a:xfrm>
-          <a:prstGeom prst="rect">
-            <a:avLst/>
-          </a:prstGeom>
-          <a:noFill/>
-        </p:spPr>
-        <p:txBody>
-          <a:bodyPr wrap="square" lIns="0" tIns="0" rIns="0" bIns="0" anchor="t">
-            <a:spAutoFit/>
-          </a:bodyPr>
-          <a:lstStyle/>
-          <a:p>
-            <a:pPr algn="l"/>
-            <a:r>
-              <a:rPr sz="1200" b="1">
-                <a:solidFill>
-                  <a:srgbClr val="C00000"/>
-                </a:solidFill>
-                <a:latin typeface="Inter"/>
-              </a:rPr>
-              <a:t>·</a:t>
-            </a:r>
-          </a:p>
-        </p:txBody>
-      </p:sp>
-      <p:sp>
-        <p:nvSpPr>
-          <p:cNvPr id="24" name="TextBox 23"/>
-          <p:cNvSpPr txBox="1"/>
-          <p:nvPr/>
-        </p:nvSpPr>
-        <p:spPr>
-          <a:xfrm>
-            <a:off x="5886000" y="1980000"/>
-            <a:ext cx="2754000" cy="115200"/>
-          </a:xfrm>
-          <a:prstGeom prst="rect">
-            <a:avLst/>
-          </a:prstGeom>
-          <a:noFill/>
-        </p:spPr>
-        <p:txBody>
-          <a:bodyPr wrap="square" lIns="0" tIns="0" rIns="0" bIns="0" anchor="t">
-            <a:spAutoFit/>
-          </a:bodyPr>
-          <a:lstStyle/>
-          <a:p>
-            <a:pPr algn="l"/>
-            <a:r>
-              <a:rPr sz="900" b="0">
-                <a:solidFill>
-                  <a:srgbClr val="2F3A48"/>
-                </a:solidFill>
-                <a:latin typeface="Inter"/>
-              </a:rPr>
-              <a:t>Анализ рынка и конкурентов</a:t>
-            </a:r>
-          </a:p>
-        </p:txBody>
-      </p:sp>
-      <p:sp>
-        <p:nvSpPr>
-          <p:cNvPr id="25" name="TextBox 24"/>
-          <p:cNvSpPr txBox="1"/>
-          <p:nvPr/>
-        </p:nvSpPr>
-        <p:spPr>
-          <a:xfrm>
-            <a:off x="5796000" y="2098800"/>
-            <a:ext cx="72000" cy="115200"/>
-          </a:xfrm>
-          <a:prstGeom prst="rect">
-            <a:avLst/>
-          </a:prstGeom>
-          <a:noFill/>
-        </p:spPr>
-        <p:txBody>
-          <a:bodyPr wrap="square" lIns="0" tIns="0" rIns="0" bIns="0" anchor="t">
-            <a:spAutoFit/>
-          </a:bodyPr>
-          <a:lstStyle/>
-          <a:p>
-            <a:pPr algn="l"/>
-            <a:r>
-              <a:rPr sz="1200" b="1">
-                <a:solidFill>
-                  <a:srgbClr val="C00000"/>
-                </a:solidFill>
-                <a:latin typeface="Inter"/>
-              </a:rPr>
-              <a:t>·</a:t>
-            </a:r>
-          </a:p>
-        </p:txBody>
-      </p:sp>
-      <p:sp>
-        <p:nvSpPr>
-          <p:cNvPr id="26" name="TextBox 25"/>
-          <p:cNvSpPr txBox="1"/>
-          <p:nvPr/>
-        </p:nvSpPr>
-        <p:spPr>
-          <a:xfrm>
-            <a:off x="5886000" y="2109600"/>
-            <a:ext cx="2754000" cy="115200"/>
-          </a:xfrm>
-          <a:prstGeom prst="rect">
-            <a:avLst/>
-          </a:prstGeom>
-          <a:noFill/>
-        </p:spPr>
-        <p:txBody>
-          <a:bodyPr wrap="square" lIns="0" tIns="0" rIns="0" bIns="0" anchor="t">
-            <a:spAutoFit/>
-          </a:bodyPr>
-          <a:lstStyle/>
-          <a:p>
-            <a:pPr algn="l"/>
-            <a:r>
-              <a:rPr sz="900" b="0">
-                <a:solidFill>
-                  <a:srgbClr val="2F3A48"/>
-                </a:solidFill>
-                <a:latin typeface="Inter"/>
-              </a:rPr>
-              <a:t>Ценообразование и MML</a:t>
-            </a:r>
-          </a:p>
-        </p:txBody>
-      </p:sp>
-      <p:sp>
-        <p:nvSpPr>
-          <p:cNvPr id="27" name="TextBox 26"/>
-          <p:cNvSpPr txBox="1"/>
-          <p:nvPr/>
-        </p:nvSpPr>
-        <p:spPr>
-          <a:xfrm>
-            <a:off x="5796000" y="2228400"/>
-            <a:ext cx="72000" cy="115200"/>
-          </a:xfrm>
-          <a:prstGeom prst="rect">
-            <a:avLst/>
-          </a:prstGeom>
-          <a:noFill/>
-        </p:spPr>
-        <p:txBody>
-          <a:bodyPr wrap="square" lIns="0" tIns="0" rIns="0" bIns="0" anchor="t">
-            <a:spAutoFit/>
-          </a:bodyPr>
-          <a:lstStyle/>
-          <a:p>
-            <a:pPr algn="l"/>
-            <a:r>
-              <a:rPr sz="1200" b="1">
-                <a:solidFill>
-                  <a:srgbClr val="C00000"/>
-                </a:solidFill>
-                <a:latin typeface="Inter"/>
-              </a:rPr>
-              <a:t>·</a:t>
-            </a:r>
-          </a:p>
-        </p:txBody>
-      </p:sp>
-      <p:sp>
-        <p:nvSpPr>
-          <p:cNvPr id="28" name="TextBox 27"/>
-          <p:cNvSpPr txBox="1"/>
-          <p:nvPr/>
-        </p:nvSpPr>
-        <p:spPr>
-          <a:xfrm>
-            <a:off x="5886000" y="2239200"/>
-            <a:ext cx="2754000" cy="115200"/>
-          </a:xfrm>
-          <a:prstGeom prst="rect">
-            <a:avLst/>
-          </a:prstGeom>
-          <a:noFill/>
-        </p:spPr>
-        <p:txBody>
-          <a:bodyPr wrap="square" lIns="0" tIns="0" rIns="0" bIns="0" anchor="t">
-            <a:spAutoFit/>
-          </a:bodyPr>
-          <a:lstStyle/>
-          <a:p>
-            <a:pPr algn="l"/>
-            <a:r>
-              <a:rPr sz="900" b="0">
-                <a:solidFill>
-                  <a:srgbClr val="2F3A48"/>
-                </a:solidFill>
-                <a:latin typeface="Inter"/>
-              </a:rPr>
-              <a:t>Подготовка POSM и контента</a:t>
-            </a:r>
-          </a:p>
-        </p:txBody>
-      </p:sp>
-      <p:sp>
-        <p:nvSpPr>
-          <p:cNvPr id="29" name="TextBox 28"/>
-          <p:cNvSpPr txBox="1"/>
-          <p:nvPr/>
-        </p:nvSpPr>
-        <p:spPr>
-          <a:xfrm>
-            <a:off x="7560000" y="2293200"/>
-            <a:ext cx="1080000" cy="144000"/>
-          </a:xfrm>
-          <a:prstGeom prst="rect">
-            <a:avLst/>
-          </a:prstGeom>
-          <a:noFill/>
-        </p:spPr>
-        <p:txBody>
-          <a:bodyPr wrap="square" lIns="0" tIns="0" rIns="0" bIns="0" anchor="t">
-            <a:spAutoFit/>
-          </a:bodyPr>
-          <a:lstStyle/>
-          <a:p>
-            <a:pPr algn="r"/>
-            <a:r>
-              <a:rPr sz="1400" b="1">
-                <a:solidFill>
-                  <a:srgbClr val="C00000"/>
-                </a:solidFill>
-                <a:latin typeface="Roboto Mono"/>
-              </a:rPr>
-              <a:t>60 дней</a:t>
-            </a:r>
-          </a:p>
-        </p:txBody>
-      </p:sp>
-      <p:sp>
-        <p:nvSpPr>
-          <p:cNvPr id="30" name="TextBox 29"/>
-          <p:cNvSpPr txBox="1"/>
-          <p:nvPr/>
-        </p:nvSpPr>
-        <p:spPr>
-          <a:xfrm>
-            <a:off x="7560000" y="2437200"/>
-            <a:ext cx="1080000" cy="108000"/>
-          </a:xfrm>
-          <a:prstGeom prst="rect">
-            <a:avLst/>
-          </a:prstGeom>
-          <a:noFill/>
-        </p:spPr>
-        <p:txBody>
-          <a:bodyPr wrap="square" lIns="0" tIns="0" rIns="0" bIns="0" anchor="t">
-            <a:spAutoFit/>
-          </a:bodyPr>
-          <a:lstStyle/>
-          <a:p>
-            <a:pPr algn="r"/>
-            <a:r>
-              <a:rPr sz="800" b="0">
-                <a:solidFill>
-                  <a:srgbClr val="8A95A3"/>
-                </a:solidFill>
-                <a:latin typeface="Inter"/>
-              </a:rPr>
-              <a:t>до запуска</a:t>
-            </a:r>
-          </a:p>
-        </p:txBody>
-      </p:sp>
-      <p:sp>
-        <p:nvSpPr>
-          <p:cNvPr id="31" name="Rounded Rectangle 30"/>
-          <p:cNvSpPr/>
-          <p:nvPr/>
-        </p:nvSpPr>
-        <p:spPr>
-          <a:xfrm>
-            <a:off x="4824000" y="2671200"/>
-            <a:ext cx="3924000" cy="972000"/>
-          </a:xfrm>
-          <a:prstGeom prst="roundRect">
-            <a:avLst>
-              <a:gd name="adj" fmla="val 4000"/>
-            </a:avLst>
-          </a:prstGeom>
-          <a:solidFill>
-            <a:srgbClr val="F5F2EC"/>
-          </a:solidFill>
-          <a:ln w="6350">
-            <a:solidFill>
-              <a:srgbClr val="D9D2C2"/>
-            </a:solidFill>
-          </a:ln>
-          <a:effectLst/>
-        </p:spPr>
-        <p:style>
-          <a:lnRef idx="1">
-            <a:schemeClr val="accent1"/>
-          </a:lnRef>
-          <a:fillRef idx="3">
-            <a:schemeClr val="accent1"/>
-          </a:fillRef>
-          <a:effectRef idx="2">
-            <a:schemeClr val="accent1"/>
-          </a:effectRef>
-          <a:fontRef idx="minor">
-            <a:schemeClr val="lt1"/>
-          </a:fontRef>
-        </p:style>
-        <p:txBody>
-          <a:bodyPr rtlCol="0" anchor="ctr"/>
-          <a:lstStyle/>
-          <a:p>
-            <a:pPr algn="ctr"/>
-            <a:endParaRPr/>
-          </a:p>
-        </p:txBody>
-      </p:sp>
-      <p:sp>
-        <p:nvSpPr>
-          <p:cNvPr id="32" name="Rounded Rectangle 31"/>
-          <p:cNvSpPr/>
-          <p:nvPr/>
-        </p:nvSpPr>
-        <p:spPr>
-          <a:xfrm>
-            <a:off x="4824000" y="2671200"/>
-            <a:ext cx="864000" cy="972000"/>
-          </a:xfrm>
-          <a:prstGeom prst="roundRect">
-            <a:avLst>
-              <a:gd name="adj" fmla="val 4000"/>
-            </a:avLst>
-          </a:prstGeom>
-          <a:solidFill>
-            <a:srgbClr val="FFFFFF"/>
-          </a:solidFill>
-          <a:ln>
-            <a:noFill/>
-          </a:ln>
-          <a:effectLst/>
-        </p:spPr>
-        <p:style>
-          <a:lnRef idx="1">
-            <a:schemeClr val="accent1"/>
-          </a:lnRef>
-          <a:fillRef idx="3">
-            <a:schemeClr val="accent1"/>
-          </a:fillRef>
-          <a:effectRef idx="2">
-            <a:schemeClr val="accent1"/>
-          </a:effectRef>
-          <a:fontRef idx="minor">
-            <a:schemeClr val="lt1"/>
-          </a:fontRef>
-        </p:style>
-        <p:txBody>
-          <a:bodyPr rtlCol="0" anchor="ctr"/>
-          <a:lstStyle/>
-          <a:p>
-            <a:pPr algn="ctr"/>
-            <a:endParaRPr/>
-          </a:p>
-        </p:txBody>
-      </p:sp>
-      <p:sp>
-        <p:nvSpPr>
-          <p:cNvPr id="33" name="Rectangle 32"/>
-          <p:cNvSpPr/>
-          <p:nvPr/>
-        </p:nvSpPr>
-        <p:spPr>
-          <a:xfrm>
-            <a:off x="4824000" y="2671200"/>
-            <a:ext cx="39600" cy="972000"/>
-          </a:xfrm>
-          <a:prstGeom prst="rect">
-            <a:avLst/>
-          </a:prstGeom>
-          <a:solidFill>
-            <a:srgbClr val="C9A77C"/>
-          </a:solidFill>
-          <a:ln>
-            <a:noFill/>
-          </a:ln>
-          <a:effectLst/>
-        </p:spPr>
-        <p:style>
-          <a:lnRef idx="1">
-            <a:schemeClr val="accent1"/>
-          </a:lnRef>
-          <a:fillRef idx="3">
-            <a:schemeClr val="accent1"/>
-          </a:fillRef>
-          <a:effectRef idx="2">
-            <a:schemeClr val="accent1"/>
-          </a:effectRef>
-          <a:fontRef idx="minor">
-            <a:schemeClr val="lt1"/>
-          </a:fontRef>
-        </p:style>
-        <p:txBody>
-          <a:bodyPr rtlCol="0" anchor="ctr"/>
-          <a:lstStyle/>
-          <a:p>
-            <a:pPr algn="ctr"/>
-            <a:endParaRPr/>
-          </a:p>
-        </p:txBody>
-      </p:sp>
-      <p:sp>
-        <p:nvSpPr>
-          <p:cNvPr id="34" name="TextBox 33"/>
-          <p:cNvSpPr txBox="1"/>
-          <p:nvPr/>
-        </p:nvSpPr>
-        <p:spPr>
-          <a:xfrm>
-            <a:off x="4824000" y="2851200"/>
-            <a:ext cx="864000" cy="396000"/>
-          </a:xfrm>
-          <a:prstGeom prst="rect">
-            <a:avLst/>
-          </a:prstGeom>
-          <a:noFill/>
-        </p:spPr>
-        <p:txBody>
-          <a:bodyPr wrap="square" lIns="0" tIns="0" rIns="0" bIns="0" anchor="ctr">
-            <a:spAutoFit/>
-          </a:bodyPr>
-          <a:lstStyle/>
-          <a:p>
-            <a:pPr algn="ctr"/>
-            <a:r>
-              <a:rPr sz="2800" b="1">
-                <a:solidFill>
-                  <a:srgbClr val="C9A77C"/>
-                </a:solidFill>
-                <a:latin typeface="Roboto Mono"/>
-              </a:rPr>
-              <a:t>02</a:t>
-            </a:r>
-          </a:p>
-        </p:txBody>
-      </p:sp>
-      <p:sp>
-        <p:nvSpPr>
-          <p:cNvPr id="35" name="TextBox 34"/>
-          <p:cNvSpPr txBox="1"/>
-          <p:nvPr/>
-        </p:nvSpPr>
-        <p:spPr>
-          <a:xfrm>
-            <a:off x="4824000" y="3283200"/>
-            <a:ext cx="864000" cy="144000"/>
-          </a:xfrm>
-          <a:prstGeom prst="rect">
-            <a:avLst/>
-          </a:prstGeom>
-          <a:noFill/>
-        </p:spPr>
-        <p:txBody>
-          <a:bodyPr wrap="square" lIns="0" tIns="0" rIns="0" bIns="0" anchor="t">
-            <a:spAutoFit/>
-          </a:bodyPr>
-          <a:lstStyle/>
-          <a:p>
-            <a:pPr algn="ctr"/>
-            <a:r>
-              <a:rPr sz="900" b="1">
-                <a:solidFill>
-                  <a:srgbClr val="8A95A3"/>
-                </a:solidFill>
-                <a:latin typeface="Roboto Mono"/>
-              </a:rPr>
-              <a:t>0 — 30 дней</a:t>
-            </a:r>
-          </a:p>
-        </p:txBody>
-      </p:sp>
-      <p:sp>
-        <p:nvSpPr>
-          <p:cNvPr id="36" name="TextBox 35"/>
-          <p:cNvSpPr txBox="1"/>
-          <p:nvPr/>
-        </p:nvSpPr>
-        <p:spPr>
-          <a:xfrm>
-            <a:off x="4824000" y="3445200"/>
-            <a:ext cx="864000" cy="125999"/>
-          </a:xfrm>
-          <a:prstGeom prst="rect">
-            <a:avLst/>
-          </a:prstGeom>
-          <a:noFill/>
-        </p:spPr>
-        <p:txBody>
-          <a:bodyPr wrap="square" lIns="0" tIns="0" rIns="0" bIns="0" anchor="t">
-            <a:spAutoFit/>
-          </a:bodyPr>
-          <a:lstStyle/>
-          <a:p>
-            <a:pPr algn="ctr"/>
-            <a:r>
-              <a:rPr sz="750" b="1" spc="200">
-                <a:solidFill>
-                  <a:srgbClr val="C9A77C"/>
-                </a:solidFill>
-                <a:latin typeface="Inter"/>
-              </a:rPr>
-              <a:t>ФАЗА 02</a:t>
-            </a:r>
-          </a:p>
-        </p:txBody>
-      </p:sp>
-      <p:sp>
-        <p:nvSpPr>
-          <p:cNvPr id="37" name="TextBox 36"/>
-          <p:cNvSpPr txBox="1"/>
-          <p:nvPr/>
-        </p:nvSpPr>
-        <p:spPr>
-          <a:xfrm>
-            <a:off x="5796000" y="2779200"/>
-            <a:ext cx="2844000" cy="162000"/>
-          </a:xfrm>
-          <a:prstGeom prst="rect">
-            <a:avLst/>
-          </a:prstGeom>
-          <a:noFill/>
-        </p:spPr>
-        <p:txBody>
-          <a:bodyPr wrap="square" lIns="0" tIns="0" rIns="0" bIns="0" anchor="t">
-            <a:spAutoFit/>
-          </a:bodyPr>
-          <a:lstStyle/>
-          <a:p>
-            <a:pPr algn="l"/>
-            <a:r>
-              <a:rPr sz="1200" b="1" spc="100">
-                <a:solidFill>
-                  <a:srgbClr val="2F3A48"/>
-                </a:solidFill>
-                <a:latin typeface="Inter"/>
-              </a:rPr>
-              <a:t>ЗАПУСК</a:t>
-            </a:r>
-          </a:p>
-        </p:txBody>
-      </p:sp>
-      <p:sp>
-        <p:nvSpPr>
-          <p:cNvPr id="38" name="TextBox 37"/>
-          <p:cNvSpPr txBox="1"/>
-          <p:nvPr/>
-        </p:nvSpPr>
-        <p:spPr>
-          <a:xfrm>
-            <a:off x="5796000" y="3013200"/>
-            <a:ext cx="72000" cy="115200"/>
-          </a:xfrm>
-          <a:prstGeom prst="rect">
-            <a:avLst/>
-          </a:prstGeom>
-          <a:noFill/>
-        </p:spPr>
-        <p:txBody>
-          <a:bodyPr wrap="square" lIns="0" tIns="0" rIns="0" bIns="0" anchor="t">
-            <a:spAutoFit/>
-          </a:bodyPr>
-          <a:lstStyle/>
-          <a:p>
-            <a:pPr algn="l"/>
-            <a:r>
-              <a:rPr sz="1200" b="1">
-                <a:solidFill>
-                  <a:srgbClr val="C9A77C"/>
-                </a:solidFill>
-                <a:latin typeface="Inter"/>
-              </a:rPr>
-              <a:t>·</a:t>
-            </a:r>
-          </a:p>
-        </p:txBody>
-      </p:sp>
-      <p:sp>
-        <p:nvSpPr>
-          <p:cNvPr id="39" name="TextBox 38"/>
-          <p:cNvSpPr txBox="1"/>
-          <p:nvPr/>
-        </p:nvSpPr>
-        <p:spPr>
-          <a:xfrm>
-            <a:off x="5886000" y="3024000"/>
-            <a:ext cx="2754000" cy="115200"/>
-          </a:xfrm>
-          <a:prstGeom prst="rect">
-            <a:avLst/>
-          </a:prstGeom>
-          <a:noFill/>
-        </p:spPr>
-        <p:txBody>
-          <a:bodyPr wrap="square" lIns="0" tIns="0" rIns="0" bIns="0" anchor="t">
-            <a:spAutoFit/>
-          </a:bodyPr>
-          <a:lstStyle/>
-          <a:p>
-            <a:pPr algn="l"/>
-            <a:r>
-              <a:rPr sz="900" b="0">
-                <a:solidFill>
-                  <a:srgbClr val="2F3A48"/>
-                </a:solidFill>
-                <a:latin typeface="Inter"/>
-              </a:rPr>
-              <a:t>Старт продаж во всех пилотах</a:t>
-            </a:r>
-          </a:p>
-        </p:txBody>
-      </p:sp>
-      <p:sp>
-        <p:nvSpPr>
-          <p:cNvPr id="40" name="TextBox 39"/>
-          <p:cNvSpPr txBox="1"/>
-          <p:nvPr/>
-        </p:nvSpPr>
-        <p:spPr>
-          <a:xfrm>
-            <a:off x="5796000" y="3142800"/>
-            <a:ext cx="72000" cy="115200"/>
-          </a:xfrm>
-          <a:prstGeom prst="rect">
-            <a:avLst/>
-          </a:prstGeom>
-          <a:noFill/>
-        </p:spPr>
-        <p:txBody>
-          <a:bodyPr wrap="square" lIns="0" tIns="0" rIns="0" bIns="0" anchor="t">
-            <a:spAutoFit/>
-          </a:bodyPr>
-          <a:lstStyle/>
-          <a:p>
-            <a:pPr algn="l"/>
-            <a:r>
-              <a:rPr sz="1200" b="1">
-                <a:solidFill>
-                  <a:srgbClr val="C9A77C"/>
-                </a:solidFill>
-                <a:latin typeface="Inter"/>
-              </a:rPr>
-              <a:t>·</a:t>
-            </a:r>
-          </a:p>
-        </p:txBody>
-      </p:sp>
-      <p:sp>
-        <p:nvSpPr>
-          <p:cNvPr id="41" name="TextBox 40"/>
-          <p:cNvSpPr txBox="1"/>
-          <p:nvPr/>
-        </p:nvSpPr>
-        <p:spPr>
-          <a:xfrm>
-            <a:off x="5886000" y="3153600"/>
-            <a:ext cx="2754000" cy="115200"/>
-          </a:xfrm>
-          <a:prstGeom prst="rect">
-            <a:avLst/>
-          </a:prstGeom>
-          <a:noFill/>
-        </p:spPr>
-        <p:txBody>
-          <a:bodyPr wrap="square" lIns="0" tIns="0" rIns="0" bIns="0" anchor="t">
-            <a:spAutoFit/>
-          </a:bodyPr>
-          <a:lstStyle/>
-          <a:p>
-            <a:pPr algn="l"/>
-            <a:r>
-              <a:rPr sz="900" b="0">
-                <a:solidFill>
-                  <a:srgbClr val="2F3A48"/>
-                </a:solidFill>
-                <a:latin typeface="Inter"/>
-              </a:rPr>
-              <a:t>Обучение ТП: 350 человек</a:t>
-            </a:r>
-          </a:p>
-        </p:txBody>
-      </p:sp>
-      <p:sp>
-        <p:nvSpPr>
-          <p:cNvPr id="42" name="TextBox 41"/>
-          <p:cNvSpPr txBox="1"/>
-          <p:nvPr/>
-        </p:nvSpPr>
-        <p:spPr>
-          <a:xfrm>
-            <a:off x="5796000" y="3272400"/>
-            <a:ext cx="72000" cy="115200"/>
-          </a:xfrm>
-          <a:prstGeom prst="rect">
-            <a:avLst/>
-          </a:prstGeom>
-          <a:noFill/>
-        </p:spPr>
-        <p:txBody>
-          <a:bodyPr wrap="square" lIns="0" tIns="0" rIns="0" bIns="0" anchor="t">
-            <a:spAutoFit/>
-          </a:bodyPr>
-          <a:lstStyle/>
-          <a:p>
-            <a:pPr algn="l"/>
-            <a:r>
-              <a:rPr sz="1200" b="1">
-                <a:solidFill>
-                  <a:srgbClr val="C9A77C"/>
-                </a:solidFill>
-                <a:latin typeface="Inter"/>
-              </a:rPr>
-              <a:t>·</a:t>
-            </a:r>
-          </a:p>
-        </p:txBody>
-      </p:sp>
-      <p:sp>
-        <p:nvSpPr>
-          <p:cNvPr id="43" name="TextBox 42"/>
-          <p:cNvSpPr txBox="1"/>
-          <p:nvPr/>
-        </p:nvSpPr>
-        <p:spPr>
-          <a:xfrm>
-            <a:off x="5886000" y="3283200"/>
-            <a:ext cx="2754000" cy="115200"/>
-          </a:xfrm>
-          <a:prstGeom prst="rect">
-            <a:avLst/>
-          </a:prstGeom>
-          <a:noFill/>
-        </p:spPr>
-        <p:txBody>
-          <a:bodyPr wrap="square" lIns="0" tIns="0" rIns="0" bIns="0" anchor="t">
-            <a:spAutoFit/>
-          </a:bodyPr>
-          <a:lstStyle/>
-          <a:p>
-            <a:pPr algn="l"/>
-            <a:r>
-              <a:rPr sz="900" b="0">
-                <a:solidFill>
-                  <a:srgbClr val="2F3A48"/>
-                </a:solidFill>
-                <a:latin typeface="Inter"/>
-              </a:rPr>
-              <a:t>POSM в 100% пилотных точек</a:t>
-            </a:r>
-          </a:p>
-        </p:txBody>
-      </p:sp>
-      <p:sp>
-        <p:nvSpPr>
-          <p:cNvPr id="44" name="TextBox 43"/>
-          <p:cNvSpPr txBox="1"/>
-          <p:nvPr/>
-        </p:nvSpPr>
-        <p:spPr>
-          <a:xfrm>
-            <a:off x="7560000" y="3337200"/>
-            <a:ext cx="1080000" cy="144000"/>
-          </a:xfrm>
-          <a:prstGeom prst="rect">
-            <a:avLst/>
-          </a:prstGeom>
-          <a:noFill/>
-        </p:spPr>
-        <p:txBody>
-          <a:bodyPr wrap="square" lIns="0" tIns="0" rIns="0" bIns="0" anchor="t">
-            <a:spAutoFit/>
-          </a:bodyPr>
-          <a:lstStyle/>
-          <a:p>
-            <a:pPr algn="r"/>
-            <a:r>
-              <a:rPr sz="1400" b="1">
-                <a:solidFill>
-                  <a:srgbClr val="C9A77C"/>
-                </a:solidFill>
-                <a:latin typeface="Roboto Mono"/>
-              </a:rPr>
-              <a:t>100%</a:t>
-            </a:r>
-          </a:p>
-        </p:txBody>
-      </p:sp>
-      <p:sp>
-        <p:nvSpPr>
-          <p:cNvPr id="45" name="TextBox 44"/>
-          <p:cNvSpPr txBox="1"/>
-          <p:nvPr/>
-        </p:nvSpPr>
-        <p:spPr>
-          <a:xfrm>
-            <a:off x="7560000" y="3481200"/>
-            <a:ext cx="1080000" cy="108000"/>
-          </a:xfrm>
-          <a:prstGeom prst="rect">
-            <a:avLst/>
-          </a:prstGeom>
-          <a:noFill/>
-        </p:spPr>
-        <p:txBody>
-          <a:bodyPr wrap="square" lIns="0" tIns="0" rIns="0" bIns="0" anchor="t">
-            <a:spAutoFit/>
-          </a:bodyPr>
-          <a:lstStyle/>
-          <a:p>
-            <a:pPr algn="r"/>
-            <a:r>
-              <a:rPr sz="800" b="0">
-                <a:solidFill>
-                  <a:srgbClr val="8A95A3"/>
-                </a:solidFill>
-                <a:latin typeface="Inter"/>
-              </a:rPr>
-              <a:t>наличие POSM</a:t>
-            </a:r>
-          </a:p>
-        </p:txBody>
-      </p:sp>
-      <p:sp>
-        <p:nvSpPr>
-          <p:cNvPr id="46" name="Rounded Rectangle 45"/>
-          <p:cNvSpPr/>
-          <p:nvPr/>
-        </p:nvSpPr>
-        <p:spPr>
-          <a:xfrm>
-            <a:off x="4824000" y="3715200"/>
-            <a:ext cx="3924000" cy="972000"/>
-          </a:xfrm>
-          <a:prstGeom prst="roundRect">
-            <a:avLst>
-              <a:gd name="adj" fmla="val 4000"/>
-            </a:avLst>
-          </a:prstGeom>
-          <a:solidFill>
-            <a:srgbClr val="F5F2EC"/>
-          </a:solidFill>
-          <a:ln w="6350">
-            <a:solidFill>
-              <a:srgbClr val="D9D2C2"/>
-            </a:solidFill>
-          </a:ln>
-          <a:effectLst/>
-        </p:spPr>
-        <p:style>
-          <a:lnRef idx="1">
-            <a:schemeClr val="accent1"/>
-          </a:lnRef>
-          <a:fillRef idx="3">
-            <a:schemeClr val="accent1"/>
-          </a:fillRef>
-          <a:effectRef idx="2">
-            <a:schemeClr val="accent1"/>
-          </a:effectRef>
-          <a:fontRef idx="minor">
-            <a:schemeClr val="lt1"/>
-          </a:fontRef>
-        </p:style>
-        <p:txBody>
-          <a:bodyPr rtlCol="0" anchor="ctr"/>
-          <a:lstStyle/>
-          <a:p>
-            <a:pPr algn="ctr"/>
-            <a:endParaRPr/>
-          </a:p>
-        </p:txBody>
-      </p:sp>
-      <p:sp>
-        <p:nvSpPr>
-          <p:cNvPr id="47" name="Rounded Rectangle 46"/>
-          <p:cNvSpPr/>
-          <p:nvPr/>
-        </p:nvSpPr>
-        <p:spPr>
-          <a:xfrm>
-            <a:off x="4824000" y="3715200"/>
-            <a:ext cx="864000" cy="972000"/>
-          </a:xfrm>
-          <a:prstGeom prst="roundRect">
-            <a:avLst>
-              <a:gd name="adj" fmla="val 4000"/>
-            </a:avLst>
-          </a:prstGeom>
-          <a:solidFill>
-            <a:srgbClr val="FFFFFF"/>
-          </a:solidFill>
-          <a:ln>
-            <a:noFill/>
-          </a:ln>
-          <a:effectLst/>
-        </p:spPr>
-        <p:style>
-          <a:lnRef idx="1">
-            <a:schemeClr val="accent1"/>
-          </a:lnRef>
-          <a:fillRef idx="3">
-            <a:schemeClr val="accent1"/>
-          </a:fillRef>
-          <a:effectRef idx="2">
-            <a:schemeClr val="accent1"/>
-          </a:effectRef>
-          <a:fontRef idx="minor">
-            <a:schemeClr val="lt1"/>
-          </a:fontRef>
-        </p:style>
-        <p:txBody>
-          <a:bodyPr rtlCol="0" anchor="ctr"/>
-          <a:lstStyle/>
-          <a:p>
-            <a:pPr algn="ctr"/>
-            <a:endParaRPr/>
-          </a:p>
-        </p:txBody>
-      </p:sp>
-      <p:sp>
-        <p:nvSpPr>
-          <p:cNvPr id="48" name="Rectangle 47"/>
-          <p:cNvSpPr/>
-          <p:nvPr/>
-        </p:nvSpPr>
-        <p:spPr>
-          <a:xfrm>
-            <a:off x="4824000" y="3715200"/>
-            <a:ext cx="39600" cy="972000"/>
-          </a:xfrm>
-          <a:prstGeom prst="rect">
-            <a:avLst/>
-          </a:prstGeom>
-          <a:solidFill>
-            <a:srgbClr val="6B8FA8"/>
-          </a:solidFill>
-          <a:ln>
-            <a:noFill/>
-          </a:ln>
-          <a:effectLst/>
-        </p:spPr>
-        <p:style>
-          <a:lnRef idx="1">
-            <a:schemeClr val="accent1"/>
-          </a:lnRef>
-          <a:fillRef idx="3">
-            <a:schemeClr val="accent1"/>
-          </a:fillRef>
-          <a:effectRef idx="2">
-            <a:schemeClr val="accent1"/>
-          </a:effectRef>
-          <a:fontRef idx="minor">
-            <a:schemeClr val="lt1"/>
-          </a:fontRef>
-        </p:style>
-        <p:txBody>
-          <a:bodyPr rtlCol="0" anchor="ctr"/>
-          <a:lstStyle/>
-          <a:p>
-            <a:pPr algn="ctr"/>
-            <a:endParaRPr/>
-          </a:p>
-        </p:txBody>
-      </p:sp>
-      <p:sp>
-        <p:nvSpPr>
-          <p:cNvPr id="49" name="TextBox 48"/>
-          <p:cNvSpPr txBox="1"/>
-          <p:nvPr/>
-        </p:nvSpPr>
-        <p:spPr>
-          <a:xfrm>
-            <a:off x="4824000" y="3895200"/>
-            <a:ext cx="864000" cy="396000"/>
-          </a:xfrm>
-          <a:prstGeom prst="rect">
-            <a:avLst/>
-          </a:prstGeom>
-          <a:noFill/>
-        </p:spPr>
-        <p:txBody>
-          <a:bodyPr wrap="square" lIns="0" tIns="0" rIns="0" bIns="0" anchor="ctr">
-            <a:spAutoFit/>
-          </a:bodyPr>
-          <a:lstStyle/>
-          <a:p>
-            <a:pPr algn="ctr"/>
-            <a:r>
-              <a:rPr sz="2800" b="1">
-                <a:solidFill>
-                  <a:srgbClr val="6B8FA8"/>
-                </a:solidFill>
-                <a:latin typeface="Roboto Mono"/>
-              </a:rPr>
-              <a:t>03</a:t>
-            </a:r>
-          </a:p>
-        </p:txBody>
-      </p:sp>
-      <p:sp>
-        <p:nvSpPr>
-          <p:cNvPr id="50" name="TextBox 49"/>
-          <p:cNvSpPr txBox="1"/>
-          <p:nvPr/>
-        </p:nvSpPr>
-        <p:spPr>
-          <a:xfrm>
-            <a:off x="4824000" y="4327200"/>
-            <a:ext cx="864000" cy="144000"/>
-          </a:xfrm>
-          <a:prstGeom prst="rect">
-            <a:avLst/>
-          </a:prstGeom>
-          <a:noFill/>
-        </p:spPr>
-        <p:txBody>
-          <a:bodyPr wrap="square" lIns="0" tIns="0" rIns="0" bIns="0" anchor="t">
-            <a:spAutoFit/>
-          </a:bodyPr>
-          <a:lstStyle/>
-          <a:p>
-            <a:pPr algn="ctr"/>
-            <a:r>
-              <a:rPr sz="900" b="1">
-                <a:solidFill>
-                  <a:srgbClr val="8A95A3"/>
-                </a:solidFill>
-                <a:latin typeface="Roboto Mono"/>
-              </a:rPr>
-              <a:t>30 — 90 дней</a:t>
-            </a:r>
-          </a:p>
-        </p:txBody>
-      </p:sp>
-      <p:sp>
-        <p:nvSpPr>
-          <p:cNvPr id="51" name="TextBox 50"/>
-          <p:cNvSpPr txBox="1"/>
-          <p:nvPr/>
-        </p:nvSpPr>
-        <p:spPr>
-          <a:xfrm>
-            <a:off x="4824000" y="4489200"/>
-            <a:ext cx="864000" cy="125999"/>
-          </a:xfrm>
-          <a:prstGeom prst="rect">
-            <a:avLst/>
-          </a:prstGeom>
-          <a:noFill/>
-        </p:spPr>
-        <p:txBody>
-          <a:bodyPr wrap="square" lIns="0" tIns="0" rIns="0" bIns="0" anchor="t">
-            <a:spAutoFit/>
-          </a:bodyPr>
-          <a:lstStyle/>
-          <a:p>
-            <a:pPr algn="ctr"/>
-            <a:r>
-              <a:rPr sz="750" b="1" spc="200">
-                <a:solidFill>
-                  <a:srgbClr val="6B8FA8"/>
-                </a:solidFill>
-                <a:latin typeface="Inter"/>
-              </a:rPr>
-              <a:t>ФАЗА 03</a:t>
-            </a:r>
-          </a:p>
-        </p:txBody>
-      </p:sp>
-      <p:sp>
-        <p:nvSpPr>
-          <p:cNvPr id="52" name="TextBox 51"/>
-          <p:cNvSpPr txBox="1"/>
-          <p:nvPr/>
-        </p:nvSpPr>
-        <p:spPr>
-          <a:xfrm>
-            <a:off x="5796000" y="3823200"/>
-            <a:ext cx="2844000" cy="162000"/>
-          </a:xfrm>
-          <a:prstGeom prst="rect">
-            <a:avLst/>
-          </a:prstGeom>
-          <a:noFill/>
-        </p:spPr>
-        <p:txBody>
-          <a:bodyPr wrap="square" lIns="0" tIns="0" rIns="0" bIns="0" anchor="t">
-            <a:spAutoFit/>
-          </a:bodyPr>
-          <a:lstStyle/>
-          <a:p>
-            <a:pPr algn="l"/>
-            <a:r>
-              <a:rPr sz="1200" b="1" spc="100">
-                <a:solidFill>
-                  <a:srgbClr val="2F3A48"/>
-                </a:solidFill>
-                <a:latin typeface="Inter"/>
-              </a:rPr>
-              <a:t>СОПРОВОЖДЕНИЕ</a:t>
-            </a:r>
-          </a:p>
-        </p:txBody>
-      </p:sp>
-      <p:sp>
-        <p:nvSpPr>
-          <p:cNvPr id="53" name="TextBox 52"/>
-          <p:cNvSpPr txBox="1"/>
-          <p:nvPr/>
-        </p:nvSpPr>
-        <p:spPr>
-          <a:xfrm>
-            <a:off x="5796000" y="4057200"/>
-            <a:ext cx="72000" cy="115200"/>
-          </a:xfrm>
-          <a:prstGeom prst="rect">
-            <a:avLst/>
-          </a:prstGeom>
-          <a:noFill/>
-        </p:spPr>
-        <p:txBody>
-          <a:bodyPr wrap="square" lIns="0" tIns="0" rIns="0" bIns="0" anchor="t">
-            <a:spAutoFit/>
-          </a:bodyPr>
-          <a:lstStyle/>
-          <a:p>
-            <a:pPr algn="l"/>
-            <a:r>
-              <a:rPr sz="1200" b="1">
-                <a:solidFill>
-                  <a:srgbClr val="6B8FA8"/>
-                </a:solidFill>
-                <a:latin typeface="Inter"/>
-              </a:rPr>
-              <a:t>·</a:t>
-            </a:r>
-          </a:p>
-        </p:txBody>
-      </p:sp>
-      <p:sp>
-        <p:nvSpPr>
-          <p:cNvPr id="54" name="TextBox 53"/>
-          <p:cNvSpPr txBox="1"/>
-          <p:nvPr/>
-        </p:nvSpPr>
-        <p:spPr>
-          <a:xfrm>
-            <a:off x="5886000" y="4068000"/>
-            <a:ext cx="2754000" cy="115200"/>
-          </a:xfrm>
-          <a:prstGeom prst="rect">
-            <a:avLst/>
-          </a:prstGeom>
-          <a:noFill/>
-        </p:spPr>
-        <p:txBody>
-          <a:bodyPr wrap="square" lIns="0" tIns="0" rIns="0" bIns="0" anchor="t">
-            <a:spAutoFit/>
-          </a:bodyPr>
-          <a:lstStyle/>
-          <a:p>
-            <a:pPr algn="l"/>
-            <a:r>
-              <a:rPr sz="900" b="0">
-                <a:solidFill>
-                  <a:srgbClr val="2F3A48"/>
-                </a:solidFill>
-                <a:latin typeface="Inter"/>
-              </a:rPr>
-              <a:t>Промоакции и мастер-классы</a:t>
-            </a:r>
-          </a:p>
-        </p:txBody>
-      </p:sp>
-      <p:sp>
-        <p:nvSpPr>
-          <p:cNvPr id="55" name="TextBox 54"/>
-          <p:cNvSpPr txBox="1"/>
-          <p:nvPr/>
-        </p:nvSpPr>
-        <p:spPr>
-          <a:xfrm>
-            <a:off x="5796000" y="4186800"/>
-            <a:ext cx="72000" cy="115200"/>
-          </a:xfrm>
-          <a:prstGeom prst="rect">
-            <a:avLst/>
-          </a:prstGeom>
-          <a:noFill/>
-        </p:spPr>
-        <p:txBody>
-          <a:bodyPr wrap="square" lIns="0" tIns="0" rIns="0" bIns="0" anchor="t">
-            <a:spAutoFit/>
-          </a:bodyPr>
-          <a:lstStyle/>
-          <a:p>
-            <a:pPr algn="l"/>
-            <a:r>
-              <a:rPr sz="1200" b="1">
-                <a:solidFill>
-                  <a:srgbClr val="6B8FA8"/>
-                </a:solidFill>
-                <a:latin typeface="Inter"/>
-              </a:rPr>
-              <a:t>·</a:t>
-            </a:r>
-          </a:p>
-        </p:txBody>
-      </p:sp>
-      <p:sp>
-        <p:nvSpPr>
-          <p:cNvPr id="56" name="TextBox 55"/>
-          <p:cNvSpPr txBox="1"/>
-          <p:nvPr/>
-        </p:nvSpPr>
-        <p:spPr>
-          <a:xfrm>
-            <a:off x="5886000" y="4197600"/>
-            <a:ext cx="2754000" cy="115200"/>
-          </a:xfrm>
-          <a:prstGeom prst="rect">
-            <a:avLst/>
-          </a:prstGeom>
-          <a:noFill/>
-        </p:spPr>
-        <p:txBody>
-          <a:bodyPr wrap="square" lIns="0" tIns="0" rIns="0" bIns="0" anchor="t">
-            <a:spAutoFit/>
-          </a:bodyPr>
-          <a:lstStyle/>
-          <a:p>
-            <a:pPr algn="l"/>
-            <a:r>
-              <a:rPr sz="900" b="0">
-                <a:solidFill>
-                  <a:srgbClr val="2F3A48"/>
-                </a:solidFill>
-                <a:latin typeface="Inter"/>
-              </a:rPr>
-              <a:t>Куратор на каждую точку</a:t>
-            </a:r>
-          </a:p>
-        </p:txBody>
-      </p:sp>
-      <p:sp>
-        <p:nvSpPr>
-          <p:cNvPr id="57" name="TextBox 56"/>
-          <p:cNvSpPr txBox="1"/>
-          <p:nvPr/>
-        </p:nvSpPr>
-        <p:spPr>
-          <a:xfrm>
-            <a:off x="5796000" y="4316400"/>
-            <a:ext cx="72000" cy="115200"/>
-          </a:xfrm>
-          <a:prstGeom prst="rect">
-            <a:avLst/>
-          </a:prstGeom>
-          <a:noFill/>
-        </p:spPr>
-        <p:txBody>
-          <a:bodyPr wrap="square" lIns="0" tIns="0" rIns="0" bIns="0" anchor="t">
-            <a:spAutoFit/>
-          </a:bodyPr>
-          <a:lstStyle/>
-          <a:p>
-            <a:pPr algn="l"/>
-            <a:r>
-              <a:rPr sz="1200" b="1">
-                <a:solidFill>
-                  <a:srgbClr val="6B8FA8"/>
-                </a:solidFill>
-                <a:latin typeface="Inter"/>
-              </a:rPr>
-              <a:t>·</a:t>
-            </a:r>
-          </a:p>
-        </p:txBody>
-      </p:sp>
-      <p:sp>
-        <p:nvSpPr>
-          <p:cNvPr id="58" name="TextBox 57"/>
-          <p:cNvSpPr txBox="1"/>
-          <p:nvPr/>
-        </p:nvSpPr>
-        <p:spPr>
-          <a:xfrm>
-            <a:off x="5886000" y="4327200"/>
-            <a:ext cx="2754000" cy="115200"/>
-          </a:xfrm>
-          <a:prstGeom prst="rect">
-            <a:avLst/>
-          </a:prstGeom>
-          <a:noFill/>
-        </p:spPr>
-        <p:txBody>
-          <a:bodyPr wrap="square" lIns="0" tIns="0" rIns="0" bIns="0" anchor="t">
-            <a:spAutoFit/>
-          </a:bodyPr>
-          <a:lstStyle/>
-          <a:p>
-            <a:pPr algn="l"/>
-            <a:r>
-              <a:rPr sz="900" b="0">
-                <a:solidFill>
-                  <a:srgbClr val="2F3A48"/>
-                </a:solidFill>
-                <a:latin typeface="Inter"/>
-              </a:rPr>
-              <a:t>Аналитика продаж по неделе</a:t>
-            </a:r>
-          </a:p>
-        </p:txBody>
-      </p:sp>
-      <p:sp>
-        <p:nvSpPr>
-          <p:cNvPr id="59" name="TextBox 58"/>
-          <p:cNvSpPr txBox="1"/>
-          <p:nvPr/>
-        </p:nvSpPr>
-        <p:spPr>
-          <a:xfrm>
-            <a:off x="7560000" y="4381200"/>
-            <a:ext cx="1080000" cy="144000"/>
-          </a:xfrm>
-          <a:prstGeom prst="rect">
-            <a:avLst/>
-          </a:prstGeom>
-          <a:noFill/>
-        </p:spPr>
-        <p:txBody>
-          <a:bodyPr wrap="square" lIns="0" tIns="0" rIns="0" bIns="0" anchor="t">
-            <a:spAutoFit/>
-          </a:bodyPr>
-          <a:lstStyle/>
-          <a:p>
-            <a:pPr algn="r"/>
-            <a:r>
-              <a:rPr sz="1400" b="1">
-                <a:solidFill>
-                  <a:srgbClr val="6B8FA8"/>
-                </a:solidFill>
-                <a:latin typeface="Roboto Mono"/>
-              </a:rPr>
-              <a:t>350 ТП</a:t>
-            </a:r>
-          </a:p>
-        </p:txBody>
-      </p:sp>
-      <p:sp>
-        <p:nvSpPr>
-          <p:cNvPr id="60" name="TextBox 59"/>
-          <p:cNvSpPr txBox="1"/>
-          <p:nvPr/>
-        </p:nvSpPr>
-        <p:spPr>
-          <a:xfrm>
-            <a:off x="7560000" y="4525200"/>
-            <a:ext cx="1080000" cy="108000"/>
-          </a:xfrm>
-          <a:prstGeom prst="rect">
-            <a:avLst/>
-          </a:prstGeom>
-          <a:noFill/>
-        </p:spPr>
-        <p:txBody>
-          <a:bodyPr wrap="square" lIns="0" tIns="0" rIns="0" bIns="0" anchor="t">
-            <a:spAutoFit/>
-          </a:bodyPr>
-          <a:lstStyle/>
-          <a:p>
-            <a:pPr algn="r"/>
-            <a:r>
-              <a:rPr sz="800" b="0">
-                <a:solidFill>
-                  <a:srgbClr val="8A95A3"/>
-                </a:solidFill>
-                <a:latin typeface="Inter"/>
-              </a:rPr>
-              <a:t>обучено в 1-й мес.</a:t>
-            </a:r>
-          </a:p>
-        </p:txBody>
-      </p:sp>
-      <p:sp>
-        <p:nvSpPr>
-          <p:cNvPr id="61" name="Rounded Rectangle 60"/>
-          <p:cNvSpPr/>
-          <p:nvPr/>
-        </p:nvSpPr>
-        <p:spPr>
-          <a:xfrm>
-            <a:off x="180000" y="961200"/>
-            <a:ext cx="4212000" cy="3859200"/>
-          </a:xfrm>
-          <a:prstGeom prst="roundRect">
-            <a:avLst>
-              <a:gd name="adj" fmla="val 2000"/>
+              <a:gd name="adj" fmla="val 3000"/>
             </a:avLst>
           </a:prstGeom>
           <a:solidFill>
@@ -26755,14 +23632,93 @@
       </p:sp>
       <p:sp>
         <p:nvSpPr>
-          <p:cNvPr id="62" name="TextBox 61"/>
+          <p:cNvPr id="27" name="Rectangle 26"/>
+          <p:cNvSpPr/>
+          <p:nvPr/>
+        </p:nvSpPr>
+        <p:spPr>
+          <a:xfrm>
+            <a:off x="3096000" y="3348000"/>
+            <a:ext cx="2808000" cy="21600"/>
+          </a:xfrm>
+          <a:prstGeom prst="rect">
+            <a:avLst/>
+          </a:prstGeom>
+          <a:solidFill>
+            <a:srgbClr val="C9A77C"/>
+          </a:solidFill>
+          <a:ln>
+            <a:noFill/>
+          </a:ln>
+          <a:effectLst/>
+        </p:spPr>
+        <p:style>
+          <a:lnRef idx="1">
+            <a:schemeClr val="accent1"/>
+          </a:lnRef>
+          <a:fillRef idx="3">
+            <a:schemeClr val="accent1"/>
+          </a:fillRef>
+          <a:effectRef idx="2">
+            <a:schemeClr val="accent1"/>
+          </a:effectRef>
+          <a:fontRef idx="minor">
+            <a:schemeClr val="lt1"/>
+          </a:fontRef>
+        </p:style>
+        <p:txBody>
+          <a:bodyPr rtlCol="0" anchor="ctr"/>
+          <a:lstStyle/>
+          <a:p>
+            <a:pPr algn="ctr"/>
+          </a:p>
+        </p:txBody>
+      </p:sp>
+      <p:sp>
+        <p:nvSpPr>
+          <p:cNvPr id="28" name="TextBox 27"/>
           <p:cNvSpPr txBox="1"/>
           <p:nvPr/>
         </p:nvSpPr>
         <p:spPr>
           <a:xfrm>
-            <a:off x="324000" y="1087199"/>
-            <a:ext cx="3924000" cy="162000"/>
+            <a:off x="3240000" y="3456000"/>
+            <a:ext cx="540000" cy="251999"/>
+          </a:xfrm>
+          <a:prstGeom prst="rect">
+            <a:avLst/>
+          </a:prstGeom>
+          <a:noFill/>
+        </p:spPr>
+        <p:txBody>
+          <a:bodyPr wrap="square" lIns="0" rIns="0" tIns="0" bIns="0" anchor="ctr">
+            <a:spAutoFit/>
+          </a:bodyPr>
+          <a:lstStyle/>
+          <a:p>
+            <a:pPr algn="l"/>
+            <a:r>
+              <a:rPr sz="2400" b="1">
+                <a:solidFill>
+                  <a:srgbClr val="C9A77C"/>
+                </a:solidFill>
+                <a:latin typeface="Roboto Mono"/>
+              </a:rPr>
+              <a:t>02</a:t>
+            </a:r>
+          </a:p>
+        </p:txBody>
+      </p:sp>
+      <p:sp>
+        <p:nvSpPr>
+          <p:cNvPr id="29" name="TextBox 28"/>
+          <p:cNvSpPr txBox="1"/>
+          <p:nvPr/>
+        </p:nvSpPr>
+        <p:spPr>
+          <a:xfrm>
+            <a:off x="3816000" y="3473999"/>
+            <a:ext cx="1980000" cy="144000"/>
           </a:xfrm>
           <a:prstGeom prst="rect">
             <a:avLst/>
@@ -26777,27 +23733,27 @@
           <a:p>
             <a:pPr algn="l"/>
             <a:r>
-              <a:rPr sz="1100" b="1" spc="200">
-                <a:solidFill>
-                  <a:srgbClr val="C00000"/>
+              <a:rPr sz="1100" b="1" spc="100">
+                <a:solidFill>
+                  <a:srgbClr val="2F3A48"/>
                 </a:solidFill>
                 <a:latin typeface="Inter"/>
               </a:rPr>
-              <a:t>РЕЗУЛЬТАТЫ ЗАПУСКА НОВИНОК 2026</a:t>
-            </a:r>
-          </a:p>
-        </p:txBody>
-      </p:sp>
-      <p:sp>
-        <p:nvSpPr>
-          <p:cNvPr id="63" name="TextBox 62"/>
+              <a:t>ЗАПУСК</a:t>
+            </a:r>
+          </a:p>
+        </p:txBody>
+      </p:sp>
+      <p:sp>
+        <p:nvSpPr>
+          <p:cNvPr id="30" name="TextBox 29"/>
           <p:cNvSpPr txBox="1"/>
           <p:nvPr/>
         </p:nvSpPr>
         <p:spPr>
           <a:xfrm>
-            <a:off x="324000" y="1267200"/>
-            <a:ext cx="3924000" cy="125999"/>
+            <a:off x="3816000" y="3618000"/>
+            <a:ext cx="1980000" cy="108000"/>
           </a:xfrm>
           <a:prstGeom prst="rect">
             <a:avLst/>
@@ -26812,27 +23768,27 @@
           <a:p>
             <a:pPr algn="l"/>
             <a:r>
-              <a:rPr sz="1000" b="0">
-                <a:solidFill>
-                  <a:srgbClr val="8A95A3"/>
-                </a:solidFill>
-                <a:latin typeface="Inter"/>
-              </a:rPr>
-              <a:t>5 новинок · 25 SKU · АКБ 302</a:t>
-            </a:r>
-          </a:p>
-        </p:txBody>
-      </p:sp>
-      <p:sp>
-        <p:nvSpPr>
-          <p:cNvPr id="64" name="Rectangle 63"/>
+              <a:rPr sz="900" b="1">
+                <a:solidFill>
+                  <a:srgbClr val="C9A77C"/>
+                </a:solidFill>
+                <a:latin typeface="Roboto Mono"/>
+              </a:rPr>
+              <a:t>0 — 30 дней</a:t>
+            </a:r>
+          </a:p>
+        </p:txBody>
+      </p:sp>
+      <p:sp>
+        <p:nvSpPr>
+          <p:cNvPr id="31" name="Rectangle 30"/>
           <p:cNvSpPr/>
           <p:nvPr/>
         </p:nvSpPr>
         <p:spPr>
           <a:xfrm>
-            <a:off x="324000" y="1429200"/>
-            <a:ext cx="3924000" cy="21600"/>
+            <a:off x="3240000" y="3816000"/>
+            <a:ext cx="2520000" cy="14400"/>
           </a:xfrm>
           <a:prstGeom prst="rect">
             <a:avLst/>
@@ -26869,14 +23825,14 @@
       </p:sp>
       <p:sp>
         <p:nvSpPr>
-          <p:cNvPr id="65" name="TextBox 64"/>
+          <p:cNvPr id="32" name="TextBox 31"/>
           <p:cNvSpPr txBox="1"/>
           <p:nvPr/>
         </p:nvSpPr>
         <p:spPr>
           <a:xfrm>
-            <a:off x="324000" y="1501200"/>
-            <a:ext cx="3924000" cy="144000"/>
+            <a:off x="3240000" y="3888000"/>
+            <a:ext cx="72000" cy="108000"/>
           </a:xfrm>
           <a:prstGeom prst="rect">
             <a:avLst/>
@@ -26891,27 +23847,202 @@
           <a:p>
             <a:pPr algn="l"/>
             <a:r>
-              <a:rPr sz="1000" b="1">
+              <a:rPr sz="1200" b="1">
+                <a:solidFill>
+                  <a:srgbClr val="C9A77C"/>
+                </a:solidFill>
+                <a:latin typeface="Inter"/>
+              </a:rPr>
+              <a:t>·</a:t>
+            </a:r>
+          </a:p>
+        </p:txBody>
+      </p:sp>
+      <p:sp>
+        <p:nvSpPr>
+          <p:cNvPr id="33" name="TextBox 32"/>
+          <p:cNvSpPr txBox="1"/>
+          <p:nvPr/>
+        </p:nvSpPr>
+        <p:spPr>
+          <a:xfrm>
+            <a:off x="3330000" y="3895200"/>
+            <a:ext cx="2412000" cy="108000"/>
+          </a:xfrm>
+          <a:prstGeom prst="rect">
+            <a:avLst/>
+          </a:prstGeom>
+          <a:noFill/>
+        </p:spPr>
+        <p:txBody>
+          <a:bodyPr wrap="square" lIns="0" rIns="0" tIns="0" bIns="0" anchor="t">
+            <a:spAutoFit/>
+          </a:bodyPr>
+          <a:lstStyle/>
+          <a:p>
+            <a:pPr algn="l"/>
+            <a:r>
+              <a:rPr sz="900" b="0">
                 <a:solidFill>
                   <a:srgbClr val="2F3A48"/>
                 </a:solidFill>
-                <a:latin typeface="Roboto Mono"/>
-              </a:rPr>
-              <a:t>Первичка: 3.65 млн ₽   ·   Вторичка: 0.62 млн ₽</a:t>
-            </a:r>
-          </a:p>
-        </p:txBody>
-      </p:sp>
-      <p:sp>
-        <p:nvSpPr>
-          <p:cNvPr id="66" name="Rectangle 65"/>
+                <a:latin typeface="Inter"/>
+              </a:rPr>
+              <a:t>Старт продаж во всех пилотах</a:t>
+            </a:r>
+          </a:p>
+        </p:txBody>
+      </p:sp>
+      <p:sp>
+        <p:nvSpPr>
+          <p:cNvPr id="34" name="TextBox 33"/>
+          <p:cNvSpPr txBox="1"/>
+          <p:nvPr/>
+        </p:nvSpPr>
+        <p:spPr>
+          <a:xfrm>
+            <a:off x="3240000" y="4024800"/>
+            <a:ext cx="72000" cy="108000"/>
+          </a:xfrm>
+          <a:prstGeom prst="rect">
+            <a:avLst/>
+          </a:prstGeom>
+          <a:noFill/>
+        </p:spPr>
+        <p:txBody>
+          <a:bodyPr wrap="square" lIns="0" rIns="0" tIns="0" bIns="0" anchor="t">
+            <a:spAutoFit/>
+          </a:bodyPr>
+          <a:lstStyle/>
+          <a:p>
+            <a:pPr algn="l"/>
+            <a:r>
+              <a:rPr sz="1200" b="1">
+                <a:solidFill>
+                  <a:srgbClr val="C9A77C"/>
+                </a:solidFill>
+                <a:latin typeface="Inter"/>
+              </a:rPr>
+              <a:t>·</a:t>
+            </a:r>
+          </a:p>
+        </p:txBody>
+      </p:sp>
+      <p:sp>
+        <p:nvSpPr>
+          <p:cNvPr id="35" name="TextBox 34"/>
+          <p:cNvSpPr txBox="1"/>
+          <p:nvPr/>
+        </p:nvSpPr>
+        <p:spPr>
+          <a:xfrm>
+            <a:off x="3330000" y="4032000"/>
+            <a:ext cx="2412000" cy="108000"/>
+          </a:xfrm>
+          <a:prstGeom prst="rect">
+            <a:avLst/>
+          </a:prstGeom>
+          <a:noFill/>
+        </p:spPr>
+        <p:txBody>
+          <a:bodyPr wrap="square" lIns="0" rIns="0" tIns="0" bIns="0" anchor="t">
+            <a:spAutoFit/>
+          </a:bodyPr>
+          <a:lstStyle/>
+          <a:p>
+            <a:pPr algn="l"/>
+            <a:r>
+              <a:rPr sz="900" b="0">
+                <a:solidFill>
+                  <a:srgbClr val="2F3A48"/>
+                </a:solidFill>
+                <a:latin typeface="Inter"/>
+              </a:rPr>
+              <a:t>Обучение ТП: 350 человек</a:t>
+            </a:r>
+          </a:p>
+        </p:txBody>
+      </p:sp>
+      <p:sp>
+        <p:nvSpPr>
+          <p:cNvPr id="36" name="TextBox 35"/>
+          <p:cNvSpPr txBox="1"/>
+          <p:nvPr/>
+        </p:nvSpPr>
+        <p:spPr>
+          <a:xfrm>
+            <a:off x="3240000" y="4161600"/>
+            <a:ext cx="72000" cy="108000"/>
+          </a:xfrm>
+          <a:prstGeom prst="rect">
+            <a:avLst/>
+          </a:prstGeom>
+          <a:noFill/>
+        </p:spPr>
+        <p:txBody>
+          <a:bodyPr wrap="square" lIns="0" rIns="0" tIns="0" bIns="0" anchor="t">
+            <a:spAutoFit/>
+          </a:bodyPr>
+          <a:lstStyle/>
+          <a:p>
+            <a:pPr algn="l"/>
+            <a:r>
+              <a:rPr sz="1200" b="1">
+                <a:solidFill>
+                  <a:srgbClr val="C9A77C"/>
+                </a:solidFill>
+                <a:latin typeface="Inter"/>
+              </a:rPr>
+              <a:t>·</a:t>
+            </a:r>
+          </a:p>
+        </p:txBody>
+      </p:sp>
+      <p:sp>
+        <p:nvSpPr>
+          <p:cNvPr id="37" name="TextBox 36"/>
+          <p:cNvSpPr txBox="1"/>
+          <p:nvPr/>
+        </p:nvSpPr>
+        <p:spPr>
+          <a:xfrm>
+            <a:off x="3330000" y="4168800"/>
+            <a:ext cx="2412000" cy="108000"/>
+          </a:xfrm>
+          <a:prstGeom prst="rect">
+            <a:avLst/>
+          </a:prstGeom>
+          <a:noFill/>
+        </p:spPr>
+        <p:txBody>
+          <a:bodyPr wrap="square" lIns="0" rIns="0" tIns="0" bIns="0" anchor="t">
+            <a:spAutoFit/>
+          </a:bodyPr>
+          <a:lstStyle/>
+          <a:p>
+            <a:pPr algn="l"/>
+            <a:r>
+              <a:rPr sz="900" b="0">
+                <a:solidFill>
+                  <a:srgbClr val="2F3A48"/>
+                </a:solidFill>
+                <a:latin typeface="Inter"/>
+              </a:rPr>
+              <a:t>POSM в 100% пилотных точек</a:t>
+            </a:r>
+          </a:p>
+        </p:txBody>
+      </p:sp>
+      <p:sp>
+        <p:nvSpPr>
+          <p:cNvPr id="38" name="Rectangle 37"/>
           <p:cNvSpPr/>
           <p:nvPr/>
         </p:nvSpPr>
         <p:spPr>
           <a:xfrm>
-            <a:off x="324000" y="1663200"/>
-            <a:ext cx="3924000" cy="14400"/>
+            <a:off x="3240000" y="4446000"/>
+            <a:ext cx="2520000" cy="10800"/>
           </a:xfrm>
           <a:prstGeom prst="rect">
             <a:avLst/>
@@ -26948,14 +24079,119 @@
       </p:sp>
       <p:sp>
         <p:nvSpPr>
-          <p:cNvPr id="67" name="Rounded Rectangle 66"/>
+          <p:cNvPr id="39" name="TextBox 38"/>
+          <p:cNvSpPr txBox="1"/>
+          <p:nvPr/>
+        </p:nvSpPr>
+        <p:spPr>
+          <a:xfrm>
+            <a:off x="3240000" y="4482000"/>
+            <a:ext cx="1080000" cy="125999"/>
+          </a:xfrm>
+          <a:prstGeom prst="rect">
+            <a:avLst/>
+          </a:prstGeom>
+          <a:noFill/>
+        </p:spPr>
+        <p:txBody>
+          <a:bodyPr wrap="square" lIns="0" rIns="0" tIns="0" bIns="0" anchor="ctr">
+            <a:spAutoFit/>
+          </a:bodyPr>
+          <a:lstStyle/>
+          <a:p>
+            <a:pPr algn="l"/>
+            <a:r>
+              <a:rPr sz="800" b="1">
+                <a:solidFill>
+                  <a:srgbClr val="8A95A3"/>
+                </a:solidFill>
+                <a:latin typeface="Inter"/>
+              </a:rPr>
+              <a:t>KPI:</a:t>
+            </a:r>
+          </a:p>
+        </p:txBody>
+      </p:sp>
+      <p:sp>
+        <p:nvSpPr>
+          <p:cNvPr id="40" name="TextBox 39"/>
+          <p:cNvSpPr txBox="1"/>
+          <p:nvPr/>
+        </p:nvSpPr>
+        <p:spPr>
+          <a:xfrm>
+            <a:off x="3636000" y="4482000"/>
+            <a:ext cx="1080000" cy="125999"/>
+          </a:xfrm>
+          <a:prstGeom prst="rect">
+            <a:avLst/>
+          </a:prstGeom>
+          <a:noFill/>
+        </p:spPr>
+        <p:txBody>
+          <a:bodyPr wrap="square" lIns="0" rIns="0" tIns="0" bIns="0" anchor="ctr">
+            <a:spAutoFit/>
+          </a:bodyPr>
+          <a:lstStyle/>
+          <a:p>
+            <a:pPr algn="l"/>
+            <a:r>
+              <a:rPr sz="1200" b="1">
+                <a:solidFill>
+                  <a:srgbClr val="C9A77C"/>
+                </a:solidFill>
+                <a:latin typeface="Roboto Mono"/>
+              </a:rPr>
+              <a:t>100%</a:t>
+            </a:r>
+          </a:p>
+        </p:txBody>
+      </p:sp>
+      <p:sp>
+        <p:nvSpPr>
+          <p:cNvPr id="41" name="TextBox 40"/>
+          <p:cNvSpPr txBox="1"/>
+          <p:nvPr/>
+        </p:nvSpPr>
+        <p:spPr>
+          <a:xfrm>
+            <a:off x="4716000" y="4482000"/>
+            <a:ext cx="1008000" cy="125999"/>
+          </a:xfrm>
+          <a:prstGeom prst="rect">
+            <a:avLst/>
+          </a:prstGeom>
+          <a:noFill/>
+        </p:spPr>
+        <p:txBody>
+          <a:bodyPr wrap="square" lIns="0" rIns="0" tIns="0" bIns="0" anchor="ctr">
+            <a:spAutoFit/>
+          </a:bodyPr>
+          <a:lstStyle/>
+          <a:p>
+            <a:pPr algn="r"/>
+            <a:r>
+              <a:rPr sz="850" b="0">
+                <a:solidFill>
+                  <a:srgbClr val="8A95A3"/>
+                </a:solidFill>
+                <a:latin typeface="Inter"/>
+              </a:rPr>
+              <a:t>наличие POSM</a:t>
+            </a:r>
+          </a:p>
+        </p:txBody>
+      </p:sp>
+      <p:sp>
+        <p:nvSpPr>
+          <p:cNvPr id="42" name="Rounded Rectangle 41"/>
           <p:cNvSpPr/>
           <p:nvPr/>
         </p:nvSpPr>
         <p:spPr>
           <a:xfrm>
-            <a:off x="324000" y="1735200"/>
-            <a:ext cx="3924000" cy="576000"/>
+            <a:off x="6012000" y="3348000"/>
+            <a:ext cx="2808000" cy="1440000"/>
           </a:xfrm>
           <a:prstGeom prst="roundRect">
             <a:avLst>
@@ -26963,7 +24199,53 @@
             </a:avLst>
           </a:prstGeom>
           <a:solidFill>
-            <a:srgbClr val="F5F2EC"/>
+            <a:srgbClr val="FFFFFF"/>
+          </a:solidFill>
+          <a:ln w="6350">
+            <a:solidFill>
+              <a:srgbClr val="D9D2C2"/>
+            </a:solidFill>
+          </a:ln>
+          <a:effectLst/>
+        </p:spPr>
+        <p:style>
+          <a:lnRef idx="1">
+            <a:schemeClr val="accent1"/>
+          </a:lnRef>
+          <a:fillRef idx="3">
+            <a:schemeClr val="accent1"/>
+          </a:fillRef>
+          <a:effectRef idx="2">
+            <a:schemeClr val="accent1"/>
+          </a:effectRef>
+          <a:fontRef idx="minor">
+            <a:schemeClr val="lt1"/>
+          </a:fontRef>
+        </p:style>
+        <p:txBody>
+          <a:bodyPr rtlCol="0" anchor="ctr"/>
+          <a:lstStyle/>
+          <a:p>
+            <a:pPr algn="ctr"/>
+          </a:p>
+        </p:txBody>
+      </p:sp>
+      <p:sp>
+        <p:nvSpPr>
+          <p:cNvPr id="43" name="Rectangle 42"/>
+          <p:cNvSpPr/>
+          <p:nvPr/>
+        </p:nvSpPr>
+        <p:spPr>
+          <a:xfrm>
+            <a:off x="6012000" y="3348000"/>
+            <a:ext cx="2808000" cy="21600"/>
+          </a:xfrm>
+          <a:prstGeom prst="rect">
+            <a:avLst/>
+          </a:prstGeom>
+          <a:solidFill>
+            <a:srgbClr val="6B8FA8"/>
           </a:solidFill>
           <a:ln>
             <a:noFill/>
@@ -26994,58 +24276,49 @@
       </p:sp>
       <p:sp>
         <p:nvSpPr>
-          <p:cNvPr id="68" name="Rectangle 67"/>
-          <p:cNvSpPr/>
-          <p:nvPr/>
-        </p:nvSpPr>
-        <p:spPr>
-          <a:xfrm>
-            <a:off x="324000" y="1735200"/>
-            <a:ext cx="28800" cy="576000"/>
-          </a:xfrm>
-          <a:prstGeom prst="rect">
-            <a:avLst/>
-          </a:prstGeom>
-          <a:solidFill>
-            <a:srgbClr val="C00000"/>
-          </a:solidFill>
-          <a:ln>
-            <a:noFill/>
-          </a:ln>
-          <a:effectLst/>
-        </p:spPr>
-        <p:style>
-          <a:lnRef idx="1">
-            <a:schemeClr val="accent1"/>
-          </a:lnRef>
-          <a:fillRef idx="3">
-            <a:schemeClr val="accent1"/>
-          </a:fillRef>
-          <a:effectRef idx="2">
-            <a:schemeClr val="accent1"/>
-          </a:effectRef>
-          <a:fontRef idx="minor">
-            <a:schemeClr val="lt1"/>
-          </a:fontRef>
-        </p:style>
-        <p:txBody>
-          <a:bodyPr rtlCol="0" anchor="ctr"/>
-          <a:lstStyle/>
-          <a:p>
-            <a:pPr algn="ctr"/>
-          </a:p>
-        </p:txBody>
-      </p:sp>
-      <p:sp>
-        <p:nvSpPr>
-          <p:cNvPr id="69" name="TextBox 68"/>
+          <p:cNvPr id="44" name="TextBox 43"/>
           <p:cNvSpPr txBox="1"/>
           <p:nvPr/>
         </p:nvSpPr>
         <p:spPr>
           <a:xfrm>
-            <a:off x="396000" y="1771200"/>
-            <a:ext cx="251999" cy="144000"/>
+            <a:off x="6156000" y="3456000"/>
+            <a:ext cx="540000" cy="251999"/>
+          </a:xfrm>
+          <a:prstGeom prst="rect">
+            <a:avLst/>
+          </a:prstGeom>
+          <a:noFill/>
+        </p:spPr>
+        <p:txBody>
+          <a:bodyPr wrap="square" lIns="0" rIns="0" tIns="0" bIns="0" anchor="ctr">
+            <a:spAutoFit/>
+          </a:bodyPr>
+          <a:lstStyle/>
+          <a:p>
+            <a:pPr algn="l"/>
+            <a:r>
+              <a:rPr sz="2400" b="1">
+                <a:solidFill>
+                  <a:srgbClr val="6B8FA8"/>
+                </a:solidFill>
+                <a:latin typeface="Roboto Mono"/>
+              </a:rPr>
+              <a:t>03</a:t>
+            </a:r>
+          </a:p>
+        </p:txBody>
+      </p:sp>
+      <p:sp>
+        <p:nvSpPr>
+          <p:cNvPr id="45" name="TextBox 44"/>
+          <p:cNvSpPr txBox="1"/>
+          <p:nvPr/>
+        </p:nvSpPr>
+        <p:spPr>
+          <a:xfrm>
+            <a:off x="6732000" y="3473999"/>
+            <a:ext cx="1980000" cy="144000"/>
           </a:xfrm>
           <a:prstGeom prst="rect">
             <a:avLst/>
@@ -27060,27 +24333,27 @@
           <a:p>
             <a:pPr algn="l"/>
             <a:r>
-              <a:rPr sz="1100" b="1">
-                <a:solidFill>
-                  <a:srgbClr val="C00000"/>
-                </a:solidFill>
-                <a:latin typeface="Roboto Mono"/>
-              </a:rPr>
-              <a:t>01</a:t>
-            </a:r>
-          </a:p>
-        </p:txBody>
-      </p:sp>
-      <p:sp>
-        <p:nvSpPr>
-          <p:cNvPr id="70" name="TextBox 69"/>
+              <a:rPr sz="1100" b="1" spc="100">
+                <a:solidFill>
+                  <a:srgbClr val="2F3A48"/>
+                </a:solidFill>
+                <a:latin typeface="Inter"/>
+              </a:rPr>
+              <a:t>СОПРОВОЖДЕНИЕ</a:t>
+            </a:r>
+          </a:p>
+        </p:txBody>
+      </p:sp>
+      <p:sp>
+        <p:nvSpPr>
+          <p:cNvPr id="46" name="TextBox 45"/>
           <p:cNvSpPr txBox="1"/>
           <p:nvPr/>
         </p:nvSpPr>
         <p:spPr>
           <a:xfrm>
-            <a:off x="666000" y="1771200"/>
-            <a:ext cx="3420000" cy="144000"/>
+            <a:off x="6732000" y="3618000"/>
+            <a:ext cx="1980000" cy="108000"/>
           </a:xfrm>
           <a:prstGeom prst="rect">
             <a:avLst/>
@@ -27095,202 +24368,27 @@
           <a:p>
             <a:pPr algn="l"/>
             <a:r>
-              <a:rPr sz="950" b="1">
-                <a:solidFill>
-                  <a:srgbClr val="2F3A48"/>
-                </a:solidFill>
-                <a:latin typeface="Inter"/>
-              </a:rPr>
-              <a:t>PROFIWOOD Антисептик кроющий ВД</a:t>
-            </a:r>
-          </a:p>
-        </p:txBody>
-      </p:sp>
-      <p:sp>
-        <p:nvSpPr>
-          <p:cNvPr id="71" name="TextBox 70"/>
-          <p:cNvSpPr txBox="1"/>
-          <p:nvPr/>
-        </p:nvSpPr>
-        <p:spPr>
-          <a:xfrm>
-            <a:off x="666000" y="1915200"/>
-            <a:ext cx="3420000" cy="108000"/>
-          </a:xfrm>
-          <a:prstGeom prst="rect">
-            <a:avLst/>
-          </a:prstGeom>
-          <a:noFill/>
-        </p:spPr>
-        <p:txBody>
-          <a:bodyPr wrap="square" lIns="0" rIns="0" tIns="0" bIns="0" anchor="t">
-            <a:spAutoFit/>
-          </a:bodyPr>
-          <a:lstStyle/>
-          <a:p>
-            <a:pPr algn="l"/>
-            <a:r>
-              <a:rPr sz="850" b="0">
-                <a:solidFill>
-                  <a:srgbClr val="8A95A3"/>
-                </a:solidFill>
-                <a:latin typeface="Inter"/>
-              </a:rPr>
-              <a:t>SKU: 14  ·  Фасовки: 0.8 л, 2.1 л, 2.4 л</a:t>
-            </a:r>
-          </a:p>
-        </p:txBody>
-      </p:sp>
-      <p:sp>
-        <p:nvSpPr>
-          <p:cNvPr id="72" name="TextBox 71"/>
-          <p:cNvSpPr txBox="1"/>
-          <p:nvPr/>
-        </p:nvSpPr>
-        <p:spPr>
-          <a:xfrm>
-            <a:off x="666000" y="2023200"/>
-            <a:ext cx="3420000" cy="108000"/>
-          </a:xfrm>
-          <a:prstGeom prst="rect">
-            <a:avLst/>
-          </a:prstGeom>
-          <a:noFill/>
-        </p:spPr>
-        <p:txBody>
-          <a:bodyPr wrap="square" lIns="0" rIns="0" tIns="0" bIns="0" anchor="t">
-            <a:spAutoFit/>
-          </a:bodyPr>
-          <a:lstStyle/>
-          <a:p>
-            <a:pPr algn="l"/>
-            <a:r>
-              <a:rPr sz="850" b="0">
-                <a:solidFill>
-                  <a:srgbClr val="8A95A3"/>
-                </a:solidFill>
-                <a:latin typeface="Inter"/>
-              </a:rPr>
-              <a:t>Цвета: база С, бежевый, белый, горький шоколад,</a:t>
-            </a:r>
-          </a:p>
-        </p:txBody>
-      </p:sp>
-      <p:sp>
-        <p:nvSpPr>
-          <p:cNvPr id="73" name="TextBox 72"/>
-          <p:cNvSpPr txBox="1"/>
-          <p:nvPr/>
-        </p:nvSpPr>
-        <p:spPr>
-          <a:xfrm>
-            <a:off x="2880000" y="1771200"/>
-            <a:ext cx="1368000" cy="144000"/>
-          </a:xfrm>
-          <a:prstGeom prst="rect">
-            <a:avLst/>
-          </a:prstGeom>
-          <a:noFill/>
-        </p:spPr>
-        <p:txBody>
-          <a:bodyPr wrap="square" lIns="0" rIns="0" tIns="0" bIns="0" anchor="t">
-            <a:spAutoFit/>
-          </a:bodyPr>
-          <a:lstStyle/>
-          <a:p>
-            <a:pPr algn="r"/>
-            <a:r>
-              <a:rPr sz="1000" b="1">
-                <a:solidFill>
-                  <a:srgbClr val="C00000"/>
+              <a:rPr sz="900" b="1">
+                <a:solidFill>
+                  <a:srgbClr val="6B8FA8"/>
                 </a:solidFill>
                 <a:latin typeface="Roboto Mono"/>
               </a:rPr>
-              <a:t>804 тыс ₽</a:t>
-            </a:r>
-          </a:p>
-        </p:txBody>
-      </p:sp>
-      <p:sp>
-        <p:nvSpPr>
-          <p:cNvPr id="74" name="TextBox 73"/>
-          <p:cNvSpPr txBox="1"/>
-          <p:nvPr/>
-        </p:nvSpPr>
-        <p:spPr>
-          <a:xfrm>
-            <a:off x="2880000" y="1915200"/>
-            <a:ext cx="1368000" cy="108000"/>
-          </a:xfrm>
-          <a:prstGeom prst="rect">
-            <a:avLst/>
-          </a:prstGeom>
-          <a:noFill/>
-        </p:spPr>
-        <p:txBody>
-          <a:bodyPr wrap="square" lIns="0" rIns="0" tIns="0" bIns="0" anchor="t">
-            <a:spAutoFit/>
-          </a:bodyPr>
-          <a:lstStyle/>
-          <a:p>
-            <a:pPr algn="r"/>
-            <a:r>
-              <a:rPr sz="800" b="0">
-                <a:solidFill>
-                  <a:srgbClr val="8A95A3"/>
-                </a:solidFill>
-                <a:latin typeface="Inter"/>
-              </a:rPr>
-              <a:t>Первичка · 1775 кг</a:t>
-            </a:r>
-          </a:p>
-        </p:txBody>
-      </p:sp>
-      <p:sp>
-        <p:nvSpPr>
-          <p:cNvPr id="75" name="TextBox 74"/>
-          <p:cNvSpPr txBox="1"/>
-          <p:nvPr/>
-        </p:nvSpPr>
-        <p:spPr>
-          <a:xfrm>
-            <a:off x="2880000" y="2023200"/>
-            <a:ext cx="1368000" cy="108000"/>
-          </a:xfrm>
-          <a:prstGeom prst="rect">
-            <a:avLst/>
-          </a:prstGeom>
-          <a:noFill/>
-        </p:spPr>
-        <p:txBody>
-          <a:bodyPr wrap="square" lIns="0" rIns="0" tIns="0" bIns="0" anchor="t">
-            <a:spAutoFit/>
-          </a:bodyPr>
-          <a:lstStyle/>
-          <a:p>
-            <a:pPr algn="r"/>
-            <a:r>
-              <a:rPr sz="800" b="0">
-                <a:solidFill>
-                  <a:srgbClr val="8A95A3"/>
-                </a:solidFill>
-                <a:latin typeface="Inter"/>
-              </a:rPr>
-              <a:t>АКБ: 100  ·  SKU: 14</a:t>
-            </a:r>
-          </a:p>
-        </p:txBody>
-      </p:sp>
-      <p:sp>
-        <p:nvSpPr>
-          <p:cNvPr id="76" name="Rectangle 75"/>
+              <a:t>30 — 90 дней</a:t>
+            </a:r>
+          </a:p>
+        </p:txBody>
+      </p:sp>
+      <p:sp>
+        <p:nvSpPr>
+          <p:cNvPr id="47" name="Rectangle 46"/>
           <p:cNvSpPr/>
           <p:nvPr/>
         </p:nvSpPr>
         <p:spPr>
           <a:xfrm>
-            <a:off x="324000" y="2293200"/>
-            <a:ext cx="3924000" cy="7200"/>
+            <a:off x="6156000" y="3816000"/>
+            <a:ext cx="2520000" cy="14400"/>
           </a:xfrm>
           <a:prstGeom prst="rect">
             <a:avLst/>
@@ -27327,58 +24425,14 @@
       </p:sp>
       <p:sp>
         <p:nvSpPr>
-          <p:cNvPr id="77" name="Rectangle 76"/>
-          <p:cNvSpPr/>
-          <p:nvPr/>
-        </p:nvSpPr>
-        <p:spPr>
-          <a:xfrm>
-            <a:off x="324000" y="2329200"/>
-            <a:ext cx="28800" cy="576000"/>
-          </a:xfrm>
-          <a:prstGeom prst="rect">
-            <a:avLst/>
-          </a:prstGeom>
-          <a:solidFill>
-            <a:srgbClr val="C9A77C"/>
-          </a:solidFill>
-          <a:ln>
-            <a:noFill/>
-          </a:ln>
-          <a:effectLst/>
-        </p:spPr>
-        <p:style>
-          <a:lnRef idx="1">
-            <a:schemeClr val="accent1"/>
-          </a:lnRef>
-          <a:fillRef idx="3">
-            <a:schemeClr val="accent1"/>
-          </a:fillRef>
-          <a:effectRef idx="2">
-            <a:schemeClr val="accent1"/>
-          </a:effectRef>
-          <a:fontRef idx="minor">
-            <a:schemeClr val="lt1"/>
-          </a:fontRef>
-        </p:style>
-        <p:txBody>
-          <a:bodyPr rtlCol="0" anchor="ctr"/>
-          <a:lstStyle/>
-          <a:p>
-            <a:pPr algn="ctr"/>
-          </a:p>
-        </p:txBody>
-      </p:sp>
-      <p:sp>
-        <p:nvSpPr>
-          <p:cNvPr id="78" name="TextBox 77"/>
+          <p:cNvPr id="48" name="TextBox 47"/>
           <p:cNvSpPr txBox="1"/>
           <p:nvPr/>
         </p:nvSpPr>
         <p:spPr>
           <a:xfrm>
-            <a:off x="396000" y="2365200"/>
-            <a:ext cx="251999" cy="144000"/>
+            <a:off x="6156000" y="3888000"/>
+            <a:ext cx="72000" cy="108000"/>
           </a:xfrm>
           <a:prstGeom prst="rect">
             <a:avLst/>
@@ -27393,27 +24447,27 @@
           <a:p>
             <a:pPr algn="l"/>
             <a:r>
-              <a:rPr sz="1100" b="1">
-                <a:solidFill>
-                  <a:srgbClr val="C9A77C"/>
-                </a:solidFill>
-                <a:latin typeface="Roboto Mono"/>
-              </a:rPr>
-              <a:t>02</a:t>
-            </a:r>
-          </a:p>
-        </p:txBody>
-      </p:sp>
-      <p:sp>
-        <p:nvSpPr>
-          <p:cNvPr id="79" name="TextBox 78"/>
+              <a:rPr sz="1200" b="1">
+                <a:solidFill>
+                  <a:srgbClr val="6B8FA8"/>
+                </a:solidFill>
+                <a:latin typeface="Inter"/>
+              </a:rPr>
+              <a:t>·</a:t>
+            </a:r>
+          </a:p>
+        </p:txBody>
+      </p:sp>
+      <p:sp>
+        <p:nvSpPr>
+          <p:cNvPr id="49" name="TextBox 48"/>
           <p:cNvSpPr txBox="1"/>
           <p:nvPr/>
         </p:nvSpPr>
         <p:spPr>
           <a:xfrm>
-            <a:off x="666000" y="2365200"/>
-            <a:ext cx="3420000" cy="144000"/>
+            <a:off x="6246000" y="3895200"/>
+            <a:ext cx="2412000" cy="108000"/>
           </a:xfrm>
           <a:prstGeom prst="rect">
             <a:avLst/>
@@ -27428,27 +24482,27 @@
           <a:p>
             <a:pPr algn="l"/>
             <a:r>
-              <a:rPr sz="950" b="1">
+              <a:rPr sz="900" b="0">
                 <a:solidFill>
                   <a:srgbClr val="2F3A48"/>
                 </a:solidFill>
                 <a:latin typeface="Inter"/>
               </a:rPr>
-              <a:t>Ореол Краска для плит OSB</a:t>
-            </a:r>
-          </a:p>
-        </p:txBody>
-      </p:sp>
-      <p:sp>
-        <p:nvSpPr>
-          <p:cNvPr id="80" name="TextBox 79"/>
+              <a:t>Промоакции и мастер-классы</a:t>
+            </a:r>
+          </a:p>
+        </p:txBody>
+      </p:sp>
+      <p:sp>
+        <p:nvSpPr>
+          <p:cNvPr id="50" name="TextBox 49"/>
           <p:cNvSpPr txBox="1"/>
           <p:nvPr/>
         </p:nvSpPr>
         <p:spPr>
           <a:xfrm>
-            <a:off x="666000" y="2509200"/>
-            <a:ext cx="3420000" cy="108000"/>
+            <a:off x="6156000" y="4024800"/>
+            <a:ext cx="72000" cy="108000"/>
           </a:xfrm>
           <a:prstGeom prst="rect">
             <a:avLst/>
@@ -27463,27 +24517,27 @@
           <a:p>
             <a:pPr algn="l"/>
             <a:r>
-              <a:rPr sz="850" b="0">
-                <a:solidFill>
-                  <a:srgbClr val="8A95A3"/>
+              <a:rPr sz="1200" b="1">
+                <a:solidFill>
+                  <a:srgbClr val="6B8FA8"/>
                 </a:solidFill>
                 <a:latin typeface="Inter"/>
               </a:rPr>
-              <a:t>SKU: 3  ·  Фасовки: 1 кг, 12 кг, 6 кг</a:t>
-            </a:r>
-          </a:p>
-        </p:txBody>
-      </p:sp>
-      <p:sp>
-        <p:nvSpPr>
-          <p:cNvPr id="81" name="TextBox 80"/>
+              <a:t>·</a:t>
+            </a:r>
+          </a:p>
+        </p:txBody>
+      </p:sp>
+      <p:sp>
+        <p:nvSpPr>
+          <p:cNvPr id="51" name="TextBox 50"/>
           <p:cNvSpPr txBox="1"/>
           <p:nvPr/>
         </p:nvSpPr>
         <p:spPr>
           <a:xfrm>
-            <a:off x="666000" y="2617200"/>
-            <a:ext cx="3420000" cy="108000"/>
+            <a:off x="6246000" y="4032000"/>
+            <a:ext cx="2412000" cy="108000"/>
           </a:xfrm>
           <a:prstGeom prst="rect">
             <a:avLst/>
@@ -27498,27 +24552,27 @@
           <a:p>
             <a:pPr algn="l"/>
             <a:r>
-              <a:rPr sz="850" b="0">
-                <a:solidFill>
-                  <a:srgbClr val="8A95A3"/>
+              <a:rPr sz="900" b="0">
+                <a:solidFill>
+                  <a:srgbClr val="2F3A48"/>
                 </a:solidFill>
                 <a:latin typeface="Inter"/>
               </a:rPr>
-              <a:t>Цвета: база А</a:t>
-            </a:r>
-          </a:p>
-        </p:txBody>
-      </p:sp>
-      <p:sp>
-        <p:nvSpPr>
-          <p:cNvPr id="82" name="TextBox 81"/>
+              <a:t>Куратор на каждую точку</a:t>
+            </a:r>
+          </a:p>
+        </p:txBody>
+      </p:sp>
+      <p:sp>
+        <p:nvSpPr>
+          <p:cNvPr id="52" name="TextBox 51"/>
           <p:cNvSpPr txBox="1"/>
           <p:nvPr/>
         </p:nvSpPr>
         <p:spPr>
           <a:xfrm>
-            <a:off x="2880000" y="2365200"/>
-            <a:ext cx="1368000" cy="144000"/>
+            <a:off x="6156000" y="4161600"/>
+            <a:ext cx="72000" cy="108000"/>
           </a:xfrm>
           <a:prstGeom prst="rect">
             <a:avLst/>
@@ -27531,29 +24585,29 @@
           </a:bodyPr>
           <a:lstStyle/>
           <a:p>
-            <a:pPr algn="r"/>
-            <a:r>
-              <a:rPr sz="1000" b="1">
-                <a:solidFill>
-                  <a:srgbClr val="C9A77C"/>
-                </a:solidFill>
-                <a:latin typeface="Roboto Mono"/>
-              </a:rPr>
-              <a:t>1616 тыс ₽</a:t>
-            </a:r>
-          </a:p>
-        </p:txBody>
-      </p:sp>
-      <p:sp>
-        <p:nvSpPr>
-          <p:cNvPr id="83" name="TextBox 82"/>
+            <a:pPr algn="l"/>
+            <a:r>
+              <a:rPr sz="1200" b="1">
+                <a:solidFill>
+                  <a:srgbClr val="6B8FA8"/>
+                </a:solidFill>
+                <a:latin typeface="Inter"/>
+              </a:rPr>
+              <a:t>·</a:t>
+            </a:r>
+          </a:p>
+        </p:txBody>
+      </p:sp>
+      <p:sp>
+        <p:nvSpPr>
+          <p:cNvPr id="53" name="TextBox 52"/>
           <p:cNvSpPr txBox="1"/>
           <p:nvPr/>
         </p:nvSpPr>
         <p:spPr>
           <a:xfrm>
-            <a:off x="2880000" y="2509200"/>
-            <a:ext cx="1368000" cy="108000"/>
+            <a:off x="6246000" y="4168800"/>
+            <a:ext cx="2412000" cy="108000"/>
           </a:xfrm>
           <a:prstGeom prst="rect">
             <a:avLst/>
@@ -27566,64 +24620,29 @@
           </a:bodyPr>
           <a:lstStyle/>
           <a:p>
-            <a:pPr algn="r"/>
-            <a:r>
-              <a:rPr sz="800" b="0">
-                <a:solidFill>
-                  <a:srgbClr val="8A95A3"/>
+            <a:pPr algn="l"/>
+            <a:r>
+              <a:rPr sz="900" b="0">
+                <a:solidFill>
+                  <a:srgbClr val="2F3A48"/>
                 </a:solidFill>
                 <a:latin typeface="Inter"/>
               </a:rPr>
-              <a:t>Первичка · 7746 кг</a:t>
-            </a:r>
-          </a:p>
-        </p:txBody>
-      </p:sp>
-      <p:sp>
-        <p:nvSpPr>
-          <p:cNvPr id="84" name="TextBox 83"/>
-          <p:cNvSpPr txBox="1"/>
-          <p:nvPr/>
-        </p:nvSpPr>
-        <p:spPr>
-          <a:xfrm>
-            <a:off x="2880000" y="2617200"/>
-            <a:ext cx="1368000" cy="108000"/>
-          </a:xfrm>
-          <a:prstGeom prst="rect">
-            <a:avLst/>
-          </a:prstGeom>
-          <a:noFill/>
-        </p:spPr>
-        <p:txBody>
-          <a:bodyPr wrap="square" lIns="0" rIns="0" tIns="0" bIns="0" anchor="t">
-            <a:spAutoFit/>
-          </a:bodyPr>
-          <a:lstStyle/>
-          <a:p>
-            <a:pPr algn="r"/>
-            <a:r>
-              <a:rPr sz="800" b="0">
-                <a:solidFill>
-                  <a:srgbClr val="8A95A3"/>
-                </a:solidFill>
-                <a:latin typeface="Inter"/>
-              </a:rPr>
-              <a:t>АКБ: 197  ·  SKU: 3</a:t>
-            </a:r>
-          </a:p>
-        </p:txBody>
-      </p:sp>
-      <p:sp>
-        <p:nvSpPr>
-          <p:cNvPr id="85" name="Rectangle 84"/>
+              <a:t>Аналитика продаж по неделе</a:t>
+            </a:r>
+          </a:p>
+        </p:txBody>
+      </p:sp>
+      <p:sp>
+        <p:nvSpPr>
+          <p:cNvPr id="54" name="Rectangle 53"/>
           <p:cNvSpPr/>
           <p:nvPr/>
         </p:nvSpPr>
         <p:spPr>
           <a:xfrm>
-            <a:off x="324000" y="2887200"/>
-            <a:ext cx="3924000" cy="7200"/>
+            <a:off x="6156000" y="4446000"/>
+            <a:ext cx="2520000" cy="10800"/>
           </a:xfrm>
           <a:prstGeom prst="rect">
             <a:avLst/>
@@ -27660,187 +24679,97 @@
       </p:sp>
       <p:sp>
         <p:nvSpPr>
-          <p:cNvPr id="86" name="Rounded Rectangle 85"/>
-          <p:cNvSpPr/>
-          <p:nvPr/>
-        </p:nvSpPr>
-        <p:spPr>
-          <a:xfrm>
-            <a:off x="324000" y="2923200"/>
-            <a:ext cx="3924000" cy="576000"/>
-          </a:xfrm>
-          <a:prstGeom prst="roundRect">
-            <a:avLst>
-              <a:gd name="adj" fmla="val 3000"/>
-            </a:avLst>
-          </a:prstGeom>
-          <a:solidFill>
-            <a:srgbClr val="F5F2EC"/>
-          </a:solidFill>
-          <a:ln>
-            <a:noFill/>
-          </a:ln>
-          <a:effectLst/>
-        </p:spPr>
-        <p:style>
-          <a:lnRef idx="1">
-            <a:schemeClr val="accent1"/>
-          </a:lnRef>
-          <a:fillRef idx="3">
-            <a:schemeClr val="accent1"/>
-          </a:fillRef>
-          <a:effectRef idx="2">
-            <a:schemeClr val="accent1"/>
-          </a:effectRef>
-          <a:fontRef idx="minor">
-            <a:schemeClr val="lt1"/>
-          </a:fontRef>
-        </p:style>
-        <p:txBody>
-          <a:bodyPr rtlCol="0" anchor="ctr"/>
-          <a:lstStyle/>
-          <a:p>
-            <a:pPr algn="ctr"/>
-          </a:p>
-        </p:txBody>
-      </p:sp>
-      <p:sp>
-        <p:nvSpPr>
-          <p:cNvPr id="87" name="Rectangle 86"/>
-          <p:cNvSpPr/>
-          <p:nvPr/>
-        </p:nvSpPr>
-        <p:spPr>
-          <a:xfrm>
-            <a:off x="324000" y="2923200"/>
-            <a:ext cx="28800" cy="576000"/>
-          </a:xfrm>
-          <a:prstGeom prst="rect">
-            <a:avLst/>
-          </a:prstGeom>
-          <a:solidFill>
-            <a:srgbClr val="6B8FA8"/>
-          </a:solidFill>
-          <a:ln>
-            <a:noFill/>
-          </a:ln>
-          <a:effectLst/>
-        </p:spPr>
-        <p:style>
-          <a:lnRef idx="1">
-            <a:schemeClr val="accent1"/>
-          </a:lnRef>
-          <a:fillRef idx="3">
-            <a:schemeClr val="accent1"/>
-          </a:fillRef>
-          <a:effectRef idx="2">
-            <a:schemeClr val="accent1"/>
-          </a:effectRef>
-          <a:fontRef idx="minor">
-            <a:schemeClr val="lt1"/>
-          </a:fontRef>
-        </p:style>
-        <p:txBody>
-          <a:bodyPr rtlCol="0" anchor="ctr"/>
-          <a:lstStyle/>
-          <a:p>
-            <a:pPr algn="ctr"/>
-          </a:p>
-        </p:txBody>
-      </p:sp>
-      <p:sp>
-        <p:nvSpPr>
-          <p:cNvPr id="88" name="TextBox 87"/>
+          <p:cNvPr id="55" name="TextBox 54"/>
           <p:cNvSpPr txBox="1"/>
           <p:nvPr/>
         </p:nvSpPr>
         <p:spPr>
           <a:xfrm>
-            <a:off x="396000" y="2959200"/>
-            <a:ext cx="251999" cy="144000"/>
-          </a:xfrm>
-          <a:prstGeom prst="rect">
-            <a:avLst/>
-          </a:prstGeom>
-          <a:noFill/>
-        </p:spPr>
-        <p:txBody>
-          <a:bodyPr wrap="square" lIns="0" rIns="0" tIns="0" bIns="0" anchor="t">
+            <a:off x="6156000" y="4482000"/>
+            <a:ext cx="1080000" cy="125999"/>
+          </a:xfrm>
+          <a:prstGeom prst="rect">
+            <a:avLst/>
+          </a:prstGeom>
+          <a:noFill/>
+        </p:spPr>
+        <p:txBody>
+          <a:bodyPr wrap="square" lIns="0" rIns="0" tIns="0" bIns="0" anchor="ctr">
             <a:spAutoFit/>
           </a:bodyPr>
           <a:lstStyle/>
           <a:p>
             <a:pPr algn="l"/>
             <a:r>
-              <a:rPr sz="1100" b="1">
-                <a:solidFill>
-                  <a:srgbClr val="6B8FA8"/>
-                </a:solidFill>
-                <a:latin typeface="Roboto Mono"/>
-              </a:rPr>
-              <a:t>03</a:t>
-            </a:r>
-          </a:p>
-        </p:txBody>
-      </p:sp>
-      <p:sp>
-        <p:nvSpPr>
-          <p:cNvPr id="89" name="TextBox 88"/>
+              <a:rPr sz="800" b="1">
+                <a:solidFill>
+                  <a:srgbClr val="8A95A3"/>
+                </a:solidFill>
+                <a:latin typeface="Inter"/>
+              </a:rPr>
+              <a:t>KPI:</a:t>
+            </a:r>
+          </a:p>
+        </p:txBody>
+      </p:sp>
+      <p:sp>
+        <p:nvSpPr>
+          <p:cNvPr id="56" name="TextBox 55"/>
           <p:cNvSpPr txBox="1"/>
           <p:nvPr/>
         </p:nvSpPr>
         <p:spPr>
           <a:xfrm>
-            <a:off x="666000" y="2959200"/>
-            <a:ext cx="3420000" cy="144000"/>
-          </a:xfrm>
-          <a:prstGeom prst="rect">
-            <a:avLst/>
-          </a:prstGeom>
-          <a:noFill/>
-        </p:spPr>
-        <p:txBody>
-          <a:bodyPr wrap="square" lIns="0" rIns="0" tIns="0" bIns="0" anchor="t">
+            <a:off x="6552000" y="4482000"/>
+            <a:ext cx="1080000" cy="125999"/>
+          </a:xfrm>
+          <a:prstGeom prst="rect">
+            <a:avLst/>
+          </a:prstGeom>
+          <a:noFill/>
+        </p:spPr>
+        <p:txBody>
+          <a:bodyPr wrap="square" lIns="0" rIns="0" tIns="0" bIns="0" anchor="ctr">
             <a:spAutoFit/>
           </a:bodyPr>
           <a:lstStyle/>
           <a:p>
             <a:pPr algn="l"/>
             <a:r>
-              <a:rPr sz="950" b="1">
-                <a:solidFill>
-                  <a:srgbClr val="2F3A48"/>
-                </a:solidFill>
-                <a:latin typeface="Inter"/>
-              </a:rPr>
-              <a:t>NEWTONE ABSOLUTE BLACK</a:t>
-            </a:r>
-          </a:p>
-        </p:txBody>
-      </p:sp>
-      <p:sp>
-        <p:nvSpPr>
-          <p:cNvPr id="90" name="TextBox 89"/>
+              <a:rPr sz="1200" b="1">
+                <a:solidFill>
+                  <a:srgbClr val="6B8FA8"/>
+                </a:solidFill>
+                <a:latin typeface="Roboto Mono"/>
+              </a:rPr>
+              <a:t>350 ТП</a:t>
+            </a:r>
+          </a:p>
+        </p:txBody>
+      </p:sp>
+      <p:sp>
+        <p:nvSpPr>
+          <p:cNvPr id="57" name="TextBox 56"/>
           <p:cNvSpPr txBox="1"/>
           <p:nvPr/>
         </p:nvSpPr>
         <p:spPr>
           <a:xfrm>
-            <a:off x="666000" y="3103200"/>
-            <a:ext cx="3420000" cy="108000"/>
-          </a:xfrm>
-          <a:prstGeom prst="rect">
-            <a:avLst/>
-          </a:prstGeom>
-          <a:noFill/>
-        </p:spPr>
-        <p:txBody>
-          <a:bodyPr wrap="square" lIns="0" rIns="0" tIns="0" bIns="0" anchor="t">
+            <a:off x="7632000" y="4482000"/>
+            <a:ext cx="1008000" cy="125999"/>
+          </a:xfrm>
+          <a:prstGeom prst="rect">
+            <a:avLst/>
+          </a:prstGeom>
+          <a:noFill/>
+        </p:spPr>
+        <p:txBody>
+          <a:bodyPr wrap="square" lIns="0" rIns="0" tIns="0" bIns="0" anchor="ctr">
             <a:spAutoFit/>
           </a:bodyPr>
           <a:lstStyle/>
           <a:p>
-            <a:pPr algn="l"/>
+            <a:pPr algn="r"/>
             <a:r>
               <a:rPr sz="850" b="0">
                 <a:solidFill>
@@ -27848,161 +24777,21 @@
                 </a:solidFill>
                 <a:latin typeface="Inter"/>
               </a:rPr>
-              <a:t>SKU: 2  ·  Фасовки: 10 л, 2.5 л</a:t>
-            </a:r>
-          </a:p>
-        </p:txBody>
-      </p:sp>
-      <p:sp>
-        <p:nvSpPr>
-          <p:cNvPr id="91" name="TextBox 90"/>
-          <p:cNvSpPr txBox="1"/>
-          <p:nvPr/>
-        </p:nvSpPr>
-        <p:spPr>
-          <a:xfrm>
-            <a:off x="666000" y="3211200"/>
-            <a:ext cx="3420000" cy="108000"/>
-          </a:xfrm>
-          <a:prstGeom prst="rect">
-            <a:avLst/>
-          </a:prstGeom>
-          <a:noFill/>
-        </p:spPr>
-        <p:txBody>
-          <a:bodyPr wrap="square" lIns="0" rIns="0" tIns="0" bIns="0" anchor="t">
-            <a:spAutoFit/>
-          </a:bodyPr>
-          <a:lstStyle/>
-          <a:p>
-            <a:pPr algn="l"/>
-            <a:r>
-              <a:rPr sz="850" b="0">
-                <a:solidFill>
-                  <a:srgbClr val="8A95A3"/>
-                </a:solidFill>
-                <a:latin typeface="Inter"/>
-              </a:rPr>
-              <a:t>Цвета: чёрный</a:t>
-            </a:r>
-          </a:p>
-        </p:txBody>
-      </p:sp>
-      <p:sp>
-        <p:nvSpPr>
-          <p:cNvPr id="92" name="TextBox 91"/>
-          <p:cNvSpPr txBox="1"/>
-          <p:nvPr/>
-        </p:nvSpPr>
-        <p:spPr>
-          <a:xfrm>
-            <a:off x="2880000" y="2959200"/>
-            <a:ext cx="1368000" cy="144000"/>
-          </a:xfrm>
-          <a:prstGeom prst="rect">
-            <a:avLst/>
-          </a:prstGeom>
-          <a:noFill/>
-        </p:spPr>
-        <p:txBody>
-          <a:bodyPr wrap="square" lIns="0" rIns="0" tIns="0" bIns="0" anchor="t">
-            <a:spAutoFit/>
-          </a:bodyPr>
-          <a:lstStyle/>
-          <a:p>
-            <a:pPr algn="r"/>
-            <a:r>
-              <a:rPr sz="1000" b="1">
-                <a:solidFill>
-                  <a:srgbClr val="6B8FA8"/>
-                </a:solidFill>
-                <a:latin typeface="Roboto Mono"/>
-              </a:rPr>
-              <a:t>111 тыс ₽</a:t>
-            </a:r>
-          </a:p>
-        </p:txBody>
-      </p:sp>
-      <p:sp>
-        <p:nvSpPr>
-          <p:cNvPr id="93" name="TextBox 92"/>
-          <p:cNvSpPr txBox="1"/>
-          <p:nvPr/>
-        </p:nvSpPr>
-        <p:spPr>
-          <a:xfrm>
-            <a:off x="2880000" y="3103200"/>
-            <a:ext cx="1368000" cy="108000"/>
-          </a:xfrm>
-          <a:prstGeom prst="rect">
-            <a:avLst/>
-          </a:prstGeom>
-          <a:noFill/>
-        </p:spPr>
-        <p:txBody>
-          <a:bodyPr wrap="square" lIns="0" rIns="0" tIns="0" bIns="0" anchor="t">
-            <a:spAutoFit/>
-          </a:bodyPr>
-          <a:lstStyle/>
-          <a:p>
-            <a:pPr algn="r"/>
-            <a:r>
-              <a:rPr sz="800" b="0">
-                <a:solidFill>
-                  <a:srgbClr val="8A95A3"/>
-                </a:solidFill>
-                <a:latin typeface="Inter"/>
-              </a:rPr>
-              <a:t>Первичка · 693 кг</a:t>
-            </a:r>
-          </a:p>
-        </p:txBody>
-      </p:sp>
-      <p:sp>
-        <p:nvSpPr>
-          <p:cNvPr id="94" name="TextBox 93"/>
-          <p:cNvSpPr txBox="1"/>
-          <p:nvPr/>
-        </p:nvSpPr>
-        <p:spPr>
-          <a:xfrm>
-            <a:off x="2880000" y="3211200"/>
-            <a:ext cx="1368000" cy="108000"/>
-          </a:xfrm>
-          <a:prstGeom prst="rect">
-            <a:avLst/>
-          </a:prstGeom>
-          <a:noFill/>
-        </p:spPr>
-        <p:txBody>
-          <a:bodyPr wrap="square" lIns="0" rIns="0" tIns="0" bIns="0" anchor="t">
-            <a:spAutoFit/>
-          </a:bodyPr>
-          <a:lstStyle/>
-          <a:p>
-            <a:pPr algn="r"/>
-            <a:r>
-              <a:rPr sz="800" b="0">
-                <a:solidFill>
-                  <a:srgbClr val="8A95A3"/>
-                </a:solidFill>
-                <a:latin typeface="Inter"/>
-              </a:rPr>
-              <a:t>АКБ: 0  ·  SKU: 2</a:t>
-            </a:r>
-          </a:p>
-        </p:txBody>
-      </p:sp>
-      <p:sp>
-        <p:nvSpPr>
-          <p:cNvPr id="95" name="Rectangle 94"/>
+              <a:t>обучено в 1-й мес.</a:t>
+            </a:r>
+          </a:p>
+        </p:txBody>
+      </p:sp>
+      <p:sp>
+        <p:nvSpPr>
+          <p:cNvPr id="58" name="Rectangle 57"/>
           <p:cNvSpPr/>
           <p:nvPr/>
         </p:nvSpPr>
         <p:spPr>
           <a:xfrm>
-            <a:off x="324000" y="3481200"/>
-            <a:ext cx="3924000" cy="7200"/>
+            <a:off x="180000" y="4860000"/>
+            <a:ext cx="8820000" cy="14400"/>
           </a:xfrm>
           <a:prstGeom prst="rect">
             <a:avLst/>
@@ -28039,58 +24828,14 @@
       </p:sp>
       <p:sp>
         <p:nvSpPr>
-          <p:cNvPr id="96" name="Rectangle 95"/>
-          <p:cNvSpPr/>
-          <p:nvPr/>
-        </p:nvSpPr>
-        <p:spPr>
-          <a:xfrm>
-            <a:off x="324000" y="3517200"/>
-            <a:ext cx="28800" cy="576000"/>
-          </a:xfrm>
-          <a:prstGeom prst="rect">
-            <a:avLst/>
-          </a:prstGeom>
-          <a:solidFill>
-            <a:srgbClr val="8BAA8A"/>
-          </a:solidFill>
-          <a:ln>
-            <a:noFill/>
-          </a:ln>
-          <a:effectLst/>
-        </p:spPr>
-        <p:style>
-          <a:lnRef idx="1">
-            <a:schemeClr val="accent1"/>
-          </a:lnRef>
-          <a:fillRef idx="3">
-            <a:schemeClr val="accent1"/>
-          </a:fillRef>
-          <a:effectRef idx="2">
-            <a:schemeClr val="accent1"/>
-          </a:effectRef>
-          <a:fontRef idx="minor">
-            <a:schemeClr val="lt1"/>
-          </a:fontRef>
-        </p:style>
-        <p:txBody>
-          <a:bodyPr rtlCol="0" anchor="ctr"/>
-          <a:lstStyle/>
-          <a:p>
-            <a:pPr algn="ctr"/>
-          </a:p>
-        </p:txBody>
-      </p:sp>
-      <p:sp>
-        <p:nvSpPr>
-          <p:cNvPr id="97" name="TextBox 96"/>
+          <p:cNvPr id="59" name="TextBox 58"/>
           <p:cNvSpPr txBox="1"/>
           <p:nvPr/>
         </p:nvSpPr>
         <p:spPr>
           <a:xfrm>
-            <a:off x="396000" y="3553200"/>
-            <a:ext cx="251999" cy="144000"/>
+            <a:off x="180000" y="4896000"/>
+            <a:ext cx="8820000" cy="144000"/>
           </a:xfrm>
           <a:prstGeom prst="rect">
             <a:avLst/>
@@ -28103,683 +24848,15 @@
           </a:bodyPr>
           <a:lstStyle/>
           <a:p>
-            <a:pPr algn="l"/>
-            <a:r>
-              <a:rPr sz="1100" b="1">
-                <a:solidFill>
-                  <a:srgbClr val="8BAA8A"/>
-                </a:solidFill>
-                <a:latin typeface="Roboto Mono"/>
-              </a:rPr>
-              <a:t>04</a:t>
-            </a:r>
-          </a:p>
-        </p:txBody>
-      </p:sp>
-      <p:sp>
-        <p:nvSpPr>
-          <p:cNvPr id="98" name="TextBox 97"/>
-          <p:cNvSpPr txBox="1"/>
-          <p:nvPr/>
-        </p:nvSpPr>
-        <p:spPr>
-          <a:xfrm>
-            <a:off x="666000" y="3553200"/>
-            <a:ext cx="3420000" cy="144000"/>
-          </a:xfrm>
-          <a:prstGeom prst="rect">
-            <a:avLst/>
-          </a:prstGeom>
-          <a:noFill/>
-        </p:spPr>
-        <p:txBody>
-          <a:bodyPr wrap="square" lIns="0" rIns="0" tIns="0" bIns="0" anchor="t">
-            <a:spAutoFit/>
-          </a:bodyPr>
-          <a:lstStyle/>
-          <a:p>
-            <a:pPr algn="l"/>
-            <a:r>
-              <a:rPr sz="950" b="1">
-                <a:solidFill>
-                  <a:srgbClr val="2F3A48"/>
+            <a:pPr algn="ctr"/>
+            <a:r>
+              <a:rPr sz="900" b="0">
+                <a:solidFill>
+                  <a:srgbClr val="8A95A3"/>
                 </a:solidFill>
                 <a:latin typeface="Inter"/>
               </a:rPr>
-              <a:t>NEWTONE SKY потолочная</a:t>
-            </a:r>
-          </a:p>
-        </p:txBody>
-      </p:sp>
-      <p:sp>
-        <p:nvSpPr>
-          <p:cNvPr id="99" name="TextBox 98"/>
-          <p:cNvSpPr txBox="1"/>
-          <p:nvPr/>
-        </p:nvSpPr>
-        <p:spPr>
-          <a:xfrm>
-            <a:off x="666000" y="3697200"/>
-            <a:ext cx="3420000" cy="108000"/>
-          </a:xfrm>
-          <a:prstGeom prst="rect">
-            <a:avLst/>
-          </a:prstGeom>
-          <a:noFill/>
-        </p:spPr>
-        <p:txBody>
-          <a:bodyPr wrap="square" lIns="0" rIns="0" tIns="0" bIns="0" anchor="t">
-            <a:spAutoFit/>
-          </a:bodyPr>
-          <a:lstStyle/>
-          <a:p>
-            <a:pPr algn="l"/>
-            <a:r>
-              <a:rPr sz="850" b="0">
-                <a:solidFill>
-                  <a:srgbClr val="8A95A3"/>
-                </a:solidFill>
-                <a:latin typeface="Inter"/>
-              </a:rPr>
-              <a:t>SKU: 2  ·  Фасовки: 2.5 л, 9 л</a:t>
-            </a:r>
-          </a:p>
-        </p:txBody>
-      </p:sp>
-      <p:sp>
-        <p:nvSpPr>
-          <p:cNvPr id="100" name="TextBox 99"/>
-          <p:cNvSpPr txBox="1"/>
-          <p:nvPr/>
-        </p:nvSpPr>
-        <p:spPr>
-          <a:xfrm>
-            <a:off x="666000" y="3805200"/>
-            <a:ext cx="3420000" cy="108000"/>
-          </a:xfrm>
-          <a:prstGeom prst="rect">
-            <a:avLst/>
-          </a:prstGeom>
-          <a:noFill/>
-        </p:spPr>
-        <p:txBody>
-          <a:bodyPr wrap="square" lIns="0" rIns="0" tIns="0" bIns="0" anchor="t">
-            <a:spAutoFit/>
-          </a:bodyPr>
-          <a:lstStyle/>
-          <a:p>
-            <a:pPr algn="l"/>
-            <a:r>
-              <a:rPr sz="850" b="0">
-                <a:solidFill>
-                  <a:srgbClr val="8A95A3"/>
-                </a:solidFill>
-                <a:latin typeface="Inter"/>
-              </a:rPr>
-              <a:t>Цвета: ультрабелый</a:t>
-            </a:r>
-          </a:p>
-        </p:txBody>
-      </p:sp>
-      <p:sp>
-        <p:nvSpPr>
-          <p:cNvPr id="101" name="TextBox 100"/>
-          <p:cNvSpPr txBox="1"/>
-          <p:nvPr/>
-        </p:nvSpPr>
-        <p:spPr>
-          <a:xfrm>
-            <a:off x="2880000" y="3553200"/>
-            <a:ext cx="1368000" cy="144000"/>
-          </a:xfrm>
-          <a:prstGeom prst="rect">
-            <a:avLst/>
-          </a:prstGeom>
-          <a:noFill/>
-        </p:spPr>
-        <p:txBody>
-          <a:bodyPr wrap="square" lIns="0" rIns="0" tIns="0" bIns="0" anchor="t">
-            <a:spAutoFit/>
-          </a:bodyPr>
-          <a:lstStyle/>
-          <a:p>
-            <a:pPr algn="r"/>
-            <a:r>
-              <a:rPr sz="1000" b="1">
-                <a:solidFill>
-                  <a:srgbClr val="8BAA8A"/>
-                </a:solidFill>
-                <a:latin typeface="Roboto Mono"/>
-              </a:rPr>
-              <a:t>57 тыс ₽</a:t>
-            </a:r>
-          </a:p>
-        </p:txBody>
-      </p:sp>
-      <p:sp>
-        <p:nvSpPr>
-          <p:cNvPr id="102" name="TextBox 101"/>
-          <p:cNvSpPr txBox="1"/>
-          <p:nvPr/>
-        </p:nvSpPr>
-        <p:spPr>
-          <a:xfrm>
-            <a:off x="2880000" y="3697200"/>
-            <a:ext cx="1368000" cy="108000"/>
-          </a:xfrm>
-          <a:prstGeom prst="rect">
-            <a:avLst/>
-          </a:prstGeom>
-          <a:noFill/>
-        </p:spPr>
-        <p:txBody>
-          <a:bodyPr wrap="square" lIns="0" rIns="0" tIns="0" bIns="0" anchor="t">
-            <a:spAutoFit/>
-          </a:bodyPr>
-          <a:lstStyle/>
-          <a:p>
-            <a:pPr algn="r"/>
-            <a:r>
-              <a:rPr sz="800" b="0">
-                <a:solidFill>
-                  <a:srgbClr val="8A95A3"/>
-                </a:solidFill>
-                <a:latin typeface="Inter"/>
-              </a:rPr>
-              <a:t>Первичка · 236 кг</a:t>
-            </a:r>
-          </a:p>
-        </p:txBody>
-      </p:sp>
-      <p:sp>
-        <p:nvSpPr>
-          <p:cNvPr id="103" name="TextBox 102"/>
-          <p:cNvSpPr txBox="1"/>
-          <p:nvPr/>
-        </p:nvSpPr>
-        <p:spPr>
-          <a:xfrm>
-            <a:off x="2880000" y="3805200"/>
-            <a:ext cx="1368000" cy="108000"/>
-          </a:xfrm>
-          <a:prstGeom prst="rect">
-            <a:avLst/>
-          </a:prstGeom>
-          <a:noFill/>
-        </p:spPr>
-        <p:txBody>
-          <a:bodyPr wrap="square" lIns="0" rIns="0" tIns="0" bIns="0" anchor="t">
-            <a:spAutoFit/>
-          </a:bodyPr>
-          <a:lstStyle/>
-          <a:p>
-            <a:pPr algn="r"/>
-            <a:r>
-              <a:rPr sz="800" b="0">
-                <a:solidFill>
-                  <a:srgbClr val="8A95A3"/>
-                </a:solidFill>
-                <a:latin typeface="Inter"/>
-              </a:rPr>
-              <a:t>АКБ: 0  ·  SKU: 2</a:t>
-            </a:r>
-          </a:p>
-        </p:txBody>
-      </p:sp>
-      <p:sp>
-        <p:nvSpPr>
-          <p:cNvPr id="104" name="Rectangle 103"/>
-          <p:cNvSpPr/>
-          <p:nvPr/>
-        </p:nvSpPr>
-        <p:spPr>
-          <a:xfrm>
-            <a:off x="324000" y="4075200"/>
-            <a:ext cx="3924000" cy="7200"/>
-          </a:xfrm>
-          <a:prstGeom prst="rect">
-            <a:avLst/>
-          </a:prstGeom>
-          <a:solidFill>
-            <a:srgbClr val="EFE9DD"/>
-          </a:solidFill>
-          <a:ln>
-            <a:noFill/>
-          </a:ln>
-          <a:effectLst/>
-        </p:spPr>
-        <p:style>
-          <a:lnRef idx="1">
-            <a:schemeClr val="accent1"/>
-          </a:lnRef>
-          <a:fillRef idx="3">
-            <a:schemeClr val="accent1"/>
-          </a:fillRef>
-          <a:effectRef idx="2">
-            <a:schemeClr val="accent1"/>
-          </a:effectRef>
-          <a:fontRef idx="minor">
-            <a:schemeClr val="lt1"/>
-          </a:fontRef>
-        </p:style>
-        <p:txBody>
-          <a:bodyPr rtlCol="0" anchor="ctr"/>
-          <a:lstStyle/>
-          <a:p>
-            <a:pPr algn="ctr"/>
-          </a:p>
-        </p:txBody>
-      </p:sp>
-      <p:sp>
-        <p:nvSpPr>
-          <p:cNvPr id="105" name="Rounded Rectangle 104"/>
-          <p:cNvSpPr/>
-          <p:nvPr/>
-        </p:nvSpPr>
-        <p:spPr>
-          <a:xfrm>
-            <a:off x="324000" y="4111200"/>
-            <a:ext cx="3924000" cy="576000"/>
-          </a:xfrm>
-          <a:prstGeom prst="roundRect">
-            <a:avLst>
-              <a:gd name="adj" fmla="val 3000"/>
-            </a:avLst>
-          </a:prstGeom>
-          <a:solidFill>
-            <a:srgbClr val="F5F2EC"/>
-          </a:solidFill>
-          <a:ln>
-            <a:noFill/>
-          </a:ln>
-          <a:effectLst/>
-        </p:spPr>
-        <p:style>
-          <a:lnRef idx="1">
-            <a:schemeClr val="accent1"/>
-          </a:lnRef>
-          <a:fillRef idx="3">
-            <a:schemeClr val="accent1"/>
-          </a:fillRef>
-          <a:effectRef idx="2">
-            <a:schemeClr val="accent1"/>
-          </a:effectRef>
-          <a:fontRef idx="minor">
-            <a:schemeClr val="lt1"/>
-          </a:fontRef>
-        </p:style>
-        <p:txBody>
-          <a:bodyPr rtlCol="0" anchor="ctr"/>
-          <a:lstStyle/>
-          <a:p>
-            <a:pPr algn="ctr"/>
-          </a:p>
-        </p:txBody>
-      </p:sp>
-      <p:sp>
-        <p:nvSpPr>
-          <p:cNvPr id="106" name="Rectangle 105"/>
-          <p:cNvSpPr/>
-          <p:nvPr/>
-        </p:nvSpPr>
-        <p:spPr>
-          <a:xfrm>
-            <a:off x="324000" y="4111200"/>
-            <a:ext cx="28800" cy="576000"/>
-          </a:xfrm>
-          <a:prstGeom prst="rect">
-            <a:avLst/>
-          </a:prstGeom>
-          <a:solidFill>
-            <a:srgbClr val="7B6FA8"/>
-          </a:solidFill>
-          <a:ln>
-            <a:noFill/>
-          </a:ln>
-          <a:effectLst/>
-        </p:spPr>
-        <p:style>
-          <a:lnRef idx="1">
-            <a:schemeClr val="accent1"/>
-          </a:lnRef>
-          <a:fillRef idx="3">
-            <a:schemeClr val="accent1"/>
-          </a:fillRef>
-          <a:effectRef idx="2">
-            <a:schemeClr val="accent1"/>
-          </a:effectRef>
-          <a:fontRef idx="minor">
-            <a:schemeClr val="lt1"/>
-          </a:fontRef>
-        </p:style>
-        <p:txBody>
-          <a:bodyPr rtlCol="0" anchor="ctr"/>
-          <a:lstStyle/>
-          <a:p>
-            <a:pPr algn="ctr"/>
-          </a:p>
-        </p:txBody>
-      </p:sp>
-      <p:sp>
-        <p:nvSpPr>
-          <p:cNvPr id="107" name="TextBox 106"/>
-          <p:cNvSpPr txBox="1"/>
-          <p:nvPr/>
-        </p:nvSpPr>
-        <p:spPr>
-          <a:xfrm>
-            <a:off x="396000" y="4147200"/>
-            <a:ext cx="251999" cy="144000"/>
-          </a:xfrm>
-          <a:prstGeom prst="rect">
-            <a:avLst/>
-          </a:prstGeom>
-          <a:noFill/>
-        </p:spPr>
-        <p:txBody>
-          <a:bodyPr wrap="square" lIns="0" rIns="0" tIns="0" bIns="0" anchor="t">
-            <a:spAutoFit/>
-          </a:bodyPr>
-          <a:lstStyle/>
-          <a:p>
-            <a:pPr algn="l"/>
-            <a:r>
-              <a:rPr sz="1100" b="1">
-                <a:solidFill>
-                  <a:srgbClr val="7B6FA8"/>
-                </a:solidFill>
-                <a:latin typeface="Roboto Mono"/>
-              </a:rPr>
-              <a:t>05</a:t>
-            </a:r>
-          </a:p>
-        </p:txBody>
-      </p:sp>
-      <p:sp>
-        <p:nvSpPr>
-          <p:cNvPr id="108" name="TextBox 107"/>
-          <p:cNvSpPr txBox="1"/>
-          <p:nvPr/>
-        </p:nvSpPr>
-        <p:spPr>
-          <a:xfrm>
-            <a:off x="666000" y="4147200"/>
-            <a:ext cx="3420000" cy="144000"/>
-          </a:xfrm>
-          <a:prstGeom prst="rect">
-            <a:avLst/>
-          </a:prstGeom>
-          <a:noFill/>
-        </p:spPr>
-        <p:txBody>
-          <a:bodyPr wrap="square" lIns="0" rIns="0" tIns="0" bIns="0" anchor="t">
-            <a:spAutoFit/>
-          </a:bodyPr>
-          <a:lstStyle/>
-          <a:p>
-            <a:pPr algn="l"/>
-            <a:r>
-              <a:rPr sz="950" b="1">
-                <a:solidFill>
-                  <a:srgbClr val="2F3A48"/>
-                </a:solidFill>
-                <a:latin typeface="Inter"/>
-              </a:rPr>
-              <a:t>Ореол Краска резиновая ВД</a:t>
-            </a:r>
-          </a:p>
-        </p:txBody>
-      </p:sp>
-      <p:sp>
-        <p:nvSpPr>
-          <p:cNvPr id="109" name="TextBox 108"/>
-          <p:cNvSpPr txBox="1"/>
-          <p:nvPr/>
-        </p:nvSpPr>
-        <p:spPr>
-          <a:xfrm>
-            <a:off x="666000" y="4291200"/>
-            <a:ext cx="3420000" cy="108000"/>
-          </a:xfrm>
-          <a:prstGeom prst="rect">
-            <a:avLst/>
-          </a:prstGeom>
-          <a:noFill/>
-        </p:spPr>
-        <p:txBody>
-          <a:bodyPr wrap="square" lIns="0" rIns="0" tIns="0" bIns="0" anchor="t">
-            <a:spAutoFit/>
-          </a:bodyPr>
-          <a:lstStyle/>
-          <a:p>
-            <a:pPr algn="l"/>
-            <a:r>
-              <a:rPr sz="850" b="0">
-                <a:solidFill>
-                  <a:srgbClr val="8A95A3"/>
-                </a:solidFill>
-                <a:latin typeface="Inter"/>
-              </a:rPr>
-              <a:t>SKU: 4  ·  Фасовки: 1.3 кг, 12 кг, 3 кг, 6 кг</a:t>
-            </a:r>
-          </a:p>
-        </p:txBody>
-      </p:sp>
-      <p:sp>
-        <p:nvSpPr>
-          <p:cNvPr id="110" name="TextBox 109"/>
-          <p:cNvSpPr txBox="1"/>
-          <p:nvPr/>
-        </p:nvSpPr>
-        <p:spPr>
-          <a:xfrm>
-            <a:off x="666000" y="4399200"/>
-            <a:ext cx="3420000" cy="108000"/>
-          </a:xfrm>
-          <a:prstGeom prst="rect">
-            <a:avLst/>
-          </a:prstGeom>
-          <a:noFill/>
-        </p:spPr>
-        <p:txBody>
-          <a:bodyPr wrap="square" lIns="0" rIns="0" tIns="0" bIns="0" anchor="t">
-            <a:spAutoFit/>
-          </a:bodyPr>
-          <a:lstStyle/>
-          <a:p>
-            <a:pPr algn="l"/>
-            <a:r>
-              <a:rPr sz="850" b="0">
-                <a:solidFill>
-                  <a:srgbClr val="8A95A3"/>
-                </a:solidFill>
-                <a:latin typeface="Inter"/>
-              </a:rPr>
-              <a:t>Цвета: база А</a:t>
-            </a:r>
-          </a:p>
-        </p:txBody>
-      </p:sp>
-      <p:sp>
-        <p:nvSpPr>
-          <p:cNvPr id="111" name="TextBox 110"/>
-          <p:cNvSpPr txBox="1"/>
-          <p:nvPr/>
-        </p:nvSpPr>
-        <p:spPr>
-          <a:xfrm>
-            <a:off x="2880000" y="4147200"/>
-            <a:ext cx="1368000" cy="144000"/>
-          </a:xfrm>
-          <a:prstGeom prst="rect">
-            <a:avLst/>
-          </a:prstGeom>
-          <a:noFill/>
-        </p:spPr>
-        <p:txBody>
-          <a:bodyPr wrap="square" lIns="0" rIns="0" tIns="0" bIns="0" anchor="t">
-            <a:spAutoFit/>
-          </a:bodyPr>
-          <a:lstStyle/>
-          <a:p>
-            <a:pPr algn="r"/>
-            <a:r>
-              <a:rPr sz="1000" b="1">
-                <a:solidFill>
-                  <a:srgbClr val="7B6FA8"/>
-                </a:solidFill>
-                <a:latin typeface="Roboto Mono"/>
-              </a:rPr>
-              <a:t>1058 тыс ₽</a:t>
-            </a:r>
-          </a:p>
-        </p:txBody>
-      </p:sp>
-      <p:sp>
-        <p:nvSpPr>
-          <p:cNvPr id="112" name="TextBox 111"/>
-          <p:cNvSpPr txBox="1"/>
-          <p:nvPr/>
-        </p:nvSpPr>
-        <p:spPr>
-          <a:xfrm>
-            <a:off x="2880000" y="4291200"/>
-            <a:ext cx="1368000" cy="108000"/>
-          </a:xfrm>
-          <a:prstGeom prst="rect">
-            <a:avLst/>
-          </a:prstGeom>
-          <a:noFill/>
-        </p:spPr>
-        <p:txBody>
-          <a:bodyPr wrap="square" lIns="0" rIns="0" tIns="0" bIns="0" anchor="t">
-            <a:spAutoFit/>
-          </a:bodyPr>
-          <a:lstStyle/>
-          <a:p>
-            <a:pPr algn="r"/>
-            <a:r>
-              <a:rPr sz="800" b="0">
-                <a:solidFill>
-                  <a:srgbClr val="8A95A3"/>
-                </a:solidFill>
-                <a:latin typeface="Inter"/>
-              </a:rPr>
-              <a:t>Первичка · 4277 кг</a:t>
-            </a:r>
-          </a:p>
-        </p:txBody>
-      </p:sp>
-      <p:sp>
-        <p:nvSpPr>
-          <p:cNvPr id="113" name="TextBox 112"/>
-          <p:cNvSpPr txBox="1"/>
-          <p:nvPr/>
-        </p:nvSpPr>
-        <p:spPr>
-          <a:xfrm>
-            <a:off x="2880000" y="4399200"/>
-            <a:ext cx="1368000" cy="108000"/>
-          </a:xfrm>
-          <a:prstGeom prst="rect">
-            <a:avLst/>
-          </a:prstGeom>
-          <a:noFill/>
-        </p:spPr>
-        <p:txBody>
-          <a:bodyPr wrap="square" lIns="0" rIns="0" tIns="0" bIns="0" anchor="t">
-            <a:spAutoFit/>
-          </a:bodyPr>
-          <a:lstStyle/>
-          <a:p>
-            <a:pPr algn="r"/>
-            <a:r>
-              <a:rPr sz="800" b="0">
-                <a:solidFill>
-                  <a:srgbClr val="8A95A3"/>
-                </a:solidFill>
-                <a:latin typeface="Inter"/>
-              </a:rPr>
-              <a:t>АКБ: 5  ·  SKU: 4</a:t>
-            </a:r>
-          </a:p>
-        </p:txBody>
-      </p:sp>
-      <p:sp>
-        <p:nvSpPr>
-          <p:cNvPr id="114" name="Rectangle 113"/>
-          <p:cNvSpPr/>
-          <p:nvPr/>
-        </p:nvSpPr>
-        <p:spPr>
-          <a:xfrm>
-            <a:off x="324000" y="4759200"/>
-            <a:ext cx="3924000" cy="14400"/>
-          </a:xfrm>
-          <a:prstGeom prst="rect">
-            <a:avLst/>
-          </a:prstGeom>
-          <a:solidFill>
-            <a:srgbClr val="EFE9DD"/>
-          </a:solidFill>
-          <a:ln>
-            <a:noFill/>
-          </a:ln>
-          <a:effectLst/>
-        </p:spPr>
-        <p:style>
-          <a:lnRef idx="1">
-            <a:schemeClr val="accent1"/>
-          </a:lnRef>
-          <a:fillRef idx="3">
-            <a:schemeClr val="accent1"/>
-          </a:fillRef>
-          <a:effectRef idx="2">
-            <a:schemeClr val="accent1"/>
-          </a:effectRef>
-          <a:fontRef idx="minor">
-            <a:schemeClr val="lt1"/>
-          </a:fontRef>
-        </p:style>
-        <p:txBody>
-          <a:bodyPr rtlCol="0" anchor="ctr"/>
-          <a:lstStyle/>
-          <a:p>
-            <a:pPr algn="ctr"/>
-          </a:p>
-        </p:txBody>
-      </p:sp>
-      <p:sp>
-        <p:nvSpPr>
-          <p:cNvPr id="115" name="TextBox 114"/>
-          <p:cNvSpPr txBox="1"/>
-          <p:nvPr/>
-        </p:nvSpPr>
-        <p:spPr>
-          <a:xfrm>
-            <a:off x="324000" y="4813200"/>
-            <a:ext cx="3924000" cy="180000"/>
-          </a:xfrm>
-          <a:prstGeom prst="rect">
-            <a:avLst/>
-          </a:prstGeom>
-          <a:noFill/>
-        </p:spPr>
-        <p:txBody>
-          <a:bodyPr wrap="square" lIns="0" rIns="0" tIns="0" bIns="0" anchor="t">
-            <a:spAutoFit/>
-          </a:bodyPr>
-          <a:lstStyle/>
-          <a:p>
-            <a:pPr algn="ctr"/>
-            <a:r>
-              <a:rPr sz="800" b="0">
-                <a:solidFill>
-                  <a:srgbClr val="8A95A3"/>
-                </a:solidFill>
-                <a:latin typeface="Inter"/>
-              </a:rPr>
-              <a:t>Период: 01.01.2026 — 06.10.2026 · Источник: 1С</a:t>
+              <a:t>Стандарт обязателен для всех новинок. Без прохождения 3 фаз новинка не вводится в MML дистрибьюторов.</a:t>
             </a:r>
           </a:p>
         </p:txBody>

--- a/download/Презентация_для_ГД_final.pptx
+++ b/download/Презентация_для_ГД_final.pptx
@@ -21601,7 +21601,7 @@
                 </a:solidFill>
                 <a:latin typeface="Inter"/>
               </a:rPr>
-              <a:t>Итоги 5 новинок 2026 · Первичка: 3.65 млн ₽ · 25 SKU · АКБ 302</a:t>
+              <a:t>Итоги 5 новинок 2026 · Первичка: 14 727 кг · Вторичка: 2 258 кг · 25 SKU · АКБ 302</a:t>
             </a:r>
           </a:p>
         </p:txBody>
@@ -21743,20 +21743,21 @@
         </p:nvGraphicFramePr>
         <p:xfrm>
           <a:off x="180000" y="961200"/>
-          <a:ext cx="8820000" cy="2033998"/>
+          <a:ext cx="8819999" cy="2033998"/>
         </p:xfrm>
         <a:graphic>
           <a:graphicData uri="http://schemas.openxmlformats.org/drawingml/2006/table">
             <a:tbl>
               <a:tblPr firstRow="0" bandRow="0"/>
               <a:tblGrid>
+                <a:gridCol w="288000"/>
+                <a:gridCol w="1728000"/>
                 <a:gridCol w="360000"/>
-                <a:gridCol w="1980000"/>
-                <a:gridCol w="432000"/>
-                <a:gridCol w="1440000"/>
-                <a:gridCol w="2088000"/>
-                <a:gridCol w="1260000"/>
-                <a:gridCol w="1260000"/>
+                <a:gridCol w="1296000"/>
+                <a:gridCol w="2015999"/>
+                <a:gridCol w="1044000"/>
+                <a:gridCol w="1044000"/>
+                <a:gridCol w="1044000"/>
               </a:tblGrid>
               <a:tr h="251999">
                 <a:tc>
@@ -21879,7 +21880,7 @@
                     <a:bodyPr wrap="square"/>
                     <a:lstStyle/>
                     <a:p>
-                      <a:pPr algn="l"/>
+                      <a:pPr algn="ctr"/>
                       <a:r>
                         <a:rPr sz="950" b="1">
                           <a:solidFill>
@@ -21887,7 +21888,30 @@
                           </a:solidFill>
                           <a:latin typeface="Inter"/>
                         </a:rPr>
-                        <a:t>Первичка (₽)</a:t>
+                        <a:t>Первичка (кг)</a:t>
+                      </a:r>
+                    </a:p>
+                  </a:txBody>
+                  <a:tcPr anchor="ctr" marL="50000" marR="50000" marT="20000" marB="20000">
+                    <a:solidFill>
+                      <a:srgbClr val="2F3A48"/>
+                    </a:solidFill>
+                  </a:tcPr>
+                </a:tc>
+                <a:tc>
+                  <a:txBody>
+                    <a:bodyPr wrap="square"/>
+                    <a:lstStyle/>
+                    <a:p>
+                      <a:pPr algn="ctr"/>
+                      <a:r>
+                        <a:rPr sz="950" b="1">
+                          <a:solidFill>
+                            <a:srgbClr val="FFFFFF"/>
+                          </a:solidFill>
+                          <a:latin typeface="Inter"/>
+                        </a:rPr>
+                        <a:t>Вторичка (кг)</a:t>
                       </a:r>
                     </a:p>
                   </a:txBody>
@@ -22050,7 +22074,30 @@
                           </a:solidFill>
                           <a:latin typeface="Roboto Mono"/>
                         </a:rPr>
-                        <a:t>804 тыс</a:t>
+                        <a:t>1 774.6</a:t>
+                      </a:r>
+                    </a:p>
+                  </a:txBody>
+                  <a:tcPr anchor="ctr" marL="50000" marR="50000" marT="20000" marB="20000">
+                    <a:solidFill>
+                      <a:srgbClr val="F5F2EC"/>
+                    </a:solidFill>
+                  </a:tcPr>
+                </a:tc>
+                <a:tc>
+                  <a:txBody>
+                    <a:bodyPr wrap="square"/>
+                    <a:lstStyle/>
+                    <a:p>
+                      <a:pPr algn="r"/>
+                      <a:r>
+                        <a:rPr sz="1000" b="1">
+                          <a:solidFill>
+                            <a:srgbClr val="2F3A48"/>
+                          </a:solidFill>
+                          <a:latin typeface="Roboto Mono"/>
+                        </a:rPr>
+                        <a:t>193.6</a:t>
                       </a:r>
                     </a:p>
                   </a:txBody>
@@ -22213,7 +22260,30 @@
                           </a:solidFill>
                           <a:latin typeface="Roboto Mono"/>
                         </a:rPr>
-                        <a:t>1,616 тыс</a:t>
+                        <a:t>7 746.0</a:t>
+                      </a:r>
+                    </a:p>
+                  </a:txBody>
+                  <a:tcPr anchor="ctr" marL="50000" marR="50000" marT="20000" marB="20000">
+                    <a:solidFill>
+                      <a:srgbClr val="FFFFFF"/>
+                    </a:solidFill>
+                  </a:tcPr>
+                </a:tc>
+                <a:tc>
+                  <a:txBody>
+                    <a:bodyPr wrap="square"/>
+                    <a:lstStyle/>
+                    <a:p>
+                      <a:pPr algn="r"/>
+                      <a:r>
+                        <a:rPr sz="1000" b="1">
+                          <a:solidFill>
+                            <a:srgbClr val="2F3A48"/>
+                          </a:solidFill>
+                          <a:latin typeface="Roboto Mono"/>
+                        </a:rPr>
+                        <a:t>1 994.0</a:t>
                       </a:r>
                     </a:p>
                   </a:txBody>
@@ -22376,7 +22446,30 @@
                           </a:solidFill>
                           <a:latin typeface="Roboto Mono"/>
                         </a:rPr>
-                        <a:t>111 тыс</a:t>
+                        <a:t>692.9</a:t>
+                      </a:r>
+                    </a:p>
+                  </a:txBody>
+                  <a:tcPr anchor="ctr" marL="50000" marR="50000" marT="20000" marB="20000">
+                    <a:solidFill>
+                      <a:srgbClr val="F5F2EC"/>
+                    </a:solidFill>
+                  </a:tcPr>
+                </a:tc>
+                <a:tc>
+                  <a:txBody>
+                    <a:bodyPr wrap="square"/>
+                    <a:lstStyle/>
+                    <a:p>
+                      <a:pPr algn="r"/>
+                      <a:r>
+                        <a:rPr sz="1000" b="0">
+                          <a:solidFill>
+                            <a:srgbClr val="8A95A3"/>
+                          </a:solidFill>
+                          <a:latin typeface="Roboto Mono"/>
+                        </a:rPr>
+                        <a:t>—</a:t>
                       </a:r>
                     </a:p>
                   </a:txBody>
@@ -22539,7 +22632,30 @@
                           </a:solidFill>
                           <a:latin typeface="Roboto Mono"/>
                         </a:rPr>
-                        <a:t>57 тыс</a:t>
+                        <a:t>236.5</a:t>
+                      </a:r>
+                    </a:p>
+                  </a:txBody>
+                  <a:tcPr anchor="ctr" marL="50000" marR="50000" marT="20000" marB="20000">
+                    <a:solidFill>
+                      <a:srgbClr val="FFFFFF"/>
+                    </a:solidFill>
+                  </a:tcPr>
+                </a:tc>
+                <a:tc>
+                  <a:txBody>
+                    <a:bodyPr wrap="square"/>
+                    <a:lstStyle/>
+                    <a:p>
+                      <a:pPr algn="r"/>
+                      <a:r>
+                        <a:rPr sz="1000" b="0">
+                          <a:solidFill>
+                            <a:srgbClr val="8A95A3"/>
+                          </a:solidFill>
+                          <a:latin typeface="Roboto Mono"/>
+                        </a:rPr>
+                        <a:t>—</a:t>
                       </a:r>
                     </a:p>
                   </a:txBody>
@@ -22702,7 +22818,30 @@
                           </a:solidFill>
                           <a:latin typeface="Roboto Mono"/>
                         </a:rPr>
-                        <a:t>1,058 тыс</a:t>
+                        <a:t>4 276.8</a:t>
+                      </a:r>
+                    </a:p>
+                  </a:txBody>
+                  <a:tcPr anchor="ctr" marL="50000" marR="50000" marT="20000" marB="20000">
+                    <a:solidFill>
+                      <a:srgbClr val="F5F2EC"/>
+                    </a:solidFill>
+                  </a:tcPr>
+                </a:tc>
+                <a:tc>
+                  <a:txBody>
+                    <a:bodyPr wrap="square"/>
+                    <a:lstStyle/>
+                    <a:p>
+                      <a:pPr algn="r"/>
+                      <a:r>
+                        <a:rPr sz="1000" b="1">
+                          <a:solidFill>
+                            <a:srgbClr val="2F3A48"/>
+                          </a:solidFill>
+                          <a:latin typeface="Roboto Mono"/>
+                        </a:rPr>
+                        <a:t>70.6</a:t>
                       </a:r>
                     </a:p>
                   </a:txBody>
@@ -22865,7 +23004,30 @@
                           </a:solidFill>
                           <a:latin typeface="Roboto Mono"/>
                         </a:rPr>
-                        <a:t>3.65 млн</a:t>
+                        <a:t>14 727</a:t>
+                      </a:r>
+                    </a:p>
+                  </a:txBody>
+                  <a:tcPr anchor="ctr" marL="50000" marR="50000" marT="20000" marB="20000">
+                    <a:solidFill>
+                      <a:srgbClr val="2F3A48"/>
+                    </a:solidFill>
+                  </a:tcPr>
+                </a:tc>
+                <a:tc>
+                  <a:txBody>
+                    <a:bodyPr wrap="square"/>
+                    <a:lstStyle/>
+                    <a:p>
+                      <a:pPr algn="r"/>
+                      <a:r>
+                        <a:rPr sz="1000" b="1">
+                          <a:solidFill>
+                            <a:srgbClr val="FFFFFF"/>
+                          </a:solidFill>
+                          <a:latin typeface="Roboto Mono"/>
+                        </a:rPr>
+                        <a:t>2 258</a:t>
                       </a:r>
                     </a:p>
                   </a:txBody>
